--- a/docs/MevzuatAgent_Odev_Sunumu_TR.pptx
+++ b/docs/MevzuatAgent_Odev_Sunumu_TR.pptx
@@ -25,6 +25,8 @@
     <p:sldId id="273" r:id="rId24"/>
     <p:sldId id="274" r:id="rId25"/>
     <p:sldId id="275" r:id="rId26"/>
+    <p:sldId id="276" r:id="rId27"/>
+    <p:sldId id="277" r:id="rId28"/>
   </p:sldIdLst>
   <p:sldSz cx="12191695" cy="6858000" type="screen4x3"/>
   <p:notesSz cx="6858000" cy="9144000"/>
@@ -9220,7 +9222,7 @@
               </a:defRPr>
             </a:pPr>
             <a:r>
-              <a:t>Bu sonuç sunum üretiminden önceki test çalıştırmasına aittir; son düzenleme sonrası tekrar doğrulanacaktır.</a:t>
+              <a:t>Bu 44 test yazılım davranışını doğrular; gerçek model çıktısı ve sentetik düzeltme kabul testleri ayrıca sınanmıştır.</a:t>
             </a:r>
           </a:p>
         </p:txBody>
@@ -10090,7 +10092,7 @@
               </a:defRPr>
             </a:pPr>
             <a:r>
-              <a:t>15  •  GÜVENLIK VE MAHREMIYET</a:t>
+              <a:t>15  •  GERÇEK UÇTAN UCA DENEME</a:t>
             </a:r>
           </a:p>
         </p:txBody>
@@ -10126,7 +10128,7 @@
               </a:defRPr>
             </a:pPr>
             <a:r>
-              <a:t>Güvenli varsayılanlar ve açık sınırlar</a:t>
+              <a:t>Model havuzu test edildi; yanıt kalitesi değişti</a:t>
             </a:r>
           </a:p>
         </p:txBody>
@@ -10162,7 +10164,7 @@
               </a:defRPr>
             </a:pPr>
             <a:r>
-              <a:t>Kod ve mevzuat bağlamı yerel Ollama'ya gider; tarama akışı bulguları uzman incelemesine sunar.</a:t>
+              <a:t>2026-10-29: resmî bağlantılardaki PDF'ler indirildi, yerel BM25 indeksi kuruldu ve özel sentetik demo deposu klonlandı.</a:t>
             </a:r>
           </a:p>
         </p:txBody>
@@ -10175,8 +10177,8 @@
         </p:nvSpPr>
         <p:spPr>
           <a:xfrm>
-            <a:off x="713232" y="1828800"/>
-            <a:ext cx="5212080" cy="2011680"/>
+            <a:off x="713232" y="1847088"/>
+            <a:ext cx="3401568" cy="2359152"/>
           </a:xfrm>
           <a:prstGeom prst="roundRect">
             <a:avLst/>
@@ -10218,8 +10220,8 @@
         </p:nvSpPr>
         <p:spPr>
           <a:xfrm>
-            <a:off x="713232" y="1828800"/>
-            <a:ext cx="64008" cy="2011680"/>
+            <a:off x="713232" y="1847088"/>
+            <a:ext cx="64008" cy="2359152"/>
           </a:xfrm>
           <a:prstGeom prst="rect">
             <a:avLst/>
@@ -10261,8 +10263,8 @@
         </p:nvSpPr>
         <p:spPr>
           <a:xfrm>
-            <a:off x="914400" y="1956816"/>
-            <a:ext cx="4828032" cy="347472"/>
+            <a:off x="914400" y="1975104"/>
+            <a:ext cx="3017520" cy="347472"/>
           </a:xfrm>
           <a:prstGeom prst="rect">
             <a:avLst/>
@@ -10284,7 +10286,7 @@
               </a:defRPr>
             </a:pPr>
             <a:r>
-              <a:t>Kontroller</a:t>
+              <a:t>Girdi ve hazırlık</a:t>
             </a:r>
           </a:p>
         </p:txBody>
@@ -10297,8 +10299,8 @@
         </p:nvSpPr>
         <p:spPr>
           <a:xfrm>
-            <a:off x="932688" y="2377440"/>
-            <a:ext cx="4791456" cy="1353312"/>
+            <a:off x="932688" y="2395728"/>
+            <a:ext cx="2980944" cy="1700784"/>
           </a:xfrm>
           <a:prstGeom prst="rect">
             <a:avLst/>
@@ -10320,19 +10322,19 @@
               </a:defRPr>
             </a:pPr>
             <a:r>
-              <a:t>•  Klonlama ve tarama kullanıcı onaylıdır</a:t>
+              <a:t>•  2 mevzuat PDF'i indirildi</a:t>
             </a:r>
             <a:br/>
             <a:r>
-              <a:t>•  Düzeltme ayrı worktree'de uygulanır</a:t>
+              <a:t>•  146 RAG parçası üretildi</a:t>
             </a:r>
             <a:br/>
             <a:r>
-              <a:t>•  Test ve PR ayrı onay ister</a:t>
+              <a:t>•  Test deposu klonlandı</a:t>
             </a:r>
             <a:br/>
             <a:r>
-              <a:t>•  PR için yalnız beklenen dosyalar seçilir</a:t>
+              <a:t>•  2 kaynak dosyası • 6 eşleşen parça</a:t>
             </a:r>
           </a:p>
         </p:txBody>
@@ -10345,8 +10347,8 @@
         </p:nvSpPr>
         <p:spPr>
           <a:xfrm>
-            <a:off x="6172200" y="1828800"/>
-            <a:ext cx="5212080" cy="2011680"/>
+            <a:off x="4389120" y="1847088"/>
+            <a:ext cx="3401568" cy="2359152"/>
           </a:xfrm>
           <a:prstGeom prst="roundRect">
             <a:avLst/>
@@ -10388,8 +10390,178 @@
         </p:nvSpPr>
         <p:spPr>
           <a:xfrm>
-            <a:off x="6172200" y="1828800"/>
-            <a:ext cx="64008" cy="2011680"/>
+            <a:off x="4389120" y="1847088"/>
+            <a:ext cx="64008" cy="2359152"/>
+          </a:xfrm>
+          <a:prstGeom prst="rect">
+            <a:avLst/>
+          </a:prstGeom>
+          <a:solidFill>
+            <a:srgbClr val="35BED7"/>
+          </a:solidFill>
+          <a:ln>
+            <a:noFill/>
+          </a:ln>
+        </p:spPr>
+        <p:style>
+          <a:lnRef idx="1">
+            <a:schemeClr val="accent1"/>
+          </a:lnRef>
+          <a:fillRef idx="3">
+            <a:schemeClr val="accent1"/>
+          </a:fillRef>
+          <a:effectRef idx="2">
+            <a:schemeClr val="accent1"/>
+          </a:effectRef>
+          <a:fontRef idx="minor">
+            <a:schemeClr val="lt1"/>
+          </a:fontRef>
+        </p:style>
+        <p:txBody>
+          <a:bodyPr rtlCol="0" anchor="ctr"/>
+          <a:lstStyle/>
+          <a:p>
+            <a:pPr algn="ctr"/>
+          </a:p>
+        </p:txBody>
+      </p:sp>
+      <p:sp>
+        <p:nvSpPr>
+          <p:cNvPr id="11" name="TextBox 10"/>
+          <p:cNvSpPr txBox="1"/>
+          <p:nvPr/>
+        </p:nvSpPr>
+        <p:spPr>
+          <a:xfrm>
+            <a:off x="4590288" y="1975104"/>
+            <a:ext cx="3017520" cy="347472"/>
+          </a:xfrm>
+          <a:prstGeom prst="rect">
+            <a:avLst/>
+          </a:prstGeom>
+          <a:noFill/>
+        </p:spPr>
+        <p:txBody>
+          <a:bodyPr wrap="square" lIns="18288" rIns="18288" tIns="18288" bIns="18288" anchor="ctr">
+            <a:spAutoFit/>
+          </a:bodyPr>
+          <a:lstStyle/>
+          <a:p>
+            <a:pPr algn="l">
+              <a:defRPr sz="1600" b="1">
+                <a:solidFill>
+                  <a:srgbClr val="112240"/>
+                </a:solidFill>
+                <a:latin typeface="Aptos"/>
+              </a:defRPr>
+            </a:pPr>
+            <a:r>
+              <a:t>Hızlı modeller</a:t>
+            </a:r>
+          </a:p>
+        </p:txBody>
+      </p:sp>
+      <p:sp>
+        <p:nvSpPr>
+          <p:cNvPr id="12" name="TextBox 11"/>
+          <p:cNvSpPr txBox="1"/>
+          <p:nvPr/>
+        </p:nvSpPr>
+        <p:spPr>
+          <a:xfrm>
+            <a:off x="4608576" y="2395728"/>
+            <a:ext cx="2980944" cy="1700784"/>
+          </a:xfrm>
+          <a:prstGeom prst="rect">
+            <a:avLst/>
+          </a:prstGeom>
+          <a:noFill/>
+        </p:spPr>
+        <p:txBody>
+          <a:bodyPr wrap="square" lIns="18288" rIns="18288" tIns="18288" bIns="18288" anchor="ctr">
+            <a:spAutoFit/>
+          </a:bodyPr>
+          <a:lstStyle/>
+          <a:p>
+            <a:pPr algn="l">
+              <a:defRPr sz="1200" b="0">
+                <a:solidFill>
+                  <a:srgbClr val="223045"/>
+                </a:solidFill>
+                <a:latin typeface="Aptos"/>
+              </a:defRPr>
+            </a:pPr>
+            <a:r>
+              <a:t>•  llama3.2:1b · 65,60 token/sn · ~55 sn</a:t>
+            </a:r>
+            <a:br/>
+            <a:r>
+              <a:t>•  2 dosyada JSON yanıtı bozuk</a:t>
+            </a:r>
+            <a:br/>
+            <a:r>
+              <a:t>•  qwen3:4b · 28,25 token/sn · ~128 sn</a:t>
+            </a:r>
+            <a:br/>
+            <a:r>
+              <a:t>•  2 dosyada boş yanıt</a:t>
+            </a:r>
+          </a:p>
+        </p:txBody>
+      </p:sp>
+      <p:sp>
+        <p:nvSpPr>
+          <p:cNvPr id="13" name="Rounded Rectangle 12"/>
+          <p:cNvSpPr/>
+          <p:nvPr/>
+        </p:nvSpPr>
+        <p:spPr>
+          <a:xfrm>
+            <a:off x="8065008" y="1847088"/>
+            <a:ext cx="3401568" cy="2359152"/>
+          </a:xfrm>
+          <a:prstGeom prst="roundRect">
+            <a:avLst/>
+          </a:prstGeom>
+          <a:solidFill>
+            <a:srgbClr val="FFFFFF"/>
+          </a:solidFill>
+          <a:ln>
+            <a:noFill/>
+          </a:ln>
+        </p:spPr>
+        <p:style>
+          <a:lnRef idx="1">
+            <a:schemeClr val="accent1"/>
+          </a:lnRef>
+          <a:fillRef idx="3">
+            <a:schemeClr val="accent1"/>
+          </a:fillRef>
+          <a:effectRef idx="2">
+            <a:schemeClr val="accent1"/>
+          </a:effectRef>
+          <a:fontRef idx="minor">
+            <a:schemeClr val="lt1"/>
+          </a:fontRef>
+        </p:style>
+        <p:txBody>
+          <a:bodyPr rtlCol="0" anchor="ctr"/>
+          <a:lstStyle/>
+          <a:p>
+            <a:pPr algn="ctr"/>
+          </a:p>
+        </p:txBody>
+      </p:sp>
+      <p:sp>
+        <p:nvSpPr>
+          <p:cNvPr id="14" name="Rectangle 13"/>
+          <p:cNvSpPr/>
+          <p:nvPr/>
+        </p:nvSpPr>
+        <p:spPr>
+          <a:xfrm>
+            <a:off x="8065008" y="1847088"/>
+            <a:ext cx="64008" cy="2359152"/>
           </a:xfrm>
           <a:prstGeom prst="rect">
             <a:avLst/>
@@ -10425,14 +10597,14 @@
       </p:sp>
       <p:sp>
         <p:nvSpPr>
-          <p:cNvPr id="11" name="TextBox 10"/>
-          <p:cNvSpPr txBox="1"/>
-          <p:nvPr/>
-        </p:nvSpPr>
-        <p:spPr>
-          <a:xfrm>
-            <a:off x="6373368" y="1956816"/>
-            <a:ext cx="4828032" cy="347472"/>
+          <p:cNvPr id="15" name="TextBox 14"/>
+          <p:cNvSpPr txBox="1"/>
+          <p:nvPr/>
+        </p:nvSpPr>
+        <p:spPr>
+          <a:xfrm>
+            <a:off x="8266176" y="1975104"/>
+            <a:ext cx="3017520" cy="347472"/>
           </a:xfrm>
           <a:prstGeom prst="rect">
             <a:avLst/>
@@ -10454,21 +10626,21 @@
               </a:defRPr>
             </a:pPr>
             <a:r>
-              <a:t>Kullanım sorumluluğu</a:t>
-            </a:r>
-          </a:p>
-        </p:txBody>
-      </p:sp>
-      <p:sp>
-        <p:nvSpPr>
-          <p:cNvPr id="12" name="TextBox 11"/>
-          <p:cNvSpPr txBox="1"/>
-          <p:nvPr/>
-        </p:nvSpPr>
-        <p:spPr>
-          <a:xfrm>
-            <a:off x="6391656" y="2377440"/>
-            <a:ext cx="4791456" cy="1353312"/>
+              <a:t>Gemma sonucu</a:t>
+            </a:r>
+          </a:p>
+        </p:txBody>
+      </p:sp>
+      <p:sp>
+        <p:nvSpPr>
+          <p:cNvPr id="16" name="TextBox 15"/>
+          <p:cNvSpPr txBox="1"/>
+          <p:nvPr/>
+        </p:nvSpPr>
+        <p:spPr>
+          <a:xfrm>
+            <a:off x="8284464" y="2395728"/>
+            <a:ext cx="2980944" cy="1700784"/>
           </a:xfrm>
           <a:prstGeom prst="rect">
             <a:avLst/>
@@ -10490,33 +10662,33 @@
               </a:defRPr>
             </a:pPr>
             <a:r>
-              <a:t>•  İndirilen kaynağın güncelliğini denetleyin</a:t>
+              <a:t>•  gemma3:4b · 25,31 token/sn · ~143 sn</a:t>
             </a:r>
             <a:br/>
             <a:r>
-              <a:t>•  Yalnız güvendiğiniz projelerde test çalıştırın</a:t>
+              <a:t>•  2/2 dosya tarandı</a:t>
             </a:r>
             <a:br/>
             <a:r>
-              <a:t>•  Model bulgusunu hukuk uzmanına doğrulatın</a:t>
+              <a:t>•  1 adet LOW bulgu üretildi</a:t>
             </a:r>
             <a:br/>
             <a:r>
-              <a:t>•  Gerçek depoda yedek ve temiz çalışma alanı kullanın</a:t>
-            </a:r>
-          </a:p>
-        </p:txBody>
-      </p:sp>
-      <p:sp>
-        <p:nvSpPr>
-          <p:cNvPr id="13" name="Rounded Rectangle 12"/>
+              <a:t>•  Atıf/kanıt var; açıklama spekülatif</a:t>
+            </a:r>
+          </a:p>
+        </p:txBody>
+      </p:sp>
+      <p:sp>
+        <p:nvSpPr>
+          <p:cNvPr id="17" name="Rounded Rectangle 16"/>
           <p:cNvSpPr/>
           <p:nvPr/>
         </p:nvSpPr>
         <p:spPr>
           <a:xfrm>
-            <a:off x="713232" y="4279392"/>
-            <a:ext cx="10671048" cy="896112"/>
+            <a:off x="713232" y="4498848"/>
+            <a:ext cx="10753344" cy="896112"/>
           </a:xfrm>
           <a:prstGeom prst="roundRect">
             <a:avLst/>
@@ -10552,14 +10724,14 @@
       </p:sp>
       <p:sp>
         <p:nvSpPr>
-          <p:cNvPr id="14" name="TextBox 13"/>
-          <p:cNvSpPr txBox="1"/>
-          <p:nvPr/>
-        </p:nvSpPr>
-        <p:spPr>
-          <a:xfrm>
-            <a:off x="932688" y="4498848"/>
-            <a:ext cx="10195560" cy="402336"/>
+          <p:cNvPr id="18" name="TextBox 17"/>
+          <p:cNvSpPr txBox="1"/>
+          <p:nvPr/>
+        </p:nvSpPr>
+        <p:spPr>
+          <a:xfrm>
+            <a:off x="941832" y="4663440"/>
+            <a:ext cx="10268712" cy="530352"/>
           </a:xfrm>
           <a:prstGeom prst="rect">
             <a:avLst/>
@@ -10573,7 +10745,7 @@
           <a:lstStyle/>
           <a:p>
             <a:pPr algn="ctr">
-              <a:defRPr sz="1400" b="1">
+              <a:defRPr sz="1200" b="1">
                 <a:solidFill>
                   <a:srgbClr val="112240"/>
                 </a:solidFill>
@@ -10581,14 +10753,14 @@
               </a:defRPr>
             </a:pPr>
             <a:r>
-              <a:t>Otomasyon kanıtı düzenler; hukuki görüş, kesin uygunluk kararı veya güvenlik sertifikası vermez.</a:t>
-            </a:r>
-          </a:p>
-        </p:txBody>
-      </p:sp>
-      <p:sp>
-        <p:nvSpPr>
-          <p:cNvPr id="15" name="TextBox 14"/>
+              <a:t>Önemli: hız tahmini çıktı kalitesini ölçmüyor. Gemma bulgusu uzman doğrulaması gerektiriyor; hızlı modellerin hatalı/boş çıktısı tarama raporlarında görünür.</a:t>
+            </a:r>
+          </a:p>
+        </p:txBody>
+      </p:sp>
+      <p:sp>
+        <p:nvSpPr>
+          <p:cNvPr id="19" name="TextBox 18"/>
           <p:cNvSpPr txBox="1"/>
           <p:nvPr/>
         </p:nvSpPr>
@@ -10624,7 +10796,7 @@
       </p:sp>
       <p:sp>
         <p:nvSpPr>
-          <p:cNvPr id="16" name="TextBox 15"/>
+          <p:cNvPr id="20" name="TextBox 19"/>
           <p:cNvSpPr txBox="1"/>
           <p:nvPr/>
         </p:nvSpPr>
@@ -10667,6 +10839,1570 @@
 </file>
 
 <file path=ppt/slides/slide17.xml><?xml version="1.0" encoding="utf-8"?>
+<p:sld xmlns:a="http://schemas.openxmlformats.org/drawingml/2006/main" xmlns:p="http://schemas.openxmlformats.org/presentationml/2006/main" xmlns:r="http://schemas.openxmlformats.org/officeDocument/2006/relationships">
+  <p:cSld>
+    <p:bg>
+      <p:bgPr>
+        <a:solidFill>
+          <a:srgbClr val="F7F9FC"/>
+        </a:solidFill>
+        <a:effectLst/>
+      </p:bgPr>
+    </p:bg>
+    <p:spTree>
+      <p:nvGrpSpPr>
+        <p:cNvPr id="1" name=""/>
+        <p:cNvGrpSpPr/>
+        <p:nvPr/>
+      </p:nvGrpSpPr>
+      <p:grpSpPr/>
+      <p:sp>
+        <p:nvSpPr>
+          <p:cNvPr id="2" name="TextBox 1"/>
+          <p:cNvSpPr txBox="1"/>
+          <p:nvPr/>
+        </p:nvSpPr>
+        <p:spPr>
+          <a:xfrm>
+            <a:off x="640080" y="329184"/>
+            <a:ext cx="10881360" cy="228600"/>
+          </a:xfrm>
+          <a:prstGeom prst="rect">
+            <a:avLst/>
+          </a:prstGeom>
+          <a:noFill/>
+        </p:spPr>
+        <p:txBody>
+          <a:bodyPr wrap="square" lIns="18288" rIns="18288" tIns="18288" bIns="18288" anchor="ctr">
+            <a:spAutoFit/>
+          </a:bodyPr>
+          <a:lstStyle/>
+          <a:p>
+            <a:pPr algn="l">
+              <a:defRPr sz="900" b="1">
+                <a:solidFill>
+                  <a:srgbClr val="00AFA0"/>
+                </a:solidFill>
+                <a:latin typeface="Aptos"/>
+              </a:defRPr>
+            </a:pPr>
+            <a:r>
+              <a:t>16  •  REMEDIATION KABUL DENEMESI</a:t>
+            </a:r>
+          </a:p>
+        </p:txBody>
+      </p:sp>
+      <p:sp>
+        <p:nvSpPr>
+          <p:cNvPr id="3" name="TextBox 2"/>
+          <p:cNvSpPr txBox="1"/>
+          <p:nvPr/>
+        </p:nvSpPr>
+        <p:spPr>
+          <a:xfrm>
+            <a:off x="640080" y="658368"/>
+            <a:ext cx="10972800" cy="502920"/>
+          </a:xfrm>
+          <a:prstGeom prst="rect">
+            <a:avLst/>
+          </a:prstGeom>
+          <a:noFill/>
+        </p:spPr>
+        <p:txBody>
+          <a:bodyPr wrap="square" lIns="18288" rIns="18288" tIns="18288" bIns="18288" anchor="ctr">
+            <a:spAutoFit/>
+          </a:bodyPr>
+          <a:lstStyle/>
+          <a:p>
+            <a:pPr algn="l">
+              <a:defRPr sz="2700" b="1">
+                <a:solidFill>
+                  <a:srgbClr val="112240"/>
+                </a:solidFill>
+                <a:latin typeface="Aptos"/>
+              </a:defRPr>
+            </a:pPr>
+            <a:r>
+              <a:t>İlk iki sentetik bulgu, izole dalda test edildi</a:t>
+            </a:r>
+          </a:p>
+        </p:txBody>
+      </p:sp>
+      <p:sp>
+        <p:nvSpPr>
+          <p:cNvPr id="4" name="TextBox 3"/>
+          <p:cNvSpPr txBox="1"/>
+          <p:nvPr/>
+        </p:nvSpPr>
+        <p:spPr>
+          <a:xfrm>
+            <a:off x="658368" y="1197864"/>
+            <a:ext cx="10881360" cy="420624"/>
+          </a:xfrm>
+          <a:prstGeom prst="rect">
+            <a:avLst/>
+          </a:prstGeom>
+          <a:noFill/>
+        </p:spPr>
+        <p:txBody>
+          <a:bodyPr wrap="square" lIns="18288" rIns="18288" tIns="18288" bIns="18288" anchor="ctr">
+            <a:spAutoFit/>
+          </a:bodyPr>
+          <a:lstStyle/>
+          <a:p>
+            <a:pPr algn="l">
+              <a:defRPr sz="1300" b="0">
+                <a:solidFill>
+                  <a:srgbClr val="637389"/>
+                </a:solidFill>
+                <a:latin typeface="Aptos"/>
+              </a:defRPr>
+            </a:pPr>
+            <a:r>
+              <a:t>Model taramasının bulguları tutarsız olduğundan düzeltme hattı önceden etiketlenmiş sentetik fixture bulgularıyla ayrıca sınandı.</a:t>
+            </a:r>
+          </a:p>
+        </p:txBody>
+      </p:sp>
+      <p:sp>
+        <p:nvSpPr>
+          <p:cNvPr id="5" name="Rounded Rectangle 4"/>
+          <p:cNvSpPr/>
+          <p:nvPr/>
+        </p:nvSpPr>
+        <p:spPr>
+          <a:xfrm>
+            <a:off x="749808" y="1874519"/>
+            <a:ext cx="3401568" cy="1298448"/>
+          </a:xfrm>
+          <a:prstGeom prst="roundRect">
+            <a:avLst/>
+          </a:prstGeom>
+          <a:solidFill>
+            <a:srgbClr val="FFFFFF"/>
+          </a:solidFill>
+          <a:ln>
+            <a:noFill/>
+          </a:ln>
+        </p:spPr>
+        <p:style>
+          <a:lnRef idx="1">
+            <a:schemeClr val="accent1"/>
+          </a:lnRef>
+          <a:fillRef idx="3">
+            <a:schemeClr val="accent1"/>
+          </a:fillRef>
+          <a:effectRef idx="2">
+            <a:schemeClr val="accent1"/>
+          </a:effectRef>
+          <a:fontRef idx="minor">
+            <a:schemeClr val="lt1"/>
+          </a:fontRef>
+        </p:style>
+        <p:txBody>
+          <a:bodyPr rtlCol="0" anchor="ctr"/>
+          <a:lstStyle/>
+          <a:p>
+            <a:pPr algn="ctr"/>
+          </a:p>
+        </p:txBody>
+      </p:sp>
+      <p:sp>
+        <p:nvSpPr>
+          <p:cNvPr id="6" name="Rounded Rectangle 5"/>
+          <p:cNvSpPr/>
+          <p:nvPr/>
+        </p:nvSpPr>
+        <p:spPr>
+          <a:xfrm>
+            <a:off x="896112" y="2039112"/>
+            <a:ext cx="384048" cy="384048"/>
+          </a:xfrm>
+          <a:prstGeom prst="roundRect">
+            <a:avLst/>
+          </a:prstGeom>
+          <a:solidFill>
+            <a:srgbClr val="D6575E"/>
+          </a:solidFill>
+          <a:ln>
+            <a:noFill/>
+          </a:ln>
+        </p:spPr>
+        <p:style>
+          <a:lnRef idx="1">
+            <a:schemeClr val="accent1"/>
+          </a:lnRef>
+          <a:fillRef idx="3">
+            <a:schemeClr val="accent1"/>
+          </a:fillRef>
+          <a:effectRef idx="2">
+            <a:schemeClr val="accent1"/>
+          </a:effectRef>
+          <a:fontRef idx="minor">
+            <a:schemeClr val="lt1"/>
+          </a:fontRef>
+        </p:style>
+        <p:txBody>
+          <a:bodyPr rtlCol="0" anchor="ctr"/>
+          <a:lstStyle/>
+          <a:p>
+            <a:pPr algn="ctr"/>
+          </a:p>
+        </p:txBody>
+      </p:sp>
+      <p:sp>
+        <p:nvSpPr>
+          <p:cNvPr id="7" name="TextBox 6"/>
+          <p:cNvSpPr txBox="1"/>
+          <p:nvPr/>
+        </p:nvSpPr>
+        <p:spPr>
+          <a:xfrm>
+            <a:off x="896112" y="2039112"/>
+            <a:ext cx="384048" cy="365760"/>
+          </a:xfrm>
+          <a:prstGeom prst="rect">
+            <a:avLst/>
+          </a:prstGeom>
+          <a:noFill/>
+        </p:spPr>
+        <p:txBody>
+          <a:bodyPr wrap="square" lIns="18288" rIns="18288" tIns="18288" bIns="18288" anchor="ctr">
+            <a:spAutoFit/>
+          </a:bodyPr>
+          <a:lstStyle/>
+          <a:p>
+            <a:pPr algn="ctr">
+              <a:defRPr sz="1300" b="1">
+                <a:solidFill>
+                  <a:srgbClr val="FFFFFF"/>
+                </a:solidFill>
+                <a:latin typeface="Aptos"/>
+              </a:defRPr>
+            </a:pPr>
+            <a:r>
+              <a:t>1</a:t>
+            </a:r>
+          </a:p>
+        </p:txBody>
+      </p:sp>
+      <p:sp>
+        <p:nvSpPr>
+          <p:cNvPr id="8" name="TextBox 7"/>
+          <p:cNvSpPr txBox="1"/>
+          <p:nvPr/>
+        </p:nvSpPr>
+        <p:spPr>
+          <a:xfrm>
+            <a:off x="1389888" y="2020824"/>
+            <a:ext cx="2615184" cy="310896"/>
+          </a:xfrm>
+          <a:prstGeom prst="rect">
+            <a:avLst/>
+          </a:prstGeom>
+          <a:noFill/>
+        </p:spPr>
+        <p:txBody>
+          <a:bodyPr wrap="square" lIns="18288" rIns="18288" tIns="18288" bIns="18288" anchor="ctr">
+            <a:spAutoFit/>
+          </a:bodyPr>
+          <a:lstStyle/>
+          <a:p>
+            <a:pPr algn="l">
+              <a:defRPr sz="1300" b="1">
+                <a:solidFill>
+                  <a:srgbClr val="112240"/>
+                </a:solidFill>
+                <a:latin typeface="Aptos"/>
+              </a:defRPr>
+            </a:pPr>
+            <a:r>
+              <a:t>Önce başarısız</a:t>
+            </a:r>
+          </a:p>
+        </p:txBody>
+      </p:sp>
+      <p:sp>
+        <p:nvSpPr>
+          <p:cNvPr id="9" name="TextBox 8"/>
+          <p:cNvSpPr txBox="1"/>
+          <p:nvPr/>
+        </p:nvSpPr>
+        <p:spPr>
+          <a:xfrm>
+            <a:off x="932688" y="2487168"/>
+            <a:ext cx="3035808" cy="502920"/>
+          </a:xfrm>
+          <a:prstGeom prst="rect">
+            <a:avLst/>
+          </a:prstGeom>
+          <a:noFill/>
+        </p:spPr>
+        <p:txBody>
+          <a:bodyPr wrap="square" lIns="18288" rIns="18288" tIns="18288" bIns="18288" anchor="ctr">
+            <a:spAutoFit/>
+          </a:bodyPr>
+          <a:lstStyle/>
+          <a:p>
+            <a:pPr algn="l">
+              <a:defRPr sz="1000" b="0">
+                <a:solidFill>
+                  <a:srgbClr val="637389"/>
+                </a:solidFill>
+                <a:latin typeface="Aptos"/>
+              </a:defRPr>
+            </a:pPr>
+            <a:r>
+              <a:t>Yeni kabul testleri iki bilinen hatayı yakaladı.</a:t>
+            </a:r>
+          </a:p>
+        </p:txBody>
+      </p:sp>
+      <p:sp>
+        <p:nvSpPr>
+          <p:cNvPr id="10" name="Rounded Rectangle 9"/>
+          <p:cNvSpPr/>
+          <p:nvPr/>
+        </p:nvSpPr>
+        <p:spPr>
+          <a:xfrm>
+            <a:off x="4407408" y="1874519"/>
+            <a:ext cx="3401568" cy="1298448"/>
+          </a:xfrm>
+          <a:prstGeom prst="roundRect">
+            <a:avLst/>
+          </a:prstGeom>
+          <a:solidFill>
+            <a:srgbClr val="FFFFFF"/>
+          </a:solidFill>
+          <a:ln>
+            <a:noFill/>
+          </a:ln>
+        </p:spPr>
+        <p:style>
+          <a:lnRef idx="1">
+            <a:schemeClr val="accent1"/>
+          </a:lnRef>
+          <a:fillRef idx="3">
+            <a:schemeClr val="accent1"/>
+          </a:fillRef>
+          <a:effectRef idx="2">
+            <a:schemeClr val="accent1"/>
+          </a:effectRef>
+          <a:fontRef idx="minor">
+            <a:schemeClr val="lt1"/>
+          </a:fontRef>
+        </p:style>
+        <p:txBody>
+          <a:bodyPr rtlCol="0" anchor="ctr"/>
+          <a:lstStyle/>
+          <a:p>
+            <a:pPr algn="ctr"/>
+          </a:p>
+        </p:txBody>
+      </p:sp>
+      <p:sp>
+        <p:nvSpPr>
+          <p:cNvPr id="11" name="Rounded Rectangle 10"/>
+          <p:cNvSpPr/>
+          <p:nvPr/>
+        </p:nvSpPr>
+        <p:spPr>
+          <a:xfrm>
+            <a:off x="4553712" y="2039112"/>
+            <a:ext cx="384048" cy="384048"/>
+          </a:xfrm>
+          <a:prstGeom prst="roundRect">
+            <a:avLst/>
+          </a:prstGeom>
+          <a:solidFill>
+            <a:srgbClr val="35BED7"/>
+          </a:solidFill>
+          <a:ln>
+            <a:noFill/>
+          </a:ln>
+        </p:spPr>
+        <p:style>
+          <a:lnRef idx="1">
+            <a:schemeClr val="accent1"/>
+          </a:lnRef>
+          <a:fillRef idx="3">
+            <a:schemeClr val="accent1"/>
+          </a:fillRef>
+          <a:effectRef idx="2">
+            <a:schemeClr val="accent1"/>
+          </a:effectRef>
+          <a:fontRef idx="minor">
+            <a:schemeClr val="lt1"/>
+          </a:fontRef>
+        </p:style>
+        <p:txBody>
+          <a:bodyPr rtlCol="0" anchor="ctr"/>
+          <a:lstStyle/>
+          <a:p>
+            <a:pPr algn="ctr"/>
+          </a:p>
+        </p:txBody>
+      </p:sp>
+      <p:sp>
+        <p:nvSpPr>
+          <p:cNvPr id="12" name="TextBox 11"/>
+          <p:cNvSpPr txBox="1"/>
+          <p:nvPr/>
+        </p:nvSpPr>
+        <p:spPr>
+          <a:xfrm>
+            <a:off x="4553712" y="2039112"/>
+            <a:ext cx="384048" cy="365760"/>
+          </a:xfrm>
+          <a:prstGeom prst="rect">
+            <a:avLst/>
+          </a:prstGeom>
+          <a:noFill/>
+        </p:spPr>
+        <p:txBody>
+          <a:bodyPr wrap="square" lIns="18288" rIns="18288" tIns="18288" bIns="18288" anchor="ctr">
+            <a:spAutoFit/>
+          </a:bodyPr>
+          <a:lstStyle/>
+          <a:p>
+            <a:pPr algn="ctr">
+              <a:defRPr sz="1300" b="1">
+                <a:solidFill>
+                  <a:srgbClr val="FFFFFF"/>
+                </a:solidFill>
+                <a:latin typeface="Aptos"/>
+              </a:defRPr>
+            </a:pPr>
+            <a:r>
+              <a:t>2</a:t>
+            </a:r>
+          </a:p>
+        </p:txBody>
+      </p:sp>
+      <p:sp>
+        <p:nvSpPr>
+          <p:cNvPr id="13" name="TextBox 12"/>
+          <p:cNvSpPr txBox="1"/>
+          <p:nvPr/>
+        </p:nvSpPr>
+        <p:spPr>
+          <a:xfrm>
+            <a:off x="5047488" y="2020824"/>
+            <a:ext cx="2615184" cy="310896"/>
+          </a:xfrm>
+          <a:prstGeom prst="rect">
+            <a:avLst/>
+          </a:prstGeom>
+          <a:noFill/>
+        </p:spPr>
+        <p:txBody>
+          <a:bodyPr wrap="square" lIns="18288" rIns="18288" tIns="18288" bIns="18288" anchor="ctr">
+            <a:spAutoFit/>
+          </a:bodyPr>
+          <a:lstStyle/>
+          <a:p>
+            <a:pPr algn="l">
+              <a:defRPr sz="1300" b="1">
+                <a:solidFill>
+                  <a:srgbClr val="112240"/>
+                </a:solidFill>
+                <a:latin typeface="Aptos"/>
+              </a:defRPr>
+            </a:pPr>
+            <a:r>
+              <a:t>Öneri ve diff</a:t>
+            </a:r>
+          </a:p>
+        </p:txBody>
+      </p:sp>
+      <p:sp>
+        <p:nvSpPr>
+          <p:cNvPr id="14" name="TextBox 13"/>
+          <p:cNvSpPr txBox="1"/>
+          <p:nvPr/>
+        </p:nvSpPr>
+        <p:spPr>
+          <a:xfrm>
+            <a:off x="4590288" y="2487168"/>
+            <a:ext cx="3035808" cy="502920"/>
+          </a:xfrm>
+          <a:prstGeom prst="rect">
+            <a:avLst/>
+          </a:prstGeom>
+          <a:noFill/>
+        </p:spPr>
+        <p:txBody>
+          <a:bodyPr wrap="square" lIns="18288" rIns="18288" tIns="18288" bIns="18288" anchor="ctr">
+            <a:spAutoFit/>
+          </a:bodyPr>
+          <a:lstStyle/>
+          <a:p>
+            <a:pPr algn="l">
+              <a:defRPr sz="1000" b="0">
+                <a:solidFill>
+                  <a:srgbClr val="637389"/>
+                </a:solidFill>
+                <a:latin typeface="Aptos"/>
+              </a:defRPr>
+            </a:pPr>
+            <a:r>
+              <a:t>Model maskenin yanlış tarafını önerdi; incelemede düzeltildi ve worktree'ye uygulandı.</a:t>
+            </a:r>
+          </a:p>
+        </p:txBody>
+      </p:sp>
+      <p:sp>
+        <p:nvSpPr>
+          <p:cNvPr id="15" name="Rounded Rectangle 14"/>
+          <p:cNvSpPr/>
+          <p:nvPr/>
+        </p:nvSpPr>
+        <p:spPr>
+          <a:xfrm>
+            <a:off x="8065008" y="1874519"/>
+            <a:ext cx="3401568" cy="1298448"/>
+          </a:xfrm>
+          <a:prstGeom prst="roundRect">
+            <a:avLst/>
+          </a:prstGeom>
+          <a:solidFill>
+            <a:srgbClr val="FFFFFF"/>
+          </a:solidFill>
+          <a:ln>
+            <a:noFill/>
+          </a:ln>
+        </p:spPr>
+        <p:style>
+          <a:lnRef idx="1">
+            <a:schemeClr val="accent1"/>
+          </a:lnRef>
+          <a:fillRef idx="3">
+            <a:schemeClr val="accent1"/>
+          </a:fillRef>
+          <a:effectRef idx="2">
+            <a:schemeClr val="accent1"/>
+          </a:effectRef>
+          <a:fontRef idx="minor">
+            <a:schemeClr val="lt1"/>
+          </a:fontRef>
+        </p:style>
+        <p:txBody>
+          <a:bodyPr rtlCol="0" anchor="ctr"/>
+          <a:lstStyle/>
+          <a:p>
+            <a:pPr algn="ctr"/>
+          </a:p>
+        </p:txBody>
+      </p:sp>
+      <p:sp>
+        <p:nvSpPr>
+          <p:cNvPr id="16" name="Rounded Rectangle 15"/>
+          <p:cNvSpPr/>
+          <p:nvPr/>
+        </p:nvSpPr>
+        <p:spPr>
+          <a:xfrm>
+            <a:off x="8211312" y="2039112"/>
+            <a:ext cx="384048" cy="384048"/>
+          </a:xfrm>
+          <a:prstGeom prst="roundRect">
+            <a:avLst/>
+          </a:prstGeom>
+          <a:solidFill>
+            <a:srgbClr val="00AFA0"/>
+          </a:solidFill>
+          <a:ln>
+            <a:noFill/>
+          </a:ln>
+        </p:spPr>
+        <p:style>
+          <a:lnRef idx="1">
+            <a:schemeClr val="accent1"/>
+          </a:lnRef>
+          <a:fillRef idx="3">
+            <a:schemeClr val="accent1"/>
+          </a:fillRef>
+          <a:effectRef idx="2">
+            <a:schemeClr val="accent1"/>
+          </a:effectRef>
+          <a:fontRef idx="minor">
+            <a:schemeClr val="lt1"/>
+          </a:fontRef>
+        </p:style>
+        <p:txBody>
+          <a:bodyPr rtlCol="0" anchor="ctr"/>
+          <a:lstStyle/>
+          <a:p>
+            <a:pPr algn="ctr"/>
+          </a:p>
+        </p:txBody>
+      </p:sp>
+      <p:sp>
+        <p:nvSpPr>
+          <p:cNvPr id="17" name="TextBox 16"/>
+          <p:cNvSpPr txBox="1"/>
+          <p:nvPr/>
+        </p:nvSpPr>
+        <p:spPr>
+          <a:xfrm>
+            <a:off x="8211312" y="2039112"/>
+            <a:ext cx="384048" cy="365760"/>
+          </a:xfrm>
+          <a:prstGeom prst="rect">
+            <a:avLst/>
+          </a:prstGeom>
+          <a:noFill/>
+        </p:spPr>
+        <p:txBody>
+          <a:bodyPr wrap="square" lIns="18288" rIns="18288" tIns="18288" bIns="18288" anchor="ctr">
+            <a:spAutoFit/>
+          </a:bodyPr>
+          <a:lstStyle/>
+          <a:p>
+            <a:pPr algn="ctr">
+              <a:defRPr sz="1300" b="1">
+                <a:solidFill>
+                  <a:srgbClr val="FFFFFF"/>
+                </a:solidFill>
+                <a:latin typeface="Aptos"/>
+              </a:defRPr>
+            </a:pPr>
+            <a:r>
+              <a:t>3</a:t>
+            </a:r>
+          </a:p>
+        </p:txBody>
+      </p:sp>
+      <p:sp>
+        <p:nvSpPr>
+          <p:cNvPr id="18" name="TextBox 17"/>
+          <p:cNvSpPr txBox="1"/>
+          <p:nvPr/>
+        </p:nvSpPr>
+        <p:spPr>
+          <a:xfrm>
+            <a:off x="8705088" y="2020824"/>
+            <a:ext cx="2615184" cy="310896"/>
+          </a:xfrm>
+          <a:prstGeom prst="rect">
+            <a:avLst/>
+          </a:prstGeom>
+          <a:noFill/>
+        </p:spPr>
+        <p:txBody>
+          <a:bodyPr wrap="square" lIns="18288" rIns="18288" tIns="18288" bIns="18288" anchor="ctr">
+            <a:spAutoFit/>
+          </a:bodyPr>
+          <a:lstStyle/>
+          <a:p>
+            <a:pPr algn="l">
+              <a:defRPr sz="1300" b="1">
+                <a:solidFill>
+                  <a:srgbClr val="112240"/>
+                </a:solidFill>
+                <a:latin typeface="Aptos"/>
+              </a:defRPr>
+            </a:pPr>
+            <a:r>
+              <a:t>Test ve PR provası</a:t>
+            </a:r>
+          </a:p>
+        </p:txBody>
+      </p:sp>
+      <p:sp>
+        <p:nvSpPr>
+          <p:cNvPr id="19" name="TextBox 18"/>
+          <p:cNvSpPr txBox="1"/>
+          <p:nvPr/>
+        </p:nvSpPr>
+        <p:spPr>
+          <a:xfrm>
+            <a:off x="8247888" y="2487168"/>
+            <a:ext cx="3035808" cy="502920"/>
+          </a:xfrm>
+          <a:prstGeom prst="rect">
+            <a:avLst/>
+          </a:prstGeom>
+          <a:noFill/>
+        </p:spPr>
+        <p:txBody>
+          <a:bodyPr wrap="square" lIns="18288" rIns="18288" tIns="18288" bIns="18288" anchor="ctr">
+            <a:spAutoFit/>
+          </a:bodyPr>
+          <a:lstStyle/>
+          <a:p>
+            <a:pPr algn="l">
+              <a:defRPr sz="1000" b="0">
+                <a:solidFill>
+                  <a:srgbClr val="637389"/>
+                </a:solidFill>
+                <a:latin typeface="Aptos"/>
+              </a:defRPr>
+            </a:pPr>
+            <a:r>
+              <a:t>2 kabul testi geçti; push yerel bare remote'a, gh yanıtı taklitçiye yöneldi.</a:t>
+            </a:r>
+          </a:p>
+        </p:txBody>
+      </p:sp>
+      <p:sp>
+        <p:nvSpPr>
+          <p:cNvPr id="20" name="Rounded Rectangle 19"/>
+          <p:cNvSpPr/>
+          <p:nvPr/>
+        </p:nvSpPr>
+        <p:spPr>
+          <a:xfrm>
+            <a:off x="749808" y="3675887"/>
+            <a:ext cx="10716768" cy="1078992"/>
+          </a:xfrm>
+          <a:prstGeom prst="roundRect">
+            <a:avLst/>
+          </a:prstGeom>
+          <a:solidFill>
+            <a:srgbClr val="E7F0FA"/>
+          </a:solidFill>
+          <a:ln>
+            <a:noFill/>
+          </a:ln>
+        </p:spPr>
+        <p:style>
+          <a:lnRef idx="1">
+            <a:schemeClr val="accent1"/>
+          </a:lnRef>
+          <a:fillRef idx="3">
+            <a:schemeClr val="accent1"/>
+          </a:fillRef>
+          <a:effectRef idx="2">
+            <a:schemeClr val="accent1"/>
+          </a:effectRef>
+          <a:fontRef idx="minor">
+            <a:schemeClr val="lt1"/>
+          </a:fontRef>
+        </p:style>
+        <p:txBody>
+          <a:bodyPr rtlCol="0" anchor="ctr"/>
+          <a:lstStyle/>
+          <a:p>
+            <a:pPr algn="ctr"/>
+          </a:p>
+        </p:txBody>
+      </p:sp>
+      <p:sp>
+        <p:nvSpPr>
+          <p:cNvPr id="21" name="TextBox 20"/>
+          <p:cNvSpPr txBox="1"/>
+          <p:nvPr/>
+        </p:nvSpPr>
+        <p:spPr>
+          <a:xfrm>
+            <a:off x="1024128" y="3877056"/>
+            <a:ext cx="2286000" cy="310896"/>
+          </a:xfrm>
+          <a:prstGeom prst="rect">
+            <a:avLst/>
+          </a:prstGeom>
+          <a:noFill/>
+        </p:spPr>
+        <p:txBody>
+          <a:bodyPr wrap="square" lIns="18288" rIns="18288" tIns="18288" bIns="18288" anchor="ctr">
+            <a:spAutoFit/>
+          </a:bodyPr>
+          <a:lstStyle/>
+          <a:p>
+            <a:pPr algn="l">
+              <a:defRPr sz="1500" b="1">
+                <a:solidFill>
+                  <a:srgbClr val="112240"/>
+                </a:solidFill>
+                <a:latin typeface="Aptos"/>
+              </a:defRPr>
+            </a:pPr>
+            <a:r>
+              <a:t>Dış GitHub etkisi yok</a:t>
+            </a:r>
+          </a:p>
+        </p:txBody>
+      </p:sp>
+      <p:sp>
+        <p:nvSpPr>
+          <p:cNvPr id="22" name="TextBox 21"/>
+          <p:cNvSpPr txBox="1"/>
+          <p:nvPr/>
+        </p:nvSpPr>
+        <p:spPr>
+          <a:xfrm>
+            <a:off x="3401568" y="3813048"/>
+            <a:ext cx="7635240" cy="530352"/>
+          </a:xfrm>
+          <a:prstGeom prst="rect">
+            <a:avLst/>
+          </a:prstGeom>
+          <a:noFill/>
+        </p:spPr>
+        <p:txBody>
+          <a:bodyPr wrap="square" lIns="18288" rIns="18288" tIns="18288" bIns="18288" anchor="ctr">
+            <a:spAutoFit/>
+          </a:bodyPr>
+          <a:lstStyle/>
+          <a:p>
+            <a:pPr algn="l">
+              <a:defRPr sz="1300" b="0">
+                <a:solidFill>
+                  <a:srgbClr val="223045"/>
+                </a:solidFill>
+                <a:latin typeface="Aptos"/>
+              </a:defRPr>
+            </a:pPr>
+            <a:r>
+              <a:t>Gerçek PR açılmadı. Akışın commit/push/PR bağlantısı adımları gerçek fixture Git geçmişi ve yerel sahte GitHub CLI ile sınandı.</a:t>
+            </a:r>
+          </a:p>
+        </p:txBody>
+      </p:sp>
+      <p:sp>
+        <p:nvSpPr>
+          <p:cNvPr id="23" name="TextBox 22"/>
+          <p:cNvSpPr txBox="1"/>
+          <p:nvPr/>
+        </p:nvSpPr>
+        <p:spPr>
+          <a:xfrm>
+            <a:off x="1024128" y="5065776"/>
+            <a:ext cx="10058400" cy="347472"/>
+          </a:xfrm>
+          <a:prstGeom prst="rect">
+            <a:avLst/>
+          </a:prstGeom>
+          <a:noFill/>
+        </p:spPr>
+        <p:txBody>
+          <a:bodyPr wrap="square" lIns="18288" rIns="18288" tIns="18288" bIns="18288" anchor="ctr">
+            <a:spAutoFit/>
+          </a:bodyPr>
+          <a:lstStyle/>
+          <a:p>
+            <a:pPr algn="ctr">
+              <a:defRPr sz="1200" b="0">
+                <a:solidFill>
+                  <a:srgbClr val="637389"/>
+                </a:solidFill>
+                <a:latin typeface="Aptos"/>
+              </a:defRPr>
+            </a:pPr>
+            <a:r>
+              <a:t>Test verisi `TEST_FIXTURE_NOT_LAW` olarak işaretlidir; düzeltmeler hukuki uyumluluk kanıtı değildir.</a:t>
+            </a:r>
+          </a:p>
+        </p:txBody>
+      </p:sp>
+      <p:sp>
+        <p:nvSpPr>
+          <p:cNvPr id="24" name="TextBox 23"/>
+          <p:cNvSpPr txBox="1"/>
+          <p:nvPr/>
+        </p:nvSpPr>
+        <p:spPr>
+          <a:xfrm>
+            <a:off x="566928" y="6473952"/>
+            <a:ext cx="9692640" cy="182880"/>
+          </a:xfrm>
+          <a:prstGeom prst="rect">
+            <a:avLst/>
+          </a:prstGeom>
+          <a:noFill/>
+        </p:spPr>
+        <p:txBody>
+          <a:bodyPr wrap="square" lIns="18288" rIns="18288" tIns="18288" bIns="18288" anchor="ctr">
+            <a:spAutoFit/>
+          </a:bodyPr>
+          <a:lstStyle/>
+          <a:p>
+            <a:pPr algn="l">
+              <a:defRPr sz="800" b="1">
+                <a:solidFill>
+                  <a:srgbClr val="637389"/>
+                </a:solidFill>
+                <a:latin typeface="Aptos"/>
+              </a:defRPr>
+            </a:pPr>
+            <a:r>
+              <a:t>MEVZUATAGENT  •  YEREL  •  ONAYLI  •  DENETLENEBİLİR</a:t>
+            </a:r>
+          </a:p>
+        </p:txBody>
+      </p:sp>
+      <p:sp>
+        <p:nvSpPr>
+          <p:cNvPr id="25" name="TextBox 24"/>
+          <p:cNvSpPr txBox="1"/>
+          <p:nvPr/>
+        </p:nvSpPr>
+        <p:spPr>
+          <a:xfrm>
+            <a:off x="11109960" y="6419088"/>
+            <a:ext cx="502920" cy="274320"/>
+          </a:xfrm>
+          <a:prstGeom prst="rect">
+            <a:avLst/>
+          </a:prstGeom>
+          <a:noFill/>
+        </p:spPr>
+        <p:txBody>
+          <a:bodyPr wrap="square" lIns="18288" rIns="18288" tIns="18288" bIns="18288" anchor="ctr">
+            <a:spAutoFit/>
+          </a:bodyPr>
+          <a:lstStyle/>
+          <a:p>
+            <a:pPr algn="r">
+              <a:defRPr sz="1000" b="1">
+                <a:solidFill>
+                  <a:srgbClr val="637389"/>
+                </a:solidFill>
+                <a:latin typeface="Aptos"/>
+              </a:defRPr>
+            </a:pPr>
+            <a:r>
+              <a:t>17</a:t>
+            </a:r>
+          </a:p>
+        </p:txBody>
+      </p:sp>
+    </p:spTree>
+  </p:cSld>
+  <p:clrMapOvr>
+    <a:masterClrMapping/>
+  </p:clrMapOvr>
+</p:sld>
+</file>
+
+<file path=ppt/slides/slide18.xml><?xml version="1.0" encoding="utf-8"?>
+<p:sld xmlns:a="http://schemas.openxmlformats.org/drawingml/2006/main" xmlns:p="http://schemas.openxmlformats.org/presentationml/2006/main" xmlns:r="http://schemas.openxmlformats.org/officeDocument/2006/relationships">
+  <p:cSld>
+    <p:bg>
+      <p:bgPr>
+        <a:solidFill>
+          <a:srgbClr val="F7F9FC"/>
+        </a:solidFill>
+        <a:effectLst/>
+      </p:bgPr>
+    </p:bg>
+    <p:spTree>
+      <p:nvGrpSpPr>
+        <p:cNvPr id="1" name=""/>
+        <p:cNvGrpSpPr/>
+        <p:nvPr/>
+      </p:nvGrpSpPr>
+      <p:grpSpPr/>
+      <p:sp>
+        <p:nvSpPr>
+          <p:cNvPr id="2" name="TextBox 1"/>
+          <p:cNvSpPr txBox="1"/>
+          <p:nvPr/>
+        </p:nvSpPr>
+        <p:spPr>
+          <a:xfrm>
+            <a:off x="640080" y="329184"/>
+            <a:ext cx="10881360" cy="228600"/>
+          </a:xfrm>
+          <a:prstGeom prst="rect">
+            <a:avLst/>
+          </a:prstGeom>
+          <a:noFill/>
+        </p:spPr>
+        <p:txBody>
+          <a:bodyPr wrap="square" lIns="18288" rIns="18288" tIns="18288" bIns="18288" anchor="ctr">
+            <a:spAutoFit/>
+          </a:bodyPr>
+          <a:lstStyle/>
+          <a:p>
+            <a:pPr algn="l">
+              <a:defRPr sz="900" b="1">
+                <a:solidFill>
+                  <a:srgbClr val="00AFA0"/>
+                </a:solidFill>
+                <a:latin typeface="Aptos"/>
+              </a:defRPr>
+            </a:pPr>
+            <a:r>
+              <a:t>15  •  GÜVENLIK VE MAHREMIYET</a:t>
+            </a:r>
+          </a:p>
+        </p:txBody>
+      </p:sp>
+      <p:sp>
+        <p:nvSpPr>
+          <p:cNvPr id="3" name="TextBox 2"/>
+          <p:cNvSpPr txBox="1"/>
+          <p:nvPr/>
+        </p:nvSpPr>
+        <p:spPr>
+          <a:xfrm>
+            <a:off x="640080" y="658368"/>
+            <a:ext cx="10972800" cy="502920"/>
+          </a:xfrm>
+          <a:prstGeom prst="rect">
+            <a:avLst/>
+          </a:prstGeom>
+          <a:noFill/>
+        </p:spPr>
+        <p:txBody>
+          <a:bodyPr wrap="square" lIns="18288" rIns="18288" tIns="18288" bIns="18288" anchor="ctr">
+            <a:spAutoFit/>
+          </a:bodyPr>
+          <a:lstStyle/>
+          <a:p>
+            <a:pPr algn="l">
+              <a:defRPr sz="2700" b="1">
+                <a:solidFill>
+                  <a:srgbClr val="112240"/>
+                </a:solidFill>
+                <a:latin typeface="Aptos"/>
+              </a:defRPr>
+            </a:pPr>
+            <a:r>
+              <a:t>Güvenli varsayılanlar ve açık sınırlar</a:t>
+            </a:r>
+          </a:p>
+        </p:txBody>
+      </p:sp>
+      <p:sp>
+        <p:nvSpPr>
+          <p:cNvPr id="4" name="TextBox 3"/>
+          <p:cNvSpPr txBox="1"/>
+          <p:nvPr/>
+        </p:nvSpPr>
+        <p:spPr>
+          <a:xfrm>
+            <a:off x="658368" y="1197864"/>
+            <a:ext cx="10881360" cy="420624"/>
+          </a:xfrm>
+          <a:prstGeom prst="rect">
+            <a:avLst/>
+          </a:prstGeom>
+          <a:noFill/>
+        </p:spPr>
+        <p:txBody>
+          <a:bodyPr wrap="square" lIns="18288" rIns="18288" tIns="18288" bIns="18288" anchor="ctr">
+            <a:spAutoFit/>
+          </a:bodyPr>
+          <a:lstStyle/>
+          <a:p>
+            <a:pPr algn="l">
+              <a:defRPr sz="1300" b="0">
+                <a:solidFill>
+                  <a:srgbClr val="637389"/>
+                </a:solidFill>
+                <a:latin typeface="Aptos"/>
+              </a:defRPr>
+            </a:pPr>
+            <a:r>
+              <a:t>Kod ve mevzuat bağlamı yerel Ollama'ya gider; tarama akışı bulguları uzman incelemesine sunar.</a:t>
+            </a:r>
+          </a:p>
+        </p:txBody>
+      </p:sp>
+      <p:sp>
+        <p:nvSpPr>
+          <p:cNvPr id="5" name="Rounded Rectangle 4"/>
+          <p:cNvSpPr/>
+          <p:nvPr/>
+        </p:nvSpPr>
+        <p:spPr>
+          <a:xfrm>
+            <a:off x="713232" y="1828800"/>
+            <a:ext cx="5212080" cy="2011680"/>
+          </a:xfrm>
+          <a:prstGeom prst="roundRect">
+            <a:avLst/>
+          </a:prstGeom>
+          <a:solidFill>
+            <a:srgbClr val="FFFFFF"/>
+          </a:solidFill>
+          <a:ln>
+            <a:noFill/>
+          </a:ln>
+        </p:spPr>
+        <p:style>
+          <a:lnRef idx="1">
+            <a:schemeClr val="accent1"/>
+          </a:lnRef>
+          <a:fillRef idx="3">
+            <a:schemeClr val="accent1"/>
+          </a:fillRef>
+          <a:effectRef idx="2">
+            <a:schemeClr val="accent1"/>
+          </a:effectRef>
+          <a:fontRef idx="minor">
+            <a:schemeClr val="lt1"/>
+          </a:fontRef>
+        </p:style>
+        <p:txBody>
+          <a:bodyPr rtlCol="0" anchor="ctr"/>
+          <a:lstStyle/>
+          <a:p>
+            <a:pPr algn="ctr"/>
+          </a:p>
+        </p:txBody>
+      </p:sp>
+      <p:sp>
+        <p:nvSpPr>
+          <p:cNvPr id="6" name="Rectangle 5"/>
+          <p:cNvSpPr/>
+          <p:nvPr/>
+        </p:nvSpPr>
+        <p:spPr>
+          <a:xfrm>
+            <a:off x="713232" y="1828800"/>
+            <a:ext cx="64008" cy="2011680"/>
+          </a:xfrm>
+          <a:prstGeom prst="rect">
+            <a:avLst/>
+          </a:prstGeom>
+          <a:solidFill>
+            <a:srgbClr val="00AFA0"/>
+          </a:solidFill>
+          <a:ln>
+            <a:noFill/>
+          </a:ln>
+        </p:spPr>
+        <p:style>
+          <a:lnRef idx="1">
+            <a:schemeClr val="accent1"/>
+          </a:lnRef>
+          <a:fillRef idx="3">
+            <a:schemeClr val="accent1"/>
+          </a:fillRef>
+          <a:effectRef idx="2">
+            <a:schemeClr val="accent1"/>
+          </a:effectRef>
+          <a:fontRef idx="minor">
+            <a:schemeClr val="lt1"/>
+          </a:fontRef>
+        </p:style>
+        <p:txBody>
+          <a:bodyPr rtlCol="0" anchor="ctr"/>
+          <a:lstStyle/>
+          <a:p>
+            <a:pPr algn="ctr"/>
+          </a:p>
+        </p:txBody>
+      </p:sp>
+      <p:sp>
+        <p:nvSpPr>
+          <p:cNvPr id="7" name="TextBox 6"/>
+          <p:cNvSpPr txBox="1"/>
+          <p:nvPr/>
+        </p:nvSpPr>
+        <p:spPr>
+          <a:xfrm>
+            <a:off x="914400" y="1956816"/>
+            <a:ext cx="4828032" cy="347472"/>
+          </a:xfrm>
+          <a:prstGeom prst="rect">
+            <a:avLst/>
+          </a:prstGeom>
+          <a:noFill/>
+        </p:spPr>
+        <p:txBody>
+          <a:bodyPr wrap="square" lIns="18288" rIns="18288" tIns="18288" bIns="18288" anchor="ctr">
+            <a:spAutoFit/>
+          </a:bodyPr>
+          <a:lstStyle/>
+          <a:p>
+            <a:pPr algn="l">
+              <a:defRPr sz="1600" b="1">
+                <a:solidFill>
+                  <a:srgbClr val="112240"/>
+                </a:solidFill>
+                <a:latin typeface="Aptos"/>
+              </a:defRPr>
+            </a:pPr>
+            <a:r>
+              <a:t>Kontroller</a:t>
+            </a:r>
+          </a:p>
+        </p:txBody>
+      </p:sp>
+      <p:sp>
+        <p:nvSpPr>
+          <p:cNvPr id="8" name="TextBox 7"/>
+          <p:cNvSpPr txBox="1"/>
+          <p:nvPr/>
+        </p:nvSpPr>
+        <p:spPr>
+          <a:xfrm>
+            <a:off x="932688" y="2377440"/>
+            <a:ext cx="4791456" cy="1353312"/>
+          </a:xfrm>
+          <a:prstGeom prst="rect">
+            <a:avLst/>
+          </a:prstGeom>
+          <a:noFill/>
+        </p:spPr>
+        <p:txBody>
+          <a:bodyPr wrap="square" lIns="18288" rIns="18288" tIns="18288" bIns="18288" anchor="ctr">
+            <a:spAutoFit/>
+          </a:bodyPr>
+          <a:lstStyle/>
+          <a:p>
+            <a:pPr algn="l">
+              <a:defRPr sz="1200" b="0">
+                <a:solidFill>
+                  <a:srgbClr val="223045"/>
+                </a:solidFill>
+                <a:latin typeface="Aptos"/>
+              </a:defRPr>
+            </a:pPr>
+            <a:r>
+              <a:t>•  Klonlama ve tarama kullanıcı onaylıdır</a:t>
+            </a:r>
+            <a:br/>
+            <a:r>
+              <a:t>•  Düzeltme ayrı worktree'de uygulanır</a:t>
+            </a:r>
+            <a:br/>
+            <a:r>
+              <a:t>•  Test ve PR ayrı onay ister</a:t>
+            </a:r>
+            <a:br/>
+            <a:r>
+              <a:t>•  PR için yalnız beklenen dosyalar seçilir</a:t>
+            </a:r>
+          </a:p>
+        </p:txBody>
+      </p:sp>
+      <p:sp>
+        <p:nvSpPr>
+          <p:cNvPr id="9" name="Rounded Rectangle 8"/>
+          <p:cNvSpPr/>
+          <p:nvPr/>
+        </p:nvSpPr>
+        <p:spPr>
+          <a:xfrm>
+            <a:off x="6172200" y="1828800"/>
+            <a:ext cx="5212080" cy="2011680"/>
+          </a:xfrm>
+          <a:prstGeom prst="roundRect">
+            <a:avLst/>
+          </a:prstGeom>
+          <a:solidFill>
+            <a:srgbClr val="FFFFFF"/>
+          </a:solidFill>
+          <a:ln>
+            <a:noFill/>
+          </a:ln>
+        </p:spPr>
+        <p:style>
+          <a:lnRef idx="1">
+            <a:schemeClr val="accent1"/>
+          </a:lnRef>
+          <a:fillRef idx="3">
+            <a:schemeClr val="accent1"/>
+          </a:fillRef>
+          <a:effectRef idx="2">
+            <a:schemeClr val="accent1"/>
+          </a:effectRef>
+          <a:fontRef idx="minor">
+            <a:schemeClr val="lt1"/>
+          </a:fontRef>
+        </p:style>
+        <p:txBody>
+          <a:bodyPr rtlCol="0" anchor="ctr"/>
+          <a:lstStyle/>
+          <a:p>
+            <a:pPr algn="ctr"/>
+          </a:p>
+        </p:txBody>
+      </p:sp>
+      <p:sp>
+        <p:nvSpPr>
+          <p:cNvPr id="10" name="Rectangle 9"/>
+          <p:cNvSpPr/>
+          <p:nvPr/>
+        </p:nvSpPr>
+        <p:spPr>
+          <a:xfrm>
+            <a:off x="6172200" y="1828800"/>
+            <a:ext cx="64008" cy="2011680"/>
+          </a:xfrm>
+          <a:prstGeom prst="rect">
+            <a:avLst/>
+          </a:prstGeom>
+          <a:solidFill>
+            <a:srgbClr val="F8BC4A"/>
+          </a:solidFill>
+          <a:ln>
+            <a:noFill/>
+          </a:ln>
+        </p:spPr>
+        <p:style>
+          <a:lnRef idx="1">
+            <a:schemeClr val="accent1"/>
+          </a:lnRef>
+          <a:fillRef idx="3">
+            <a:schemeClr val="accent1"/>
+          </a:fillRef>
+          <a:effectRef idx="2">
+            <a:schemeClr val="accent1"/>
+          </a:effectRef>
+          <a:fontRef idx="minor">
+            <a:schemeClr val="lt1"/>
+          </a:fontRef>
+        </p:style>
+        <p:txBody>
+          <a:bodyPr rtlCol="0" anchor="ctr"/>
+          <a:lstStyle/>
+          <a:p>
+            <a:pPr algn="ctr"/>
+          </a:p>
+        </p:txBody>
+      </p:sp>
+      <p:sp>
+        <p:nvSpPr>
+          <p:cNvPr id="11" name="TextBox 10"/>
+          <p:cNvSpPr txBox="1"/>
+          <p:nvPr/>
+        </p:nvSpPr>
+        <p:spPr>
+          <a:xfrm>
+            <a:off x="6373368" y="1956816"/>
+            <a:ext cx="4828032" cy="347472"/>
+          </a:xfrm>
+          <a:prstGeom prst="rect">
+            <a:avLst/>
+          </a:prstGeom>
+          <a:noFill/>
+        </p:spPr>
+        <p:txBody>
+          <a:bodyPr wrap="square" lIns="18288" rIns="18288" tIns="18288" bIns="18288" anchor="ctr">
+            <a:spAutoFit/>
+          </a:bodyPr>
+          <a:lstStyle/>
+          <a:p>
+            <a:pPr algn="l">
+              <a:defRPr sz="1600" b="1">
+                <a:solidFill>
+                  <a:srgbClr val="112240"/>
+                </a:solidFill>
+                <a:latin typeface="Aptos"/>
+              </a:defRPr>
+            </a:pPr>
+            <a:r>
+              <a:t>Kullanım sorumluluğu</a:t>
+            </a:r>
+          </a:p>
+        </p:txBody>
+      </p:sp>
+      <p:sp>
+        <p:nvSpPr>
+          <p:cNvPr id="12" name="TextBox 11"/>
+          <p:cNvSpPr txBox="1"/>
+          <p:nvPr/>
+        </p:nvSpPr>
+        <p:spPr>
+          <a:xfrm>
+            <a:off x="6391656" y="2377440"/>
+            <a:ext cx="4791456" cy="1353312"/>
+          </a:xfrm>
+          <a:prstGeom prst="rect">
+            <a:avLst/>
+          </a:prstGeom>
+          <a:noFill/>
+        </p:spPr>
+        <p:txBody>
+          <a:bodyPr wrap="square" lIns="18288" rIns="18288" tIns="18288" bIns="18288" anchor="ctr">
+            <a:spAutoFit/>
+          </a:bodyPr>
+          <a:lstStyle/>
+          <a:p>
+            <a:pPr algn="l">
+              <a:defRPr sz="1200" b="0">
+                <a:solidFill>
+                  <a:srgbClr val="223045"/>
+                </a:solidFill>
+                <a:latin typeface="Aptos"/>
+              </a:defRPr>
+            </a:pPr>
+            <a:r>
+              <a:t>•  İndirilen kaynağın güncelliğini denetleyin</a:t>
+            </a:r>
+            <a:br/>
+            <a:r>
+              <a:t>•  Yalnız güvendiğiniz projelerde test çalıştırın</a:t>
+            </a:r>
+            <a:br/>
+            <a:r>
+              <a:t>•  Model bulgusunu hukuk uzmanına doğrulatın</a:t>
+            </a:r>
+            <a:br/>
+            <a:r>
+              <a:t>•  Gerçek depoda yedek ve temiz çalışma alanı kullanın</a:t>
+            </a:r>
+          </a:p>
+        </p:txBody>
+      </p:sp>
+      <p:sp>
+        <p:nvSpPr>
+          <p:cNvPr id="13" name="Rounded Rectangle 12"/>
+          <p:cNvSpPr/>
+          <p:nvPr/>
+        </p:nvSpPr>
+        <p:spPr>
+          <a:xfrm>
+            <a:off x="713232" y="4279392"/>
+            <a:ext cx="10671048" cy="896112"/>
+          </a:xfrm>
+          <a:prstGeom prst="roundRect">
+            <a:avLst/>
+          </a:prstGeom>
+          <a:solidFill>
+            <a:srgbClr val="FFF6DF"/>
+          </a:solidFill>
+          <a:ln>
+            <a:noFill/>
+          </a:ln>
+        </p:spPr>
+        <p:style>
+          <a:lnRef idx="1">
+            <a:schemeClr val="accent1"/>
+          </a:lnRef>
+          <a:fillRef idx="3">
+            <a:schemeClr val="accent1"/>
+          </a:fillRef>
+          <a:effectRef idx="2">
+            <a:schemeClr val="accent1"/>
+          </a:effectRef>
+          <a:fontRef idx="minor">
+            <a:schemeClr val="lt1"/>
+          </a:fontRef>
+        </p:style>
+        <p:txBody>
+          <a:bodyPr rtlCol="0" anchor="ctr"/>
+          <a:lstStyle/>
+          <a:p>
+            <a:pPr algn="ctr"/>
+          </a:p>
+        </p:txBody>
+      </p:sp>
+      <p:sp>
+        <p:nvSpPr>
+          <p:cNvPr id="14" name="TextBox 13"/>
+          <p:cNvSpPr txBox="1"/>
+          <p:nvPr/>
+        </p:nvSpPr>
+        <p:spPr>
+          <a:xfrm>
+            <a:off x="932688" y="4498848"/>
+            <a:ext cx="10195560" cy="402336"/>
+          </a:xfrm>
+          <a:prstGeom prst="rect">
+            <a:avLst/>
+          </a:prstGeom>
+          <a:noFill/>
+        </p:spPr>
+        <p:txBody>
+          <a:bodyPr wrap="square" lIns="18288" rIns="18288" tIns="18288" bIns="18288" anchor="ctr">
+            <a:spAutoFit/>
+          </a:bodyPr>
+          <a:lstStyle/>
+          <a:p>
+            <a:pPr algn="ctr">
+              <a:defRPr sz="1400" b="1">
+                <a:solidFill>
+                  <a:srgbClr val="112240"/>
+                </a:solidFill>
+                <a:latin typeface="Aptos"/>
+              </a:defRPr>
+            </a:pPr>
+            <a:r>
+              <a:t>Otomasyon kanıtı düzenler; hukuki görüş, kesin uygunluk kararı veya güvenlik sertifikası vermez.</a:t>
+            </a:r>
+          </a:p>
+        </p:txBody>
+      </p:sp>
+      <p:sp>
+        <p:nvSpPr>
+          <p:cNvPr id="15" name="TextBox 14"/>
+          <p:cNvSpPr txBox="1"/>
+          <p:nvPr/>
+        </p:nvSpPr>
+        <p:spPr>
+          <a:xfrm>
+            <a:off x="566928" y="6473952"/>
+            <a:ext cx="9692640" cy="182880"/>
+          </a:xfrm>
+          <a:prstGeom prst="rect">
+            <a:avLst/>
+          </a:prstGeom>
+          <a:noFill/>
+        </p:spPr>
+        <p:txBody>
+          <a:bodyPr wrap="square" lIns="18288" rIns="18288" tIns="18288" bIns="18288" anchor="ctr">
+            <a:spAutoFit/>
+          </a:bodyPr>
+          <a:lstStyle/>
+          <a:p>
+            <a:pPr algn="l">
+              <a:defRPr sz="800" b="1">
+                <a:solidFill>
+                  <a:srgbClr val="637389"/>
+                </a:solidFill>
+                <a:latin typeface="Aptos"/>
+              </a:defRPr>
+            </a:pPr>
+            <a:r>
+              <a:t>MEVZUATAGENT  •  YEREL  •  ONAYLI  •  DENETLENEBİLİR</a:t>
+            </a:r>
+          </a:p>
+        </p:txBody>
+      </p:sp>
+      <p:sp>
+        <p:nvSpPr>
+          <p:cNvPr id="16" name="TextBox 15"/>
+          <p:cNvSpPr txBox="1"/>
+          <p:nvPr/>
+        </p:nvSpPr>
+        <p:spPr>
+          <a:xfrm>
+            <a:off x="11109960" y="6419088"/>
+            <a:ext cx="502920" cy="274320"/>
+          </a:xfrm>
+          <a:prstGeom prst="rect">
+            <a:avLst/>
+          </a:prstGeom>
+          <a:noFill/>
+        </p:spPr>
+        <p:txBody>
+          <a:bodyPr wrap="square" lIns="18288" rIns="18288" tIns="18288" bIns="18288" anchor="ctr">
+            <a:spAutoFit/>
+          </a:bodyPr>
+          <a:lstStyle/>
+          <a:p>
+            <a:pPr algn="r">
+              <a:defRPr sz="1000" b="1">
+                <a:solidFill>
+                  <a:srgbClr val="637389"/>
+                </a:solidFill>
+                <a:latin typeface="Aptos"/>
+              </a:defRPr>
+            </a:pPr>
+            <a:r>
+              <a:t>18</a:t>
+            </a:r>
+          </a:p>
+        </p:txBody>
+      </p:sp>
+    </p:spTree>
+  </p:cSld>
+  <p:clrMapOvr>
+    <a:masterClrMapping/>
+  </p:clrMapOvr>
+</p:sld>
+</file>
+
+<file path=ppt/slides/slide19.xml><?xml version="1.0" encoding="utf-8"?>
 <p:sld xmlns:a="http://schemas.openxmlformats.org/drawingml/2006/main" xmlns:p="http://schemas.openxmlformats.org/presentationml/2006/main" xmlns:r="http://schemas.openxmlformats.org/officeDocument/2006/relationships">
   <p:cSld>
     <p:bg>
@@ -11626,1743 +13362,6 @@
               </a:defRPr>
             </a:pPr>
             <a:r>
-              <a:t>17</a:t>
-            </a:r>
-          </a:p>
-        </p:txBody>
-      </p:sp>
-    </p:spTree>
-  </p:cSld>
-  <p:clrMapOvr>
-    <a:masterClrMapping/>
-  </p:clrMapOvr>
-</p:sld>
-</file>
-
-<file path=ppt/slides/slide18.xml><?xml version="1.0" encoding="utf-8"?>
-<p:sld xmlns:a="http://schemas.openxmlformats.org/drawingml/2006/main" xmlns:p="http://schemas.openxmlformats.org/presentationml/2006/main" xmlns:r="http://schemas.openxmlformats.org/officeDocument/2006/relationships">
-  <p:cSld>
-    <p:bg>
-      <p:bgPr>
-        <a:solidFill>
-          <a:srgbClr val="F7F9FC"/>
-        </a:solidFill>
-        <a:effectLst/>
-      </p:bgPr>
-    </p:bg>
-    <p:spTree>
-      <p:nvGrpSpPr>
-        <p:cNvPr id="1" name=""/>
-        <p:cNvGrpSpPr/>
-        <p:nvPr/>
-      </p:nvGrpSpPr>
-      <p:grpSpPr/>
-      <p:sp>
-        <p:nvSpPr>
-          <p:cNvPr id="2" name="TextBox 1"/>
-          <p:cNvSpPr txBox="1"/>
-          <p:nvPr/>
-        </p:nvSpPr>
-        <p:spPr>
-          <a:xfrm>
-            <a:off x="640080" y="329184"/>
-            <a:ext cx="10881360" cy="228600"/>
-          </a:xfrm>
-          <a:prstGeom prst="rect">
-            <a:avLst/>
-          </a:prstGeom>
-          <a:noFill/>
-        </p:spPr>
-        <p:txBody>
-          <a:bodyPr wrap="square" lIns="18288" rIns="18288" tIns="18288" bIns="18288" anchor="ctr">
-            <a:spAutoFit/>
-          </a:bodyPr>
-          <a:lstStyle/>
-          <a:p>
-            <a:pPr algn="l">
-              <a:defRPr sz="900" b="1">
-                <a:solidFill>
-                  <a:srgbClr val="00AFA0"/>
-                </a:solidFill>
-                <a:latin typeface="Aptos"/>
-              </a:defRPr>
-            </a:pPr>
-            <a:r>
-              <a:t>17  •  BILINEN SINIRLAMALAR</a:t>
-            </a:r>
-          </a:p>
-        </p:txBody>
-      </p:sp>
-      <p:sp>
-        <p:nvSpPr>
-          <p:cNvPr id="3" name="TextBox 2"/>
-          <p:cNvSpPr txBox="1"/>
-          <p:nvPr/>
-        </p:nvSpPr>
-        <p:spPr>
-          <a:xfrm>
-            <a:off x="640080" y="658368"/>
-            <a:ext cx="10972800" cy="502920"/>
-          </a:xfrm>
-          <a:prstGeom prst="rect">
-            <a:avLst/>
-          </a:prstGeom>
-          <a:noFill/>
-        </p:spPr>
-        <p:txBody>
-          <a:bodyPr wrap="square" lIns="18288" rIns="18288" tIns="18288" bIns="18288" anchor="ctr">
-            <a:spAutoFit/>
-          </a:bodyPr>
-          <a:lstStyle/>
-          <a:p>
-            <a:pPr algn="l">
-              <a:defRPr sz="2700" b="1">
-                <a:solidFill>
-                  <a:srgbClr val="112240"/>
-                </a:solidFill>
-                <a:latin typeface="Aptos"/>
-              </a:defRPr>
-            </a:pPr>
-            <a:r>
-              <a:t>Tamamlanan iş ve sonraki geliştirme alanları</a:t>
-            </a:r>
-          </a:p>
-        </p:txBody>
-      </p:sp>
-      <p:sp>
-        <p:nvSpPr>
-          <p:cNvPr id="4" name="TextBox 3"/>
-          <p:cNvSpPr txBox="1"/>
-          <p:nvPr/>
-        </p:nvSpPr>
-        <p:spPr>
-          <a:xfrm>
-            <a:off x="658368" y="1197864"/>
-            <a:ext cx="10881360" cy="420624"/>
-          </a:xfrm>
-          <a:prstGeom prst="rect">
-            <a:avLst/>
-          </a:prstGeom>
-          <a:noFill/>
-        </p:spPr>
-        <p:txBody>
-          <a:bodyPr wrap="square" lIns="18288" rIns="18288" tIns="18288" bIns="18288" anchor="ctr">
-            <a:spAutoFit/>
-          </a:bodyPr>
-          <a:lstStyle/>
-          <a:p>
-            <a:pPr algn="l">
-              <a:defRPr sz="1300" b="0">
-                <a:solidFill>
-                  <a:srgbClr val="637389"/>
-                </a:solidFill>
-                <a:latin typeface="Aptos"/>
-              </a:defRPr>
-            </a:pPr>
-            <a:r>
-              <a:t>Kapsamı dürüstçe ayırmak, model çıktısına gereğinden fazla güvenilmesini önler.</a:t>
-            </a:r>
-          </a:p>
-        </p:txBody>
-      </p:sp>
-      <p:sp>
-        <p:nvSpPr>
-          <p:cNvPr id="5" name="Rounded Rectangle 4"/>
-          <p:cNvSpPr/>
-          <p:nvPr/>
-        </p:nvSpPr>
-        <p:spPr>
-          <a:xfrm>
-            <a:off x="713232" y="1847088"/>
-            <a:ext cx="5230368" cy="2423160"/>
-          </a:xfrm>
-          <a:prstGeom prst="roundRect">
-            <a:avLst/>
-          </a:prstGeom>
-          <a:solidFill>
-            <a:srgbClr val="FFFFFF"/>
-          </a:solidFill>
-          <a:ln>
-            <a:noFill/>
-          </a:ln>
-        </p:spPr>
-        <p:style>
-          <a:lnRef idx="1">
-            <a:schemeClr val="accent1"/>
-          </a:lnRef>
-          <a:fillRef idx="3">
-            <a:schemeClr val="accent1"/>
-          </a:fillRef>
-          <a:effectRef idx="2">
-            <a:schemeClr val="accent1"/>
-          </a:effectRef>
-          <a:fontRef idx="minor">
-            <a:schemeClr val="lt1"/>
-          </a:fontRef>
-        </p:style>
-        <p:txBody>
-          <a:bodyPr rtlCol="0" anchor="ctr"/>
-          <a:lstStyle/>
-          <a:p>
-            <a:pPr algn="ctr"/>
-          </a:p>
-        </p:txBody>
-      </p:sp>
-      <p:sp>
-        <p:nvSpPr>
-          <p:cNvPr id="6" name="Rectangle 5"/>
-          <p:cNvSpPr/>
-          <p:nvPr/>
-        </p:nvSpPr>
-        <p:spPr>
-          <a:xfrm>
-            <a:off x="713232" y="1847088"/>
-            <a:ext cx="64008" cy="2423160"/>
-          </a:xfrm>
-          <a:prstGeom prst="rect">
-            <a:avLst/>
-          </a:prstGeom>
-          <a:solidFill>
-            <a:srgbClr val="00AFA0"/>
-          </a:solidFill>
-          <a:ln>
-            <a:noFill/>
-          </a:ln>
-        </p:spPr>
-        <p:style>
-          <a:lnRef idx="1">
-            <a:schemeClr val="accent1"/>
-          </a:lnRef>
-          <a:fillRef idx="3">
-            <a:schemeClr val="accent1"/>
-          </a:fillRef>
-          <a:effectRef idx="2">
-            <a:schemeClr val="accent1"/>
-          </a:effectRef>
-          <a:fontRef idx="minor">
-            <a:schemeClr val="lt1"/>
-          </a:fontRef>
-        </p:style>
-        <p:txBody>
-          <a:bodyPr rtlCol="0" anchor="ctr"/>
-          <a:lstStyle/>
-          <a:p>
-            <a:pPr algn="ctr"/>
-          </a:p>
-        </p:txBody>
-      </p:sp>
-      <p:sp>
-        <p:nvSpPr>
-          <p:cNvPr id="7" name="TextBox 6"/>
-          <p:cNvSpPr txBox="1"/>
-          <p:nvPr/>
-        </p:nvSpPr>
-        <p:spPr>
-          <a:xfrm>
-            <a:off x="914400" y="1975104"/>
-            <a:ext cx="4846320" cy="347472"/>
-          </a:xfrm>
-          <a:prstGeom prst="rect">
-            <a:avLst/>
-          </a:prstGeom>
-          <a:noFill/>
-        </p:spPr>
-        <p:txBody>
-          <a:bodyPr wrap="square" lIns="18288" rIns="18288" tIns="18288" bIns="18288" anchor="ctr">
-            <a:spAutoFit/>
-          </a:bodyPr>
-          <a:lstStyle/>
-          <a:p>
-            <a:pPr algn="l">
-              <a:defRPr sz="1600" b="1">
-                <a:solidFill>
-                  <a:srgbClr val="112240"/>
-                </a:solidFill>
-                <a:latin typeface="Aptos"/>
-              </a:defRPr>
-            </a:pPr>
-            <a:r>
-              <a:t>Uygulanan</a:t>
-            </a:r>
-          </a:p>
-        </p:txBody>
-      </p:sp>
-      <p:sp>
-        <p:nvSpPr>
-          <p:cNvPr id="8" name="TextBox 7"/>
-          <p:cNvSpPr txBox="1"/>
-          <p:nvPr/>
-        </p:nvSpPr>
-        <p:spPr>
-          <a:xfrm>
-            <a:off x="932688" y="2395728"/>
-            <a:ext cx="4809744" cy="1764792"/>
-          </a:xfrm>
-          <a:prstGeom prst="rect">
-            <a:avLst/>
-          </a:prstGeom>
-          <a:noFill/>
-        </p:spPr>
-        <p:txBody>
-          <a:bodyPr wrap="square" lIns="18288" rIns="18288" tIns="18288" bIns="18288" anchor="ctr">
-            <a:spAutoFit/>
-          </a:bodyPr>
-          <a:lstStyle/>
-          <a:p>
-            <a:pPr algn="l">
-              <a:defRPr sz="1200" b="0">
-                <a:solidFill>
-                  <a:srgbClr val="223045"/>
-                </a:solidFill>
-                <a:latin typeface="Aptos"/>
-              </a:defRPr>
-            </a:pPr>
-            <a:r>
-              <a:t>•  PDF indirme ve sayfa metnini parçalama</a:t>
-            </a:r>
-            <a:br/>
-            <a:r>
-              <a:t>•  BM25 ile yerel mevzuat araması</a:t>
-            </a:r>
-            <a:br/>
-            <a:r>
-              <a:t>•  Onaylı tarama ve MD/HTML rapor</a:t>
-            </a:r>
-            <a:br/>
-            <a:r>
-              <a:t>•  İzole düzeltme, test ve PR akışları</a:t>
-            </a:r>
-          </a:p>
-        </p:txBody>
-      </p:sp>
-      <p:sp>
-        <p:nvSpPr>
-          <p:cNvPr id="9" name="Rounded Rectangle 8"/>
-          <p:cNvSpPr/>
-          <p:nvPr/>
-        </p:nvSpPr>
-        <p:spPr>
-          <a:xfrm>
-            <a:off x="6144768" y="1847088"/>
-            <a:ext cx="5230368" cy="2423160"/>
-          </a:xfrm>
-          <a:prstGeom prst="roundRect">
-            <a:avLst/>
-          </a:prstGeom>
-          <a:solidFill>
-            <a:srgbClr val="FFFFFF"/>
-          </a:solidFill>
-          <a:ln>
-            <a:noFill/>
-          </a:ln>
-        </p:spPr>
-        <p:style>
-          <a:lnRef idx="1">
-            <a:schemeClr val="accent1"/>
-          </a:lnRef>
-          <a:fillRef idx="3">
-            <a:schemeClr val="accent1"/>
-          </a:fillRef>
-          <a:effectRef idx="2">
-            <a:schemeClr val="accent1"/>
-          </a:effectRef>
-          <a:fontRef idx="minor">
-            <a:schemeClr val="lt1"/>
-          </a:fontRef>
-        </p:style>
-        <p:txBody>
-          <a:bodyPr rtlCol="0" anchor="ctr"/>
-          <a:lstStyle/>
-          <a:p>
-            <a:pPr algn="ctr"/>
-          </a:p>
-        </p:txBody>
-      </p:sp>
-      <p:sp>
-        <p:nvSpPr>
-          <p:cNvPr id="10" name="Rectangle 9"/>
-          <p:cNvSpPr/>
-          <p:nvPr/>
-        </p:nvSpPr>
-        <p:spPr>
-          <a:xfrm>
-            <a:off x="6144768" y="1847088"/>
-            <a:ext cx="64008" cy="2423160"/>
-          </a:xfrm>
-          <a:prstGeom prst="rect">
-            <a:avLst/>
-          </a:prstGeom>
-          <a:solidFill>
-            <a:srgbClr val="F8BC4A"/>
-          </a:solidFill>
-          <a:ln>
-            <a:noFill/>
-          </a:ln>
-        </p:spPr>
-        <p:style>
-          <a:lnRef idx="1">
-            <a:schemeClr val="accent1"/>
-          </a:lnRef>
-          <a:fillRef idx="3">
-            <a:schemeClr val="accent1"/>
-          </a:fillRef>
-          <a:effectRef idx="2">
-            <a:schemeClr val="accent1"/>
-          </a:effectRef>
-          <a:fontRef idx="minor">
-            <a:schemeClr val="lt1"/>
-          </a:fontRef>
-        </p:style>
-        <p:txBody>
-          <a:bodyPr rtlCol="0" anchor="ctr"/>
-          <a:lstStyle/>
-          <a:p>
-            <a:pPr algn="ctr"/>
-          </a:p>
-        </p:txBody>
-      </p:sp>
-      <p:sp>
-        <p:nvSpPr>
-          <p:cNvPr id="11" name="TextBox 10"/>
-          <p:cNvSpPr txBox="1"/>
-          <p:nvPr/>
-        </p:nvSpPr>
-        <p:spPr>
-          <a:xfrm>
-            <a:off x="6345936" y="1975104"/>
-            <a:ext cx="4846320" cy="347472"/>
-          </a:xfrm>
-          <a:prstGeom prst="rect">
-            <a:avLst/>
-          </a:prstGeom>
-          <a:noFill/>
-        </p:spPr>
-        <p:txBody>
-          <a:bodyPr wrap="square" lIns="18288" rIns="18288" tIns="18288" bIns="18288" anchor="ctr">
-            <a:spAutoFit/>
-          </a:bodyPr>
-          <a:lstStyle/>
-          <a:p>
-            <a:pPr algn="l">
-              <a:defRPr sz="1600" b="1">
-                <a:solidFill>
-                  <a:srgbClr val="112240"/>
-                </a:solidFill>
-                <a:latin typeface="Aptos"/>
-              </a:defRPr>
-            </a:pPr>
-            <a:r>
-              <a:t>Henüz yok / garanti edilmez</a:t>
-            </a:r>
-          </a:p>
-        </p:txBody>
-      </p:sp>
-      <p:sp>
-        <p:nvSpPr>
-          <p:cNvPr id="12" name="TextBox 11"/>
-          <p:cNvSpPr txBox="1"/>
-          <p:nvPr/>
-        </p:nvSpPr>
-        <p:spPr>
-          <a:xfrm>
-            <a:off x="6364224" y="2395728"/>
-            <a:ext cx="4809744" cy="1764792"/>
-          </a:xfrm>
-          <a:prstGeom prst="rect">
-            <a:avLst/>
-          </a:prstGeom>
-          <a:noFill/>
-        </p:spPr>
-        <p:txBody>
-          <a:bodyPr wrap="square" lIns="18288" rIns="18288" tIns="18288" bIns="18288" anchor="ctr">
-            <a:spAutoFit/>
-          </a:bodyPr>
-          <a:lstStyle/>
-          <a:p>
-            <a:pPr algn="l">
-              <a:defRPr sz="1200" b="0">
-                <a:solidFill>
-                  <a:srgbClr val="223045"/>
-                </a:solidFill>
-                <a:latin typeface="Aptos"/>
-              </a:defRPr>
-            </a:pPr>
-            <a:r>
-              <a:t>•  OCR, vektör arama ve belge sürüm takibi</a:t>
-            </a:r>
-            <a:br/>
-            <a:r>
-              <a:t>•  Hukuki doğruluğun otomatik kanıtlanması</a:t>
-            </a:r>
-            <a:br/>
-            <a:r>
-              <a:t>•  Web arayüzü ve devam ettirilebilir işler</a:t>
-            </a:r>
-            <a:br/>
-            <a:r>
-              <a:t>•  Gerçek GitHub PR ile uçtan uca canlı doğrulama</a:t>
-            </a:r>
-          </a:p>
-        </p:txBody>
-      </p:sp>
-      <p:sp>
-        <p:nvSpPr>
-          <p:cNvPr id="13" name="Rounded Rectangle 12"/>
-          <p:cNvSpPr/>
-          <p:nvPr/>
-        </p:nvSpPr>
-        <p:spPr>
-          <a:xfrm>
-            <a:off x="713232" y="4681728"/>
-            <a:ext cx="10661904" cy="749808"/>
-          </a:xfrm>
-          <a:prstGeom prst="roundRect">
-            <a:avLst/>
-          </a:prstGeom>
-          <a:solidFill>
-            <a:srgbClr val="FFF6DF"/>
-          </a:solidFill>
-          <a:ln>
-            <a:noFill/>
-          </a:ln>
-        </p:spPr>
-        <p:style>
-          <a:lnRef idx="1">
-            <a:schemeClr val="accent1"/>
-          </a:lnRef>
-          <a:fillRef idx="3">
-            <a:schemeClr val="accent1"/>
-          </a:fillRef>
-          <a:effectRef idx="2">
-            <a:schemeClr val="accent1"/>
-          </a:effectRef>
-          <a:fontRef idx="minor">
-            <a:schemeClr val="lt1"/>
-          </a:fontRef>
-        </p:style>
-        <p:txBody>
-          <a:bodyPr rtlCol="0" anchor="ctr"/>
-          <a:lstStyle/>
-          <a:p>
-            <a:pPr algn="ctr"/>
-          </a:p>
-        </p:txBody>
-      </p:sp>
-      <p:sp>
-        <p:nvSpPr>
-          <p:cNvPr id="14" name="TextBox 13"/>
-          <p:cNvSpPr txBox="1"/>
-          <p:nvPr/>
-        </p:nvSpPr>
-        <p:spPr>
-          <a:xfrm>
-            <a:off x="914400" y="4837176"/>
-            <a:ext cx="10241280" cy="411480"/>
-          </a:xfrm>
-          <a:prstGeom prst="rect">
-            <a:avLst/>
-          </a:prstGeom>
-          <a:noFill/>
-        </p:spPr>
-        <p:txBody>
-          <a:bodyPr wrap="square" lIns="18288" rIns="18288" tIns="18288" bIns="18288" anchor="ctr">
-            <a:spAutoFit/>
-          </a:bodyPr>
-          <a:lstStyle/>
-          <a:p>
-            <a:pPr algn="ctr">
-              <a:defRPr sz="1100" b="1">
-                <a:solidFill>
-                  <a:srgbClr val="112240"/>
-                </a:solidFill>
-                <a:latin typeface="Aptos"/>
-              </a:defRPr>
-            </a:pPr>
-            <a:r>
-              <a:t>Sonraki adımlar: PDF rubriğini doğrula • gerçek mevzuat örnekleriyle uzman değerlendirmesi yap • gerçek PR akışını yetkili test deposunda dene.</a:t>
-            </a:r>
-          </a:p>
-        </p:txBody>
-      </p:sp>
-      <p:sp>
-        <p:nvSpPr>
-          <p:cNvPr id="15" name="TextBox 14"/>
-          <p:cNvSpPr txBox="1"/>
-          <p:nvPr/>
-        </p:nvSpPr>
-        <p:spPr>
-          <a:xfrm>
-            <a:off x="566928" y="6473952"/>
-            <a:ext cx="9692640" cy="182880"/>
-          </a:xfrm>
-          <a:prstGeom prst="rect">
-            <a:avLst/>
-          </a:prstGeom>
-          <a:noFill/>
-        </p:spPr>
-        <p:txBody>
-          <a:bodyPr wrap="square" lIns="18288" rIns="18288" tIns="18288" bIns="18288" anchor="ctr">
-            <a:spAutoFit/>
-          </a:bodyPr>
-          <a:lstStyle/>
-          <a:p>
-            <a:pPr algn="l">
-              <a:defRPr sz="800" b="1">
-                <a:solidFill>
-                  <a:srgbClr val="637389"/>
-                </a:solidFill>
-                <a:latin typeface="Aptos"/>
-              </a:defRPr>
-            </a:pPr>
-            <a:r>
-              <a:t>MEVZUATAGENT  •  YEREL  •  ONAYLI  •  DENETLENEBİLİR</a:t>
-            </a:r>
-          </a:p>
-        </p:txBody>
-      </p:sp>
-      <p:sp>
-        <p:nvSpPr>
-          <p:cNvPr id="16" name="TextBox 15"/>
-          <p:cNvSpPr txBox="1"/>
-          <p:nvPr/>
-        </p:nvSpPr>
-        <p:spPr>
-          <a:xfrm>
-            <a:off x="11109960" y="6419088"/>
-            <a:ext cx="502920" cy="274320"/>
-          </a:xfrm>
-          <a:prstGeom prst="rect">
-            <a:avLst/>
-          </a:prstGeom>
-          <a:noFill/>
-        </p:spPr>
-        <p:txBody>
-          <a:bodyPr wrap="square" lIns="18288" rIns="18288" tIns="18288" bIns="18288" anchor="ctr">
-            <a:spAutoFit/>
-          </a:bodyPr>
-          <a:lstStyle/>
-          <a:p>
-            <a:pPr algn="r">
-              <a:defRPr sz="1000" b="1">
-                <a:solidFill>
-                  <a:srgbClr val="637389"/>
-                </a:solidFill>
-                <a:latin typeface="Aptos"/>
-              </a:defRPr>
-            </a:pPr>
-            <a:r>
-              <a:t>18</a:t>
-            </a:r>
-          </a:p>
-        </p:txBody>
-      </p:sp>
-    </p:spTree>
-  </p:cSld>
-  <p:clrMapOvr>
-    <a:masterClrMapping/>
-  </p:clrMapOvr>
-</p:sld>
-</file>
-
-<file path=ppt/slides/slide19.xml><?xml version="1.0" encoding="utf-8"?>
-<p:sld xmlns:a="http://schemas.openxmlformats.org/drawingml/2006/main" xmlns:p="http://schemas.openxmlformats.org/presentationml/2006/main" xmlns:r="http://schemas.openxmlformats.org/officeDocument/2006/relationships">
-  <p:cSld>
-    <p:bg>
-      <p:bgPr>
-        <a:solidFill>
-          <a:srgbClr val="F7F9FC"/>
-        </a:solidFill>
-        <a:effectLst/>
-      </p:bgPr>
-    </p:bg>
-    <p:spTree>
-      <p:nvGrpSpPr>
-        <p:cNvPr id="1" name=""/>
-        <p:cNvGrpSpPr/>
-        <p:nvPr/>
-      </p:nvGrpSpPr>
-      <p:grpSpPr/>
-      <p:sp>
-        <p:nvSpPr>
-          <p:cNvPr id="2" name="TextBox 1"/>
-          <p:cNvSpPr txBox="1"/>
-          <p:nvPr/>
-        </p:nvSpPr>
-        <p:spPr>
-          <a:xfrm>
-            <a:off x="640080" y="329184"/>
-            <a:ext cx="10881360" cy="228600"/>
-          </a:xfrm>
-          <a:prstGeom prst="rect">
-            <a:avLst/>
-          </a:prstGeom>
-          <a:noFill/>
-        </p:spPr>
-        <p:txBody>
-          <a:bodyPr wrap="square" lIns="18288" rIns="18288" tIns="18288" bIns="18288" anchor="ctr">
-            <a:spAutoFit/>
-          </a:bodyPr>
-          <a:lstStyle/>
-          <a:p>
-            <a:pPr algn="l">
-              <a:defRPr sz="900" b="1">
-                <a:solidFill>
-                  <a:srgbClr val="00AFA0"/>
-                </a:solidFill>
-                <a:latin typeface="Aptos"/>
-              </a:defRPr>
-            </a:pPr>
-            <a:r>
-              <a:t>18  •  KISA DEMO</a:t>
-            </a:r>
-          </a:p>
-        </p:txBody>
-      </p:sp>
-      <p:sp>
-        <p:nvSpPr>
-          <p:cNvPr id="3" name="TextBox 2"/>
-          <p:cNvSpPr txBox="1"/>
-          <p:nvPr/>
-        </p:nvSpPr>
-        <p:spPr>
-          <a:xfrm>
-            <a:off x="640080" y="658368"/>
-            <a:ext cx="10972800" cy="502920"/>
-          </a:xfrm>
-          <a:prstGeom prst="rect">
-            <a:avLst/>
-          </a:prstGeom>
-          <a:noFill/>
-        </p:spPr>
-        <p:txBody>
-          <a:bodyPr wrap="square" lIns="18288" rIns="18288" tIns="18288" bIns="18288" anchor="ctr">
-            <a:spAutoFit/>
-          </a:bodyPr>
-          <a:lstStyle/>
-          <a:p>
-            <a:pPr algn="l">
-              <a:defRPr sz="2700" b="1">
-                <a:solidFill>
-                  <a:srgbClr val="112240"/>
-                </a:solidFill>
-                <a:latin typeface="Aptos"/>
-              </a:defRPr>
-            </a:pPr>
-            <a:r>
-              <a:t>Uygulamayı sunumda nasıl gösteririm?</a:t>
-            </a:r>
-          </a:p>
-        </p:txBody>
-      </p:sp>
-      <p:sp>
-        <p:nvSpPr>
-          <p:cNvPr id="4" name="TextBox 3"/>
-          <p:cNvSpPr txBox="1"/>
-          <p:nvPr/>
-        </p:nvSpPr>
-        <p:spPr>
-          <a:xfrm>
-            <a:off x="658368" y="1197864"/>
-            <a:ext cx="10881360" cy="420624"/>
-          </a:xfrm>
-          <a:prstGeom prst="rect">
-            <a:avLst/>
-          </a:prstGeom>
-          <a:noFill/>
-        </p:spPr>
-        <p:txBody>
-          <a:bodyPr wrap="square" lIns="18288" rIns="18288" tIns="18288" bIns="18288" anchor="ctr">
-            <a:spAutoFit/>
-          </a:bodyPr>
-          <a:lstStyle/>
-          <a:p>
-            <a:pPr algn="l">
-              <a:defRPr sz="1300" b="0">
-                <a:solidFill>
-                  <a:srgbClr val="637389"/>
-                </a:solidFill>
-                <a:latin typeface="Aptos"/>
-              </a:defRPr>
-            </a:pPr>
-            <a:r>
-              <a:t>Sentetik test deposunda, dış sisteme yan etki oluşturmadan ana akışı sergileyin.</a:t>
-            </a:r>
-          </a:p>
-        </p:txBody>
-      </p:sp>
-      <p:sp>
-        <p:nvSpPr>
-          <p:cNvPr id="5" name="Rounded Rectangle 4"/>
-          <p:cNvSpPr/>
-          <p:nvPr/>
-        </p:nvSpPr>
-        <p:spPr>
-          <a:xfrm>
-            <a:off x="822960" y="1783080"/>
-            <a:ext cx="5074920" cy="987552"/>
-          </a:xfrm>
-          <a:prstGeom prst="roundRect">
-            <a:avLst/>
-          </a:prstGeom>
-          <a:solidFill>
-            <a:srgbClr val="FFFFFF"/>
-          </a:solidFill>
-          <a:ln>
-            <a:noFill/>
-          </a:ln>
-        </p:spPr>
-        <p:style>
-          <a:lnRef idx="1">
-            <a:schemeClr val="accent1"/>
-          </a:lnRef>
-          <a:fillRef idx="3">
-            <a:schemeClr val="accent1"/>
-          </a:fillRef>
-          <a:effectRef idx="2">
-            <a:schemeClr val="accent1"/>
-          </a:effectRef>
-          <a:fontRef idx="minor">
-            <a:schemeClr val="lt1"/>
-          </a:fontRef>
-        </p:style>
-        <p:txBody>
-          <a:bodyPr rtlCol="0" anchor="ctr"/>
-          <a:lstStyle/>
-          <a:p>
-            <a:pPr algn="ctr"/>
-          </a:p>
-        </p:txBody>
-      </p:sp>
-      <p:sp>
-        <p:nvSpPr>
-          <p:cNvPr id="6" name="TextBox 5"/>
-          <p:cNvSpPr txBox="1"/>
-          <p:nvPr/>
-        </p:nvSpPr>
-        <p:spPr>
-          <a:xfrm>
-            <a:off x="978408" y="1984248"/>
-            <a:ext cx="493776" cy="292608"/>
-          </a:xfrm>
-          <a:prstGeom prst="rect">
-            <a:avLst/>
-          </a:prstGeom>
-          <a:noFill/>
-        </p:spPr>
-        <p:txBody>
-          <a:bodyPr wrap="square" lIns="18288" rIns="18288" tIns="18288" bIns="18288" anchor="ctr">
-            <a:spAutoFit/>
-          </a:bodyPr>
-          <a:lstStyle/>
-          <a:p>
-            <a:pPr algn="l">
-              <a:defRPr sz="1300" b="1">
-                <a:solidFill>
-                  <a:srgbClr val="00AFA0"/>
-                </a:solidFill>
-                <a:latin typeface="Aptos"/>
-              </a:defRPr>
-            </a:pPr>
-            <a:r>
-              <a:t>01</a:t>
-            </a:r>
-          </a:p>
-        </p:txBody>
-      </p:sp>
-      <p:sp>
-        <p:nvSpPr>
-          <p:cNvPr id="7" name="TextBox 6"/>
-          <p:cNvSpPr txBox="1"/>
-          <p:nvPr/>
-        </p:nvSpPr>
-        <p:spPr>
-          <a:xfrm>
-            <a:off x="1600200" y="1920240"/>
-            <a:ext cx="4023360" cy="292608"/>
-          </a:xfrm>
-          <a:prstGeom prst="rect">
-            <a:avLst/>
-          </a:prstGeom>
-          <a:noFill/>
-        </p:spPr>
-        <p:txBody>
-          <a:bodyPr wrap="square" lIns="18288" rIns="18288" tIns="18288" bIns="18288" anchor="ctr">
-            <a:spAutoFit/>
-          </a:bodyPr>
-          <a:lstStyle/>
-          <a:p>
-            <a:pPr algn="l">
-              <a:defRPr sz="1400" b="1">
-                <a:solidFill>
-                  <a:srgbClr val="112240"/>
-                </a:solidFill>
-                <a:latin typeface="Aptos"/>
-              </a:defRPr>
-            </a:pPr>
-            <a:r>
-              <a:t>Kurulumu başlat</a:t>
-            </a:r>
-          </a:p>
-        </p:txBody>
-      </p:sp>
-      <p:sp>
-        <p:nvSpPr>
-          <p:cNvPr id="8" name="TextBox 7"/>
-          <p:cNvSpPr txBox="1"/>
-          <p:nvPr/>
-        </p:nvSpPr>
-        <p:spPr>
-          <a:xfrm>
-            <a:off x="1600200" y="2295144"/>
-            <a:ext cx="4023360" cy="274320"/>
-          </a:xfrm>
-          <a:prstGeom prst="rect">
-            <a:avLst/>
-          </a:prstGeom>
-          <a:noFill/>
-        </p:spPr>
-        <p:txBody>
-          <a:bodyPr wrap="square" lIns="18288" rIns="18288" tIns="18288" bIns="18288" anchor="ctr">
-            <a:spAutoFit/>
-          </a:bodyPr>
-          <a:lstStyle/>
-          <a:p>
-            <a:pPr algn="l">
-              <a:defRPr sz="1000" b="0">
-                <a:solidFill>
-                  <a:srgbClr val="637389"/>
-                </a:solidFill>
-                <a:latin typeface="Aptos"/>
-              </a:defRPr>
-            </a:pPr>
-            <a:r>
-              <a:t>Kurulum.command → Python ve paket kontrolü</a:t>
-            </a:r>
-          </a:p>
-        </p:txBody>
-      </p:sp>
-      <p:sp>
-        <p:nvSpPr>
-          <p:cNvPr id="9" name="Rounded Rectangle 8"/>
-          <p:cNvSpPr/>
-          <p:nvPr/>
-        </p:nvSpPr>
-        <p:spPr>
-          <a:xfrm>
-            <a:off x="6309360" y="1783080"/>
-            <a:ext cx="5074920" cy="987552"/>
-          </a:xfrm>
-          <a:prstGeom prst="roundRect">
-            <a:avLst/>
-          </a:prstGeom>
-          <a:solidFill>
-            <a:srgbClr val="FFFFFF"/>
-          </a:solidFill>
-          <a:ln>
-            <a:noFill/>
-          </a:ln>
-        </p:spPr>
-        <p:style>
-          <a:lnRef idx="1">
-            <a:schemeClr val="accent1"/>
-          </a:lnRef>
-          <a:fillRef idx="3">
-            <a:schemeClr val="accent1"/>
-          </a:fillRef>
-          <a:effectRef idx="2">
-            <a:schemeClr val="accent1"/>
-          </a:effectRef>
-          <a:fontRef idx="minor">
-            <a:schemeClr val="lt1"/>
-          </a:fontRef>
-        </p:style>
-        <p:txBody>
-          <a:bodyPr rtlCol="0" anchor="ctr"/>
-          <a:lstStyle/>
-          <a:p>
-            <a:pPr algn="ctr"/>
-          </a:p>
-        </p:txBody>
-      </p:sp>
-      <p:sp>
-        <p:nvSpPr>
-          <p:cNvPr id="10" name="TextBox 9"/>
-          <p:cNvSpPr txBox="1"/>
-          <p:nvPr/>
-        </p:nvSpPr>
-        <p:spPr>
-          <a:xfrm>
-            <a:off x="6464808" y="1984248"/>
-            <a:ext cx="493776" cy="292608"/>
-          </a:xfrm>
-          <a:prstGeom prst="rect">
-            <a:avLst/>
-          </a:prstGeom>
-          <a:noFill/>
-        </p:spPr>
-        <p:txBody>
-          <a:bodyPr wrap="square" lIns="18288" rIns="18288" tIns="18288" bIns="18288" anchor="ctr">
-            <a:spAutoFit/>
-          </a:bodyPr>
-          <a:lstStyle/>
-          <a:p>
-            <a:pPr algn="l">
-              <a:defRPr sz="1300" b="1">
-                <a:solidFill>
-                  <a:srgbClr val="00AFA0"/>
-                </a:solidFill>
-                <a:latin typeface="Aptos"/>
-              </a:defRPr>
-            </a:pPr>
-            <a:r>
-              <a:t>02</a:t>
-            </a:r>
-          </a:p>
-        </p:txBody>
-      </p:sp>
-      <p:sp>
-        <p:nvSpPr>
-          <p:cNvPr id="11" name="TextBox 10"/>
-          <p:cNvSpPr txBox="1"/>
-          <p:nvPr/>
-        </p:nvSpPr>
-        <p:spPr>
-          <a:xfrm>
-            <a:off x="7086600" y="1920240"/>
-            <a:ext cx="4023360" cy="292608"/>
-          </a:xfrm>
-          <a:prstGeom prst="rect">
-            <a:avLst/>
-          </a:prstGeom>
-          <a:noFill/>
-        </p:spPr>
-        <p:txBody>
-          <a:bodyPr wrap="square" lIns="18288" rIns="18288" tIns="18288" bIns="18288" anchor="ctr">
-            <a:spAutoFit/>
-          </a:bodyPr>
-          <a:lstStyle/>
-          <a:p>
-            <a:pPr algn="l">
-              <a:defRPr sz="1400" b="1">
-                <a:solidFill>
-                  <a:srgbClr val="112240"/>
-                </a:solidFill>
-                <a:latin typeface="Aptos"/>
-              </a:defRPr>
-            </a:pPr>
-            <a:r>
-              <a:t>Menüyü aç</a:t>
-            </a:r>
-          </a:p>
-        </p:txBody>
-      </p:sp>
-      <p:sp>
-        <p:nvSpPr>
-          <p:cNvPr id="12" name="TextBox 11"/>
-          <p:cNvSpPr txBox="1"/>
-          <p:nvPr/>
-        </p:nvSpPr>
-        <p:spPr>
-          <a:xfrm>
-            <a:off x="7086600" y="2295144"/>
-            <a:ext cx="4023360" cy="274320"/>
-          </a:xfrm>
-          <a:prstGeom prst="rect">
-            <a:avLst/>
-          </a:prstGeom>
-          <a:noFill/>
-        </p:spPr>
-        <p:txBody>
-          <a:bodyPr wrap="square" lIns="18288" rIns="18288" tIns="18288" bIns="18288" anchor="ctr">
-            <a:spAutoFit/>
-          </a:bodyPr>
-          <a:lstStyle/>
-          <a:p>
-            <a:pPr algn="l">
-              <a:defRPr sz="1000" b="0">
-                <a:solidFill>
-                  <a:srgbClr val="637389"/>
-                </a:solidFill>
-                <a:latin typeface="Aptos"/>
-              </a:defRPr>
-            </a:pPr>
-            <a:r>
-              <a:t>mevzuat-agent → yapılandırma kontrolü</a:t>
-            </a:r>
-          </a:p>
-        </p:txBody>
-      </p:sp>
-      <p:sp>
-        <p:nvSpPr>
-          <p:cNvPr id="13" name="Rounded Rectangle 12"/>
-          <p:cNvSpPr/>
-          <p:nvPr/>
-        </p:nvSpPr>
-        <p:spPr>
-          <a:xfrm>
-            <a:off x="822960" y="3081528"/>
-            <a:ext cx="5074920" cy="987552"/>
-          </a:xfrm>
-          <a:prstGeom prst="roundRect">
-            <a:avLst/>
-          </a:prstGeom>
-          <a:solidFill>
-            <a:srgbClr val="FFFFFF"/>
-          </a:solidFill>
-          <a:ln>
-            <a:noFill/>
-          </a:ln>
-        </p:spPr>
-        <p:style>
-          <a:lnRef idx="1">
-            <a:schemeClr val="accent1"/>
-          </a:lnRef>
-          <a:fillRef idx="3">
-            <a:schemeClr val="accent1"/>
-          </a:fillRef>
-          <a:effectRef idx="2">
-            <a:schemeClr val="accent1"/>
-          </a:effectRef>
-          <a:fontRef idx="minor">
-            <a:schemeClr val="lt1"/>
-          </a:fontRef>
-        </p:style>
-        <p:txBody>
-          <a:bodyPr rtlCol="0" anchor="ctr"/>
-          <a:lstStyle/>
-          <a:p>
-            <a:pPr algn="ctr"/>
-          </a:p>
-        </p:txBody>
-      </p:sp>
-      <p:sp>
-        <p:nvSpPr>
-          <p:cNvPr id="14" name="TextBox 13"/>
-          <p:cNvSpPr txBox="1"/>
-          <p:nvPr/>
-        </p:nvSpPr>
-        <p:spPr>
-          <a:xfrm>
-            <a:off x="978408" y="3282696"/>
-            <a:ext cx="493776" cy="292608"/>
-          </a:xfrm>
-          <a:prstGeom prst="rect">
-            <a:avLst/>
-          </a:prstGeom>
-          <a:noFill/>
-        </p:spPr>
-        <p:txBody>
-          <a:bodyPr wrap="square" lIns="18288" rIns="18288" tIns="18288" bIns="18288" anchor="ctr">
-            <a:spAutoFit/>
-          </a:bodyPr>
-          <a:lstStyle/>
-          <a:p>
-            <a:pPr algn="l">
-              <a:defRPr sz="1300" b="1">
-                <a:solidFill>
-                  <a:srgbClr val="00AFA0"/>
-                </a:solidFill>
-                <a:latin typeface="Aptos"/>
-              </a:defRPr>
-            </a:pPr>
-            <a:r>
-              <a:t>03</a:t>
-            </a:r>
-          </a:p>
-        </p:txBody>
-      </p:sp>
-      <p:sp>
-        <p:nvSpPr>
-          <p:cNvPr id="15" name="TextBox 14"/>
-          <p:cNvSpPr txBox="1"/>
-          <p:nvPr/>
-        </p:nvSpPr>
-        <p:spPr>
-          <a:xfrm>
-            <a:off x="1600200" y="3218688"/>
-            <a:ext cx="4023360" cy="292608"/>
-          </a:xfrm>
-          <a:prstGeom prst="rect">
-            <a:avLst/>
-          </a:prstGeom>
-          <a:noFill/>
-        </p:spPr>
-        <p:txBody>
-          <a:bodyPr wrap="square" lIns="18288" rIns="18288" tIns="18288" bIns="18288" anchor="ctr">
-            <a:spAutoFit/>
-          </a:bodyPr>
-          <a:lstStyle/>
-          <a:p>
-            <a:pPr algn="l">
-              <a:defRPr sz="1400" b="1">
-                <a:solidFill>
-                  <a:srgbClr val="112240"/>
-                </a:solidFill>
-                <a:latin typeface="Aptos"/>
-              </a:defRPr>
-            </a:pPr>
-            <a:r>
-              <a:t>Demo depoyu seç</a:t>
-            </a:r>
-          </a:p>
-        </p:txBody>
-      </p:sp>
-      <p:sp>
-        <p:nvSpPr>
-          <p:cNvPr id="16" name="TextBox 15"/>
-          <p:cNvSpPr txBox="1"/>
-          <p:nvPr/>
-        </p:nvSpPr>
-        <p:spPr>
-          <a:xfrm>
-            <a:off x="1600200" y="3593592"/>
-            <a:ext cx="4023360" cy="274320"/>
-          </a:xfrm>
-          <a:prstGeom prst="rect">
-            <a:avLst/>
-          </a:prstGeom>
-          <a:noFill/>
-        </p:spPr>
-        <p:txBody>
-          <a:bodyPr wrap="square" lIns="18288" rIns="18288" tIns="18288" bIns="18288" anchor="ctr">
-            <a:spAutoFit/>
-          </a:bodyPr>
-          <a:lstStyle/>
-          <a:p>
-            <a:pPr algn="l">
-              <a:defRPr sz="1000" b="0">
-                <a:solidFill>
-                  <a:srgbClr val="637389"/>
-                </a:solidFill>
-                <a:latin typeface="Aptos"/>
-              </a:defRPr>
-            </a:pPr>
-            <a:r>
-              <a:t>Yalnızca test için hazırlanmış sentetik depo</a:t>
-            </a:r>
-          </a:p>
-        </p:txBody>
-      </p:sp>
-      <p:sp>
-        <p:nvSpPr>
-          <p:cNvPr id="17" name="Rounded Rectangle 16"/>
-          <p:cNvSpPr/>
-          <p:nvPr/>
-        </p:nvSpPr>
-        <p:spPr>
-          <a:xfrm>
-            <a:off x="6309360" y="3081528"/>
-            <a:ext cx="5074920" cy="987552"/>
-          </a:xfrm>
-          <a:prstGeom prst="roundRect">
-            <a:avLst/>
-          </a:prstGeom>
-          <a:solidFill>
-            <a:srgbClr val="FFFFFF"/>
-          </a:solidFill>
-          <a:ln>
-            <a:noFill/>
-          </a:ln>
-        </p:spPr>
-        <p:style>
-          <a:lnRef idx="1">
-            <a:schemeClr val="accent1"/>
-          </a:lnRef>
-          <a:fillRef idx="3">
-            <a:schemeClr val="accent1"/>
-          </a:fillRef>
-          <a:effectRef idx="2">
-            <a:schemeClr val="accent1"/>
-          </a:effectRef>
-          <a:fontRef idx="minor">
-            <a:schemeClr val="lt1"/>
-          </a:fontRef>
-        </p:style>
-        <p:txBody>
-          <a:bodyPr rtlCol="0" anchor="ctr"/>
-          <a:lstStyle/>
-          <a:p>
-            <a:pPr algn="ctr"/>
-          </a:p>
-        </p:txBody>
-      </p:sp>
-      <p:sp>
-        <p:nvSpPr>
-          <p:cNvPr id="18" name="TextBox 17"/>
-          <p:cNvSpPr txBox="1"/>
-          <p:nvPr/>
-        </p:nvSpPr>
-        <p:spPr>
-          <a:xfrm>
-            <a:off x="6464808" y="3282696"/>
-            <a:ext cx="493776" cy="292608"/>
-          </a:xfrm>
-          <a:prstGeom prst="rect">
-            <a:avLst/>
-          </a:prstGeom>
-          <a:noFill/>
-        </p:spPr>
-        <p:txBody>
-          <a:bodyPr wrap="square" lIns="18288" rIns="18288" tIns="18288" bIns="18288" anchor="ctr">
-            <a:spAutoFit/>
-          </a:bodyPr>
-          <a:lstStyle/>
-          <a:p>
-            <a:pPr algn="l">
-              <a:defRPr sz="1300" b="1">
-                <a:solidFill>
-                  <a:srgbClr val="00AFA0"/>
-                </a:solidFill>
-                <a:latin typeface="Aptos"/>
-              </a:defRPr>
-            </a:pPr>
-            <a:r>
-              <a:t>04</a:t>
-            </a:r>
-          </a:p>
-        </p:txBody>
-      </p:sp>
-      <p:sp>
-        <p:nvSpPr>
-          <p:cNvPr id="19" name="TextBox 18"/>
-          <p:cNvSpPr txBox="1"/>
-          <p:nvPr/>
-        </p:nvSpPr>
-        <p:spPr>
-          <a:xfrm>
-            <a:off x="7086600" y="3218688"/>
-            <a:ext cx="4023360" cy="292608"/>
-          </a:xfrm>
-          <a:prstGeom prst="rect">
-            <a:avLst/>
-          </a:prstGeom>
-          <a:noFill/>
-        </p:spPr>
-        <p:txBody>
-          <a:bodyPr wrap="square" lIns="18288" rIns="18288" tIns="18288" bIns="18288" anchor="ctr">
-            <a:spAutoFit/>
-          </a:bodyPr>
-          <a:lstStyle/>
-          <a:p>
-            <a:pPr algn="l">
-              <a:defRPr sz="1400" b="1">
-                <a:solidFill>
-                  <a:srgbClr val="112240"/>
-                </a:solidFill>
-                <a:latin typeface="Aptos"/>
-              </a:defRPr>
-            </a:pPr>
-            <a:r>
-              <a:t>Tahmini gör</a:t>
-            </a:r>
-          </a:p>
-        </p:txBody>
-      </p:sp>
-      <p:sp>
-        <p:nvSpPr>
-          <p:cNvPr id="20" name="TextBox 19"/>
-          <p:cNvSpPr txBox="1"/>
-          <p:nvPr/>
-        </p:nvSpPr>
-        <p:spPr>
-          <a:xfrm>
-            <a:off x="7086600" y="3593592"/>
-            <a:ext cx="4023360" cy="274320"/>
-          </a:xfrm>
-          <a:prstGeom prst="rect">
-            <a:avLst/>
-          </a:prstGeom>
-          <a:noFill/>
-        </p:spPr>
-        <p:txBody>
-          <a:bodyPr wrap="square" lIns="18288" rIns="18288" tIns="18288" bIns="18288" anchor="ctr">
-            <a:spAutoFit/>
-          </a:bodyPr>
-          <a:lstStyle/>
-          <a:p>
-            <a:pPr algn="l">
-              <a:defRPr sz="1000" b="0">
-                <a:solidFill>
-                  <a:srgbClr val="637389"/>
-                </a:solidFill>
-                <a:latin typeface="Aptos"/>
-              </a:defRPr>
-            </a:pPr>
-            <a:r>
-              <a:t>Kurulu Ollama modelleri ve süreler</a:t>
-            </a:r>
-          </a:p>
-        </p:txBody>
-      </p:sp>
-      <p:sp>
-        <p:nvSpPr>
-          <p:cNvPr id="21" name="Rounded Rectangle 20"/>
-          <p:cNvSpPr/>
-          <p:nvPr/>
-        </p:nvSpPr>
-        <p:spPr>
-          <a:xfrm>
-            <a:off x="822960" y="4379976"/>
-            <a:ext cx="5074920" cy="987552"/>
-          </a:xfrm>
-          <a:prstGeom prst="roundRect">
-            <a:avLst/>
-          </a:prstGeom>
-          <a:solidFill>
-            <a:srgbClr val="FFFFFF"/>
-          </a:solidFill>
-          <a:ln>
-            <a:noFill/>
-          </a:ln>
-        </p:spPr>
-        <p:style>
-          <a:lnRef idx="1">
-            <a:schemeClr val="accent1"/>
-          </a:lnRef>
-          <a:fillRef idx="3">
-            <a:schemeClr val="accent1"/>
-          </a:fillRef>
-          <a:effectRef idx="2">
-            <a:schemeClr val="accent1"/>
-          </a:effectRef>
-          <a:fontRef idx="minor">
-            <a:schemeClr val="lt1"/>
-          </a:fontRef>
-        </p:style>
-        <p:txBody>
-          <a:bodyPr rtlCol="0" anchor="ctr"/>
-          <a:lstStyle/>
-          <a:p>
-            <a:pPr algn="ctr"/>
-          </a:p>
-        </p:txBody>
-      </p:sp>
-      <p:sp>
-        <p:nvSpPr>
-          <p:cNvPr id="22" name="TextBox 21"/>
-          <p:cNvSpPr txBox="1"/>
-          <p:nvPr/>
-        </p:nvSpPr>
-        <p:spPr>
-          <a:xfrm>
-            <a:off x="978408" y="4581144"/>
-            <a:ext cx="493776" cy="292608"/>
-          </a:xfrm>
-          <a:prstGeom prst="rect">
-            <a:avLst/>
-          </a:prstGeom>
-          <a:noFill/>
-        </p:spPr>
-        <p:txBody>
-          <a:bodyPr wrap="square" lIns="18288" rIns="18288" tIns="18288" bIns="18288" anchor="ctr">
-            <a:spAutoFit/>
-          </a:bodyPr>
-          <a:lstStyle/>
-          <a:p>
-            <a:pPr algn="l">
-              <a:defRPr sz="1300" b="1">
-                <a:solidFill>
-                  <a:srgbClr val="00AFA0"/>
-                </a:solidFill>
-                <a:latin typeface="Aptos"/>
-              </a:defRPr>
-            </a:pPr>
-            <a:r>
-              <a:t>05</a:t>
-            </a:r>
-          </a:p>
-        </p:txBody>
-      </p:sp>
-      <p:sp>
-        <p:nvSpPr>
-          <p:cNvPr id="23" name="TextBox 22"/>
-          <p:cNvSpPr txBox="1"/>
-          <p:nvPr/>
-        </p:nvSpPr>
-        <p:spPr>
-          <a:xfrm>
-            <a:off x="1600200" y="4517136"/>
-            <a:ext cx="4023360" cy="292608"/>
-          </a:xfrm>
-          <a:prstGeom prst="rect">
-            <a:avLst/>
-          </a:prstGeom>
-          <a:noFill/>
-        </p:spPr>
-        <p:txBody>
-          <a:bodyPr wrap="square" lIns="18288" rIns="18288" tIns="18288" bIns="18288" anchor="ctr">
-            <a:spAutoFit/>
-          </a:bodyPr>
-          <a:lstStyle/>
-          <a:p>
-            <a:pPr algn="l">
-              <a:defRPr sz="1400" b="1">
-                <a:solidFill>
-                  <a:srgbClr val="112240"/>
-                </a:solidFill>
-                <a:latin typeface="Aptos"/>
-              </a:defRPr>
-            </a:pPr>
-            <a:r>
-              <a:t>Raporu incele</a:t>
-            </a:r>
-          </a:p>
-        </p:txBody>
-      </p:sp>
-      <p:sp>
-        <p:nvSpPr>
-          <p:cNvPr id="24" name="TextBox 23"/>
-          <p:cNvSpPr txBox="1"/>
-          <p:nvPr/>
-        </p:nvSpPr>
-        <p:spPr>
-          <a:xfrm>
-            <a:off x="1600200" y="4892040"/>
-            <a:ext cx="4023360" cy="274320"/>
-          </a:xfrm>
-          <a:prstGeom prst="rect">
-            <a:avLst/>
-          </a:prstGeom>
-          <a:noFill/>
-        </p:spPr>
-        <p:txBody>
-          <a:bodyPr wrap="square" lIns="18288" rIns="18288" tIns="18288" bIns="18288" anchor="ctr">
-            <a:spAutoFit/>
-          </a:bodyPr>
-          <a:lstStyle/>
-          <a:p>
-            <a:pPr algn="l">
-              <a:defRPr sz="1000" b="0">
-                <a:solidFill>
-                  <a:srgbClr val="637389"/>
-                </a:solidFill>
-                <a:latin typeface="Aptos"/>
-              </a:defRPr>
-            </a:pPr>
-            <a:r>
-              <a:t>Kaynak/kanıt ve tarama kapsamı</a:t>
-            </a:r>
-          </a:p>
-        </p:txBody>
-      </p:sp>
-      <p:sp>
-        <p:nvSpPr>
-          <p:cNvPr id="25" name="Rounded Rectangle 24"/>
-          <p:cNvSpPr/>
-          <p:nvPr/>
-        </p:nvSpPr>
-        <p:spPr>
-          <a:xfrm>
-            <a:off x="6309360" y="4379976"/>
-            <a:ext cx="5074920" cy="987552"/>
-          </a:xfrm>
-          <a:prstGeom prst="roundRect">
-            <a:avLst/>
-          </a:prstGeom>
-          <a:solidFill>
-            <a:srgbClr val="FFFFFF"/>
-          </a:solidFill>
-          <a:ln>
-            <a:noFill/>
-          </a:ln>
-        </p:spPr>
-        <p:style>
-          <a:lnRef idx="1">
-            <a:schemeClr val="accent1"/>
-          </a:lnRef>
-          <a:fillRef idx="3">
-            <a:schemeClr val="accent1"/>
-          </a:fillRef>
-          <a:effectRef idx="2">
-            <a:schemeClr val="accent1"/>
-          </a:effectRef>
-          <a:fontRef idx="minor">
-            <a:schemeClr val="lt1"/>
-          </a:fontRef>
-        </p:style>
-        <p:txBody>
-          <a:bodyPr rtlCol="0" anchor="ctr"/>
-          <a:lstStyle/>
-          <a:p>
-            <a:pPr algn="ctr"/>
-          </a:p>
-        </p:txBody>
-      </p:sp>
-      <p:sp>
-        <p:nvSpPr>
-          <p:cNvPr id="26" name="TextBox 25"/>
-          <p:cNvSpPr txBox="1"/>
-          <p:nvPr/>
-        </p:nvSpPr>
-        <p:spPr>
-          <a:xfrm>
-            <a:off x="6464808" y="4581144"/>
-            <a:ext cx="493776" cy="292608"/>
-          </a:xfrm>
-          <a:prstGeom prst="rect">
-            <a:avLst/>
-          </a:prstGeom>
-          <a:noFill/>
-        </p:spPr>
-        <p:txBody>
-          <a:bodyPr wrap="square" lIns="18288" rIns="18288" tIns="18288" bIns="18288" anchor="ctr">
-            <a:spAutoFit/>
-          </a:bodyPr>
-          <a:lstStyle/>
-          <a:p>
-            <a:pPr algn="l">
-              <a:defRPr sz="1300" b="1">
-                <a:solidFill>
-                  <a:srgbClr val="00AFA0"/>
-                </a:solidFill>
-                <a:latin typeface="Aptos"/>
-              </a:defRPr>
-            </a:pPr>
-            <a:r>
-              <a:t>06</a:t>
-            </a:r>
-          </a:p>
-        </p:txBody>
-      </p:sp>
-      <p:sp>
-        <p:nvSpPr>
-          <p:cNvPr id="27" name="TextBox 26"/>
-          <p:cNvSpPr txBox="1"/>
-          <p:nvPr/>
-        </p:nvSpPr>
-        <p:spPr>
-          <a:xfrm>
-            <a:off x="7086600" y="4517136"/>
-            <a:ext cx="4023360" cy="292608"/>
-          </a:xfrm>
-          <a:prstGeom prst="rect">
-            <a:avLst/>
-          </a:prstGeom>
-          <a:noFill/>
-        </p:spPr>
-        <p:txBody>
-          <a:bodyPr wrap="square" lIns="18288" rIns="18288" tIns="18288" bIns="18288" anchor="ctr">
-            <a:spAutoFit/>
-          </a:bodyPr>
-          <a:lstStyle/>
-          <a:p>
-            <a:pPr algn="l">
-              <a:defRPr sz="1400" b="1">
-                <a:solidFill>
-                  <a:srgbClr val="112240"/>
-                </a:solidFill>
-                <a:latin typeface="Aptos"/>
-              </a:defRPr>
-            </a:pPr>
-            <a:r>
-              <a:t>Düzeltmeyi göster</a:t>
-            </a:r>
-          </a:p>
-        </p:txBody>
-      </p:sp>
-      <p:sp>
-        <p:nvSpPr>
-          <p:cNvPr id="28" name="TextBox 27"/>
-          <p:cNvSpPr txBox="1"/>
-          <p:nvPr/>
-        </p:nvSpPr>
-        <p:spPr>
-          <a:xfrm>
-            <a:off x="7086600" y="4892040"/>
-            <a:ext cx="4023360" cy="274320"/>
-          </a:xfrm>
-          <a:prstGeom prst="rect">
-            <a:avLst/>
-          </a:prstGeom>
-          <a:noFill/>
-        </p:spPr>
-        <p:txBody>
-          <a:bodyPr wrap="square" lIns="18288" rIns="18288" tIns="18288" bIns="18288" anchor="ctr">
-            <a:spAutoFit/>
-          </a:bodyPr>
-          <a:lstStyle/>
-          <a:p>
-            <a:pPr algn="l">
-              <a:defRPr sz="1000" b="0">
-                <a:solidFill>
-                  <a:srgbClr val="637389"/>
-                </a:solidFill>
-                <a:latin typeface="Aptos"/>
-              </a:defRPr>
-            </a:pPr>
-            <a:r>
-              <a:t>İzole dal ve diff; PR onayı verme</a:t>
-            </a:r>
-          </a:p>
-        </p:txBody>
-      </p:sp>
-      <p:sp>
-        <p:nvSpPr>
-          <p:cNvPr id="29" name="TextBox 28"/>
-          <p:cNvSpPr txBox="1"/>
-          <p:nvPr/>
-        </p:nvSpPr>
-        <p:spPr>
-          <a:xfrm>
-            <a:off x="566928" y="6473952"/>
-            <a:ext cx="9692640" cy="182880"/>
-          </a:xfrm>
-          <a:prstGeom prst="rect">
-            <a:avLst/>
-          </a:prstGeom>
-          <a:noFill/>
-        </p:spPr>
-        <p:txBody>
-          <a:bodyPr wrap="square" lIns="18288" rIns="18288" tIns="18288" bIns="18288" anchor="ctr">
-            <a:spAutoFit/>
-          </a:bodyPr>
-          <a:lstStyle/>
-          <a:p>
-            <a:pPr algn="l">
-              <a:defRPr sz="800" b="1">
-                <a:solidFill>
-                  <a:srgbClr val="637389"/>
-                </a:solidFill>
-                <a:latin typeface="Aptos"/>
-              </a:defRPr>
-            </a:pPr>
-            <a:r>
-              <a:t>MEVZUATAGENT  •  YEREL  •  ONAYLI  •  DENETLENEBİLİR</a:t>
-            </a:r>
-          </a:p>
-        </p:txBody>
-      </p:sp>
-      <p:sp>
-        <p:nvSpPr>
-          <p:cNvPr id="30" name="TextBox 29"/>
-          <p:cNvSpPr txBox="1"/>
-          <p:nvPr/>
-        </p:nvSpPr>
-        <p:spPr>
-          <a:xfrm>
-            <a:off x="11109960" y="6419088"/>
-            <a:ext cx="502920" cy="274320"/>
-          </a:xfrm>
-          <a:prstGeom prst="rect">
-            <a:avLst/>
-          </a:prstGeom>
-          <a:noFill/>
-        </p:spPr>
-        <p:txBody>
-          <a:bodyPr wrap="square" lIns="18288" rIns="18288" tIns="18288" bIns="18288" anchor="ctr">
-            <a:spAutoFit/>
-          </a:bodyPr>
-          <a:lstStyle/>
-          <a:p>
-            <a:pPr algn="r">
-              <a:defRPr sz="1000" b="1">
-                <a:solidFill>
-                  <a:srgbClr val="637389"/>
-                </a:solidFill>
-                <a:latin typeface="Aptos"/>
-              </a:defRPr>
-            </a:pPr>
-            <a:r>
               <a:t>19</a:t>
             </a:r>
           </a:p>
@@ -14237,6 +14236,1743 @@
     <p:bg>
       <p:bgPr>
         <a:solidFill>
+          <a:srgbClr val="F7F9FC"/>
+        </a:solidFill>
+        <a:effectLst/>
+      </p:bgPr>
+    </p:bg>
+    <p:spTree>
+      <p:nvGrpSpPr>
+        <p:cNvPr id="1" name=""/>
+        <p:cNvGrpSpPr/>
+        <p:nvPr/>
+      </p:nvGrpSpPr>
+      <p:grpSpPr/>
+      <p:sp>
+        <p:nvSpPr>
+          <p:cNvPr id="2" name="TextBox 1"/>
+          <p:cNvSpPr txBox="1"/>
+          <p:nvPr/>
+        </p:nvSpPr>
+        <p:spPr>
+          <a:xfrm>
+            <a:off x="640080" y="329184"/>
+            <a:ext cx="10881360" cy="228600"/>
+          </a:xfrm>
+          <a:prstGeom prst="rect">
+            <a:avLst/>
+          </a:prstGeom>
+          <a:noFill/>
+        </p:spPr>
+        <p:txBody>
+          <a:bodyPr wrap="square" lIns="18288" rIns="18288" tIns="18288" bIns="18288" anchor="ctr">
+            <a:spAutoFit/>
+          </a:bodyPr>
+          <a:lstStyle/>
+          <a:p>
+            <a:pPr algn="l">
+              <a:defRPr sz="900" b="1">
+                <a:solidFill>
+                  <a:srgbClr val="00AFA0"/>
+                </a:solidFill>
+                <a:latin typeface="Aptos"/>
+              </a:defRPr>
+            </a:pPr>
+            <a:r>
+              <a:t>17  •  BILINEN SINIRLAMALAR</a:t>
+            </a:r>
+          </a:p>
+        </p:txBody>
+      </p:sp>
+      <p:sp>
+        <p:nvSpPr>
+          <p:cNvPr id="3" name="TextBox 2"/>
+          <p:cNvSpPr txBox="1"/>
+          <p:nvPr/>
+        </p:nvSpPr>
+        <p:spPr>
+          <a:xfrm>
+            <a:off x="640080" y="658368"/>
+            <a:ext cx="10972800" cy="502920"/>
+          </a:xfrm>
+          <a:prstGeom prst="rect">
+            <a:avLst/>
+          </a:prstGeom>
+          <a:noFill/>
+        </p:spPr>
+        <p:txBody>
+          <a:bodyPr wrap="square" lIns="18288" rIns="18288" tIns="18288" bIns="18288" anchor="ctr">
+            <a:spAutoFit/>
+          </a:bodyPr>
+          <a:lstStyle/>
+          <a:p>
+            <a:pPr algn="l">
+              <a:defRPr sz="2700" b="1">
+                <a:solidFill>
+                  <a:srgbClr val="112240"/>
+                </a:solidFill>
+                <a:latin typeface="Aptos"/>
+              </a:defRPr>
+            </a:pPr>
+            <a:r>
+              <a:t>Tamamlanan iş ve sonraki geliştirme alanları</a:t>
+            </a:r>
+          </a:p>
+        </p:txBody>
+      </p:sp>
+      <p:sp>
+        <p:nvSpPr>
+          <p:cNvPr id="4" name="TextBox 3"/>
+          <p:cNvSpPr txBox="1"/>
+          <p:nvPr/>
+        </p:nvSpPr>
+        <p:spPr>
+          <a:xfrm>
+            <a:off x="658368" y="1197864"/>
+            <a:ext cx="10881360" cy="420624"/>
+          </a:xfrm>
+          <a:prstGeom prst="rect">
+            <a:avLst/>
+          </a:prstGeom>
+          <a:noFill/>
+        </p:spPr>
+        <p:txBody>
+          <a:bodyPr wrap="square" lIns="18288" rIns="18288" tIns="18288" bIns="18288" anchor="ctr">
+            <a:spAutoFit/>
+          </a:bodyPr>
+          <a:lstStyle/>
+          <a:p>
+            <a:pPr algn="l">
+              <a:defRPr sz="1300" b="0">
+                <a:solidFill>
+                  <a:srgbClr val="637389"/>
+                </a:solidFill>
+                <a:latin typeface="Aptos"/>
+              </a:defRPr>
+            </a:pPr>
+            <a:r>
+              <a:t>Kapsamı dürüstçe ayırmak, model çıktısına gereğinden fazla güvenilmesini önler.</a:t>
+            </a:r>
+          </a:p>
+        </p:txBody>
+      </p:sp>
+      <p:sp>
+        <p:nvSpPr>
+          <p:cNvPr id="5" name="Rounded Rectangle 4"/>
+          <p:cNvSpPr/>
+          <p:nvPr/>
+        </p:nvSpPr>
+        <p:spPr>
+          <a:xfrm>
+            <a:off x="713232" y="1847088"/>
+            <a:ext cx="5230368" cy="2423160"/>
+          </a:xfrm>
+          <a:prstGeom prst="roundRect">
+            <a:avLst/>
+          </a:prstGeom>
+          <a:solidFill>
+            <a:srgbClr val="FFFFFF"/>
+          </a:solidFill>
+          <a:ln>
+            <a:noFill/>
+          </a:ln>
+        </p:spPr>
+        <p:style>
+          <a:lnRef idx="1">
+            <a:schemeClr val="accent1"/>
+          </a:lnRef>
+          <a:fillRef idx="3">
+            <a:schemeClr val="accent1"/>
+          </a:fillRef>
+          <a:effectRef idx="2">
+            <a:schemeClr val="accent1"/>
+          </a:effectRef>
+          <a:fontRef idx="minor">
+            <a:schemeClr val="lt1"/>
+          </a:fontRef>
+        </p:style>
+        <p:txBody>
+          <a:bodyPr rtlCol="0" anchor="ctr"/>
+          <a:lstStyle/>
+          <a:p>
+            <a:pPr algn="ctr"/>
+          </a:p>
+        </p:txBody>
+      </p:sp>
+      <p:sp>
+        <p:nvSpPr>
+          <p:cNvPr id="6" name="Rectangle 5"/>
+          <p:cNvSpPr/>
+          <p:nvPr/>
+        </p:nvSpPr>
+        <p:spPr>
+          <a:xfrm>
+            <a:off x="713232" y="1847088"/>
+            <a:ext cx="64008" cy="2423160"/>
+          </a:xfrm>
+          <a:prstGeom prst="rect">
+            <a:avLst/>
+          </a:prstGeom>
+          <a:solidFill>
+            <a:srgbClr val="00AFA0"/>
+          </a:solidFill>
+          <a:ln>
+            <a:noFill/>
+          </a:ln>
+        </p:spPr>
+        <p:style>
+          <a:lnRef idx="1">
+            <a:schemeClr val="accent1"/>
+          </a:lnRef>
+          <a:fillRef idx="3">
+            <a:schemeClr val="accent1"/>
+          </a:fillRef>
+          <a:effectRef idx="2">
+            <a:schemeClr val="accent1"/>
+          </a:effectRef>
+          <a:fontRef idx="minor">
+            <a:schemeClr val="lt1"/>
+          </a:fontRef>
+        </p:style>
+        <p:txBody>
+          <a:bodyPr rtlCol="0" anchor="ctr"/>
+          <a:lstStyle/>
+          <a:p>
+            <a:pPr algn="ctr"/>
+          </a:p>
+        </p:txBody>
+      </p:sp>
+      <p:sp>
+        <p:nvSpPr>
+          <p:cNvPr id="7" name="TextBox 6"/>
+          <p:cNvSpPr txBox="1"/>
+          <p:nvPr/>
+        </p:nvSpPr>
+        <p:spPr>
+          <a:xfrm>
+            <a:off x="914400" y="1975104"/>
+            <a:ext cx="4846320" cy="347472"/>
+          </a:xfrm>
+          <a:prstGeom prst="rect">
+            <a:avLst/>
+          </a:prstGeom>
+          <a:noFill/>
+        </p:spPr>
+        <p:txBody>
+          <a:bodyPr wrap="square" lIns="18288" rIns="18288" tIns="18288" bIns="18288" anchor="ctr">
+            <a:spAutoFit/>
+          </a:bodyPr>
+          <a:lstStyle/>
+          <a:p>
+            <a:pPr algn="l">
+              <a:defRPr sz="1600" b="1">
+                <a:solidFill>
+                  <a:srgbClr val="112240"/>
+                </a:solidFill>
+                <a:latin typeface="Aptos"/>
+              </a:defRPr>
+            </a:pPr>
+            <a:r>
+              <a:t>Uygulanan</a:t>
+            </a:r>
+          </a:p>
+        </p:txBody>
+      </p:sp>
+      <p:sp>
+        <p:nvSpPr>
+          <p:cNvPr id="8" name="TextBox 7"/>
+          <p:cNvSpPr txBox="1"/>
+          <p:nvPr/>
+        </p:nvSpPr>
+        <p:spPr>
+          <a:xfrm>
+            <a:off x="932688" y="2395728"/>
+            <a:ext cx="4809744" cy="1764792"/>
+          </a:xfrm>
+          <a:prstGeom prst="rect">
+            <a:avLst/>
+          </a:prstGeom>
+          <a:noFill/>
+        </p:spPr>
+        <p:txBody>
+          <a:bodyPr wrap="square" lIns="18288" rIns="18288" tIns="18288" bIns="18288" anchor="ctr">
+            <a:spAutoFit/>
+          </a:bodyPr>
+          <a:lstStyle/>
+          <a:p>
+            <a:pPr algn="l">
+              <a:defRPr sz="1200" b="0">
+                <a:solidFill>
+                  <a:srgbClr val="223045"/>
+                </a:solidFill>
+                <a:latin typeface="Aptos"/>
+              </a:defRPr>
+            </a:pPr>
+            <a:r>
+              <a:t>•  PDF indirme ve sayfa metnini parçalama</a:t>
+            </a:r>
+            <a:br/>
+            <a:r>
+              <a:t>•  BM25 ile yerel mevzuat araması</a:t>
+            </a:r>
+            <a:br/>
+            <a:r>
+              <a:t>•  Onaylı tarama ve MD/HTML rapor</a:t>
+            </a:r>
+            <a:br/>
+            <a:r>
+              <a:t>•  İzole düzeltme, test ve PR akışları</a:t>
+            </a:r>
+          </a:p>
+        </p:txBody>
+      </p:sp>
+      <p:sp>
+        <p:nvSpPr>
+          <p:cNvPr id="9" name="Rounded Rectangle 8"/>
+          <p:cNvSpPr/>
+          <p:nvPr/>
+        </p:nvSpPr>
+        <p:spPr>
+          <a:xfrm>
+            <a:off x="6144768" y="1847088"/>
+            <a:ext cx="5230368" cy="2423160"/>
+          </a:xfrm>
+          <a:prstGeom prst="roundRect">
+            <a:avLst/>
+          </a:prstGeom>
+          <a:solidFill>
+            <a:srgbClr val="FFFFFF"/>
+          </a:solidFill>
+          <a:ln>
+            <a:noFill/>
+          </a:ln>
+        </p:spPr>
+        <p:style>
+          <a:lnRef idx="1">
+            <a:schemeClr val="accent1"/>
+          </a:lnRef>
+          <a:fillRef idx="3">
+            <a:schemeClr val="accent1"/>
+          </a:fillRef>
+          <a:effectRef idx="2">
+            <a:schemeClr val="accent1"/>
+          </a:effectRef>
+          <a:fontRef idx="minor">
+            <a:schemeClr val="lt1"/>
+          </a:fontRef>
+        </p:style>
+        <p:txBody>
+          <a:bodyPr rtlCol="0" anchor="ctr"/>
+          <a:lstStyle/>
+          <a:p>
+            <a:pPr algn="ctr"/>
+          </a:p>
+        </p:txBody>
+      </p:sp>
+      <p:sp>
+        <p:nvSpPr>
+          <p:cNvPr id="10" name="Rectangle 9"/>
+          <p:cNvSpPr/>
+          <p:nvPr/>
+        </p:nvSpPr>
+        <p:spPr>
+          <a:xfrm>
+            <a:off x="6144768" y="1847088"/>
+            <a:ext cx="64008" cy="2423160"/>
+          </a:xfrm>
+          <a:prstGeom prst="rect">
+            <a:avLst/>
+          </a:prstGeom>
+          <a:solidFill>
+            <a:srgbClr val="F8BC4A"/>
+          </a:solidFill>
+          <a:ln>
+            <a:noFill/>
+          </a:ln>
+        </p:spPr>
+        <p:style>
+          <a:lnRef idx="1">
+            <a:schemeClr val="accent1"/>
+          </a:lnRef>
+          <a:fillRef idx="3">
+            <a:schemeClr val="accent1"/>
+          </a:fillRef>
+          <a:effectRef idx="2">
+            <a:schemeClr val="accent1"/>
+          </a:effectRef>
+          <a:fontRef idx="minor">
+            <a:schemeClr val="lt1"/>
+          </a:fontRef>
+        </p:style>
+        <p:txBody>
+          <a:bodyPr rtlCol="0" anchor="ctr"/>
+          <a:lstStyle/>
+          <a:p>
+            <a:pPr algn="ctr"/>
+          </a:p>
+        </p:txBody>
+      </p:sp>
+      <p:sp>
+        <p:nvSpPr>
+          <p:cNvPr id="11" name="TextBox 10"/>
+          <p:cNvSpPr txBox="1"/>
+          <p:nvPr/>
+        </p:nvSpPr>
+        <p:spPr>
+          <a:xfrm>
+            <a:off x="6345936" y="1975104"/>
+            <a:ext cx="4846320" cy="347472"/>
+          </a:xfrm>
+          <a:prstGeom prst="rect">
+            <a:avLst/>
+          </a:prstGeom>
+          <a:noFill/>
+        </p:spPr>
+        <p:txBody>
+          <a:bodyPr wrap="square" lIns="18288" rIns="18288" tIns="18288" bIns="18288" anchor="ctr">
+            <a:spAutoFit/>
+          </a:bodyPr>
+          <a:lstStyle/>
+          <a:p>
+            <a:pPr algn="l">
+              <a:defRPr sz="1600" b="1">
+                <a:solidFill>
+                  <a:srgbClr val="112240"/>
+                </a:solidFill>
+                <a:latin typeface="Aptos"/>
+              </a:defRPr>
+            </a:pPr>
+            <a:r>
+              <a:t>Henüz yok / garanti edilmez</a:t>
+            </a:r>
+          </a:p>
+        </p:txBody>
+      </p:sp>
+      <p:sp>
+        <p:nvSpPr>
+          <p:cNvPr id="12" name="TextBox 11"/>
+          <p:cNvSpPr txBox="1"/>
+          <p:nvPr/>
+        </p:nvSpPr>
+        <p:spPr>
+          <a:xfrm>
+            <a:off x="6364224" y="2395728"/>
+            <a:ext cx="4809744" cy="1764792"/>
+          </a:xfrm>
+          <a:prstGeom prst="rect">
+            <a:avLst/>
+          </a:prstGeom>
+          <a:noFill/>
+        </p:spPr>
+        <p:txBody>
+          <a:bodyPr wrap="square" lIns="18288" rIns="18288" tIns="18288" bIns="18288" anchor="ctr">
+            <a:spAutoFit/>
+          </a:bodyPr>
+          <a:lstStyle/>
+          <a:p>
+            <a:pPr algn="l">
+              <a:defRPr sz="1200" b="0">
+                <a:solidFill>
+                  <a:srgbClr val="223045"/>
+                </a:solidFill>
+                <a:latin typeface="Aptos"/>
+              </a:defRPr>
+            </a:pPr>
+            <a:r>
+              <a:t>•  OCR, vektör arama ve belge sürüm takibi</a:t>
+            </a:r>
+            <a:br/>
+            <a:r>
+              <a:t>•  Hukuki doğruluğun otomatik kanıtlanması</a:t>
+            </a:r>
+            <a:br/>
+            <a:r>
+              <a:t>•  Web arayüzü ve devam ettirilebilir işler</a:t>
+            </a:r>
+            <a:br/>
+            <a:r>
+              <a:t>•  Gerçek GitHub PR ile uçtan uca canlı doğrulama</a:t>
+            </a:r>
+          </a:p>
+        </p:txBody>
+      </p:sp>
+      <p:sp>
+        <p:nvSpPr>
+          <p:cNvPr id="13" name="Rounded Rectangle 12"/>
+          <p:cNvSpPr/>
+          <p:nvPr/>
+        </p:nvSpPr>
+        <p:spPr>
+          <a:xfrm>
+            <a:off x="713232" y="4681728"/>
+            <a:ext cx="10661904" cy="749808"/>
+          </a:xfrm>
+          <a:prstGeom prst="roundRect">
+            <a:avLst/>
+          </a:prstGeom>
+          <a:solidFill>
+            <a:srgbClr val="FFF6DF"/>
+          </a:solidFill>
+          <a:ln>
+            <a:noFill/>
+          </a:ln>
+        </p:spPr>
+        <p:style>
+          <a:lnRef idx="1">
+            <a:schemeClr val="accent1"/>
+          </a:lnRef>
+          <a:fillRef idx="3">
+            <a:schemeClr val="accent1"/>
+          </a:fillRef>
+          <a:effectRef idx="2">
+            <a:schemeClr val="accent1"/>
+          </a:effectRef>
+          <a:fontRef idx="minor">
+            <a:schemeClr val="lt1"/>
+          </a:fontRef>
+        </p:style>
+        <p:txBody>
+          <a:bodyPr rtlCol="0" anchor="ctr"/>
+          <a:lstStyle/>
+          <a:p>
+            <a:pPr algn="ctr"/>
+          </a:p>
+        </p:txBody>
+      </p:sp>
+      <p:sp>
+        <p:nvSpPr>
+          <p:cNvPr id="14" name="TextBox 13"/>
+          <p:cNvSpPr txBox="1"/>
+          <p:nvPr/>
+        </p:nvSpPr>
+        <p:spPr>
+          <a:xfrm>
+            <a:off x="914400" y="4837176"/>
+            <a:ext cx="10241280" cy="411480"/>
+          </a:xfrm>
+          <a:prstGeom prst="rect">
+            <a:avLst/>
+          </a:prstGeom>
+          <a:noFill/>
+        </p:spPr>
+        <p:txBody>
+          <a:bodyPr wrap="square" lIns="18288" rIns="18288" tIns="18288" bIns="18288" anchor="ctr">
+            <a:spAutoFit/>
+          </a:bodyPr>
+          <a:lstStyle/>
+          <a:p>
+            <a:pPr algn="ctr">
+              <a:defRPr sz="1100" b="1">
+                <a:solidFill>
+                  <a:srgbClr val="112240"/>
+                </a:solidFill>
+                <a:latin typeface="Aptos"/>
+              </a:defRPr>
+            </a:pPr>
+            <a:r>
+              <a:t>Sonraki adımlar: PDF rubriğini doğrula • gerçek mevzuat örnekleriyle uzman değerlendirmesi yap • gerçek PR akışını yetkili test deposunda dene.</a:t>
+            </a:r>
+          </a:p>
+        </p:txBody>
+      </p:sp>
+      <p:sp>
+        <p:nvSpPr>
+          <p:cNvPr id="15" name="TextBox 14"/>
+          <p:cNvSpPr txBox="1"/>
+          <p:nvPr/>
+        </p:nvSpPr>
+        <p:spPr>
+          <a:xfrm>
+            <a:off x="566928" y="6473952"/>
+            <a:ext cx="9692640" cy="182880"/>
+          </a:xfrm>
+          <a:prstGeom prst="rect">
+            <a:avLst/>
+          </a:prstGeom>
+          <a:noFill/>
+        </p:spPr>
+        <p:txBody>
+          <a:bodyPr wrap="square" lIns="18288" rIns="18288" tIns="18288" bIns="18288" anchor="ctr">
+            <a:spAutoFit/>
+          </a:bodyPr>
+          <a:lstStyle/>
+          <a:p>
+            <a:pPr algn="l">
+              <a:defRPr sz="800" b="1">
+                <a:solidFill>
+                  <a:srgbClr val="637389"/>
+                </a:solidFill>
+                <a:latin typeface="Aptos"/>
+              </a:defRPr>
+            </a:pPr>
+            <a:r>
+              <a:t>MEVZUATAGENT  •  YEREL  •  ONAYLI  •  DENETLENEBİLİR</a:t>
+            </a:r>
+          </a:p>
+        </p:txBody>
+      </p:sp>
+      <p:sp>
+        <p:nvSpPr>
+          <p:cNvPr id="16" name="TextBox 15"/>
+          <p:cNvSpPr txBox="1"/>
+          <p:nvPr/>
+        </p:nvSpPr>
+        <p:spPr>
+          <a:xfrm>
+            <a:off x="11109960" y="6419088"/>
+            <a:ext cx="502920" cy="274320"/>
+          </a:xfrm>
+          <a:prstGeom prst="rect">
+            <a:avLst/>
+          </a:prstGeom>
+          <a:noFill/>
+        </p:spPr>
+        <p:txBody>
+          <a:bodyPr wrap="square" lIns="18288" rIns="18288" tIns="18288" bIns="18288" anchor="ctr">
+            <a:spAutoFit/>
+          </a:bodyPr>
+          <a:lstStyle/>
+          <a:p>
+            <a:pPr algn="r">
+              <a:defRPr sz="1000" b="1">
+                <a:solidFill>
+                  <a:srgbClr val="637389"/>
+                </a:solidFill>
+                <a:latin typeface="Aptos"/>
+              </a:defRPr>
+            </a:pPr>
+            <a:r>
+              <a:t>20</a:t>
+            </a:r>
+          </a:p>
+        </p:txBody>
+      </p:sp>
+    </p:spTree>
+  </p:cSld>
+  <p:clrMapOvr>
+    <a:masterClrMapping/>
+  </p:clrMapOvr>
+</p:sld>
+</file>
+
+<file path=ppt/slides/slide21.xml><?xml version="1.0" encoding="utf-8"?>
+<p:sld xmlns:a="http://schemas.openxmlformats.org/drawingml/2006/main" xmlns:p="http://schemas.openxmlformats.org/presentationml/2006/main" xmlns:r="http://schemas.openxmlformats.org/officeDocument/2006/relationships">
+  <p:cSld>
+    <p:bg>
+      <p:bgPr>
+        <a:solidFill>
+          <a:srgbClr val="F7F9FC"/>
+        </a:solidFill>
+        <a:effectLst/>
+      </p:bgPr>
+    </p:bg>
+    <p:spTree>
+      <p:nvGrpSpPr>
+        <p:cNvPr id="1" name=""/>
+        <p:cNvGrpSpPr/>
+        <p:nvPr/>
+      </p:nvGrpSpPr>
+      <p:grpSpPr/>
+      <p:sp>
+        <p:nvSpPr>
+          <p:cNvPr id="2" name="TextBox 1"/>
+          <p:cNvSpPr txBox="1"/>
+          <p:nvPr/>
+        </p:nvSpPr>
+        <p:spPr>
+          <a:xfrm>
+            <a:off x="640080" y="329184"/>
+            <a:ext cx="10881360" cy="228600"/>
+          </a:xfrm>
+          <a:prstGeom prst="rect">
+            <a:avLst/>
+          </a:prstGeom>
+          <a:noFill/>
+        </p:spPr>
+        <p:txBody>
+          <a:bodyPr wrap="square" lIns="18288" rIns="18288" tIns="18288" bIns="18288" anchor="ctr">
+            <a:spAutoFit/>
+          </a:bodyPr>
+          <a:lstStyle/>
+          <a:p>
+            <a:pPr algn="l">
+              <a:defRPr sz="900" b="1">
+                <a:solidFill>
+                  <a:srgbClr val="00AFA0"/>
+                </a:solidFill>
+                <a:latin typeface="Aptos"/>
+              </a:defRPr>
+            </a:pPr>
+            <a:r>
+              <a:t>18  •  KISA DEMO</a:t>
+            </a:r>
+          </a:p>
+        </p:txBody>
+      </p:sp>
+      <p:sp>
+        <p:nvSpPr>
+          <p:cNvPr id="3" name="TextBox 2"/>
+          <p:cNvSpPr txBox="1"/>
+          <p:nvPr/>
+        </p:nvSpPr>
+        <p:spPr>
+          <a:xfrm>
+            <a:off x="640080" y="658368"/>
+            <a:ext cx="10972800" cy="502920"/>
+          </a:xfrm>
+          <a:prstGeom prst="rect">
+            <a:avLst/>
+          </a:prstGeom>
+          <a:noFill/>
+        </p:spPr>
+        <p:txBody>
+          <a:bodyPr wrap="square" lIns="18288" rIns="18288" tIns="18288" bIns="18288" anchor="ctr">
+            <a:spAutoFit/>
+          </a:bodyPr>
+          <a:lstStyle/>
+          <a:p>
+            <a:pPr algn="l">
+              <a:defRPr sz="2700" b="1">
+                <a:solidFill>
+                  <a:srgbClr val="112240"/>
+                </a:solidFill>
+                <a:latin typeface="Aptos"/>
+              </a:defRPr>
+            </a:pPr>
+            <a:r>
+              <a:t>Uygulamayı sunumda nasıl gösteririm?</a:t>
+            </a:r>
+          </a:p>
+        </p:txBody>
+      </p:sp>
+      <p:sp>
+        <p:nvSpPr>
+          <p:cNvPr id="4" name="TextBox 3"/>
+          <p:cNvSpPr txBox="1"/>
+          <p:nvPr/>
+        </p:nvSpPr>
+        <p:spPr>
+          <a:xfrm>
+            <a:off x="658368" y="1197864"/>
+            <a:ext cx="10881360" cy="420624"/>
+          </a:xfrm>
+          <a:prstGeom prst="rect">
+            <a:avLst/>
+          </a:prstGeom>
+          <a:noFill/>
+        </p:spPr>
+        <p:txBody>
+          <a:bodyPr wrap="square" lIns="18288" rIns="18288" tIns="18288" bIns="18288" anchor="ctr">
+            <a:spAutoFit/>
+          </a:bodyPr>
+          <a:lstStyle/>
+          <a:p>
+            <a:pPr algn="l">
+              <a:defRPr sz="1300" b="0">
+                <a:solidFill>
+                  <a:srgbClr val="637389"/>
+                </a:solidFill>
+                <a:latin typeface="Aptos"/>
+              </a:defRPr>
+            </a:pPr>
+            <a:r>
+              <a:t>Sentetik test deposunda, dış sisteme yan etki oluşturmadan ana akışı sergileyin.</a:t>
+            </a:r>
+          </a:p>
+        </p:txBody>
+      </p:sp>
+      <p:sp>
+        <p:nvSpPr>
+          <p:cNvPr id="5" name="Rounded Rectangle 4"/>
+          <p:cNvSpPr/>
+          <p:nvPr/>
+        </p:nvSpPr>
+        <p:spPr>
+          <a:xfrm>
+            <a:off x="822960" y="1783080"/>
+            <a:ext cx="5074920" cy="987552"/>
+          </a:xfrm>
+          <a:prstGeom prst="roundRect">
+            <a:avLst/>
+          </a:prstGeom>
+          <a:solidFill>
+            <a:srgbClr val="FFFFFF"/>
+          </a:solidFill>
+          <a:ln>
+            <a:noFill/>
+          </a:ln>
+        </p:spPr>
+        <p:style>
+          <a:lnRef idx="1">
+            <a:schemeClr val="accent1"/>
+          </a:lnRef>
+          <a:fillRef idx="3">
+            <a:schemeClr val="accent1"/>
+          </a:fillRef>
+          <a:effectRef idx="2">
+            <a:schemeClr val="accent1"/>
+          </a:effectRef>
+          <a:fontRef idx="minor">
+            <a:schemeClr val="lt1"/>
+          </a:fontRef>
+        </p:style>
+        <p:txBody>
+          <a:bodyPr rtlCol="0" anchor="ctr"/>
+          <a:lstStyle/>
+          <a:p>
+            <a:pPr algn="ctr"/>
+          </a:p>
+        </p:txBody>
+      </p:sp>
+      <p:sp>
+        <p:nvSpPr>
+          <p:cNvPr id="6" name="TextBox 5"/>
+          <p:cNvSpPr txBox="1"/>
+          <p:nvPr/>
+        </p:nvSpPr>
+        <p:spPr>
+          <a:xfrm>
+            <a:off x="978408" y="1984248"/>
+            <a:ext cx="493776" cy="292608"/>
+          </a:xfrm>
+          <a:prstGeom prst="rect">
+            <a:avLst/>
+          </a:prstGeom>
+          <a:noFill/>
+        </p:spPr>
+        <p:txBody>
+          <a:bodyPr wrap="square" lIns="18288" rIns="18288" tIns="18288" bIns="18288" anchor="ctr">
+            <a:spAutoFit/>
+          </a:bodyPr>
+          <a:lstStyle/>
+          <a:p>
+            <a:pPr algn="l">
+              <a:defRPr sz="1300" b="1">
+                <a:solidFill>
+                  <a:srgbClr val="00AFA0"/>
+                </a:solidFill>
+                <a:latin typeface="Aptos"/>
+              </a:defRPr>
+            </a:pPr>
+            <a:r>
+              <a:t>01</a:t>
+            </a:r>
+          </a:p>
+        </p:txBody>
+      </p:sp>
+      <p:sp>
+        <p:nvSpPr>
+          <p:cNvPr id="7" name="TextBox 6"/>
+          <p:cNvSpPr txBox="1"/>
+          <p:nvPr/>
+        </p:nvSpPr>
+        <p:spPr>
+          <a:xfrm>
+            <a:off x="1600200" y="1920240"/>
+            <a:ext cx="4023360" cy="292608"/>
+          </a:xfrm>
+          <a:prstGeom prst="rect">
+            <a:avLst/>
+          </a:prstGeom>
+          <a:noFill/>
+        </p:spPr>
+        <p:txBody>
+          <a:bodyPr wrap="square" lIns="18288" rIns="18288" tIns="18288" bIns="18288" anchor="ctr">
+            <a:spAutoFit/>
+          </a:bodyPr>
+          <a:lstStyle/>
+          <a:p>
+            <a:pPr algn="l">
+              <a:defRPr sz="1400" b="1">
+                <a:solidFill>
+                  <a:srgbClr val="112240"/>
+                </a:solidFill>
+                <a:latin typeface="Aptos"/>
+              </a:defRPr>
+            </a:pPr>
+            <a:r>
+              <a:t>Kurulumu başlat</a:t>
+            </a:r>
+          </a:p>
+        </p:txBody>
+      </p:sp>
+      <p:sp>
+        <p:nvSpPr>
+          <p:cNvPr id="8" name="TextBox 7"/>
+          <p:cNvSpPr txBox="1"/>
+          <p:nvPr/>
+        </p:nvSpPr>
+        <p:spPr>
+          <a:xfrm>
+            <a:off x="1600200" y="2295144"/>
+            <a:ext cx="4023360" cy="274320"/>
+          </a:xfrm>
+          <a:prstGeom prst="rect">
+            <a:avLst/>
+          </a:prstGeom>
+          <a:noFill/>
+        </p:spPr>
+        <p:txBody>
+          <a:bodyPr wrap="square" lIns="18288" rIns="18288" tIns="18288" bIns="18288" anchor="ctr">
+            <a:spAutoFit/>
+          </a:bodyPr>
+          <a:lstStyle/>
+          <a:p>
+            <a:pPr algn="l">
+              <a:defRPr sz="1000" b="0">
+                <a:solidFill>
+                  <a:srgbClr val="637389"/>
+                </a:solidFill>
+                <a:latin typeface="Aptos"/>
+              </a:defRPr>
+            </a:pPr>
+            <a:r>
+              <a:t>Kurulum.command → Python ve paket kontrolü</a:t>
+            </a:r>
+          </a:p>
+        </p:txBody>
+      </p:sp>
+      <p:sp>
+        <p:nvSpPr>
+          <p:cNvPr id="9" name="Rounded Rectangle 8"/>
+          <p:cNvSpPr/>
+          <p:nvPr/>
+        </p:nvSpPr>
+        <p:spPr>
+          <a:xfrm>
+            <a:off x="6309360" y="1783080"/>
+            <a:ext cx="5074920" cy="987552"/>
+          </a:xfrm>
+          <a:prstGeom prst="roundRect">
+            <a:avLst/>
+          </a:prstGeom>
+          <a:solidFill>
+            <a:srgbClr val="FFFFFF"/>
+          </a:solidFill>
+          <a:ln>
+            <a:noFill/>
+          </a:ln>
+        </p:spPr>
+        <p:style>
+          <a:lnRef idx="1">
+            <a:schemeClr val="accent1"/>
+          </a:lnRef>
+          <a:fillRef idx="3">
+            <a:schemeClr val="accent1"/>
+          </a:fillRef>
+          <a:effectRef idx="2">
+            <a:schemeClr val="accent1"/>
+          </a:effectRef>
+          <a:fontRef idx="minor">
+            <a:schemeClr val="lt1"/>
+          </a:fontRef>
+        </p:style>
+        <p:txBody>
+          <a:bodyPr rtlCol="0" anchor="ctr"/>
+          <a:lstStyle/>
+          <a:p>
+            <a:pPr algn="ctr"/>
+          </a:p>
+        </p:txBody>
+      </p:sp>
+      <p:sp>
+        <p:nvSpPr>
+          <p:cNvPr id="10" name="TextBox 9"/>
+          <p:cNvSpPr txBox="1"/>
+          <p:nvPr/>
+        </p:nvSpPr>
+        <p:spPr>
+          <a:xfrm>
+            <a:off x="6464808" y="1984248"/>
+            <a:ext cx="493776" cy="292608"/>
+          </a:xfrm>
+          <a:prstGeom prst="rect">
+            <a:avLst/>
+          </a:prstGeom>
+          <a:noFill/>
+        </p:spPr>
+        <p:txBody>
+          <a:bodyPr wrap="square" lIns="18288" rIns="18288" tIns="18288" bIns="18288" anchor="ctr">
+            <a:spAutoFit/>
+          </a:bodyPr>
+          <a:lstStyle/>
+          <a:p>
+            <a:pPr algn="l">
+              <a:defRPr sz="1300" b="1">
+                <a:solidFill>
+                  <a:srgbClr val="00AFA0"/>
+                </a:solidFill>
+                <a:latin typeface="Aptos"/>
+              </a:defRPr>
+            </a:pPr>
+            <a:r>
+              <a:t>02</a:t>
+            </a:r>
+          </a:p>
+        </p:txBody>
+      </p:sp>
+      <p:sp>
+        <p:nvSpPr>
+          <p:cNvPr id="11" name="TextBox 10"/>
+          <p:cNvSpPr txBox="1"/>
+          <p:nvPr/>
+        </p:nvSpPr>
+        <p:spPr>
+          <a:xfrm>
+            <a:off x="7086600" y="1920240"/>
+            <a:ext cx="4023360" cy="292608"/>
+          </a:xfrm>
+          <a:prstGeom prst="rect">
+            <a:avLst/>
+          </a:prstGeom>
+          <a:noFill/>
+        </p:spPr>
+        <p:txBody>
+          <a:bodyPr wrap="square" lIns="18288" rIns="18288" tIns="18288" bIns="18288" anchor="ctr">
+            <a:spAutoFit/>
+          </a:bodyPr>
+          <a:lstStyle/>
+          <a:p>
+            <a:pPr algn="l">
+              <a:defRPr sz="1400" b="1">
+                <a:solidFill>
+                  <a:srgbClr val="112240"/>
+                </a:solidFill>
+                <a:latin typeface="Aptos"/>
+              </a:defRPr>
+            </a:pPr>
+            <a:r>
+              <a:t>Menüyü aç</a:t>
+            </a:r>
+          </a:p>
+        </p:txBody>
+      </p:sp>
+      <p:sp>
+        <p:nvSpPr>
+          <p:cNvPr id="12" name="TextBox 11"/>
+          <p:cNvSpPr txBox="1"/>
+          <p:nvPr/>
+        </p:nvSpPr>
+        <p:spPr>
+          <a:xfrm>
+            <a:off x="7086600" y="2295144"/>
+            <a:ext cx="4023360" cy="274320"/>
+          </a:xfrm>
+          <a:prstGeom prst="rect">
+            <a:avLst/>
+          </a:prstGeom>
+          <a:noFill/>
+        </p:spPr>
+        <p:txBody>
+          <a:bodyPr wrap="square" lIns="18288" rIns="18288" tIns="18288" bIns="18288" anchor="ctr">
+            <a:spAutoFit/>
+          </a:bodyPr>
+          <a:lstStyle/>
+          <a:p>
+            <a:pPr algn="l">
+              <a:defRPr sz="1000" b="0">
+                <a:solidFill>
+                  <a:srgbClr val="637389"/>
+                </a:solidFill>
+                <a:latin typeface="Aptos"/>
+              </a:defRPr>
+            </a:pPr>
+            <a:r>
+              <a:t>mevzuat-agent → yapılandırma kontrolü</a:t>
+            </a:r>
+          </a:p>
+        </p:txBody>
+      </p:sp>
+      <p:sp>
+        <p:nvSpPr>
+          <p:cNvPr id="13" name="Rounded Rectangle 12"/>
+          <p:cNvSpPr/>
+          <p:nvPr/>
+        </p:nvSpPr>
+        <p:spPr>
+          <a:xfrm>
+            <a:off x="822960" y="3081528"/>
+            <a:ext cx="5074920" cy="987552"/>
+          </a:xfrm>
+          <a:prstGeom prst="roundRect">
+            <a:avLst/>
+          </a:prstGeom>
+          <a:solidFill>
+            <a:srgbClr val="FFFFFF"/>
+          </a:solidFill>
+          <a:ln>
+            <a:noFill/>
+          </a:ln>
+        </p:spPr>
+        <p:style>
+          <a:lnRef idx="1">
+            <a:schemeClr val="accent1"/>
+          </a:lnRef>
+          <a:fillRef idx="3">
+            <a:schemeClr val="accent1"/>
+          </a:fillRef>
+          <a:effectRef idx="2">
+            <a:schemeClr val="accent1"/>
+          </a:effectRef>
+          <a:fontRef idx="minor">
+            <a:schemeClr val="lt1"/>
+          </a:fontRef>
+        </p:style>
+        <p:txBody>
+          <a:bodyPr rtlCol="0" anchor="ctr"/>
+          <a:lstStyle/>
+          <a:p>
+            <a:pPr algn="ctr"/>
+          </a:p>
+        </p:txBody>
+      </p:sp>
+      <p:sp>
+        <p:nvSpPr>
+          <p:cNvPr id="14" name="TextBox 13"/>
+          <p:cNvSpPr txBox="1"/>
+          <p:nvPr/>
+        </p:nvSpPr>
+        <p:spPr>
+          <a:xfrm>
+            <a:off x="978408" y="3282696"/>
+            <a:ext cx="493776" cy="292608"/>
+          </a:xfrm>
+          <a:prstGeom prst="rect">
+            <a:avLst/>
+          </a:prstGeom>
+          <a:noFill/>
+        </p:spPr>
+        <p:txBody>
+          <a:bodyPr wrap="square" lIns="18288" rIns="18288" tIns="18288" bIns="18288" anchor="ctr">
+            <a:spAutoFit/>
+          </a:bodyPr>
+          <a:lstStyle/>
+          <a:p>
+            <a:pPr algn="l">
+              <a:defRPr sz="1300" b="1">
+                <a:solidFill>
+                  <a:srgbClr val="00AFA0"/>
+                </a:solidFill>
+                <a:latin typeface="Aptos"/>
+              </a:defRPr>
+            </a:pPr>
+            <a:r>
+              <a:t>03</a:t>
+            </a:r>
+          </a:p>
+        </p:txBody>
+      </p:sp>
+      <p:sp>
+        <p:nvSpPr>
+          <p:cNvPr id="15" name="TextBox 14"/>
+          <p:cNvSpPr txBox="1"/>
+          <p:nvPr/>
+        </p:nvSpPr>
+        <p:spPr>
+          <a:xfrm>
+            <a:off x="1600200" y="3218688"/>
+            <a:ext cx="4023360" cy="292608"/>
+          </a:xfrm>
+          <a:prstGeom prst="rect">
+            <a:avLst/>
+          </a:prstGeom>
+          <a:noFill/>
+        </p:spPr>
+        <p:txBody>
+          <a:bodyPr wrap="square" lIns="18288" rIns="18288" tIns="18288" bIns="18288" anchor="ctr">
+            <a:spAutoFit/>
+          </a:bodyPr>
+          <a:lstStyle/>
+          <a:p>
+            <a:pPr algn="l">
+              <a:defRPr sz="1400" b="1">
+                <a:solidFill>
+                  <a:srgbClr val="112240"/>
+                </a:solidFill>
+                <a:latin typeface="Aptos"/>
+              </a:defRPr>
+            </a:pPr>
+            <a:r>
+              <a:t>Demo depoyu seç</a:t>
+            </a:r>
+          </a:p>
+        </p:txBody>
+      </p:sp>
+      <p:sp>
+        <p:nvSpPr>
+          <p:cNvPr id="16" name="TextBox 15"/>
+          <p:cNvSpPr txBox="1"/>
+          <p:nvPr/>
+        </p:nvSpPr>
+        <p:spPr>
+          <a:xfrm>
+            <a:off x="1600200" y="3593592"/>
+            <a:ext cx="4023360" cy="274320"/>
+          </a:xfrm>
+          <a:prstGeom prst="rect">
+            <a:avLst/>
+          </a:prstGeom>
+          <a:noFill/>
+        </p:spPr>
+        <p:txBody>
+          <a:bodyPr wrap="square" lIns="18288" rIns="18288" tIns="18288" bIns="18288" anchor="ctr">
+            <a:spAutoFit/>
+          </a:bodyPr>
+          <a:lstStyle/>
+          <a:p>
+            <a:pPr algn="l">
+              <a:defRPr sz="1000" b="0">
+                <a:solidFill>
+                  <a:srgbClr val="637389"/>
+                </a:solidFill>
+                <a:latin typeface="Aptos"/>
+              </a:defRPr>
+            </a:pPr>
+            <a:r>
+              <a:t>Yalnızca test için hazırlanmış sentetik depo</a:t>
+            </a:r>
+          </a:p>
+        </p:txBody>
+      </p:sp>
+      <p:sp>
+        <p:nvSpPr>
+          <p:cNvPr id="17" name="Rounded Rectangle 16"/>
+          <p:cNvSpPr/>
+          <p:nvPr/>
+        </p:nvSpPr>
+        <p:spPr>
+          <a:xfrm>
+            <a:off x="6309360" y="3081528"/>
+            <a:ext cx="5074920" cy="987552"/>
+          </a:xfrm>
+          <a:prstGeom prst="roundRect">
+            <a:avLst/>
+          </a:prstGeom>
+          <a:solidFill>
+            <a:srgbClr val="FFFFFF"/>
+          </a:solidFill>
+          <a:ln>
+            <a:noFill/>
+          </a:ln>
+        </p:spPr>
+        <p:style>
+          <a:lnRef idx="1">
+            <a:schemeClr val="accent1"/>
+          </a:lnRef>
+          <a:fillRef idx="3">
+            <a:schemeClr val="accent1"/>
+          </a:fillRef>
+          <a:effectRef idx="2">
+            <a:schemeClr val="accent1"/>
+          </a:effectRef>
+          <a:fontRef idx="minor">
+            <a:schemeClr val="lt1"/>
+          </a:fontRef>
+        </p:style>
+        <p:txBody>
+          <a:bodyPr rtlCol="0" anchor="ctr"/>
+          <a:lstStyle/>
+          <a:p>
+            <a:pPr algn="ctr"/>
+          </a:p>
+        </p:txBody>
+      </p:sp>
+      <p:sp>
+        <p:nvSpPr>
+          <p:cNvPr id="18" name="TextBox 17"/>
+          <p:cNvSpPr txBox="1"/>
+          <p:nvPr/>
+        </p:nvSpPr>
+        <p:spPr>
+          <a:xfrm>
+            <a:off x="6464808" y="3282696"/>
+            <a:ext cx="493776" cy="292608"/>
+          </a:xfrm>
+          <a:prstGeom prst="rect">
+            <a:avLst/>
+          </a:prstGeom>
+          <a:noFill/>
+        </p:spPr>
+        <p:txBody>
+          <a:bodyPr wrap="square" lIns="18288" rIns="18288" tIns="18288" bIns="18288" anchor="ctr">
+            <a:spAutoFit/>
+          </a:bodyPr>
+          <a:lstStyle/>
+          <a:p>
+            <a:pPr algn="l">
+              <a:defRPr sz="1300" b="1">
+                <a:solidFill>
+                  <a:srgbClr val="00AFA0"/>
+                </a:solidFill>
+                <a:latin typeface="Aptos"/>
+              </a:defRPr>
+            </a:pPr>
+            <a:r>
+              <a:t>04</a:t>
+            </a:r>
+          </a:p>
+        </p:txBody>
+      </p:sp>
+      <p:sp>
+        <p:nvSpPr>
+          <p:cNvPr id="19" name="TextBox 18"/>
+          <p:cNvSpPr txBox="1"/>
+          <p:nvPr/>
+        </p:nvSpPr>
+        <p:spPr>
+          <a:xfrm>
+            <a:off x="7086600" y="3218688"/>
+            <a:ext cx="4023360" cy="292608"/>
+          </a:xfrm>
+          <a:prstGeom prst="rect">
+            <a:avLst/>
+          </a:prstGeom>
+          <a:noFill/>
+        </p:spPr>
+        <p:txBody>
+          <a:bodyPr wrap="square" lIns="18288" rIns="18288" tIns="18288" bIns="18288" anchor="ctr">
+            <a:spAutoFit/>
+          </a:bodyPr>
+          <a:lstStyle/>
+          <a:p>
+            <a:pPr algn="l">
+              <a:defRPr sz="1400" b="1">
+                <a:solidFill>
+                  <a:srgbClr val="112240"/>
+                </a:solidFill>
+                <a:latin typeface="Aptos"/>
+              </a:defRPr>
+            </a:pPr>
+            <a:r>
+              <a:t>Tahmini gör</a:t>
+            </a:r>
+          </a:p>
+        </p:txBody>
+      </p:sp>
+      <p:sp>
+        <p:nvSpPr>
+          <p:cNvPr id="20" name="TextBox 19"/>
+          <p:cNvSpPr txBox="1"/>
+          <p:nvPr/>
+        </p:nvSpPr>
+        <p:spPr>
+          <a:xfrm>
+            <a:off x="7086600" y="3593592"/>
+            <a:ext cx="4023360" cy="274320"/>
+          </a:xfrm>
+          <a:prstGeom prst="rect">
+            <a:avLst/>
+          </a:prstGeom>
+          <a:noFill/>
+        </p:spPr>
+        <p:txBody>
+          <a:bodyPr wrap="square" lIns="18288" rIns="18288" tIns="18288" bIns="18288" anchor="ctr">
+            <a:spAutoFit/>
+          </a:bodyPr>
+          <a:lstStyle/>
+          <a:p>
+            <a:pPr algn="l">
+              <a:defRPr sz="1000" b="0">
+                <a:solidFill>
+                  <a:srgbClr val="637389"/>
+                </a:solidFill>
+                <a:latin typeface="Aptos"/>
+              </a:defRPr>
+            </a:pPr>
+            <a:r>
+              <a:t>Kurulu Ollama modelleri ve süreler</a:t>
+            </a:r>
+          </a:p>
+        </p:txBody>
+      </p:sp>
+      <p:sp>
+        <p:nvSpPr>
+          <p:cNvPr id="21" name="Rounded Rectangle 20"/>
+          <p:cNvSpPr/>
+          <p:nvPr/>
+        </p:nvSpPr>
+        <p:spPr>
+          <a:xfrm>
+            <a:off x="822960" y="4379976"/>
+            <a:ext cx="5074920" cy="987552"/>
+          </a:xfrm>
+          <a:prstGeom prst="roundRect">
+            <a:avLst/>
+          </a:prstGeom>
+          <a:solidFill>
+            <a:srgbClr val="FFFFFF"/>
+          </a:solidFill>
+          <a:ln>
+            <a:noFill/>
+          </a:ln>
+        </p:spPr>
+        <p:style>
+          <a:lnRef idx="1">
+            <a:schemeClr val="accent1"/>
+          </a:lnRef>
+          <a:fillRef idx="3">
+            <a:schemeClr val="accent1"/>
+          </a:fillRef>
+          <a:effectRef idx="2">
+            <a:schemeClr val="accent1"/>
+          </a:effectRef>
+          <a:fontRef idx="minor">
+            <a:schemeClr val="lt1"/>
+          </a:fontRef>
+        </p:style>
+        <p:txBody>
+          <a:bodyPr rtlCol="0" anchor="ctr"/>
+          <a:lstStyle/>
+          <a:p>
+            <a:pPr algn="ctr"/>
+          </a:p>
+        </p:txBody>
+      </p:sp>
+      <p:sp>
+        <p:nvSpPr>
+          <p:cNvPr id="22" name="TextBox 21"/>
+          <p:cNvSpPr txBox="1"/>
+          <p:nvPr/>
+        </p:nvSpPr>
+        <p:spPr>
+          <a:xfrm>
+            <a:off x="978408" y="4581144"/>
+            <a:ext cx="493776" cy="292608"/>
+          </a:xfrm>
+          <a:prstGeom prst="rect">
+            <a:avLst/>
+          </a:prstGeom>
+          <a:noFill/>
+        </p:spPr>
+        <p:txBody>
+          <a:bodyPr wrap="square" lIns="18288" rIns="18288" tIns="18288" bIns="18288" anchor="ctr">
+            <a:spAutoFit/>
+          </a:bodyPr>
+          <a:lstStyle/>
+          <a:p>
+            <a:pPr algn="l">
+              <a:defRPr sz="1300" b="1">
+                <a:solidFill>
+                  <a:srgbClr val="00AFA0"/>
+                </a:solidFill>
+                <a:latin typeface="Aptos"/>
+              </a:defRPr>
+            </a:pPr>
+            <a:r>
+              <a:t>05</a:t>
+            </a:r>
+          </a:p>
+        </p:txBody>
+      </p:sp>
+      <p:sp>
+        <p:nvSpPr>
+          <p:cNvPr id="23" name="TextBox 22"/>
+          <p:cNvSpPr txBox="1"/>
+          <p:nvPr/>
+        </p:nvSpPr>
+        <p:spPr>
+          <a:xfrm>
+            <a:off x="1600200" y="4517136"/>
+            <a:ext cx="4023360" cy="292608"/>
+          </a:xfrm>
+          <a:prstGeom prst="rect">
+            <a:avLst/>
+          </a:prstGeom>
+          <a:noFill/>
+        </p:spPr>
+        <p:txBody>
+          <a:bodyPr wrap="square" lIns="18288" rIns="18288" tIns="18288" bIns="18288" anchor="ctr">
+            <a:spAutoFit/>
+          </a:bodyPr>
+          <a:lstStyle/>
+          <a:p>
+            <a:pPr algn="l">
+              <a:defRPr sz="1400" b="1">
+                <a:solidFill>
+                  <a:srgbClr val="112240"/>
+                </a:solidFill>
+                <a:latin typeface="Aptos"/>
+              </a:defRPr>
+            </a:pPr>
+            <a:r>
+              <a:t>Raporu incele</a:t>
+            </a:r>
+          </a:p>
+        </p:txBody>
+      </p:sp>
+      <p:sp>
+        <p:nvSpPr>
+          <p:cNvPr id="24" name="TextBox 23"/>
+          <p:cNvSpPr txBox="1"/>
+          <p:nvPr/>
+        </p:nvSpPr>
+        <p:spPr>
+          <a:xfrm>
+            <a:off x="1600200" y="4892040"/>
+            <a:ext cx="4023360" cy="274320"/>
+          </a:xfrm>
+          <a:prstGeom prst="rect">
+            <a:avLst/>
+          </a:prstGeom>
+          <a:noFill/>
+        </p:spPr>
+        <p:txBody>
+          <a:bodyPr wrap="square" lIns="18288" rIns="18288" tIns="18288" bIns="18288" anchor="ctr">
+            <a:spAutoFit/>
+          </a:bodyPr>
+          <a:lstStyle/>
+          <a:p>
+            <a:pPr algn="l">
+              <a:defRPr sz="1000" b="0">
+                <a:solidFill>
+                  <a:srgbClr val="637389"/>
+                </a:solidFill>
+                <a:latin typeface="Aptos"/>
+              </a:defRPr>
+            </a:pPr>
+            <a:r>
+              <a:t>Kaynak/kanıt ve tarama kapsamı</a:t>
+            </a:r>
+          </a:p>
+        </p:txBody>
+      </p:sp>
+      <p:sp>
+        <p:nvSpPr>
+          <p:cNvPr id="25" name="Rounded Rectangle 24"/>
+          <p:cNvSpPr/>
+          <p:nvPr/>
+        </p:nvSpPr>
+        <p:spPr>
+          <a:xfrm>
+            <a:off x="6309360" y="4379976"/>
+            <a:ext cx="5074920" cy="987552"/>
+          </a:xfrm>
+          <a:prstGeom prst="roundRect">
+            <a:avLst/>
+          </a:prstGeom>
+          <a:solidFill>
+            <a:srgbClr val="FFFFFF"/>
+          </a:solidFill>
+          <a:ln>
+            <a:noFill/>
+          </a:ln>
+        </p:spPr>
+        <p:style>
+          <a:lnRef idx="1">
+            <a:schemeClr val="accent1"/>
+          </a:lnRef>
+          <a:fillRef idx="3">
+            <a:schemeClr val="accent1"/>
+          </a:fillRef>
+          <a:effectRef idx="2">
+            <a:schemeClr val="accent1"/>
+          </a:effectRef>
+          <a:fontRef idx="minor">
+            <a:schemeClr val="lt1"/>
+          </a:fontRef>
+        </p:style>
+        <p:txBody>
+          <a:bodyPr rtlCol="0" anchor="ctr"/>
+          <a:lstStyle/>
+          <a:p>
+            <a:pPr algn="ctr"/>
+          </a:p>
+        </p:txBody>
+      </p:sp>
+      <p:sp>
+        <p:nvSpPr>
+          <p:cNvPr id="26" name="TextBox 25"/>
+          <p:cNvSpPr txBox="1"/>
+          <p:nvPr/>
+        </p:nvSpPr>
+        <p:spPr>
+          <a:xfrm>
+            <a:off x="6464808" y="4581144"/>
+            <a:ext cx="493776" cy="292608"/>
+          </a:xfrm>
+          <a:prstGeom prst="rect">
+            <a:avLst/>
+          </a:prstGeom>
+          <a:noFill/>
+        </p:spPr>
+        <p:txBody>
+          <a:bodyPr wrap="square" lIns="18288" rIns="18288" tIns="18288" bIns="18288" anchor="ctr">
+            <a:spAutoFit/>
+          </a:bodyPr>
+          <a:lstStyle/>
+          <a:p>
+            <a:pPr algn="l">
+              <a:defRPr sz="1300" b="1">
+                <a:solidFill>
+                  <a:srgbClr val="00AFA0"/>
+                </a:solidFill>
+                <a:latin typeface="Aptos"/>
+              </a:defRPr>
+            </a:pPr>
+            <a:r>
+              <a:t>06</a:t>
+            </a:r>
+          </a:p>
+        </p:txBody>
+      </p:sp>
+      <p:sp>
+        <p:nvSpPr>
+          <p:cNvPr id="27" name="TextBox 26"/>
+          <p:cNvSpPr txBox="1"/>
+          <p:nvPr/>
+        </p:nvSpPr>
+        <p:spPr>
+          <a:xfrm>
+            <a:off x="7086600" y="4517136"/>
+            <a:ext cx="4023360" cy="292608"/>
+          </a:xfrm>
+          <a:prstGeom prst="rect">
+            <a:avLst/>
+          </a:prstGeom>
+          <a:noFill/>
+        </p:spPr>
+        <p:txBody>
+          <a:bodyPr wrap="square" lIns="18288" rIns="18288" tIns="18288" bIns="18288" anchor="ctr">
+            <a:spAutoFit/>
+          </a:bodyPr>
+          <a:lstStyle/>
+          <a:p>
+            <a:pPr algn="l">
+              <a:defRPr sz="1400" b="1">
+                <a:solidFill>
+                  <a:srgbClr val="112240"/>
+                </a:solidFill>
+                <a:latin typeface="Aptos"/>
+              </a:defRPr>
+            </a:pPr>
+            <a:r>
+              <a:t>Düzeltmeyi göster</a:t>
+            </a:r>
+          </a:p>
+        </p:txBody>
+      </p:sp>
+      <p:sp>
+        <p:nvSpPr>
+          <p:cNvPr id="28" name="TextBox 27"/>
+          <p:cNvSpPr txBox="1"/>
+          <p:nvPr/>
+        </p:nvSpPr>
+        <p:spPr>
+          <a:xfrm>
+            <a:off x="7086600" y="4892040"/>
+            <a:ext cx="4023360" cy="274320"/>
+          </a:xfrm>
+          <a:prstGeom prst="rect">
+            <a:avLst/>
+          </a:prstGeom>
+          <a:noFill/>
+        </p:spPr>
+        <p:txBody>
+          <a:bodyPr wrap="square" lIns="18288" rIns="18288" tIns="18288" bIns="18288" anchor="ctr">
+            <a:spAutoFit/>
+          </a:bodyPr>
+          <a:lstStyle/>
+          <a:p>
+            <a:pPr algn="l">
+              <a:defRPr sz="1000" b="0">
+                <a:solidFill>
+                  <a:srgbClr val="637389"/>
+                </a:solidFill>
+                <a:latin typeface="Aptos"/>
+              </a:defRPr>
+            </a:pPr>
+            <a:r>
+              <a:t>İzole dal ve diff; PR onayı verme</a:t>
+            </a:r>
+          </a:p>
+        </p:txBody>
+      </p:sp>
+      <p:sp>
+        <p:nvSpPr>
+          <p:cNvPr id="29" name="TextBox 28"/>
+          <p:cNvSpPr txBox="1"/>
+          <p:nvPr/>
+        </p:nvSpPr>
+        <p:spPr>
+          <a:xfrm>
+            <a:off x="566928" y="6473952"/>
+            <a:ext cx="9692640" cy="182880"/>
+          </a:xfrm>
+          <a:prstGeom prst="rect">
+            <a:avLst/>
+          </a:prstGeom>
+          <a:noFill/>
+        </p:spPr>
+        <p:txBody>
+          <a:bodyPr wrap="square" lIns="18288" rIns="18288" tIns="18288" bIns="18288" anchor="ctr">
+            <a:spAutoFit/>
+          </a:bodyPr>
+          <a:lstStyle/>
+          <a:p>
+            <a:pPr algn="l">
+              <a:defRPr sz="800" b="1">
+                <a:solidFill>
+                  <a:srgbClr val="637389"/>
+                </a:solidFill>
+                <a:latin typeface="Aptos"/>
+              </a:defRPr>
+            </a:pPr>
+            <a:r>
+              <a:t>MEVZUATAGENT  •  YEREL  •  ONAYLI  •  DENETLENEBİLİR</a:t>
+            </a:r>
+          </a:p>
+        </p:txBody>
+      </p:sp>
+      <p:sp>
+        <p:nvSpPr>
+          <p:cNvPr id="30" name="TextBox 29"/>
+          <p:cNvSpPr txBox="1"/>
+          <p:nvPr/>
+        </p:nvSpPr>
+        <p:spPr>
+          <a:xfrm>
+            <a:off x="11109960" y="6419088"/>
+            <a:ext cx="502920" cy="274320"/>
+          </a:xfrm>
+          <a:prstGeom prst="rect">
+            <a:avLst/>
+          </a:prstGeom>
+          <a:noFill/>
+        </p:spPr>
+        <p:txBody>
+          <a:bodyPr wrap="square" lIns="18288" rIns="18288" tIns="18288" bIns="18288" anchor="ctr">
+            <a:spAutoFit/>
+          </a:bodyPr>
+          <a:lstStyle/>
+          <a:p>
+            <a:pPr algn="r">
+              <a:defRPr sz="1000" b="1">
+                <a:solidFill>
+                  <a:srgbClr val="637389"/>
+                </a:solidFill>
+                <a:latin typeface="Aptos"/>
+              </a:defRPr>
+            </a:pPr>
+            <a:r>
+              <a:t>21</a:t>
+            </a:r>
+          </a:p>
+        </p:txBody>
+      </p:sp>
+    </p:spTree>
+  </p:cSld>
+  <p:clrMapOvr>
+    <a:masterClrMapping/>
+  </p:clrMapOvr>
+</p:sld>
+</file>
+
+<file path=ppt/slides/slide22.xml><?xml version="1.0" encoding="utf-8"?>
+<p:sld xmlns:a="http://schemas.openxmlformats.org/drawingml/2006/main" xmlns:p="http://schemas.openxmlformats.org/presentationml/2006/main" xmlns:r="http://schemas.openxmlformats.org/officeDocument/2006/relationships">
+  <p:cSld>
+    <p:bg>
+      <p:bgPr>
+        <a:solidFill>
           <a:srgbClr val="112240"/>
         </a:solidFill>
         <a:effectLst/>
@@ -14507,7 +16243,7 @@
               </a:defRPr>
             </a:pPr>
             <a:r>
-              <a:t>20</a:t>
+              <a:t>22</a:t>
             </a:r>
           </a:p>
         </p:txBody>

--- a/docs/MevzuatAgent_Odev_Sunumu_TR.pptx
+++ b/docs/MevzuatAgent_Odev_Sunumu_TR.pptx
@@ -27,6 +27,8 @@
     <p:sldId id="275" r:id="rId26"/>
     <p:sldId id="276" r:id="rId27"/>
     <p:sldId id="277" r:id="rId28"/>
+    <p:sldId id="278" r:id="rId29"/>
+    <p:sldId id="279" r:id="rId30"/>
   </p:sldIdLst>
   <p:sldSz cx="12191695" cy="6858000" type="screen4x3"/>
   <p:notesSz cx="6858000" cy="9144000"/>
@@ -3511,14 +3513,38 @@
               </a:defRPr>
             </a:pPr>
             <a:r>
-              <a:t>Türkçe sunum  |  Gereksinimler, mimari, güvenlik ve test</a:t>
-            </a:r>
-          </a:p>
-        </p:txBody>
-      </p:sp>
-      <p:sp>
-        <p:nvSpPr>
-          <p:cNvPr id="12" name="TextBox 11"/>
+              <a:t>Sohbet arayüzü  |  Uçtan uca akış  |  Onaylı remediation ve PR</a:t>
+            </a:r>
+          </a:p>
+        </p:txBody>
+      </p:sp>
+      <p:pic>
+        <p:nvPicPr>
+          <p:cNvPr id="12" name="Picture 11" descr="softtech-logo.png"/>
+          <p:cNvPicPr>
+            <a:picLocks noChangeAspect="1"/>
+          </p:cNvPicPr>
+          <p:nvPr/>
+        </p:nvPicPr>
+        <p:blipFill>
+          <a:blip r:embed="rId2"/>
+          <a:stretch>
+            <a:fillRect/>
+          </a:stretch>
+        </p:blipFill>
+        <p:spPr>
+          <a:xfrm>
+            <a:off x="9646920" y="5074920"/>
+            <a:ext cx="1600200" cy="694592"/>
+          </a:xfrm>
+          <a:prstGeom prst="rect">
+            <a:avLst/>
+          </a:prstGeom>
+        </p:spPr>
+      </p:pic>
+      <p:sp>
+        <p:nvSpPr>
+          <p:cNvPr id="13" name="TextBox 12"/>
           <p:cNvSpPr txBox="1"/>
           <p:nvPr/>
         </p:nvSpPr>
@@ -3554,7 +3580,7 @@
       </p:sp>
       <p:sp>
         <p:nvSpPr>
-          <p:cNvPr id="13" name="TextBox 12"/>
+          <p:cNvPr id="14" name="TextBox 13"/>
           <p:cNvSpPr txBox="1"/>
           <p:nvPr/>
         </p:nvSpPr>
@@ -6955,7 +6981,7 @@
               </a:defRPr>
             </a:pPr>
             <a:r>
-              <a:t>Çalıştır</a:t>
+              <a:t>Sohbeti başlat</a:t>
             </a:r>
           </a:p>
         </p:txBody>
@@ -6991,7 +7017,7 @@
               </a:defRPr>
             </a:pPr>
             <a:r>
-              <a:t>mevzuat-agent Türkçe menüsü</a:t>
+              <a:t>mevzuat-agent • yerel Ollama</a:t>
             </a:r>
           </a:p>
         </p:txBody>
@@ -8774,7 +8800,7 @@
               </a:defRPr>
             </a:pPr>
             <a:r>
-              <a:t>44</a:t>
+              <a:t>56</a:t>
             </a:r>
           </a:p>
         </p:txBody>
@@ -9222,7 +9248,7 @@
               </a:defRPr>
             </a:pPr>
             <a:r>
-              <a:t>Bu 44 test yazılım davranışını doğrular; gerçek model çıktısı ve sentetik düzeltme kabul testleri ayrıca sınanmıştır.</a:t>
+              <a:t>56 otomatik test yazılım davranışını doğrular; gerçek model çıktısı hukuki doğruluğu kanıtlamaz.</a:t>
             </a:r>
           </a:p>
         </p:txBody>
@@ -9958,7 +9984,7 @@
               </a:defRPr>
             </a:pPr>
             <a:r>
-              <a:t>Test fixture deposu GitHub'da özeldir. Sentetik kodu üretim sistemlerinde kullanmayın.</a:t>
+              <a:t>Fixture yerel ve deterministiktir; sentetik kodu üretim sistemlerinde kullanmayın.</a:t>
             </a:r>
           </a:p>
         </p:txBody>
@@ -10128,7 +10154,7 @@
               </a:defRPr>
             </a:pPr>
             <a:r>
-              <a:t>Model havuzu test edildi; yanıt kalitesi değişti</a:t>
+              <a:t>Model hatası ve deterministik demo ayrı raporlandı</a:t>
             </a:r>
           </a:p>
         </p:txBody>
@@ -10164,7 +10190,7 @@
               </a:defRPr>
             </a:pPr>
             <a:r>
-              <a:t>2026-10-29: resmî bağlantılardaki PDF'ler indirildi, yerel BM25 indeksi kuruldu ve özel sentetik demo deposu klonlandı.</a:t>
+              <a:t>Gerçek model kalitesi ile akışın yazılım testleri birbirinden ayrılır.</a:t>
             </a:r>
           </a:p>
         </p:txBody>
@@ -10286,7 +10312,7 @@
               </a:defRPr>
             </a:pPr>
             <a:r>
-              <a:t>Girdi ve hazırlık</a:t>
+              <a:t>Mevzuat hazırlığı</a:t>
             </a:r>
           </a:p>
         </p:txBody>
@@ -10330,11 +10356,11 @@
             </a:r>
             <a:br/>
             <a:r>
-              <a:t>•  Test deposu klonlandı</a:t>
+              <a:t>•  Yerel BM25 indeksi</a:t>
             </a:r>
             <a:br/>
             <a:r>
-              <a:t>•  2 kaynak dosyası • 6 eşleşen parça</a:t>
+              <a:t>•  Demo fixture deposu hazır</a:t>
             </a:r>
           </a:p>
         </p:txBody>
@@ -10456,7 +10482,7 @@
               </a:defRPr>
             </a:pPr>
             <a:r>
-              <a:t>Hızlı modeller</a:t>
+              <a:t>Gerçek model denemesi</a:t>
             </a:r>
           </a:p>
         </p:txBody>
@@ -10492,19 +10518,19 @@
               </a:defRPr>
             </a:pPr>
             <a:r>
-              <a:t>•  llama3.2:1b · 65,60 token/sn · ~55 sn</a:t>
+              <a:t>•  llama3.2:1b yanıtı geçersiz JSON</a:t>
             </a:r>
             <a:br/>
             <a:r>
-              <a:t>•  2 dosyada JSON yanıtı bozuk</a:t>
+              <a:t>•  Model taraması: 0 doğrulanmış dosya</a:t>
             </a:r>
             <a:br/>
             <a:r>
-              <a:t>•  qwen3:4b · 28,25 token/sn · ~128 sn</a:t>
+              <a:t>•  Gerçek remediation durduruldu</a:t>
             </a:r>
             <a:br/>
             <a:r>
-              <a:t>•  2 dosyada boş yanıt</a:t>
+              <a:t>•  Hata raporda açıkça gösterildi</a:t>
             </a:r>
           </a:p>
         </p:txBody>
@@ -10626,7 +10652,7 @@
               </a:defRPr>
             </a:pPr>
             <a:r>
-              <a:t>Gemma sonucu</a:t>
+              <a:t>Deterministik E2E</a:t>
             </a:r>
           </a:p>
         </p:txBody>
@@ -10662,19 +10688,19 @@
               </a:defRPr>
             </a:pPr>
             <a:r>
-              <a:t>•  gemma3:4b · 25,31 token/sn · ~143 sn</a:t>
+              <a:t>•  Fixture üzerinden 2 sentetik bulgu</a:t>
             </a:r>
             <a:br/>
             <a:r>
-              <a:t>•  2/2 dosya tarandı</a:t>
+              <a:t>•  Remediation izole worktree'de</a:t>
             </a:r>
             <a:br/>
             <a:r>
-              <a:t>•  1 adet LOW bulgu üretildi</a:t>
+              <a:t>•  pytest: 2 geçti</a:t>
             </a:r>
             <a:br/>
             <a:r>
-              <a:t>•  Atıf/kanıt var; açıklama spekülatif</a:t>
+              <a:t>•  PR yanıtı yerel mock ile doğrulandı</a:t>
             </a:r>
           </a:p>
         </p:txBody>
@@ -10753,7 +10779,7 @@
               </a:defRPr>
             </a:pPr>
             <a:r>
-              <a:t>Önemli: hız tahmini çıktı kalitesini ölçmüyor. Gemma bulgusu uzman doğrulaması gerektiriyor; hızlı modellerin hatalı/boş çıktısı tarama raporlarında görünür.</a:t>
+              <a:t>Canlı model taraması başarısız olduğunda sentetik rapor yalnızca demo/test amacıyla ayrı üretilir; gerçek tarama veya PR girdisi olmaz.</a:t>
             </a:r>
           </a:p>
         </p:txBody>
@@ -11826,7 +11852,7 @@
               </a:defRPr>
             </a:pPr>
             <a:r>
-              <a:t>15  •  GÜVENLIK VE MAHREMIYET</a:t>
+              <a:t>18  •  SOHBETTEN RAPORA UÇTAN UCA AKIŞ</a:t>
             </a:r>
           </a:p>
         </p:txBody>
@@ -11862,7 +11888,7 @@
               </a:defRPr>
             </a:pPr>
             <a:r>
-              <a:t>Güvenli varsayılanlar ve açık sınırlar</a:t>
+              <a:t>Kullanıcı sohbeti yönlendirir; pipeline her adımda onay ister</a:t>
             </a:r>
           </a:p>
         </p:txBody>
@@ -11898,7 +11924,7 @@
               </a:defRPr>
             </a:pPr>
             <a:r>
-              <a:t>Kod ve mevzuat bağlamı yerel Ollama'ya gider; tarama akışı bulguları uzman incelemesine sunar.</a:t>
+              <a:t>Sistem promptu proje kapsamını korur; Ollama yanıtı ve pipeline işlemleri birbirinden ayrıdır.</a:t>
             </a:r>
           </a:p>
         </p:txBody>
@@ -11911,8 +11937,8 @@
         </p:nvSpPr>
         <p:spPr>
           <a:xfrm>
-            <a:off x="713232" y="1828800"/>
-            <a:ext cx="5212080" cy="2011680"/>
+            <a:off x="658368" y="1965960"/>
+            <a:ext cx="1627632" cy="1536192"/>
           </a:xfrm>
           <a:prstGeom prst="roundRect">
             <a:avLst/>
@@ -11948,141 +11974,162 @@
       </p:sp>
       <p:sp>
         <p:nvSpPr>
-          <p:cNvPr id="6" name="Rectangle 5"/>
+          <p:cNvPr id="6" name="TextBox 5"/>
+          <p:cNvSpPr txBox="1"/>
+          <p:nvPr/>
+        </p:nvSpPr>
+        <p:spPr>
+          <a:xfrm>
+            <a:off x="795528" y="2121408"/>
+            <a:ext cx="365760" cy="219456"/>
+          </a:xfrm>
+          <a:prstGeom prst="rect">
+            <a:avLst/>
+          </a:prstGeom>
+          <a:noFill/>
+        </p:spPr>
+        <p:txBody>
+          <a:bodyPr wrap="square" lIns="18288" rIns="18288" tIns="18288" bIns="18288" anchor="ctr">
+            <a:spAutoFit/>
+          </a:bodyPr>
+          <a:lstStyle/>
+          <a:p>
+            <a:pPr algn="l">
+              <a:defRPr sz="1000" b="1">
+                <a:solidFill>
+                  <a:srgbClr val="00AFA0"/>
+                </a:solidFill>
+                <a:latin typeface="Aptos"/>
+              </a:defRPr>
+            </a:pPr>
+            <a:r>
+              <a:t>01</a:t>
+            </a:r>
+          </a:p>
+        </p:txBody>
+      </p:sp>
+      <p:sp>
+        <p:nvSpPr>
+          <p:cNvPr id="7" name="TextBox 6"/>
+          <p:cNvSpPr txBox="1"/>
+          <p:nvPr/>
+        </p:nvSpPr>
+        <p:spPr>
+          <a:xfrm>
+            <a:off x="795528" y="2441448"/>
+            <a:ext cx="1353312" cy="292608"/>
+          </a:xfrm>
+          <a:prstGeom prst="rect">
+            <a:avLst/>
+          </a:prstGeom>
+          <a:noFill/>
+        </p:spPr>
+        <p:txBody>
+          <a:bodyPr wrap="square" lIns="18288" rIns="18288" tIns="18288" bIns="18288" anchor="ctr">
+            <a:spAutoFit/>
+          </a:bodyPr>
+          <a:lstStyle/>
+          <a:p>
+            <a:pPr algn="l">
+              <a:defRPr sz="1400" b="1">
+                <a:solidFill>
+                  <a:srgbClr val="112240"/>
+                </a:solidFill>
+                <a:latin typeface="Aptos"/>
+              </a:defRPr>
+            </a:pPr>
+            <a:r>
+              <a:t>Sohbet</a:t>
+            </a:r>
+          </a:p>
+        </p:txBody>
+      </p:sp>
+      <p:sp>
+        <p:nvSpPr>
+          <p:cNvPr id="8" name="TextBox 7"/>
+          <p:cNvSpPr txBox="1"/>
+          <p:nvPr/>
+        </p:nvSpPr>
+        <p:spPr>
+          <a:xfrm>
+            <a:off x="795528" y="2834640"/>
+            <a:ext cx="1353312" cy="457200"/>
+          </a:xfrm>
+          <a:prstGeom prst="rect">
+            <a:avLst/>
+          </a:prstGeom>
+          <a:noFill/>
+        </p:spPr>
+        <p:txBody>
+          <a:bodyPr wrap="square" lIns="18288" rIns="18288" tIns="18288" bIns="18288" anchor="ctr">
+            <a:spAutoFit/>
+          </a:bodyPr>
+          <a:lstStyle/>
+          <a:p>
+            <a:pPr algn="l">
+              <a:defRPr sz="1000" b="0">
+                <a:solidFill>
+                  <a:srgbClr val="637389"/>
+                </a:solidFill>
+                <a:latin typeface="Aptos"/>
+              </a:defRPr>
+            </a:pPr>
+            <a:r>
+              <a:t>Soru sor</a:t>
+            </a:r>
+            <a:br/>
+            <a:r>
+              <a:t>veya devam yaz</a:t>
+            </a:r>
+          </a:p>
+        </p:txBody>
+      </p:sp>
+      <p:sp>
+        <p:nvSpPr>
+          <p:cNvPr id="9" name="TextBox 8"/>
+          <p:cNvSpPr txBox="1"/>
+          <p:nvPr/>
+        </p:nvSpPr>
+        <p:spPr>
+          <a:xfrm>
+            <a:off x="2304288" y="2542032"/>
+            <a:ext cx="237744" cy="292608"/>
+          </a:xfrm>
+          <a:prstGeom prst="rect">
+            <a:avLst/>
+          </a:prstGeom>
+          <a:noFill/>
+        </p:spPr>
+        <p:txBody>
+          <a:bodyPr wrap="square" lIns="18288" rIns="18288" tIns="18288" bIns="18288" anchor="ctr">
+            <a:spAutoFit/>
+          </a:bodyPr>
+          <a:lstStyle/>
+          <a:p>
+            <a:pPr algn="ctr">
+              <a:defRPr sz="1700" b="1">
+                <a:solidFill>
+                  <a:srgbClr val="00AFA0"/>
+                </a:solidFill>
+                <a:latin typeface="Aptos"/>
+              </a:defRPr>
+            </a:pPr>
+            <a:r>
+              <a:t>→</a:t>
+            </a:r>
+          </a:p>
+        </p:txBody>
+      </p:sp>
+      <p:sp>
+        <p:nvSpPr>
+          <p:cNvPr id="10" name="Rounded Rectangle 9"/>
           <p:cNvSpPr/>
           <p:nvPr/>
         </p:nvSpPr>
         <p:spPr>
           <a:xfrm>
-            <a:off x="713232" y="1828800"/>
-            <a:ext cx="64008" cy="2011680"/>
-          </a:xfrm>
-          <a:prstGeom prst="rect">
-            <a:avLst/>
-          </a:prstGeom>
-          <a:solidFill>
-            <a:srgbClr val="00AFA0"/>
-          </a:solidFill>
-          <a:ln>
-            <a:noFill/>
-          </a:ln>
-        </p:spPr>
-        <p:style>
-          <a:lnRef idx="1">
-            <a:schemeClr val="accent1"/>
-          </a:lnRef>
-          <a:fillRef idx="3">
-            <a:schemeClr val="accent1"/>
-          </a:fillRef>
-          <a:effectRef idx="2">
-            <a:schemeClr val="accent1"/>
-          </a:effectRef>
-          <a:fontRef idx="minor">
-            <a:schemeClr val="lt1"/>
-          </a:fontRef>
-        </p:style>
-        <p:txBody>
-          <a:bodyPr rtlCol="0" anchor="ctr"/>
-          <a:lstStyle/>
-          <a:p>
-            <a:pPr algn="ctr"/>
-          </a:p>
-        </p:txBody>
-      </p:sp>
-      <p:sp>
-        <p:nvSpPr>
-          <p:cNvPr id="7" name="TextBox 6"/>
-          <p:cNvSpPr txBox="1"/>
-          <p:nvPr/>
-        </p:nvSpPr>
-        <p:spPr>
-          <a:xfrm>
-            <a:off x="914400" y="1956816"/>
-            <a:ext cx="4828032" cy="347472"/>
-          </a:xfrm>
-          <a:prstGeom prst="rect">
-            <a:avLst/>
-          </a:prstGeom>
-          <a:noFill/>
-        </p:spPr>
-        <p:txBody>
-          <a:bodyPr wrap="square" lIns="18288" rIns="18288" tIns="18288" bIns="18288" anchor="ctr">
-            <a:spAutoFit/>
-          </a:bodyPr>
-          <a:lstStyle/>
-          <a:p>
-            <a:pPr algn="l">
-              <a:defRPr sz="1600" b="1">
-                <a:solidFill>
-                  <a:srgbClr val="112240"/>
-                </a:solidFill>
-                <a:latin typeface="Aptos"/>
-              </a:defRPr>
-            </a:pPr>
-            <a:r>
-              <a:t>Kontroller</a:t>
-            </a:r>
-          </a:p>
-        </p:txBody>
-      </p:sp>
-      <p:sp>
-        <p:nvSpPr>
-          <p:cNvPr id="8" name="TextBox 7"/>
-          <p:cNvSpPr txBox="1"/>
-          <p:nvPr/>
-        </p:nvSpPr>
-        <p:spPr>
-          <a:xfrm>
-            <a:off x="932688" y="2377440"/>
-            <a:ext cx="4791456" cy="1353312"/>
-          </a:xfrm>
-          <a:prstGeom prst="rect">
-            <a:avLst/>
-          </a:prstGeom>
-          <a:noFill/>
-        </p:spPr>
-        <p:txBody>
-          <a:bodyPr wrap="square" lIns="18288" rIns="18288" tIns="18288" bIns="18288" anchor="ctr">
-            <a:spAutoFit/>
-          </a:bodyPr>
-          <a:lstStyle/>
-          <a:p>
-            <a:pPr algn="l">
-              <a:defRPr sz="1200" b="0">
-                <a:solidFill>
-                  <a:srgbClr val="223045"/>
-                </a:solidFill>
-                <a:latin typeface="Aptos"/>
-              </a:defRPr>
-            </a:pPr>
-            <a:r>
-              <a:t>•  Klonlama ve tarama kullanıcı onaylıdır</a:t>
-            </a:r>
-            <a:br/>
-            <a:r>
-              <a:t>•  Düzeltme ayrı worktree'de uygulanır</a:t>
-            </a:r>
-            <a:br/>
-            <a:r>
-              <a:t>•  Test ve PR ayrı onay ister</a:t>
-            </a:r>
-            <a:br/>
-            <a:r>
-              <a:t>•  PR için yalnız beklenen dosyalar seçilir</a:t>
-            </a:r>
-          </a:p>
-        </p:txBody>
-      </p:sp>
-      <p:sp>
-        <p:nvSpPr>
-          <p:cNvPr id="9" name="Rounded Rectangle 8"/>
-          <p:cNvSpPr/>
-          <p:nvPr/>
-        </p:nvSpPr>
-        <p:spPr>
-          <a:xfrm>
-            <a:off x="6172200" y="1828800"/>
-            <a:ext cx="5212080" cy="2011680"/>
+            <a:off x="2560320" y="1965960"/>
+            <a:ext cx="1627632" cy="1536192"/>
           </a:xfrm>
           <a:prstGeom prst="roundRect">
             <a:avLst/>
@@ -12118,20 +12165,168 @@
       </p:sp>
       <p:sp>
         <p:nvSpPr>
-          <p:cNvPr id="10" name="Rectangle 9"/>
+          <p:cNvPr id="11" name="TextBox 10"/>
+          <p:cNvSpPr txBox="1"/>
+          <p:nvPr/>
+        </p:nvSpPr>
+        <p:spPr>
+          <a:xfrm>
+            <a:off x="2697479" y="2121408"/>
+            <a:ext cx="365760" cy="219456"/>
+          </a:xfrm>
+          <a:prstGeom prst="rect">
+            <a:avLst/>
+          </a:prstGeom>
+          <a:noFill/>
+        </p:spPr>
+        <p:txBody>
+          <a:bodyPr wrap="square" lIns="18288" rIns="18288" tIns="18288" bIns="18288" anchor="ctr">
+            <a:spAutoFit/>
+          </a:bodyPr>
+          <a:lstStyle/>
+          <a:p>
+            <a:pPr algn="l">
+              <a:defRPr sz="1000" b="1">
+                <a:solidFill>
+                  <a:srgbClr val="00AFA0"/>
+                </a:solidFill>
+                <a:latin typeface="Aptos"/>
+              </a:defRPr>
+            </a:pPr>
+            <a:r>
+              <a:t>02</a:t>
+            </a:r>
+          </a:p>
+        </p:txBody>
+      </p:sp>
+      <p:sp>
+        <p:nvSpPr>
+          <p:cNvPr id="12" name="TextBox 11"/>
+          <p:cNvSpPr txBox="1"/>
+          <p:nvPr/>
+        </p:nvSpPr>
+        <p:spPr>
+          <a:xfrm>
+            <a:off x="2697479" y="2441448"/>
+            <a:ext cx="1353312" cy="292608"/>
+          </a:xfrm>
+          <a:prstGeom prst="rect">
+            <a:avLst/>
+          </a:prstGeom>
+          <a:noFill/>
+        </p:spPr>
+        <p:txBody>
+          <a:bodyPr wrap="square" lIns="18288" rIns="18288" tIns="18288" bIns="18288" anchor="ctr">
+            <a:spAutoFit/>
+          </a:bodyPr>
+          <a:lstStyle/>
+          <a:p>
+            <a:pPr algn="l">
+              <a:defRPr sz="1400" b="1">
+                <a:solidFill>
+                  <a:srgbClr val="112240"/>
+                </a:solidFill>
+                <a:latin typeface="Aptos"/>
+              </a:defRPr>
+            </a:pPr>
+            <a:r>
+              <a:t>Kapsam</a:t>
+            </a:r>
+          </a:p>
+        </p:txBody>
+      </p:sp>
+      <p:sp>
+        <p:nvSpPr>
+          <p:cNvPr id="13" name="TextBox 12"/>
+          <p:cNvSpPr txBox="1"/>
+          <p:nvPr/>
+        </p:nvSpPr>
+        <p:spPr>
+          <a:xfrm>
+            <a:off x="2697479" y="2834640"/>
+            <a:ext cx="1353312" cy="457200"/>
+          </a:xfrm>
+          <a:prstGeom prst="rect">
+            <a:avLst/>
+          </a:prstGeom>
+          <a:noFill/>
+        </p:spPr>
+        <p:txBody>
+          <a:bodyPr wrap="square" lIns="18288" rIns="18288" tIns="18288" bIns="18288" anchor="ctr">
+            <a:spAutoFit/>
+          </a:bodyPr>
+          <a:lstStyle/>
+          <a:p>
+            <a:pPr algn="l">
+              <a:defRPr sz="1000" b="0">
+                <a:solidFill>
+                  <a:srgbClr val="637389"/>
+                </a:solidFill>
+                <a:latin typeface="Aptos"/>
+              </a:defRPr>
+            </a:pPr>
+            <a:r>
+              <a:t>Mevzuat seç</a:t>
+            </a:r>
+            <a:br/>
+            <a:r>
+              <a:t>1 • 2 • tümü</a:t>
+            </a:r>
+          </a:p>
+        </p:txBody>
+      </p:sp>
+      <p:sp>
+        <p:nvSpPr>
+          <p:cNvPr id="14" name="TextBox 13"/>
+          <p:cNvSpPr txBox="1"/>
+          <p:nvPr/>
+        </p:nvSpPr>
+        <p:spPr>
+          <a:xfrm>
+            <a:off x="4206240" y="2542032"/>
+            <a:ext cx="237744" cy="292608"/>
+          </a:xfrm>
+          <a:prstGeom prst="rect">
+            <a:avLst/>
+          </a:prstGeom>
+          <a:noFill/>
+        </p:spPr>
+        <p:txBody>
+          <a:bodyPr wrap="square" lIns="18288" rIns="18288" tIns="18288" bIns="18288" anchor="ctr">
+            <a:spAutoFit/>
+          </a:bodyPr>
+          <a:lstStyle/>
+          <a:p>
+            <a:pPr algn="ctr">
+              <a:defRPr sz="1700" b="1">
+                <a:solidFill>
+                  <a:srgbClr val="00AFA0"/>
+                </a:solidFill>
+                <a:latin typeface="Aptos"/>
+              </a:defRPr>
+            </a:pPr>
+            <a:r>
+              <a:t>→</a:t>
+            </a:r>
+          </a:p>
+        </p:txBody>
+      </p:sp>
+      <p:sp>
+        <p:nvSpPr>
+          <p:cNvPr id="15" name="Rounded Rectangle 14"/>
           <p:cNvSpPr/>
           <p:nvPr/>
         </p:nvSpPr>
         <p:spPr>
           <a:xfrm>
-            <a:off x="6172200" y="1828800"/>
-            <a:ext cx="64008" cy="2011680"/>
-          </a:xfrm>
-          <a:prstGeom prst="rect">
+            <a:off x="4462272" y="1965960"/>
+            <a:ext cx="1627632" cy="1536192"/>
+          </a:xfrm>
+          <a:prstGeom prst="roundRect">
             <a:avLst/>
           </a:prstGeom>
           <a:solidFill>
-            <a:srgbClr val="F8BC4A"/>
+            <a:srgbClr val="FFFFFF"/>
           </a:solidFill>
           <a:ln>
             <a:noFill/>
@@ -12161,28 +12356,64 @@
       </p:sp>
       <p:sp>
         <p:nvSpPr>
-          <p:cNvPr id="11" name="TextBox 10"/>
-          <p:cNvSpPr txBox="1"/>
-          <p:nvPr/>
-        </p:nvSpPr>
-        <p:spPr>
-          <a:xfrm>
-            <a:off x="6373368" y="1956816"/>
-            <a:ext cx="4828032" cy="347472"/>
-          </a:xfrm>
-          <a:prstGeom prst="rect">
-            <a:avLst/>
-          </a:prstGeom>
-          <a:noFill/>
-        </p:spPr>
-        <p:txBody>
-          <a:bodyPr wrap="square" lIns="18288" rIns="18288" tIns="18288" bIns="18288" anchor="ctr">
-            <a:spAutoFit/>
-          </a:bodyPr>
-          <a:lstStyle/>
-          <a:p>
-            <a:pPr algn="l">
-              <a:defRPr sz="1600" b="1">
+          <p:cNvPr id="16" name="TextBox 15"/>
+          <p:cNvSpPr txBox="1"/>
+          <p:nvPr/>
+        </p:nvSpPr>
+        <p:spPr>
+          <a:xfrm>
+            <a:off x="4599432" y="2121408"/>
+            <a:ext cx="365760" cy="219456"/>
+          </a:xfrm>
+          <a:prstGeom prst="rect">
+            <a:avLst/>
+          </a:prstGeom>
+          <a:noFill/>
+        </p:spPr>
+        <p:txBody>
+          <a:bodyPr wrap="square" lIns="18288" rIns="18288" tIns="18288" bIns="18288" anchor="ctr">
+            <a:spAutoFit/>
+          </a:bodyPr>
+          <a:lstStyle/>
+          <a:p>
+            <a:pPr algn="l">
+              <a:defRPr sz="1000" b="1">
+                <a:solidFill>
+                  <a:srgbClr val="00AFA0"/>
+                </a:solidFill>
+                <a:latin typeface="Aptos"/>
+              </a:defRPr>
+            </a:pPr>
+            <a:r>
+              <a:t>03</a:t>
+            </a:r>
+          </a:p>
+        </p:txBody>
+      </p:sp>
+      <p:sp>
+        <p:nvSpPr>
+          <p:cNvPr id="17" name="TextBox 16"/>
+          <p:cNvSpPr txBox="1"/>
+          <p:nvPr/>
+        </p:nvSpPr>
+        <p:spPr>
+          <a:xfrm>
+            <a:off x="4599432" y="2441448"/>
+            <a:ext cx="1353312" cy="292608"/>
+          </a:xfrm>
+          <a:prstGeom prst="rect">
+            <a:avLst/>
+          </a:prstGeom>
+          <a:noFill/>
+        </p:spPr>
+        <p:txBody>
+          <a:bodyPr wrap="square" lIns="18288" rIns="18288" tIns="18288" bIns="18288" anchor="ctr">
+            <a:spAutoFit/>
+          </a:bodyPr>
+          <a:lstStyle/>
+          <a:p>
+            <a:pPr algn="l">
+              <a:defRPr sz="1400" b="1">
                 <a:solidFill>
                   <a:srgbClr val="112240"/>
                 </a:solidFill>
@@ -12190,75 +12421,103 @@
               </a:defRPr>
             </a:pPr>
             <a:r>
-              <a:t>Kullanım sorumluluğu</a:t>
-            </a:r>
-          </a:p>
-        </p:txBody>
-      </p:sp>
-      <p:sp>
-        <p:nvSpPr>
-          <p:cNvPr id="12" name="TextBox 11"/>
-          <p:cNvSpPr txBox="1"/>
-          <p:nvPr/>
-        </p:nvSpPr>
-        <p:spPr>
-          <a:xfrm>
-            <a:off x="6391656" y="2377440"/>
-            <a:ext cx="4791456" cy="1353312"/>
-          </a:xfrm>
-          <a:prstGeom prst="rect">
-            <a:avLst/>
-          </a:prstGeom>
-          <a:noFill/>
-        </p:spPr>
-        <p:txBody>
-          <a:bodyPr wrap="square" lIns="18288" rIns="18288" tIns="18288" bIns="18288" anchor="ctr">
-            <a:spAutoFit/>
-          </a:bodyPr>
-          <a:lstStyle/>
-          <a:p>
-            <a:pPr algn="l">
-              <a:defRPr sz="1200" b="0">
-                <a:solidFill>
-                  <a:srgbClr val="223045"/>
-                </a:solidFill>
-                <a:latin typeface="Aptos"/>
-              </a:defRPr>
-            </a:pPr>
-            <a:r>
-              <a:t>•  İndirilen kaynağın güncelliğini denetleyin</a:t>
+              <a:t>Hazırlık</a:t>
+            </a:r>
+          </a:p>
+        </p:txBody>
+      </p:sp>
+      <p:sp>
+        <p:nvSpPr>
+          <p:cNvPr id="18" name="TextBox 17"/>
+          <p:cNvSpPr txBox="1"/>
+          <p:nvPr/>
+        </p:nvSpPr>
+        <p:spPr>
+          <a:xfrm>
+            <a:off x="4599432" y="2834640"/>
+            <a:ext cx="1353312" cy="457200"/>
+          </a:xfrm>
+          <a:prstGeom prst="rect">
+            <a:avLst/>
+          </a:prstGeom>
+          <a:noFill/>
+        </p:spPr>
+        <p:txBody>
+          <a:bodyPr wrap="square" lIns="18288" rIns="18288" tIns="18288" bIns="18288" anchor="ctr">
+            <a:spAutoFit/>
+          </a:bodyPr>
+          <a:lstStyle/>
+          <a:p>
+            <a:pPr algn="l">
+              <a:defRPr sz="1000" b="0">
+                <a:solidFill>
+                  <a:srgbClr val="637389"/>
+                </a:solidFill>
+                <a:latin typeface="Aptos"/>
+              </a:defRPr>
+            </a:pPr>
+            <a:r>
+              <a:t>PDF → RAG</a:t>
             </a:r>
             <a:br/>
             <a:r>
-              <a:t>•  Yalnız güvendiğiniz projelerde test çalıştırın</a:t>
-            </a:r>
-            <a:br/>
-            <a:r>
-              <a:t>•  Model bulgusunu hukuk uzmanına doğrulatın</a:t>
-            </a:r>
-            <a:br/>
-            <a:r>
-              <a:t>•  Gerçek depoda yedek ve temiz çalışma alanı kullanın</a:t>
-            </a:r>
-          </a:p>
-        </p:txBody>
-      </p:sp>
-      <p:sp>
-        <p:nvSpPr>
-          <p:cNvPr id="13" name="Rounded Rectangle 12"/>
+              <a:t>Repo → klon</a:t>
+            </a:r>
+          </a:p>
+        </p:txBody>
+      </p:sp>
+      <p:sp>
+        <p:nvSpPr>
+          <p:cNvPr id="19" name="TextBox 18"/>
+          <p:cNvSpPr txBox="1"/>
+          <p:nvPr/>
+        </p:nvSpPr>
+        <p:spPr>
+          <a:xfrm>
+            <a:off x="6108192" y="2542032"/>
+            <a:ext cx="237744" cy="292608"/>
+          </a:xfrm>
+          <a:prstGeom prst="rect">
+            <a:avLst/>
+          </a:prstGeom>
+          <a:noFill/>
+        </p:spPr>
+        <p:txBody>
+          <a:bodyPr wrap="square" lIns="18288" rIns="18288" tIns="18288" bIns="18288" anchor="ctr">
+            <a:spAutoFit/>
+          </a:bodyPr>
+          <a:lstStyle/>
+          <a:p>
+            <a:pPr algn="ctr">
+              <a:defRPr sz="1700" b="1">
+                <a:solidFill>
+                  <a:srgbClr val="00AFA0"/>
+                </a:solidFill>
+                <a:latin typeface="Aptos"/>
+              </a:defRPr>
+            </a:pPr>
+            <a:r>
+              <a:t>→</a:t>
+            </a:r>
+          </a:p>
+        </p:txBody>
+      </p:sp>
+      <p:sp>
+        <p:nvSpPr>
+          <p:cNvPr id="20" name="Rounded Rectangle 19"/>
           <p:cNvSpPr/>
           <p:nvPr/>
         </p:nvSpPr>
         <p:spPr>
           <a:xfrm>
-            <a:off x="713232" y="4279392"/>
-            <a:ext cx="10671048" cy="896112"/>
+            <a:off x="6364224" y="1965960"/>
+            <a:ext cx="1627632" cy="1536192"/>
           </a:xfrm>
           <a:prstGeom prst="roundRect">
             <a:avLst/>
           </a:prstGeom>
           <a:solidFill>
-            <a:srgbClr val="FFF6DF"/>
+            <a:srgbClr val="FFFFFF"/>
           </a:solidFill>
           <a:ln>
             <a:noFill/>
@@ -12288,14 +12547,126 @@
       </p:sp>
       <p:sp>
         <p:nvSpPr>
-          <p:cNvPr id="14" name="TextBox 13"/>
-          <p:cNvSpPr txBox="1"/>
-          <p:nvPr/>
-        </p:nvSpPr>
-        <p:spPr>
-          <a:xfrm>
-            <a:off x="932688" y="4498848"/>
-            <a:ext cx="10195560" cy="402336"/>
+          <p:cNvPr id="21" name="TextBox 20"/>
+          <p:cNvSpPr txBox="1"/>
+          <p:nvPr/>
+        </p:nvSpPr>
+        <p:spPr>
+          <a:xfrm>
+            <a:off x="6501384" y="2121408"/>
+            <a:ext cx="365760" cy="219456"/>
+          </a:xfrm>
+          <a:prstGeom prst="rect">
+            <a:avLst/>
+          </a:prstGeom>
+          <a:noFill/>
+        </p:spPr>
+        <p:txBody>
+          <a:bodyPr wrap="square" lIns="18288" rIns="18288" tIns="18288" bIns="18288" anchor="ctr">
+            <a:spAutoFit/>
+          </a:bodyPr>
+          <a:lstStyle/>
+          <a:p>
+            <a:pPr algn="l">
+              <a:defRPr sz="1000" b="1">
+                <a:solidFill>
+                  <a:srgbClr val="00AFA0"/>
+                </a:solidFill>
+                <a:latin typeface="Aptos"/>
+              </a:defRPr>
+            </a:pPr>
+            <a:r>
+              <a:t>04</a:t>
+            </a:r>
+          </a:p>
+        </p:txBody>
+      </p:sp>
+      <p:sp>
+        <p:nvSpPr>
+          <p:cNvPr id="22" name="TextBox 21"/>
+          <p:cNvSpPr txBox="1"/>
+          <p:nvPr/>
+        </p:nvSpPr>
+        <p:spPr>
+          <a:xfrm>
+            <a:off x="6501384" y="2441448"/>
+            <a:ext cx="1353312" cy="292608"/>
+          </a:xfrm>
+          <a:prstGeom prst="rect">
+            <a:avLst/>
+          </a:prstGeom>
+          <a:noFill/>
+        </p:spPr>
+        <p:txBody>
+          <a:bodyPr wrap="square" lIns="18288" rIns="18288" tIns="18288" bIns="18288" anchor="ctr">
+            <a:spAutoFit/>
+          </a:bodyPr>
+          <a:lstStyle/>
+          <a:p>
+            <a:pPr algn="l">
+              <a:defRPr sz="1400" b="1">
+                <a:solidFill>
+                  <a:srgbClr val="112240"/>
+                </a:solidFill>
+                <a:latin typeface="Aptos"/>
+              </a:defRPr>
+            </a:pPr>
+            <a:r>
+              <a:t>Tahmin</a:t>
+            </a:r>
+          </a:p>
+        </p:txBody>
+      </p:sp>
+      <p:sp>
+        <p:nvSpPr>
+          <p:cNvPr id="23" name="TextBox 22"/>
+          <p:cNvSpPr txBox="1"/>
+          <p:nvPr/>
+        </p:nvSpPr>
+        <p:spPr>
+          <a:xfrm>
+            <a:off x="6501384" y="2834640"/>
+            <a:ext cx="1353312" cy="457200"/>
+          </a:xfrm>
+          <a:prstGeom prst="rect">
+            <a:avLst/>
+          </a:prstGeom>
+          <a:noFill/>
+        </p:spPr>
+        <p:txBody>
+          <a:bodyPr wrap="square" lIns="18288" rIns="18288" tIns="18288" bIns="18288" anchor="ctr">
+            <a:spAutoFit/>
+          </a:bodyPr>
+          <a:lstStyle/>
+          <a:p>
+            <a:pPr algn="l">
+              <a:defRPr sz="1000" b="0">
+                <a:solidFill>
+                  <a:srgbClr val="637389"/>
+                </a:solidFill>
+                <a:latin typeface="Aptos"/>
+              </a:defRPr>
+            </a:pPr>
+            <a:r>
+              <a:t>Model hızı</a:t>
+            </a:r>
+            <a:br/>
+            <a:r>
+              <a:t>Token • süre</a:t>
+            </a:r>
+          </a:p>
+        </p:txBody>
+      </p:sp>
+      <p:sp>
+        <p:nvSpPr>
+          <p:cNvPr id="24" name="TextBox 23"/>
+          <p:cNvSpPr txBox="1"/>
+          <p:nvPr/>
+        </p:nvSpPr>
+        <p:spPr>
+          <a:xfrm>
+            <a:off x="8010144" y="2542032"/>
+            <a:ext cx="237744" cy="292608"/>
           </a:xfrm>
           <a:prstGeom prst="rect">
             <a:avLst/>
@@ -12309,6 +12680,121 @@
           <a:lstStyle/>
           <a:p>
             <a:pPr algn="ctr">
+              <a:defRPr sz="1700" b="1">
+                <a:solidFill>
+                  <a:srgbClr val="00AFA0"/>
+                </a:solidFill>
+                <a:latin typeface="Aptos"/>
+              </a:defRPr>
+            </a:pPr>
+            <a:r>
+              <a:t>→</a:t>
+            </a:r>
+          </a:p>
+        </p:txBody>
+      </p:sp>
+      <p:sp>
+        <p:nvSpPr>
+          <p:cNvPr id="25" name="Rounded Rectangle 24"/>
+          <p:cNvSpPr/>
+          <p:nvPr/>
+        </p:nvSpPr>
+        <p:spPr>
+          <a:xfrm>
+            <a:off x="8266176" y="1965960"/>
+            <a:ext cx="1627632" cy="1536192"/>
+          </a:xfrm>
+          <a:prstGeom prst="roundRect">
+            <a:avLst/>
+          </a:prstGeom>
+          <a:solidFill>
+            <a:srgbClr val="FFFFFF"/>
+          </a:solidFill>
+          <a:ln>
+            <a:noFill/>
+          </a:ln>
+        </p:spPr>
+        <p:style>
+          <a:lnRef idx="1">
+            <a:schemeClr val="accent1"/>
+          </a:lnRef>
+          <a:fillRef idx="3">
+            <a:schemeClr val="accent1"/>
+          </a:fillRef>
+          <a:effectRef idx="2">
+            <a:schemeClr val="accent1"/>
+          </a:effectRef>
+          <a:fontRef idx="minor">
+            <a:schemeClr val="lt1"/>
+          </a:fontRef>
+        </p:style>
+        <p:txBody>
+          <a:bodyPr rtlCol="0" anchor="ctr"/>
+          <a:lstStyle/>
+          <a:p>
+            <a:pPr algn="ctr"/>
+          </a:p>
+        </p:txBody>
+      </p:sp>
+      <p:sp>
+        <p:nvSpPr>
+          <p:cNvPr id="26" name="TextBox 25"/>
+          <p:cNvSpPr txBox="1"/>
+          <p:nvPr/>
+        </p:nvSpPr>
+        <p:spPr>
+          <a:xfrm>
+            <a:off x="8403336" y="2121408"/>
+            <a:ext cx="365760" cy="219456"/>
+          </a:xfrm>
+          <a:prstGeom prst="rect">
+            <a:avLst/>
+          </a:prstGeom>
+          <a:noFill/>
+        </p:spPr>
+        <p:txBody>
+          <a:bodyPr wrap="square" lIns="18288" rIns="18288" tIns="18288" bIns="18288" anchor="ctr">
+            <a:spAutoFit/>
+          </a:bodyPr>
+          <a:lstStyle/>
+          <a:p>
+            <a:pPr algn="l">
+              <a:defRPr sz="1000" b="1">
+                <a:solidFill>
+                  <a:srgbClr val="00AFA0"/>
+                </a:solidFill>
+                <a:latin typeface="Aptos"/>
+              </a:defRPr>
+            </a:pPr>
+            <a:r>
+              <a:t>05</a:t>
+            </a:r>
+          </a:p>
+        </p:txBody>
+      </p:sp>
+      <p:sp>
+        <p:nvSpPr>
+          <p:cNvPr id="27" name="TextBox 26"/>
+          <p:cNvSpPr txBox="1"/>
+          <p:nvPr/>
+        </p:nvSpPr>
+        <p:spPr>
+          <a:xfrm>
+            <a:off x="8403336" y="2441448"/>
+            <a:ext cx="1353312" cy="292608"/>
+          </a:xfrm>
+          <a:prstGeom prst="rect">
+            <a:avLst/>
+          </a:prstGeom>
+          <a:noFill/>
+        </p:spPr>
+        <p:txBody>
+          <a:bodyPr wrap="square" lIns="18288" rIns="18288" tIns="18288" bIns="18288" anchor="ctr">
+            <a:spAutoFit/>
+          </a:bodyPr>
+          <a:lstStyle/>
+          <a:p>
+            <a:pPr algn="l">
               <a:defRPr sz="1400" b="1">
                 <a:solidFill>
                   <a:srgbClr val="112240"/>
@@ -12317,14 +12803,396 @@
               </a:defRPr>
             </a:pPr>
             <a:r>
-              <a:t>Otomasyon kanıtı düzenler; hukuki görüş, kesin uygunluk kararı veya güvenlik sertifikası vermez.</a:t>
-            </a:r>
-          </a:p>
-        </p:txBody>
-      </p:sp>
-      <p:sp>
-        <p:nvSpPr>
-          <p:cNvPr id="15" name="TextBox 14"/>
+              <a:t>Tarama</a:t>
+            </a:r>
+          </a:p>
+        </p:txBody>
+      </p:sp>
+      <p:sp>
+        <p:nvSpPr>
+          <p:cNvPr id="28" name="TextBox 27"/>
+          <p:cNvSpPr txBox="1"/>
+          <p:nvPr/>
+        </p:nvSpPr>
+        <p:spPr>
+          <a:xfrm>
+            <a:off x="8403336" y="2834640"/>
+            <a:ext cx="1353312" cy="457200"/>
+          </a:xfrm>
+          <a:prstGeom prst="rect">
+            <a:avLst/>
+          </a:prstGeom>
+          <a:noFill/>
+        </p:spPr>
+        <p:txBody>
+          <a:bodyPr wrap="square" lIns="18288" rIns="18288" tIns="18288" bIns="18288" anchor="ctr">
+            <a:spAutoFit/>
+          </a:bodyPr>
+          <a:lstStyle/>
+          <a:p>
+            <a:pPr algn="l">
+              <a:defRPr sz="1000" b="0">
+                <a:solidFill>
+                  <a:srgbClr val="637389"/>
+                </a:solidFill>
+                <a:latin typeface="Aptos"/>
+              </a:defRPr>
+            </a:pPr>
+            <a:r>
+              <a:t>Kapsam ve model</a:t>
+            </a:r>
+            <a:br/>
+            <a:r>
+              <a:t>kullanıcı onayı</a:t>
+            </a:r>
+          </a:p>
+        </p:txBody>
+      </p:sp>
+      <p:sp>
+        <p:nvSpPr>
+          <p:cNvPr id="29" name="TextBox 28"/>
+          <p:cNvSpPr txBox="1"/>
+          <p:nvPr/>
+        </p:nvSpPr>
+        <p:spPr>
+          <a:xfrm>
+            <a:off x="9912096" y="2542032"/>
+            <a:ext cx="237744" cy="292608"/>
+          </a:xfrm>
+          <a:prstGeom prst="rect">
+            <a:avLst/>
+          </a:prstGeom>
+          <a:noFill/>
+        </p:spPr>
+        <p:txBody>
+          <a:bodyPr wrap="square" lIns="18288" rIns="18288" tIns="18288" bIns="18288" anchor="ctr">
+            <a:spAutoFit/>
+          </a:bodyPr>
+          <a:lstStyle/>
+          <a:p>
+            <a:pPr algn="ctr">
+              <a:defRPr sz="1700" b="1">
+                <a:solidFill>
+                  <a:srgbClr val="00AFA0"/>
+                </a:solidFill>
+                <a:latin typeface="Aptos"/>
+              </a:defRPr>
+            </a:pPr>
+            <a:r>
+              <a:t>→</a:t>
+            </a:r>
+          </a:p>
+        </p:txBody>
+      </p:sp>
+      <p:sp>
+        <p:nvSpPr>
+          <p:cNvPr id="30" name="Rounded Rectangle 29"/>
+          <p:cNvSpPr/>
+          <p:nvPr/>
+        </p:nvSpPr>
+        <p:spPr>
+          <a:xfrm>
+            <a:off x="10168128" y="1965960"/>
+            <a:ext cx="1627632" cy="1536192"/>
+          </a:xfrm>
+          <a:prstGeom prst="roundRect">
+            <a:avLst/>
+          </a:prstGeom>
+          <a:solidFill>
+            <a:srgbClr val="FFFFFF"/>
+          </a:solidFill>
+          <a:ln>
+            <a:noFill/>
+          </a:ln>
+        </p:spPr>
+        <p:style>
+          <a:lnRef idx="1">
+            <a:schemeClr val="accent1"/>
+          </a:lnRef>
+          <a:fillRef idx="3">
+            <a:schemeClr val="accent1"/>
+          </a:fillRef>
+          <a:effectRef idx="2">
+            <a:schemeClr val="accent1"/>
+          </a:effectRef>
+          <a:fontRef idx="minor">
+            <a:schemeClr val="lt1"/>
+          </a:fontRef>
+        </p:style>
+        <p:txBody>
+          <a:bodyPr rtlCol="0" anchor="ctr"/>
+          <a:lstStyle/>
+          <a:p>
+            <a:pPr algn="ctr"/>
+          </a:p>
+        </p:txBody>
+      </p:sp>
+      <p:sp>
+        <p:nvSpPr>
+          <p:cNvPr id="31" name="TextBox 30"/>
+          <p:cNvSpPr txBox="1"/>
+          <p:nvPr/>
+        </p:nvSpPr>
+        <p:spPr>
+          <a:xfrm>
+            <a:off x="10305288" y="2121408"/>
+            <a:ext cx="365760" cy="219456"/>
+          </a:xfrm>
+          <a:prstGeom prst="rect">
+            <a:avLst/>
+          </a:prstGeom>
+          <a:noFill/>
+        </p:spPr>
+        <p:txBody>
+          <a:bodyPr wrap="square" lIns="18288" rIns="18288" tIns="18288" bIns="18288" anchor="ctr">
+            <a:spAutoFit/>
+          </a:bodyPr>
+          <a:lstStyle/>
+          <a:p>
+            <a:pPr algn="l">
+              <a:defRPr sz="1000" b="1">
+                <a:solidFill>
+                  <a:srgbClr val="00AFA0"/>
+                </a:solidFill>
+                <a:latin typeface="Aptos"/>
+              </a:defRPr>
+            </a:pPr>
+            <a:r>
+              <a:t>06</a:t>
+            </a:r>
+          </a:p>
+        </p:txBody>
+      </p:sp>
+      <p:sp>
+        <p:nvSpPr>
+          <p:cNvPr id="32" name="TextBox 31"/>
+          <p:cNvSpPr txBox="1"/>
+          <p:nvPr/>
+        </p:nvSpPr>
+        <p:spPr>
+          <a:xfrm>
+            <a:off x="10305288" y="2441448"/>
+            <a:ext cx="1353312" cy="292608"/>
+          </a:xfrm>
+          <a:prstGeom prst="rect">
+            <a:avLst/>
+          </a:prstGeom>
+          <a:noFill/>
+        </p:spPr>
+        <p:txBody>
+          <a:bodyPr wrap="square" lIns="18288" rIns="18288" tIns="18288" bIns="18288" anchor="ctr">
+            <a:spAutoFit/>
+          </a:bodyPr>
+          <a:lstStyle/>
+          <a:p>
+            <a:pPr algn="l">
+              <a:defRPr sz="1400" b="1">
+                <a:solidFill>
+                  <a:srgbClr val="112240"/>
+                </a:solidFill>
+                <a:latin typeface="Aptos"/>
+              </a:defRPr>
+            </a:pPr>
+            <a:r>
+              <a:t>Rapor</a:t>
+            </a:r>
+          </a:p>
+        </p:txBody>
+      </p:sp>
+      <p:sp>
+        <p:nvSpPr>
+          <p:cNvPr id="33" name="TextBox 32"/>
+          <p:cNvSpPr txBox="1"/>
+          <p:nvPr/>
+        </p:nvSpPr>
+        <p:spPr>
+          <a:xfrm>
+            <a:off x="10305288" y="2834640"/>
+            <a:ext cx="1353312" cy="457200"/>
+          </a:xfrm>
+          <a:prstGeom prst="rect">
+            <a:avLst/>
+          </a:prstGeom>
+          <a:noFill/>
+        </p:spPr>
+        <p:txBody>
+          <a:bodyPr wrap="square" lIns="18288" rIns="18288" tIns="18288" bIns="18288" anchor="ctr">
+            <a:spAutoFit/>
+          </a:bodyPr>
+          <a:lstStyle/>
+          <a:p>
+            <a:pPr algn="l">
+              <a:defRPr sz="1000" b="0">
+                <a:solidFill>
+                  <a:srgbClr val="637389"/>
+                </a:solidFill>
+                <a:latin typeface="Aptos"/>
+              </a:defRPr>
+            </a:pPr>
+            <a:r>
+              <a:t>JSON • MD</a:t>
+            </a:r>
+            <a:br/>
+            <a:r>
+              <a:t>HTML • bulgu</a:t>
+            </a:r>
+          </a:p>
+        </p:txBody>
+      </p:sp>
+      <p:sp>
+        <p:nvSpPr>
+          <p:cNvPr id="34" name="Rounded Rectangle 33"/>
+          <p:cNvSpPr/>
+          <p:nvPr/>
+        </p:nvSpPr>
+        <p:spPr>
+          <a:xfrm>
+            <a:off x="749808" y="3913632"/>
+            <a:ext cx="10698480" cy="1051560"/>
+          </a:xfrm>
+          <a:prstGeom prst="roundRect">
+            <a:avLst/>
+          </a:prstGeom>
+          <a:solidFill>
+            <a:srgbClr val="E7F0FA"/>
+          </a:solidFill>
+          <a:ln>
+            <a:noFill/>
+          </a:ln>
+        </p:spPr>
+        <p:style>
+          <a:lnRef idx="1">
+            <a:schemeClr val="accent1"/>
+          </a:lnRef>
+          <a:fillRef idx="3">
+            <a:schemeClr val="accent1"/>
+          </a:fillRef>
+          <a:effectRef idx="2">
+            <a:schemeClr val="accent1"/>
+          </a:effectRef>
+          <a:fontRef idx="minor">
+            <a:schemeClr val="lt1"/>
+          </a:fontRef>
+        </p:style>
+        <p:txBody>
+          <a:bodyPr rtlCol="0" anchor="ctr"/>
+          <a:lstStyle/>
+          <a:p>
+            <a:pPr algn="ctr"/>
+          </a:p>
+        </p:txBody>
+      </p:sp>
+      <p:sp>
+        <p:nvSpPr>
+          <p:cNvPr id="35" name="TextBox 34"/>
+          <p:cNvSpPr txBox="1"/>
+          <p:nvPr/>
+        </p:nvSpPr>
+        <p:spPr>
+          <a:xfrm>
+            <a:off x="987552" y="4114800"/>
+            <a:ext cx="1920240" cy="274320"/>
+          </a:xfrm>
+          <a:prstGeom prst="rect">
+            <a:avLst/>
+          </a:prstGeom>
+          <a:noFill/>
+        </p:spPr>
+        <p:txBody>
+          <a:bodyPr wrap="square" lIns="18288" rIns="18288" tIns="18288" bIns="18288" anchor="ctr">
+            <a:spAutoFit/>
+          </a:bodyPr>
+          <a:lstStyle/>
+          <a:p>
+            <a:pPr algn="l">
+              <a:defRPr sz="1400" b="1">
+                <a:solidFill>
+                  <a:srgbClr val="112240"/>
+                </a:solidFill>
+                <a:latin typeface="Aptos"/>
+              </a:defRPr>
+            </a:pPr>
+            <a:r>
+              <a:t>Deterministik demo</a:t>
+            </a:r>
+          </a:p>
+        </p:txBody>
+      </p:sp>
+      <p:sp>
+        <p:nvSpPr>
+          <p:cNvPr id="36" name="TextBox 35"/>
+          <p:cNvSpPr txBox="1"/>
+          <p:nvPr/>
+        </p:nvSpPr>
+        <p:spPr>
+          <a:xfrm>
+            <a:off x="2852928" y="4050791"/>
+            <a:ext cx="8229600" cy="548640"/>
+          </a:xfrm>
+          <a:prstGeom prst="rect">
+            <a:avLst/>
+          </a:prstGeom>
+          <a:noFill/>
+        </p:spPr>
+        <p:txBody>
+          <a:bodyPr wrap="square" lIns="18288" rIns="18288" tIns="18288" bIns="18288" anchor="ctr">
+            <a:spAutoFit/>
+          </a:bodyPr>
+          <a:lstStyle/>
+          <a:p>
+            <a:pPr algn="l">
+              <a:defRPr sz="1200" b="0">
+                <a:solidFill>
+                  <a:srgbClr val="223045"/>
+                </a:solidFill>
+                <a:latin typeface="Aptos"/>
+              </a:defRPr>
+            </a:pPr>
+            <a:r>
+              <a:t>Model taraması JSON hatası veya bulgusuz sonuç verirse demo1/demo2 için ayrı sentetik rapor üretilebilir. Bu rapor gerçek mevzuat tespiti ve remediation girdisi değildir.</a:t>
+            </a:r>
+          </a:p>
+        </p:txBody>
+      </p:sp>
+      <p:sp>
+        <p:nvSpPr>
+          <p:cNvPr id="37" name="TextBox 36"/>
+          <p:cNvSpPr txBox="1"/>
+          <p:nvPr/>
+        </p:nvSpPr>
+        <p:spPr>
+          <a:xfrm>
+            <a:off x="932688" y="5321808"/>
+            <a:ext cx="10195560" cy="320040"/>
+          </a:xfrm>
+          <a:prstGeom prst="rect">
+            <a:avLst/>
+          </a:prstGeom>
+          <a:noFill/>
+        </p:spPr>
+        <p:txBody>
+          <a:bodyPr wrap="square" lIns="18288" rIns="18288" tIns="18288" bIns="18288" anchor="ctr">
+            <a:spAutoFit/>
+          </a:bodyPr>
+          <a:lstStyle/>
+          <a:p>
+            <a:pPr algn="ctr">
+              <a:defRPr sz="1200" b="1">
+                <a:solidFill>
+                  <a:srgbClr val="637389"/>
+                </a:solidFill>
+                <a:latin typeface="Aptos"/>
+              </a:defRPr>
+            </a:pPr>
+            <a:r>
+              <a:t>İşlem adımları: sohbet komutu → pipeline önerisi → açık kullanıcı onayı → çıktı/rapor → sonraki adım.</a:t>
+            </a:r>
+          </a:p>
+        </p:txBody>
+      </p:sp>
+      <p:sp>
+        <p:nvSpPr>
+          <p:cNvPr id="38" name="TextBox 37"/>
           <p:cNvSpPr txBox="1"/>
           <p:nvPr/>
         </p:nvSpPr>
@@ -12360,7 +13228,7 @@
       </p:sp>
       <p:sp>
         <p:nvSpPr>
-          <p:cNvPr id="16" name="TextBox 15"/>
+          <p:cNvPr id="39" name="TextBox 38"/>
           <p:cNvSpPr txBox="1"/>
           <p:nvPr/>
         </p:nvSpPr>
@@ -12451,7 +13319,2471 @@
               </a:defRPr>
             </a:pPr>
             <a:r>
-              <a:t>16  •  GEREKSINIM IZLEME</a:t>
+              <a:t>19  •  REMEDIATION, KOD FARKI VE PR</a:t>
+            </a:r>
+          </a:p>
+        </p:txBody>
+      </p:sp>
+      <p:sp>
+        <p:nvSpPr>
+          <p:cNvPr id="3" name="TextBox 2"/>
+          <p:cNvSpPr txBox="1"/>
+          <p:nvPr/>
+        </p:nvSpPr>
+        <p:spPr>
+          <a:xfrm>
+            <a:off x="640080" y="658368"/>
+            <a:ext cx="10972800" cy="502920"/>
+          </a:xfrm>
+          <a:prstGeom prst="rect">
+            <a:avLst/>
+          </a:prstGeom>
+          <a:noFill/>
+        </p:spPr>
+        <p:txBody>
+          <a:bodyPr wrap="square" lIns="18288" rIns="18288" tIns="18288" bIns="18288" anchor="ctr">
+            <a:spAutoFit/>
+          </a:bodyPr>
+          <a:lstStyle/>
+          <a:p>
+            <a:pPr algn="l">
+              <a:defRPr sz="2700" b="1">
+                <a:solidFill>
+                  <a:srgbClr val="112240"/>
+                </a:solidFill>
+                <a:latin typeface="Aptos"/>
+              </a:defRPr>
+            </a:pPr>
+            <a:r>
+              <a:t>İlk iki bulgu: diff → izole dal → test → PR</a:t>
+            </a:r>
+          </a:p>
+        </p:txBody>
+      </p:sp>
+      <p:sp>
+        <p:nvSpPr>
+          <p:cNvPr id="4" name="TextBox 3"/>
+          <p:cNvSpPr txBox="1"/>
+          <p:nvPr/>
+        </p:nvSpPr>
+        <p:spPr>
+          <a:xfrm>
+            <a:off x="658368" y="1197864"/>
+            <a:ext cx="10881360" cy="420624"/>
+          </a:xfrm>
+          <a:prstGeom prst="rect">
+            <a:avLst/>
+          </a:prstGeom>
+          <a:noFill/>
+        </p:spPr>
+        <p:txBody>
+          <a:bodyPr wrap="square" lIns="18288" rIns="18288" tIns="18288" bIns="18288" anchor="ctr">
+            <a:spAutoFit/>
+          </a:bodyPr>
+          <a:lstStyle/>
+          <a:p>
+            <a:pPr algn="l">
+              <a:defRPr sz="1300" b="0">
+                <a:solidFill>
+                  <a:srgbClr val="637389"/>
+                </a:solidFill>
+                <a:latin typeface="Aptos"/>
+              </a:defRPr>
+            </a:pPr>
+            <a:r>
+              <a:t>Aşağıdaki değişiklik sentetik E2E fixture'ından alınmıştır; mevzuat düzeltmesi veya gerçek GitHub PR'ı değildir.</a:t>
+            </a:r>
+          </a:p>
+        </p:txBody>
+      </p:sp>
+      <p:sp>
+        <p:nvSpPr>
+          <p:cNvPr id="5" name="Rounded Rectangle 4"/>
+          <p:cNvSpPr/>
+          <p:nvPr/>
+        </p:nvSpPr>
+        <p:spPr>
+          <a:xfrm>
+            <a:off x="713232" y="1783080"/>
+            <a:ext cx="6656832" cy="3520440"/>
+          </a:xfrm>
+          <a:prstGeom prst="roundRect">
+            <a:avLst/>
+          </a:prstGeom>
+          <a:solidFill>
+            <a:srgbClr val="112240"/>
+          </a:solidFill>
+          <a:ln>
+            <a:noFill/>
+          </a:ln>
+        </p:spPr>
+        <p:style>
+          <a:lnRef idx="1">
+            <a:schemeClr val="accent1"/>
+          </a:lnRef>
+          <a:fillRef idx="3">
+            <a:schemeClr val="accent1"/>
+          </a:fillRef>
+          <a:effectRef idx="2">
+            <a:schemeClr val="accent1"/>
+          </a:effectRef>
+          <a:fontRef idx="minor">
+            <a:schemeClr val="lt1"/>
+          </a:fontRef>
+        </p:style>
+        <p:txBody>
+          <a:bodyPr rtlCol="0" anchor="ctr"/>
+          <a:lstStyle/>
+          <a:p>
+            <a:pPr algn="ctr"/>
+          </a:p>
+        </p:txBody>
+      </p:sp>
+      <p:sp>
+        <p:nvSpPr>
+          <p:cNvPr id="6" name="TextBox 5"/>
+          <p:cNvSpPr txBox="1"/>
+          <p:nvPr/>
+        </p:nvSpPr>
+        <p:spPr>
+          <a:xfrm>
+            <a:off x="960120" y="1965960"/>
+            <a:ext cx="6126480" cy="256032"/>
+          </a:xfrm>
+          <a:prstGeom prst="rect">
+            <a:avLst/>
+          </a:prstGeom>
+          <a:noFill/>
+        </p:spPr>
+        <p:txBody>
+          <a:bodyPr wrap="square" lIns="18288" rIns="18288" tIns="18288" bIns="18288" anchor="ctr">
+            <a:spAutoFit/>
+          </a:bodyPr>
+          <a:lstStyle/>
+          <a:p>
+            <a:pPr algn="l">
+              <a:defRPr sz="1100" b="1">
+                <a:solidFill>
+                  <a:srgbClr val="D6575E"/>
+                </a:solidFill>
+                <a:latin typeface="Aptos Mono"/>
+              </a:defRPr>
+            </a:pPr>
+            <a:r>
+              <a:t>ÖNCE  (payment_rules.py)</a:t>
+            </a:r>
+          </a:p>
+        </p:txBody>
+      </p:sp>
+      <p:sp>
+        <p:nvSpPr>
+          <p:cNvPr id="7" name="TextBox 6"/>
+          <p:cNvSpPr txBox="1"/>
+          <p:nvPr/>
+        </p:nvSpPr>
+        <p:spPr>
+          <a:xfrm>
+            <a:off x="960120" y="2304288"/>
+            <a:ext cx="6126480" cy="1005840"/>
+          </a:xfrm>
+          <a:prstGeom prst="rect">
+            <a:avLst/>
+          </a:prstGeom>
+          <a:noFill/>
+        </p:spPr>
+        <p:txBody>
+          <a:bodyPr wrap="square" lIns="18288" rIns="18288" tIns="18288" bIns="18288" anchor="ctr">
+            <a:spAutoFit/>
+          </a:bodyPr>
+          <a:lstStyle/>
+          <a:p>
+            <a:pPr algn="l">
+              <a:defRPr sz="1200" b="0">
+                <a:solidFill>
+                  <a:srgbClr val="FFFFFF"/>
+                </a:solidFill>
+                <a:latin typeface="Aptos Mono"/>
+              </a:defRPr>
+            </a:pPr>
+            <a:r>
+              <a:t>def mask_reference(value, visible=4):</a:t>
+            </a:r>
+            <a:br/>
+            <a:r>
+              <a:t>    return value</a:t>
+            </a:r>
+            <a:br/>
+            <a:br/>
+            <a:r>
+              <a:t>def is_positive_amount(amount):</a:t>
+            </a:r>
+            <a:br/>
+            <a:r>
+              <a:t>    return amount &gt;= 0</a:t>
+            </a:r>
+          </a:p>
+        </p:txBody>
+      </p:sp>
+      <p:sp>
+        <p:nvSpPr>
+          <p:cNvPr id="8" name="TextBox 7"/>
+          <p:cNvSpPr txBox="1"/>
+          <p:nvPr/>
+        </p:nvSpPr>
+        <p:spPr>
+          <a:xfrm>
+            <a:off x="960120" y="3493008"/>
+            <a:ext cx="6126480" cy="256032"/>
+          </a:xfrm>
+          <a:prstGeom prst="rect">
+            <a:avLst/>
+          </a:prstGeom>
+          <a:noFill/>
+        </p:spPr>
+        <p:txBody>
+          <a:bodyPr wrap="square" lIns="18288" rIns="18288" tIns="18288" bIns="18288" anchor="ctr">
+            <a:spAutoFit/>
+          </a:bodyPr>
+          <a:lstStyle/>
+          <a:p>
+            <a:pPr algn="l">
+              <a:defRPr sz="1100" b="1">
+                <a:solidFill>
+                  <a:srgbClr val="00AFA0"/>
+                </a:solidFill>
+                <a:latin typeface="Aptos Mono"/>
+              </a:defRPr>
+            </a:pPr>
+            <a:r>
+              <a:t>SONRA  (yalnızca kullanıcı onayıyla)</a:t>
+            </a:r>
+          </a:p>
+        </p:txBody>
+      </p:sp>
+      <p:sp>
+        <p:nvSpPr>
+          <p:cNvPr id="9" name="TextBox 8"/>
+          <p:cNvSpPr txBox="1"/>
+          <p:nvPr/>
+        </p:nvSpPr>
+        <p:spPr>
+          <a:xfrm>
+            <a:off x="960120" y="3822191"/>
+            <a:ext cx="6126480" cy="1207008"/>
+          </a:xfrm>
+          <a:prstGeom prst="rect">
+            <a:avLst/>
+          </a:prstGeom>
+          <a:noFill/>
+        </p:spPr>
+        <p:txBody>
+          <a:bodyPr wrap="square" lIns="18288" rIns="18288" tIns="18288" bIns="18288" anchor="ctr">
+            <a:spAutoFit/>
+          </a:bodyPr>
+          <a:lstStyle/>
+          <a:p>
+            <a:pPr algn="l">
+              <a:defRPr sz="1000" b="0">
+                <a:solidFill>
+                  <a:srgbClr val="FFFFFF"/>
+                </a:solidFill>
+                <a:latin typeface="Aptos Mono"/>
+              </a:defRPr>
+            </a:pPr>
+            <a:r>
+              <a:t>def mask_reference(value, visible=4):</a:t>
+            </a:r>
+            <a:br/>
+            <a:r>
+              <a:t>    return "*" * max(0, len(value)-visible) + value[-visible:]</a:t>
+            </a:r>
+            <a:br/>
+            <a:br/>
+            <a:r>
+              <a:t>def is_positive_amount(amount):</a:t>
+            </a:r>
+            <a:br/>
+            <a:r>
+              <a:t>    return amount &gt; 0</a:t>
+            </a:r>
+          </a:p>
+        </p:txBody>
+      </p:sp>
+      <p:sp>
+        <p:nvSpPr>
+          <p:cNvPr id="10" name="Rounded Rectangle 9"/>
+          <p:cNvSpPr/>
+          <p:nvPr/>
+        </p:nvSpPr>
+        <p:spPr>
+          <a:xfrm>
+            <a:off x="7662672" y="1810512"/>
+            <a:ext cx="3794760" cy="932688"/>
+          </a:xfrm>
+          <a:prstGeom prst="roundRect">
+            <a:avLst/>
+          </a:prstGeom>
+          <a:solidFill>
+            <a:srgbClr val="FFFFFF"/>
+          </a:solidFill>
+          <a:ln>
+            <a:noFill/>
+          </a:ln>
+        </p:spPr>
+        <p:style>
+          <a:lnRef idx="1">
+            <a:schemeClr val="accent1"/>
+          </a:lnRef>
+          <a:fillRef idx="3">
+            <a:schemeClr val="accent1"/>
+          </a:fillRef>
+          <a:effectRef idx="2">
+            <a:schemeClr val="accent1"/>
+          </a:effectRef>
+          <a:fontRef idx="minor">
+            <a:schemeClr val="lt1"/>
+          </a:fontRef>
+        </p:style>
+        <p:txBody>
+          <a:bodyPr rtlCol="0" anchor="ctr"/>
+          <a:lstStyle/>
+          <a:p>
+            <a:pPr algn="ctr"/>
+          </a:p>
+        </p:txBody>
+      </p:sp>
+      <p:sp>
+        <p:nvSpPr>
+          <p:cNvPr id="11" name="Rectangle 10"/>
+          <p:cNvSpPr/>
+          <p:nvPr/>
+        </p:nvSpPr>
+        <p:spPr>
+          <a:xfrm>
+            <a:off x="7662672" y="1810512"/>
+            <a:ext cx="64008" cy="932688"/>
+          </a:xfrm>
+          <a:prstGeom prst="rect">
+            <a:avLst/>
+          </a:prstGeom>
+          <a:solidFill>
+            <a:srgbClr val="00AFA0"/>
+          </a:solidFill>
+          <a:ln>
+            <a:noFill/>
+          </a:ln>
+        </p:spPr>
+        <p:style>
+          <a:lnRef idx="1">
+            <a:schemeClr val="accent1"/>
+          </a:lnRef>
+          <a:fillRef idx="3">
+            <a:schemeClr val="accent1"/>
+          </a:fillRef>
+          <a:effectRef idx="2">
+            <a:schemeClr val="accent1"/>
+          </a:effectRef>
+          <a:fontRef idx="minor">
+            <a:schemeClr val="lt1"/>
+          </a:fontRef>
+        </p:style>
+        <p:txBody>
+          <a:bodyPr rtlCol="0" anchor="ctr"/>
+          <a:lstStyle/>
+          <a:p>
+            <a:pPr algn="ctr"/>
+          </a:p>
+        </p:txBody>
+      </p:sp>
+      <p:sp>
+        <p:nvSpPr>
+          <p:cNvPr id="12" name="TextBox 11"/>
+          <p:cNvSpPr txBox="1"/>
+          <p:nvPr/>
+        </p:nvSpPr>
+        <p:spPr>
+          <a:xfrm>
+            <a:off x="7863840" y="1938528"/>
+            <a:ext cx="3410712" cy="347472"/>
+          </a:xfrm>
+          <a:prstGeom prst="rect">
+            <a:avLst/>
+          </a:prstGeom>
+          <a:noFill/>
+        </p:spPr>
+        <p:txBody>
+          <a:bodyPr wrap="square" lIns="18288" rIns="18288" tIns="18288" bIns="18288" anchor="ctr">
+            <a:spAutoFit/>
+          </a:bodyPr>
+          <a:lstStyle/>
+          <a:p>
+            <a:pPr algn="l">
+              <a:defRPr sz="1600" b="1">
+                <a:solidFill>
+                  <a:srgbClr val="112240"/>
+                </a:solidFill>
+                <a:latin typeface="Aptos"/>
+              </a:defRPr>
+            </a:pPr>
+            <a:r>
+              <a:t>1 • İncele ve uygula</a:t>
+            </a:r>
+          </a:p>
+        </p:txBody>
+      </p:sp>
+      <p:sp>
+        <p:nvSpPr>
+          <p:cNvPr id="13" name="TextBox 12"/>
+          <p:cNvSpPr txBox="1"/>
+          <p:nvPr/>
+        </p:nvSpPr>
+        <p:spPr>
+          <a:xfrm>
+            <a:off x="7882128" y="2359152"/>
+            <a:ext cx="3374136" cy="274320"/>
+          </a:xfrm>
+          <a:prstGeom prst="rect">
+            <a:avLst/>
+          </a:prstGeom>
+          <a:noFill/>
+        </p:spPr>
+        <p:txBody>
+          <a:bodyPr wrap="square" lIns="18288" rIns="18288" tIns="18288" bIns="18288" anchor="ctr">
+            <a:spAutoFit/>
+          </a:bodyPr>
+          <a:lstStyle/>
+          <a:p>
+            <a:pPr algn="l">
+              <a:defRPr sz="1200" b="0">
+                <a:solidFill>
+                  <a:srgbClr val="223045"/>
+                </a:solidFill>
+                <a:latin typeface="Aptos"/>
+              </a:defRPr>
+            </a:pPr>
+            <a:r>
+              <a:t>•  En yüksek iki bulgu</a:t>
+            </a:r>
+            <a:br/>
+            <a:r>
+              <a:t>•  Ayrı worktree / branch</a:t>
+            </a:r>
+          </a:p>
+        </p:txBody>
+      </p:sp>
+      <p:sp>
+        <p:nvSpPr>
+          <p:cNvPr id="14" name="Rounded Rectangle 13"/>
+          <p:cNvSpPr/>
+          <p:nvPr/>
+        </p:nvSpPr>
+        <p:spPr>
+          <a:xfrm>
+            <a:off x="7662672" y="2907792"/>
+            <a:ext cx="3794760" cy="932688"/>
+          </a:xfrm>
+          <a:prstGeom prst="roundRect">
+            <a:avLst/>
+          </a:prstGeom>
+          <a:solidFill>
+            <a:srgbClr val="FFFFFF"/>
+          </a:solidFill>
+          <a:ln>
+            <a:noFill/>
+          </a:ln>
+        </p:spPr>
+        <p:style>
+          <a:lnRef idx="1">
+            <a:schemeClr val="accent1"/>
+          </a:lnRef>
+          <a:fillRef idx="3">
+            <a:schemeClr val="accent1"/>
+          </a:fillRef>
+          <a:effectRef idx="2">
+            <a:schemeClr val="accent1"/>
+          </a:effectRef>
+          <a:fontRef idx="minor">
+            <a:schemeClr val="lt1"/>
+          </a:fontRef>
+        </p:style>
+        <p:txBody>
+          <a:bodyPr rtlCol="0" anchor="ctr"/>
+          <a:lstStyle/>
+          <a:p>
+            <a:pPr algn="ctr"/>
+          </a:p>
+        </p:txBody>
+      </p:sp>
+      <p:sp>
+        <p:nvSpPr>
+          <p:cNvPr id="15" name="Rectangle 14"/>
+          <p:cNvSpPr/>
+          <p:nvPr/>
+        </p:nvSpPr>
+        <p:spPr>
+          <a:xfrm>
+            <a:off x="7662672" y="2907792"/>
+            <a:ext cx="64008" cy="932688"/>
+          </a:xfrm>
+          <a:prstGeom prst="rect">
+            <a:avLst/>
+          </a:prstGeom>
+          <a:solidFill>
+            <a:srgbClr val="35BED7"/>
+          </a:solidFill>
+          <a:ln>
+            <a:noFill/>
+          </a:ln>
+        </p:spPr>
+        <p:style>
+          <a:lnRef idx="1">
+            <a:schemeClr val="accent1"/>
+          </a:lnRef>
+          <a:fillRef idx="3">
+            <a:schemeClr val="accent1"/>
+          </a:fillRef>
+          <a:effectRef idx="2">
+            <a:schemeClr val="accent1"/>
+          </a:effectRef>
+          <a:fontRef idx="minor">
+            <a:schemeClr val="lt1"/>
+          </a:fontRef>
+        </p:style>
+        <p:txBody>
+          <a:bodyPr rtlCol="0" anchor="ctr"/>
+          <a:lstStyle/>
+          <a:p>
+            <a:pPr algn="ctr"/>
+          </a:p>
+        </p:txBody>
+      </p:sp>
+      <p:sp>
+        <p:nvSpPr>
+          <p:cNvPr id="16" name="TextBox 15"/>
+          <p:cNvSpPr txBox="1"/>
+          <p:nvPr/>
+        </p:nvSpPr>
+        <p:spPr>
+          <a:xfrm>
+            <a:off x="7863840" y="3035808"/>
+            <a:ext cx="3410712" cy="347472"/>
+          </a:xfrm>
+          <a:prstGeom prst="rect">
+            <a:avLst/>
+          </a:prstGeom>
+          <a:noFill/>
+        </p:spPr>
+        <p:txBody>
+          <a:bodyPr wrap="square" lIns="18288" rIns="18288" tIns="18288" bIns="18288" anchor="ctr">
+            <a:spAutoFit/>
+          </a:bodyPr>
+          <a:lstStyle/>
+          <a:p>
+            <a:pPr algn="l">
+              <a:defRPr sz="1600" b="1">
+                <a:solidFill>
+                  <a:srgbClr val="112240"/>
+                </a:solidFill>
+                <a:latin typeface="Aptos"/>
+              </a:defRPr>
+            </a:pPr>
+            <a:r>
+              <a:t>2 • Testi onayla</a:t>
+            </a:r>
+          </a:p>
+        </p:txBody>
+      </p:sp>
+      <p:sp>
+        <p:nvSpPr>
+          <p:cNvPr id="17" name="TextBox 16"/>
+          <p:cNvSpPr txBox="1"/>
+          <p:nvPr/>
+        </p:nvSpPr>
+        <p:spPr>
+          <a:xfrm>
+            <a:off x="7882128" y="3456432"/>
+            <a:ext cx="3374136" cy="274320"/>
+          </a:xfrm>
+          <a:prstGeom prst="rect">
+            <a:avLst/>
+          </a:prstGeom>
+          <a:noFill/>
+        </p:spPr>
+        <p:txBody>
+          <a:bodyPr wrap="square" lIns="18288" rIns="18288" tIns="18288" bIns="18288" anchor="ctr">
+            <a:spAutoFit/>
+          </a:bodyPr>
+          <a:lstStyle/>
+          <a:p>
+            <a:pPr algn="l">
+              <a:defRPr sz="1200" b="0">
+                <a:solidFill>
+                  <a:srgbClr val="223045"/>
+                </a:solidFill>
+                <a:latin typeface="Aptos"/>
+              </a:defRPr>
+            </a:pPr>
+            <a:r>
+              <a:t>•  Test raporu MD/HTML</a:t>
+            </a:r>
+            <a:br/>
+            <a:r>
+              <a:t>•  Başarısızsa PR durur</a:t>
+            </a:r>
+          </a:p>
+        </p:txBody>
+      </p:sp>
+      <p:sp>
+        <p:nvSpPr>
+          <p:cNvPr id="18" name="Rounded Rectangle 17"/>
+          <p:cNvSpPr/>
+          <p:nvPr/>
+        </p:nvSpPr>
+        <p:spPr>
+          <a:xfrm>
+            <a:off x="7662672" y="4005072"/>
+            <a:ext cx="3794760" cy="932688"/>
+          </a:xfrm>
+          <a:prstGeom prst="roundRect">
+            <a:avLst/>
+          </a:prstGeom>
+          <a:solidFill>
+            <a:srgbClr val="FFFFFF"/>
+          </a:solidFill>
+          <a:ln>
+            <a:noFill/>
+          </a:ln>
+        </p:spPr>
+        <p:style>
+          <a:lnRef idx="1">
+            <a:schemeClr val="accent1"/>
+          </a:lnRef>
+          <a:fillRef idx="3">
+            <a:schemeClr val="accent1"/>
+          </a:fillRef>
+          <a:effectRef idx="2">
+            <a:schemeClr val="accent1"/>
+          </a:effectRef>
+          <a:fontRef idx="minor">
+            <a:schemeClr val="lt1"/>
+          </a:fontRef>
+        </p:style>
+        <p:txBody>
+          <a:bodyPr rtlCol="0" anchor="ctr"/>
+          <a:lstStyle/>
+          <a:p>
+            <a:pPr algn="ctr"/>
+          </a:p>
+        </p:txBody>
+      </p:sp>
+      <p:sp>
+        <p:nvSpPr>
+          <p:cNvPr id="19" name="Rectangle 18"/>
+          <p:cNvSpPr/>
+          <p:nvPr/>
+        </p:nvSpPr>
+        <p:spPr>
+          <a:xfrm>
+            <a:off x="7662672" y="4005072"/>
+            <a:ext cx="64008" cy="932688"/>
+          </a:xfrm>
+          <a:prstGeom prst="rect">
+            <a:avLst/>
+          </a:prstGeom>
+          <a:solidFill>
+            <a:srgbClr val="F8BC4A"/>
+          </a:solidFill>
+          <a:ln>
+            <a:noFill/>
+          </a:ln>
+        </p:spPr>
+        <p:style>
+          <a:lnRef idx="1">
+            <a:schemeClr val="accent1"/>
+          </a:lnRef>
+          <a:fillRef idx="3">
+            <a:schemeClr val="accent1"/>
+          </a:fillRef>
+          <a:effectRef idx="2">
+            <a:schemeClr val="accent1"/>
+          </a:effectRef>
+          <a:fontRef idx="minor">
+            <a:schemeClr val="lt1"/>
+          </a:fontRef>
+        </p:style>
+        <p:txBody>
+          <a:bodyPr rtlCol="0" anchor="ctr"/>
+          <a:lstStyle/>
+          <a:p>
+            <a:pPr algn="ctr"/>
+          </a:p>
+        </p:txBody>
+      </p:sp>
+      <p:sp>
+        <p:nvSpPr>
+          <p:cNvPr id="20" name="TextBox 19"/>
+          <p:cNvSpPr txBox="1"/>
+          <p:nvPr/>
+        </p:nvSpPr>
+        <p:spPr>
+          <a:xfrm>
+            <a:off x="7863840" y="4133087"/>
+            <a:ext cx="3410712" cy="347472"/>
+          </a:xfrm>
+          <a:prstGeom prst="rect">
+            <a:avLst/>
+          </a:prstGeom>
+          <a:noFill/>
+        </p:spPr>
+        <p:txBody>
+          <a:bodyPr wrap="square" lIns="18288" rIns="18288" tIns="18288" bIns="18288" anchor="ctr">
+            <a:spAutoFit/>
+          </a:bodyPr>
+          <a:lstStyle/>
+          <a:p>
+            <a:pPr algn="l">
+              <a:defRPr sz="1600" b="1">
+                <a:solidFill>
+                  <a:srgbClr val="112240"/>
+                </a:solidFill>
+                <a:latin typeface="Aptos"/>
+              </a:defRPr>
+            </a:pPr>
+            <a:r>
+              <a:t>3 • PR için son onay</a:t>
+            </a:r>
+          </a:p>
+        </p:txBody>
+      </p:sp>
+      <p:sp>
+        <p:nvSpPr>
+          <p:cNvPr id="21" name="TextBox 20"/>
+          <p:cNvSpPr txBox="1"/>
+          <p:nvPr/>
+        </p:nvSpPr>
+        <p:spPr>
+          <a:xfrm>
+            <a:off x="7882128" y="4553712"/>
+            <a:ext cx="3374136" cy="274320"/>
+          </a:xfrm>
+          <a:prstGeom prst="rect">
+            <a:avLst/>
+          </a:prstGeom>
+          <a:noFill/>
+        </p:spPr>
+        <p:txBody>
+          <a:bodyPr wrap="square" lIns="18288" rIns="18288" tIns="18288" bIns="18288" anchor="ctr">
+            <a:spAutoFit/>
+          </a:bodyPr>
+          <a:lstStyle/>
+          <a:p>
+            <a:pPr algn="l">
+              <a:defRPr sz="1200" b="0">
+                <a:solidFill>
+                  <a:srgbClr val="223045"/>
+                </a:solidFill>
+                <a:latin typeface="Aptos"/>
+              </a:defRPr>
+            </a:pPr>
+            <a:r>
+              <a:t>•  Commit + push + gh PR</a:t>
+            </a:r>
+            <a:br/>
+            <a:r>
+              <a:t>•  Her adım ayrı izin</a:t>
+            </a:r>
+          </a:p>
+        </p:txBody>
+      </p:sp>
+      <p:sp>
+        <p:nvSpPr>
+          <p:cNvPr id="22" name="Rounded Rectangle 21"/>
+          <p:cNvSpPr/>
+          <p:nvPr/>
+        </p:nvSpPr>
+        <p:spPr>
+          <a:xfrm>
+            <a:off x="749808" y="5522976"/>
+            <a:ext cx="10698480" cy="530352"/>
+          </a:xfrm>
+          <a:prstGeom prst="roundRect">
+            <a:avLst/>
+          </a:prstGeom>
+          <a:solidFill>
+            <a:srgbClr val="FFF6DF"/>
+          </a:solidFill>
+          <a:ln>
+            <a:noFill/>
+          </a:ln>
+        </p:spPr>
+        <p:style>
+          <a:lnRef idx="1">
+            <a:schemeClr val="accent1"/>
+          </a:lnRef>
+          <a:fillRef idx="3">
+            <a:schemeClr val="accent1"/>
+          </a:fillRef>
+          <a:effectRef idx="2">
+            <a:schemeClr val="accent1"/>
+          </a:effectRef>
+          <a:fontRef idx="minor">
+            <a:schemeClr val="lt1"/>
+          </a:fontRef>
+        </p:style>
+        <p:txBody>
+          <a:bodyPr rtlCol="0" anchor="ctr"/>
+          <a:lstStyle/>
+          <a:p>
+            <a:pPr algn="ctr"/>
+          </a:p>
+        </p:txBody>
+      </p:sp>
+      <p:sp>
+        <p:nvSpPr>
+          <p:cNvPr id="23" name="TextBox 22"/>
+          <p:cNvSpPr txBox="1"/>
+          <p:nvPr/>
+        </p:nvSpPr>
+        <p:spPr>
+          <a:xfrm>
+            <a:off x="914400" y="5623560"/>
+            <a:ext cx="10241280" cy="292608"/>
+          </a:xfrm>
+          <a:prstGeom prst="rect">
+            <a:avLst/>
+          </a:prstGeom>
+          <a:noFill/>
+        </p:spPr>
+        <p:txBody>
+          <a:bodyPr wrap="square" lIns="18288" rIns="18288" tIns="18288" bIns="18288" anchor="ctr">
+            <a:spAutoFit/>
+          </a:bodyPr>
+          <a:lstStyle/>
+          <a:p>
+            <a:pPr algn="ctr">
+              <a:defRPr sz="1100" b="1">
+                <a:solidFill>
+                  <a:srgbClr val="112240"/>
+                </a:solidFill>
+                <a:latin typeface="Aptos"/>
+              </a:defRPr>
+            </a:pPr>
+            <a:r>
+              <a:t>E2E kanıtı: test geçti; push yerel bare remote'a, PR yanıtı mock gh'ye yapıldı. Gerçek GitHub PR açılmadı.</a:t>
+            </a:r>
+          </a:p>
+        </p:txBody>
+      </p:sp>
+      <p:sp>
+        <p:nvSpPr>
+          <p:cNvPr id="24" name="TextBox 23"/>
+          <p:cNvSpPr txBox="1"/>
+          <p:nvPr/>
+        </p:nvSpPr>
+        <p:spPr>
+          <a:xfrm>
+            <a:off x="566928" y="6473952"/>
+            <a:ext cx="9692640" cy="182880"/>
+          </a:xfrm>
+          <a:prstGeom prst="rect">
+            <a:avLst/>
+          </a:prstGeom>
+          <a:noFill/>
+        </p:spPr>
+        <p:txBody>
+          <a:bodyPr wrap="square" lIns="18288" rIns="18288" tIns="18288" bIns="18288" anchor="ctr">
+            <a:spAutoFit/>
+          </a:bodyPr>
+          <a:lstStyle/>
+          <a:p>
+            <a:pPr algn="l">
+              <a:defRPr sz="800" b="1">
+                <a:solidFill>
+                  <a:srgbClr val="637389"/>
+                </a:solidFill>
+                <a:latin typeface="Aptos"/>
+              </a:defRPr>
+            </a:pPr>
+            <a:r>
+              <a:t>MEVZUATAGENT  •  YEREL  •  ONAYLI  •  DENETLENEBİLİR</a:t>
+            </a:r>
+          </a:p>
+        </p:txBody>
+      </p:sp>
+      <p:sp>
+        <p:nvSpPr>
+          <p:cNvPr id="25" name="TextBox 24"/>
+          <p:cNvSpPr txBox="1"/>
+          <p:nvPr/>
+        </p:nvSpPr>
+        <p:spPr>
+          <a:xfrm>
+            <a:off x="11109960" y="6419088"/>
+            <a:ext cx="502920" cy="274320"/>
+          </a:xfrm>
+          <a:prstGeom prst="rect">
+            <a:avLst/>
+          </a:prstGeom>
+          <a:noFill/>
+        </p:spPr>
+        <p:txBody>
+          <a:bodyPr wrap="square" lIns="18288" rIns="18288" tIns="18288" bIns="18288" anchor="ctr">
+            <a:spAutoFit/>
+          </a:bodyPr>
+          <a:lstStyle/>
+          <a:p>
+            <a:pPr algn="r">
+              <a:defRPr sz="1000" b="1">
+                <a:solidFill>
+                  <a:srgbClr val="637389"/>
+                </a:solidFill>
+                <a:latin typeface="Aptos"/>
+              </a:defRPr>
+            </a:pPr>
+            <a:r>
+              <a:t>19</a:t>
+            </a:r>
+          </a:p>
+        </p:txBody>
+      </p:sp>
+    </p:spTree>
+  </p:cSld>
+  <p:clrMapOvr>
+    <a:masterClrMapping/>
+  </p:clrMapOvr>
+</p:sld>
+</file>
+
+<file path=ppt/slides/slide2.xml><?xml version="1.0" encoding="utf-8"?>
+<p:sld xmlns:a="http://schemas.openxmlformats.org/drawingml/2006/main" xmlns:p="http://schemas.openxmlformats.org/presentationml/2006/main" xmlns:r="http://schemas.openxmlformats.org/officeDocument/2006/relationships">
+  <p:cSld>
+    <p:bg>
+      <p:bgPr>
+        <a:solidFill>
+          <a:srgbClr val="F7F9FC"/>
+        </a:solidFill>
+        <a:effectLst/>
+      </p:bgPr>
+    </p:bg>
+    <p:spTree>
+      <p:nvGrpSpPr>
+        <p:cNvPr id="1" name=""/>
+        <p:cNvGrpSpPr/>
+        <p:nvPr/>
+      </p:nvGrpSpPr>
+      <p:grpSpPr/>
+      <p:sp>
+        <p:nvSpPr>
+          <p:cNvPr id="2" name="TextBox 1"/>
+          <p:cNvSpPr txBox="1"/>
+          <p:nvPr/>
+        </p:nvSpPr>
+        <p:spPr>
+          <a:xfrm>
+            <a:off x="640080" y="329184"/>
+            <a:ext cx="10881360" cy="228600"/>
+          </a:xfrm>
+          <a:prstGeom prst="rect">
+            <a:avLst/>
+          </a:prstGeom>
+          <a:noFill/>
+        </p:spPr>
+        <p:txBody>
+          <a:bodyPr wrap="square" lIns="18288" rIns="18288" tIns="18288" bIns="18288" anchor="ctr">
+            <a:spAutoFit/>
+          </a:bodyPr>
+          <a:lstStyle/>
+          <a:p>
+            <a:pPr algn="l">
+              <a:defRPr sz="900" b="1">
+                <a:solidFill>
+                  <a:srgbClr val="00AFA0"/>
+                </a:solidFill>
+                <a:latin typeface="Aptos"/>
+              </a:defRPr>
+            </a:pPr>
+            <a:r>
+              <a:t>01  •  NEDEN BU PROJE?</a:t>
+            </a:r>
+          </a:p>
+        </p:txBody>
+      </p:sp>
+      <p:sp>
+        <p:nvSpPr>
+          <p:cNvPr id="3" name="TextBox 2"/>
+          <p:cNvSpPr txBox="1"/>
+          <p:nvPr/>
+        </p:nvSpPr>
+        <p:spPr>
+          <a:xfrm>
+            <a:off x="640080" y="658368"/>
+            <a:ext cx="10972800" cy="502920"/>
+          </a:xfrm>
+          <a:prstGeom prst="rect">
+            <a:avLst/>
+          </a:prstGeom>
+          <a:noFill/>
+        </p:spPr>
+        <p:txBody>
+          <a:bodyPr wrap="square" lIns="18288" rIns="18288" tIns="18288" bIns="18288" anchor="ctr">
+            <a:spAutoFit/>
+          </a:bodyPr>
+          <a:lstStyle/>
+          <a:p>
+            <a:pPr algn="l">
+              <a:defRPr sz="2700" b="1">
+                <a:solidFill>
+                  <a:srgbClr val="112240"/>
+                </a:solidFill>
+                <a:latin typeface="Aptos"/>
+              </a:defRPr>
+            </a:pPr>
+            <a:r>
+              <a:t>Mevzuat bilgisini kod kararlarına yaklaştırmak</a:t>
+            </a:r>
+          </a:p>
+        </p:txBody>
+      </p:sp>
+      <p:sp>
+        <p:nvSpPr>
+          <p:cNvPr id="4" name="TextBox 3"/>
+          <p:cNvSpPr txBox="1"/>
+          <p:nvPr/>
+        </p:nvSpPr>
+        <p:spPr>
+          <a:xfrm>
+            <a:off x="658368" y="1197864"/>
+            <a:ext cx="10881360" cy="420624"/>
+          </a:xfrm>
+          <a:prstGeom prst="rect">
+            <a:avLst/>
+          </a:prstGeom>
+          <a:noFill/>
+        </p:spPr>
+        <p:txBody>
+          <a:bodyPr wrap="square" lIns="18288" rIns="18288" tIns="18288" bIns="18288" anchor="ctr">
+            <a:spAutoFit/>
+          </a:bodyPr>
+          <a:lstStyle/>
+          <a:p>
+            <a:pPr algn="l">
+              <a:defRPr sz="1300" b="0">
+                <a:solidFill>
+                  <a:srgbClr val="637389"/>
+                </a:solidFill>
+                <a:latin typeface="Aptos"/>
+              </a:defRPr>
+            </a:pPr>
+            <a:r>
+              <a:t>Dağınık kaynaklar, manuel inceleme ve izlenmesi zor düzeltme adımlarını tek bir kontrollü akışta birleştirir.</a:t>
+            </a:r>
+          </a:p>
+        </p:txBody>
+      </p:sp>
+      <p:sp>
+        <p:nvSpPr>
+          <p:cNvPr id="5" name="Rounded Rectangle 4"/>
+          <p:cNvSpPr/>
+          <p:nvPr/>
+        </p:nvSpPr>
+        <p:spPr>
+          <a:xfrm>
+            <a:off x="658368" y="1874519"/>
+            <a:ext cx="3493008" cy="1920240"/>
+          </a:xfrm>
+          <a:prstGeom prst="roundRect">
+            <a:avLst/>
+          </a:prstGeom>
+          <a:solidFill>
+            <a:srgbClr val="FFFFFF"/>
+          </a:solidFill>
+          <a:ln>
+            <a:noFill/>
+          </a:ln>
+        </p:spPr>
+        <p:style>
+          <a:lnRef idx="1">
+            <a:schemeClr val="accent1"/>
+          </a:lnRef>
+          <a:fillRef idx="3">
+            <a:schemeClr val="accent1"/>
+          </a:fillRef>
+          <a:effectRef idx="2">
+            <a:schemeClr val="accent1"/>
+          </a:effectRef>
+          <a:fontRef idx="minor">
+            <a:schemeClr val="lt1"/>
+          </a:fontRef>
+        </p:style>
+        <p:txBody>
+          <a:bodyPr rtlCol="0" anchor="ctr"/>
+          <a:lstStyle/>
+          <a:p>
+            <a:pPr algn="ctr"/>
+          </a:p>
+        </p:txBody>
+      </p:sp>
+      <p:sp>
+        <p:nvSpPr>
+          <p:cNvPr id="6" name="Rectangle 5"/>
+          <p:cNvSpPr/>
+          <p:nvPr/>
+        </p:nvSpPr>
+        <p:spPr>
+          <a:xfrm>
+            <a:off x="658368" y="1874519"/>
+            <a:ext cx="64008" cy="1920240"/>
+          </a:xfrm>
+          <a:prstGeom prst="rect">
+            <a:avLst/>
+          </a:prstGeom>
+          <a:solidFill>
+            <a:srgbClr val="00AFA0"/>
+          </a:solidFill>
+          <a:ln>
+            <a:noFill/>
+          </a:ln>
+        </p:spPr>
+        <p:style>
+          <a:lnRef idx="1">
+            <a:schemeClr val="accent1"/>
+          </a:lnRef>
+          <a:fillRef idx="3">
+            <a:schemeClr val="accent1"/>
+          </a:fillRef>
+          <a:effectRef idx="2">
+            <a:schemeClr val="accent1"/>
+          </a:effectRef>
+          <a:fontRef idx="minor">
+            <a:schemeClr val="lt1"/>
+          </a:fontRef>
+        </p:style>
+        <p:txBody>
+          <a:bodyPr rtlCol="0" anchor="ctr"/>
+          <a:lstStyle/>
+          <a:p>
+            <a:pPr algn="ctr"/>
+          </a:p>
+        </p:txBody>
+      </p:sp>
+      <p:sp>
+        <p:nvSpPr>
+          <p:cNvPr id="7" name="TextBox 6"/>
+          <p:cNvSpPr txBox="1"/>
+          <p:nvPr/>
+        </p:nvSpPr>
+        <p:spPr>
+          <a:xfrm>
+            <a:off x="859536" y="2002536"/>
+            <a:ext cx="3108960" cy="347472"/>
+          </a:xfrm>
+          <a:prstGeom prst="rect">
+            <a:avLst/>
+          </a:prstGeom>
+          <a:noFill/>
+        </p:spPr>
+        <p:txBody>
+          <a:bodyPr wrap="square" lIns="18288" rIns="18288" tIns="18288" bIns="18288" anchor="ctr">
+            <a:spAutoFit/>
+          </a:bodyPr>
+          <a:lstStyle/>
+          <a:p>
+            <a:pPr algn="l">
+              <a:defRPr sz="1600" b="1">
+                <a:solidFill>
+                  <a:srgbClr val="112240"/>
+                </a:solidFill>
+                <a:latin typeface="Aptos"/>
+              </a:defRPr>
+            </a:pPr>
+            <a:r>
+              <a:t>Girdi</a:t>
+            </a:r>
+          </a:p>
+        </p:txBody>
+      </p:sp>
+      <p:sp>
+        <p:nvSpPr>
+          <p:cNvPr id="8" name="TextBox 7"/>
+          <p:cNvSpPr txBox="1"/>
+          <p:nvPr/>
+        </p:nvSpPr>
+        <p:spPr>
+          <a:xfrm>
+            <a:off x="877824" y="2423160"/>
+            <a:ext cx="3072384" cy="1261872"/>
+          </a:xfrm>
+          <a:prstGeom prst="rect">
+            <a:avLst/>
+          </a:prstGeom>
+          <a:noFill/>
+        </p:spPr>
+        <p:txBody>
+          <a:bodyPr wrap="square" lIns="18288" rIns="18288" tIns="18288" bIns="18288" anchor="ctr">
+            <a:spAutoFit/>
+          </a:bodyPr>
+          <a:lstStyle/>
+          <a:p>
+            <a:pPr algn="l">
+              <a:defRPr sz="1200" b="0">
+                <a:solidFill>
+                  <a:srgbClr val="223045"/>
+                </a:solidFill>
+                <a:latin typeface="Aptos"/>
+              </a:defRPr>
+            </a:pPr>
+            <a:r>
+              <a:t>•  Mevzuat PDF bağlantıları</a:t>
+            </a:r>
+            <a:br/>
+            <a:r>
+              <a:t>•  Kullanıcının seçtiği Git deposu</a:t>
+            </a:r>
+            <a:br/>
+            <a:r>
+              <a:t>•  Yerel Ollama model havuzu</a:t>
+            </a:r>
+          </a:p>
+        </p:txBody>
+      </p:sp>
+      <p:sp>
+        <p:nvSpPr>
+          <p:cNvPr id="9" name="Rounded Rectangle 8"/>
+          <p:cNvSpPr/>
+          <p:nvPr/>
+        </p:nvSpPr>
+        <p:spPr>
+          <a:xfrm>
+            <a:off x="4352544" y="1874519"/>
+            <a:ext cx="3493008" cy="1920240"/>
+          </a:xfrm>
+          <a:prstGeom prst="roundRect">
+            <a:avLst/>
+          </a:prstGeom>
+          <a:solidFill>
+            <a:srgbClr val="FFFFFF"/>
+          </a:solidFill>
+          <a:ln>
+            <a:noFill/>
+          </a:ln>
+        </p:spPr>
+        <p:style>
+          <a:lnRef idx="1">
+            <a:schemeClr val="accent1"/>
+          </a:lnRef>
+          <a:fillRef idx="3">
+            <a:schemeClr val="accent1"/>
+          </a:fillRef>
+          <a:effectRef idx="2">
+            <a:schemeClr val="accent1"/>
+          </a:effectRef>
+          <a:fontRef idx="minor">
+            <a:schemeClr val="lt1"/>
+          </a:fontRef>
+        </p:style>
+        <p:txBody>
+          <a:bodyPr rtlCol="0" anchor="ctr"/>
+          <a:lstStyle/>
+          <a:p>
+            <a:pPr algn="ctr"/>
+          </a:p>
+        </p:txBody>
+      </p:sp>
+      <p:sp>
+        <p:nvSpPr>
+          <p:cNvPr id="10" name="Rectangle 9"/>
+          <p:cNvSpPr/>
+          <p:nvPr/>
+        </p:nvSpPr>
+        <p:spPr>
+          <a:xfrm>
+            <a:off x="4352544" y="1874519"/>
+            <a:ext cx="64008" cy="1920240"/>
+          </a:xfrm>
+          <a:prstGeom prst="rect">
+            <a:avLst/>
+          </a:prstGeom>
+          <a:solidFill>
+            <a:srgbClr val="35BED7"/>
+          </a:solidFill>
+          <a:ln>
+            <a:noFill/>
+          </a:ln>
+        </p:spPr>
+        <p:style>
+          <a:lnRef idx="1">
+            <a:schemeClr val="accent1"/>
+          </a:lnRef>
+          <a:fillRef idx="3">
+            <a:schemeClr val="accent1"/>
+          </a:fillRef>
+          <a:effectRef idx="2">
+            <a:schemeClr val="accent1"/>
+          </a:effectRef>
+          <a:fontRef idx="minor">
+            <a:schemeClr val="lt1"/>
+          </a:fontRef>
+        </p:style>
+        <p:txBody>
+          <a:bodyPr rtlCol="0" anchor="ctr"/>
+          <a:lstStyle/>
+          <a:p>
+            <a:pPr algn="ctr"/>
+          </a:p>
+        </p:txBody>
+      </p:sp>
+      <p:sp>
+        <p:nvSpPr>
+          <p:cNvPr id="11" name="TextBox 10"/>
+          <p:cNvSpPr txBox="1"/>
+          <p:nvPr/>
+        </p:nvSpPr>
+        <p:spPr>
+          <a:xfrm>
+            <a:off x="4553712" y="2002536"/>
+            <a:ext cx="3108960" cy="347472"/>
+          </a:xfrm>
+          <a:prstGeom prst="rect">
+            <a:avLst/>
+          </a:prstGeom>
+          <a:noFill/>
+        </p:spPr>
+        <p:txBody>
+          <a:bodyPr wrap="square" lIns="18288" rIns="18288" tIns="18288" bIns="18288" anchor="ctr">
+            <a:spAutoFit/>
+          </a:bodyPr>
+          <a:lstStyle/>
+          <a:p>
+            <a:pPr algn="l">
+              <a:defRPr sz="1600" b="1">
+                <a:solidFill>
+                  <a:srgbClr val="112240"/>
+                </a:solidFill>
+                <a:latin typeface="Aptos"/>
+              </a:defRPr>
+            </a:pPr>
+            <a:r>
+              <a:t>İşleme</a:t>
+            </a:r>
+          </a:p>
+        </p:txBody>
+      </p:sp>
+      <p:sp>
+        <p:nvSpPr>
+          <p:cNvPr id="12" name="TextBox 11"/>
+          <p:cNvSpPr txBox="1"/>
+          <p:nvPr/>
+        </p:nvSpPr>
+        <p:spPr>
+          <a:xfrm>
+            <a:off x="4572000" y="2423160"/>
+            <a:ext cx="3072384" cy="1261872"/>
+          </a:xfrm>
+          <a:prstGeom prst="rect">
+            <a:avLst/>
+          </a:prstGeom>
+          <a:noFill/>
+        </p:spPr>
+        <p:txBody>
+          <a:bodyPr wrap="square" lIns="18288" rIns="18288" tIns="18288" bIns="18288" anchor="ctr">
+            <a:spAutoFit/>
+          </a:bodyPr>
+          <a:lstStyle/>
+          <a:p>
+            <a:pPr algn="l">
+              <a:defRPr sz="1200" b="0">
+                <a:solidFill>
+                  <a:srgbClr val="223045"/>
+                </a:solidFill>
+                <a:latin typeface="Aptos"/>
+              </a:defRPr>
+            </a:pPr>
+            <a:r>
+              <a:t>•  Metni parçala ve yerel ara</a:t>
+            </a:r>
+            <a:br/>
+            <a:r>
+              <a:t>•  Kapsam/süre tahmini yap</a:t>
+            </a:r>
+            <a:br/>
+            <a:r>
+              <a:t>•  İlgili kod ve kaynakları incele</a:t>
+            </a:r>
+          </a:p>
+        </p:txBody>
+      </p:sp>
+      <p:sp>
+        <p:nvSpPr>
+          <p:cNvPr id="13" name="Rounded Rectangle 12"/>
+          <p:cNvSpPr/>
+          <p:nvPr/>
+        </p:nvSpPr>
+        <p:spPr>
+          <a:xfrm>
+            <a:off x="8046720" y="1874519"/>
+            <a:ext cx="3493008" cy="1920240"/>
+          </a:xfrm>
+          <a:prstGeom prst="roundRect">
+            <a:avLst/>
+          </a:prstGeom>
+          <a:solidFill>
+            <a:srgbClr val="FFFFFF"/>
+          </a:solidFill>
+          <a:ln>
+            <a:noFill/>
+          </a:ln>
+        </p:spPr>
+        <p:style>
+          <a:lnRef idx="1">
+            <a:schemeClr val="accent1"/>
+          </a:lnRef>
+          <a:fillRef idx="3">
+            <a:schemeClr val="accent1"/>
+          </a:fillRef>
+          <a:effectRef idx="2">
+            <a:schemeClr val="accent1"/>
+          </a:effectRef>
+          <a:fontRef idx="minor">
+            <a:schemeClr val="lt1"/>
+          </a:fontRef>
+        </p:style>
+        <p:txBody>
+          <a:bodyPr rtlCol="0" anchor="ctr"/>
+          <a:lstStyle/>
+          <a:p>
+            <a:pPr algn="ctr"/>
+          </a:p>
+        </p:txBody>
+      </p:sp>
+      <p:sp>
+        <p:nvSpPr>
+          <p:cNvPr id="14" name="Rectangle 13"/>
+          <p:cNvSpPr/>
+          <p:nvPr/>
+        </p:nvSpPr>
+        <p:spPr>
+          <a:xfrm>
+            <a:off x="8046720" y="1874519"/>
+            <a:ext cx="64008" cy="1920240"/>
+          </a:xfrm>
+          <a:prstGeom prst="rect">
+            <a:avLst/>
+          </a:prstGeom>
+          <a:solidFill>
+            <a:srgbClr val="F8BC4A"/>
+          </a:solidFill>
+          <a:ln>
+            <a:noFill/>
+          </a:ln>
+        </p:spPr>
+        <p:style>
+          <a:lnRef idx="1">
+            <a:schemeClr val="accent1"/>
+          </a:lnRef>
+          <a:fillRef idx="3">
+            <a:schemeClr val="accent1"/>
+          </a:fillRef>
+          <a:effectRef idx="2">
+            <a:schemeClr val="accent1"/>
+          </a:effectRef>
+          <a:fontRef idx="minor">
+            <a:schemeClr val="lt1"/>
+          </a:fontRef>
+        </p:style>
+        <p:txBody>
+          <a:bodyPr rtlCol="0" anchor="ctr"/>
+          <a:lstStyle/>
+          <a:p>
+            <a:pPr algn="ctr"/>
+          </a:p>
+        </p:txBody>
+      </p:sp>
+      <p:sp>
+        <p:nvSpPr>
+          <p:cNvPr id="15" name="TextBox 14"/>
+          <p:cNvSpPr txBox="1"/>
+          <p:nvPr/>
+        </p:nvSpPr>
+        <p:spPr>
+          <a:xfrm>
+            <a:off x="8247888" y="2002536"/>
+            <a:ext cx="3108960" cy="347472"/>
+          </a:xfrm>
+          <a:prstGeom prst="rect">
+            <a:avLst/>
+          </a:prstGeom>
+          <a:noFill/>
+        </p:spPr>
+        <p:txBody>
+          <a:bodyPr wrap="square" lIns="18288" rIns="18288" tIns="18288" bIns="18288" anchor="ctr">
+            <a:spAutoFit/>
+          </a:bodyPr>
+          <a:lstStyle/>
+          <a:p>
+            <a:pPr algn="l">
+              <a:defRPr sz="1600" b="1">
+                <a:solidFill>
+                  <a:srgbClr val="112240"/>
+                </a:solidFill>
+                <a:latin typeface="Aptos"/>
+              </a:defRPr>
+            </a:pPr>
+            <a:r>
+              <a:t>Çıktı</a:t>
+            </a:r>
+          </a:p>
+        </p:txBody>
+      </p:sp>
+      <p:sp>
+        <p:nvSpPr>
+          <p:cNvPr id="16" name="TextBox 15"/>
+          <p:cNvSpPr txBox="1"/>
+          <p:nvPr/>
+        </p:nvSpPr>
+        <p:spPr>
+          <a:xfrm>
+            <a:off x="8266176" y="2423160"/>
+            <a:ext cx="3072384" cy="1261872"/>
+          </a:xfrm>
+          <a:prstGeom prst="rect">
+            <a:avLst/>
+          </a:prstGeom>
+          <a:noFill/>
+        </p:spPr>
+        <p:txBody>
+          <a:bodyPr wrap="square" lIns="18288" rIns="18288" tIns="18288" bIns="18288" anchor="ctr">
+            <a:spAutoFit/>
+          </a:bodyPr>
+          <a:lstStyle/>
+          <a:p>
+            <a:pPr algn="l">
+              <a:defRPr sz="1200" b="0">
+                <a:solidFill>
+                  <a:srgbClr val="223045"/>
+                </a:solidFill>
+                <a:latin typeface="Aptos"/>
+              </a:defRPr>
+            </a:pPr>
+            <a:r>
+              <a:t>•  Kanıt bağlantılı bulgular</a:t>
+            </a:r>
+            <a:br/>
+            <a:r>
+              <a:t>•  Markdown ve HTML raporları</a:t>
+            </a:r>
+            <a:br/>
+            <a:r>
+              <a:t>•  Onaylı düzeltme ve PR akışı</a:t>
+            </a:r>
+          </a:p>
+        </p:txBody>
+      </p:sp>
+      <p:sp>
+        <p:nvSpPr>
+          <p:cNvPr id="17" name="Rounded Rectangle 16"/>
+          <p:cNvSpPr/>
+          <p:nvPr/>
+        </p:nvSpPr>
+        <p:spPr>
+          <a:xfrm>
+            <a:off x="658368" y="4160520"/>
+            <a:ext cx="10881360" cy="960120"/>
+          </a:xfrm>
+          <a:prstGeom prst="roundRect">
+            <a:avLst/>
+          </a:prstGeom>
+          <a:solidFill>
+            <a:srgbClr val="E7F0FA"/>
+          </a:solidFill>
+          <a:ln>
+            <a:noFill/>
+          </a:ln>
+        </p:spPr>
+        <p:style>
+          <a:lnRef idx="1">
+            <a:schemeClr val="accent1"/>
+          </a:lnRef>
+          <a:fillRef idx="3">
+            <a:schemeClr val="accent1"/>
+          </a:fillRef>
+          <a:effectRef idx="2">
+            <a:schemeClr val="accent1"/>
+          </a:effectRef>
+          <a:fontRef idx="minor">
+            <a:schemeClr val="lt1"/>
+          </a:fontRef>
+        </p:style>
+        <p:txBody>
+          <a:bodyPr rtlCol="0" anchor="ctr"/>
+          <a:lstStyle/>
+          <a:p>
+            <a:pPr algn="ctr"/>
+          </a:p>
+        </p:txBody>
+      </p:sp>
+      <p:sp>
+        <p:nvSpPr>
+          <p:cNvPr id="18" name="TextBox 17"/>
+          <p:cNvSpPr txBox="1"/>
+          <p:nvPr/>
+        </p:nvSpPr>
+        <p:spPr>
+          <a:xfrm>
+            <a:off x="896112" y="4325112"/>
+            <a:ext cx="1645920" cy="274320"/>
+          </a:xfrm>
+          <a:prstGeom prst="rect">
+            <a:avLst/>
+          </a:prstGeom>
+          <a:noFill/>
+        </p:spPr>
+        <p:txBody>
+          <a:bodyPr wrap="square" lIns="18288" rIns="18288" tIns="18288" bIns="18288" anchor="ctr">
+            <a:spAutoFit/>
+          </a:bodyPr>
+          <a:lstStyle/>
+          <a:p>
+            <a:pPr algn="l">
+              <a:defRPr sz="1300" b="1">
+                <a:solidFill>
+                  <a:srgbClr val="112240"/>
+                </a:solidFill>
+                <a:latin typeface="Aptos"/>
+              </a:defRPr>
+            </a:pPr>
+            <a:r>
+              <a:t>Temel yaklaşım</a:t>
+            </a:r>
+          </a:p>
+        </p:txBody>
+      </p:sp>
+      <p:sp>
+        <p:nvSpPr>
+          <p:cNvPr id="19" name="TextBox 18"/>
+          <p:cNvSpPr txBox="1"/>
+          <p:nvPr/>
+        </p:nvSpPr>
+        <p:spPr>
+          <a:xfrm>
+            <a:off x="2560320" y="4279392"/>
+            <a:ext cx="8458200" cy="402336"/>
+          </a:xfrm>
+          <a:prstGeom prst="rect">
+            <a:avLst/>
+          </a:prstGeom>
+          <a:noFill/>
+        </p:spPr>
+        <p:txBody>
+          <a:bodyPr wrap="square" lIns="18288" rIns="18288" tIns="18288" bIns="18288" anchor="ctr">
+            <a:spAutoFit/>
+          </a:bodyPr>
+          <a:lstStyle/>
+          <a:p>
+            <a:pPr algn="l">
+              <a:defRPr sz="1500" b="1">
+                <a:solidFill>
+                  <a:srgbClr val="223045"/>
+                </a:solidFill>
+                <a:latin typeface="Aptos"/>
+              </a:defRPr>
+            </a:pPr>
+            <a:r>
+              <a:t>Araç karar vermez: mevzuat uzmanının değerlendirmesine kanıt ve izlenebilir iş akışı sağlar.</a:t>
+            </a:r>
+          </a:p>
+        </p:txBody>
+      </p:sp>
+      <p:sp>
+        <p:nvSpPr>
+          <p:cNvPr id="20" name="TextBox 19"/>
+          <p:cNvSpPr txBox="1"/>
+          <p:nvPr/>
+        </p:nvSpPr>
+        <p:spPr>
+          <a:xfrm>
+            <a:off x="896112" y="5422392"/>
+            <a:ext cx="9875520" cy="320040"/>
+          </a:xfrm>
+          <a:prstGeom prst="rect">
+            <a:avLst/>
+          </a:prstGeom>
+          <a:noFill/>
+        </p:spPr>
+        <p:txBody>
+          <a:bodyPr wrap="square" lIns="18288" rIns="18288" tIns="18288" bIns="18288" anchor="ctr">
+            <a:spAutoFit/>
+          </a:bodyPr>
+          <a:lstStyle/>
+          <a:p>
+            <a:pPr algn="l">
+              <a:defRPr sz="1200" b="0">
+                <a:solidFill>
+                  <a:srgbClr val="637389"/>
+                </a:solidFill>
+                <a:latin typeface="Aptos"/>
+              </a:defRPr>
+            </a:pPr>
+            <a:r>
+              <a:t>Hukuk danışmanı değildir; otomatik tarama sonucu hukuki uygunluğu kanıtlamaz.</a:t>
+            </a:r>
+          </a:p>
+        </p:txBody>
+      </p:sp>
+      <p:sp>
+        <p:nvSpPr>
+          <p:cNvPr id="21" name="TextBox 20"/>
+          <p:cNvSpPr txBox="1"/>
+          <p:nvPr/>
+        </p:nvSpPr>
+        <p:spPr>
+          <a:xfrm>
+            <a:off x="566928" y="6473952"/>
+            <a:ext cx="9692640" cy="182880"/>
+          </a:xfrm>
+          <a:prstGeom prst="rect">
+            <a:avLst/>
+          </a:prstGeom>
+          <a:noFill/>
+        </p:spPr>
+        <p:txBody>
+          <a:bodyPr wrap="square" lIns="18288" rIns="18288" tIns="18288" bIns="18288" anchor="ctr">
+            <a:spAutoFit/>
+          </a:bodyPr>
+          <a:lstStyle/>
+          <a:p>
+            <a:pPr algn="l">
+              <a:defRPr sz="800" b="1">
+                <a:solidFill>
+                  <a:srgbClr val="637389"/>
+                </a:solidFill>
+                <a:latin typeface="Aptos"/>
+              </a:defRPr>
+            </a:pPr>
+            <a:r>
+              <a:t>MEVZUATAGENT  •  YEREL  •  ONAYLI  •  DENETLENEBİLİR</a:t>
+            </a:r>
+          </a:p>
+        </p:txBody>
+      </p:sp>
+      <p:sp>
+        <p:nvSpPr>
+          <p:cNvPr id="22" name="TextBox 21"/>
+          <p:cNvSpPr txBox="1"/>
+          <p:nvPr/>
+        </p:nvSpPr>
+        <p:spPr>
+          <a:xfrm>
+            <a:off x="11109960" y="6419088"/>
+            <a:ext cx="502920" cy="274320"/>
+          </a:xfrm>
+          <a:prstGeom prst="rect">
+            <a:avLst/>
+          </a:prstGeom>
+          <a:noFill/>
+        </p:spPr>
+        <p:txBody>
+          <a:bodyPr wrap="square" lIns="18288" rIns="18288" tIns="18288" bIns="18288" anchor="ctr">
+            <a:spAutoFit/>
+          </a:bodyPr>
+          <a:lstStyle/>
+          <a:p>
+            <a:pPr algn="r">
+              <a:defRPr sz="1000" b="1">
+                <a:solidFill>
+                  <a:srgbClr val="637389"/>
+                </a:solidFill>
+                <a:latin typeface="Aptos"/>
+              </a:defRPr>
+            </a:pPr>
+            <a:r>
+              <a:t>02</a:t>
+            </a:r>
+          </a:p>
+        </p:txBody>
+      </p:sp>
+    </p:spTree>
+  </p:cSld>
+  <p:clrMapOvr>
+    <a:masterClrMapping/>
+  </p:clrMapOvr>
+</p:sld>
+</file>
+
+<file path=ppt/slides/slide20.xml><?xml version="1.0" encoding="utf-8"?>
+<p:sld xmlns:a="http://schemas.openxmlformats.org/drawingml/2006/main" xmlns:p="http://schemas.openxmlformats.org/presentationml/2006/main" xmlns:r="http://schemas.openxmlformats.org/officeDocument/2006/relationships">
+  <p:cSld>
+    <p:bg>
+      <p:bgPr>
+        <a:solidFill>
+          <a:srgbClr val="F7F9FC"/>
+        </a:solidFill>
+        <a:effectLst/>
+      </p:bgPr>
+    </p:bg>
+    <p:spTree>
+      <p:nvGrpSpPr>
+        <p:cNvPr id="1" name=""/>
+        <p:cNvGrpSpPr/>
+        <p:nvPr/>
+      </p:nvGrpSpPr>
+      <p:grpSpPr/>
+      <p:sp>
+        <p:nvSpPr>
+          <p:cNvPr id="2" name="TextBox 1"/>
+          <p:cNvSpPr txBox="1"/>
+          <p:nvPr/>
+        </p:nvSpPr>
+        <p:spPr>
+          <a:xfrm>
+            <a:off x="640080" y="329184"/>
+            <a:ext cx="10881360" cy="228600"/>
+          </a:xfrm>
+          <a:prstGeom prst="rect">
+            <a:avLst/>
+          </a:prstGeom>
+          <a:noFill/>
+        </p:spPr>
+        <p:txBody>
+          <a:bodyPr wrap="square" lIns="18288" rIns="18288" tIns="18288" bIns="18288" anchor="ctr">
+            <a:spAutoFit/>
+          </a:bodyPr>
+          <a:lstStyle/>
+          <a:p>
+            <a:pPr algn="l">
+              <a:defRPr sz="900" b="1">
+                <a:solidFill>
+                  <a:srgbClr val="00AFA0"/>
+                </a:solidFill>
+                <a:latin typeface="Aptos"/>
+              </a:defRPr>
+            </a:pPr>
+            <a:r>
+              <a:t>20  •  GÜVENLIK VE MAHREMIYET</a:t>
+            </a:r>
+          </a:p>
+        </p:txBody>
+      </p:sp>
+      <p:sp>
+        <p:nvSpPr>
+          <p:cNvPr id="3" name="TextBox 2"/>
+          <p:cNvSpPr txBox="1"/>
+          <p:nvPr/>
+        </p:nvSpPr>
+        <p:spPr>
+          <a:xfrm>
+            <a:off x="640080" y="658368"/>
+            <a:ext cx="10972800" cy="502920"/>
+          </a:xfrm>
+          <a:prstGeom prst="rect">
+            <a:avLst/>
+          </a:prstGeom>
+          <a:noFill/>
+        </p:spPr>
+        <p:txBody>
+          <a:bodyPr wrap="square" lIns="18288" rIns="18288" tIns="18288" bIns="18288" anchor="ctr">
+            <a:spAutoFit/>
+          </a:bodyPr>
+          <a:lstStyle/>
+          <a:p>
+            <a:pPr algn="l">
+              <a:defRPr sz="2700" b="1">
+                <a:solidFill>
+                  <a:srgbClr val="112240"/>
+                </a:solidFill>
+                <a:latin typeface="Aptos"/>
+              </a:defRPr>
+            </a:pPr>
+            <a:r>
+              <a:t>Güvenli varsayılanlar ve açık sınırlar</a:t>
+            </a:r>
+          </a:p>
+        </p:txBody>
+      </p:sp>
+      <p:sp>
+        <p:nvSpPr>
+          <p:cNvPr id="4" name="TextBox 3"/>
+          <p:cNvSpPr txBox="1"/>
+          <p:nvPr/>
+        </p:nvSpPr>
+        <p:spPr>
+          <a:xfrm>
+            <a:off x="658368" y="1197864"/>
+            <a:ext cx="10881360" cy="420624"/>
+          </a:xfrm>
+          <a:prstGeom prst="rect">
+            <a:avLst/>
+          </a:prstGeom>
+          <a:noFill/>
+        </p:spPr>
+        <p:txBody>
+          <a:bodyPr wrap="square" lIns="18288" rIns="18288" tIns="18288" bIns="18288" anchor="ctr">
+            <a:spAutoFit/>
+          </a:bodyPr>
+          <a:lstStyle/>
+          <a:p>
+            <a:pPr algn="l">
+              <a:defRPr sz="1300" b="0">
+                <a:solidFill>
+                  <a:srgbClr val="637389"/>
+                </a:solidFill>
+                <a:latin typeface="Aptos"/>
+              </a:defRPr>
+            </a:pPr>
+            <a:r>
+              <a:t>Kod ve mevzuat bağlamı yerel Ollama'ya gider; tarama akışı bulguları uzman incelemesine sunar.</a:t>
+            </a:r>
+          </a:p>
+        </p:txBody>
+      </p:sp>
+      <p:sp>
+        <p:nvSpPr>
+          <p:cNvPr id="5" name="Rounded Rectangle 4"/>
+          <p:cNvSpPr/>
+          <p:nvPr/>
+        </p:nvSpPr>
+        <p:spPr>
+          <a:xfrm>
+            <a:off x="713232" y="1828800"/>
+            <a:ext cx="5212080" cy="2011680"/>
+          </a:xfrm>
+          <a:prstGeom prst="roundRect">
+            <a:avLst/>
+          </a:prstGeom>
+          <a:solidFill>
+            <a:srgbClr val="FFFFFF"/>
+          </a:solidFill>
+          <a:ln>
+            <a:noFill/>
+          </a:ln>
+        </p:spPr>
+        <p:style>
+          <a:lnRef idx="1">
+            <a:schemeClr val="accent1"/>
+          </a:lnRef>
+          <a:fillRef idx="3">
+            <a:schemeClr val="accent1"/>
+          </a:fillRef>
+          <a:effectRef idx="2">
+            <a:schemeClr val="accent1"/>
+          </a:effectRef>
+          <a:fontRef idx="minor">
+            <a:schemeClr val="lt1"/>
+          </a:fontRef>
+        </p:style>
+        <p:txBody>
+          <a:bodyPr rtlCol="0" anchor="ctr"/>
+          <a:lstStyle/>
+          <a:p>
+            <a:pPr algn="ctr"/>
+          </a:p>
+        </p:txBody>
+      </p:sp>
+      <p:sp>
+        <p:nvSpPr>
+          <p:cNvPr id="6" name="Rectangle 5"/>
+          <p:cNvSpPr/>
+          <p:nvPr/>
+        </p:nvSpPr>
+        <p:spPr>
+          <a:xfrm>
+            <a:off x="713232" y="1828800"/>
+            <a:ext cx="64008" cy="2011680"/>
+          </a:xfrm>
+          <a:prstGeom prst="rect">
+            <a:avLst/>
+          </a:prstGeom>
+          <a:solidFill>
+            <a:srgbClr val="00AFA0"/>
+          </a:solidFill>
+          <a:ln>
+            <a:noFill/>
+          </a:ln>
+        </p:spPr>
+        <p:style>
+          <a:lnRef idx="1">
+            <a:schemeClr val="accent1"/>
+          </a:lnRef>
+          <a:fillRef idx="3">
+            <a:schemeClr val="accent1"/>
+          </a:fillRef>
+          <a:effectRef idx="2">
+            <a:schemeClr val="accent1"/>
+          </a:effectRef>
+          <a:fontRef idx="minor">
+            <a:schemeClr val="lt1"/>
+          </a:fontRef>
+        </p:style>
+        <p:txBody>
+          <a:bodyPr rtlCol="0" anchor="ctr"/>
+          <a:lstStyle/>
+          <a:p>
+            <a:pPr algn="ctr"/>
+          </a:p>
+        </p:txBody>
+      </p:sp>
+      <p:sp>
+        <p:nvSpPr>
+          <p:cNvPr id="7" name="TextBox 6"/>
+          <p:cNvSpPr txBox="1"/>
+          <p:nvPr/>
+        </p:nvSpPr>
+        <p:spPr>
+          <a:xfrm>
+            <a:off x="914400" y="1956816"/>
+            <a:ext cx="4828032" cy="347472"/>
+          </a:xfrm>
+          <a:prstGeom prst="rect">
+            <a:avLst/>
+          </a:prstGeom>
+          <a:noFill/>
+        </p:spPr>
+        <p:txBody>
+          <a:bodyPr wrap="square" lIns="18288" rIns="18288" tIns="18288" bIns="18288" anchor="ctr">
+            <a:spAutoFit/>
+          </a:bodyPr>
+          <a:lstStyle/>
+          <a:p>
+            <a:pPr algn="l">
+              <a:defRPr sz="1600" b="1">
+                <a:solidFill>
+                  <a:srgbClr val="112240"/>
+                </a:solidFill>
+                <a:latin typeface="Aptos"/>
+              </a:defRPr>
+            </a:pPr>
+            <a:r>
+              <a:t>Kontroller</a:t>
+            </a:r>
+          </a:p>
+        </p:txBody>
+      </p:sp>
+      <p:sp>
+        <p:nvSpPr>
+          <p:cNvPr id="8" name="TextBox 7"/>
+          <p:cNvSpPr txBox="1"/>
+          <p:nvPr/>
+        </p:nvSpPr>
+        <p:spPr>
+          <a:xfrm>
+            <a:off x="932688" y="2377440"/>
+            <a:ext cx="4791456" cy="1353312"/>
+          </a:xfrm>
+          <a:prstGeom prst="rect">
+            <a:avLst/>
+          </a:prstGeom>
+          <a:noFill/>
+        </p:spPr>
+        <p:txBody>
+          <a:bodyPr wrap="square" lIns="18288" rIns="18288" tIns="18288" bIns="18288" anchor="ctr">
+            <a:spAutoFit/>
+          </a:bodyPr>
+          <a:lstStyle/>
+          <a:p>
+            <a:pPr algn="l">
+              <a:defRPr sz="1200" b="0">
+                <a:solidFill>
+                  <a:srgbClr val="223045"/>
+                </a:solidFill>
+                <a:latin typeface="Aptos"/>
+              </a:defRPr>
+            </a:pPr>
+            <a:r>
+              <a:t>•  Klonlama ve tarama kullanıcı onaylıdır</a:t>
+            </a:r>
+            <a:br/>
+            <a:r>
+              <a:t>•  Düzeltme ayrı worktree'de uygulanır</a:t>
+            </a:r>
+            <a:br/>
+            <a:r>
+              <a:t>•  Test ve PR ayrı onay ister</a:t>
+            </a:r>
+            <a:br/>
+            <a:r>
+              <a:t>•  PR için yalnız beklenen dosyalar seçilir</a:t>
+            </a:r>
+          </a:p>
+        </p:txBody>
+      </p:sp>
+      <p:sp>
+        <p:nvSpPr>
+          <p:cNvPr id="9" name="Rounded Rectangle 8"/>
+          <p:cNvSpPr/>
+          <p:nvPr/>
+        </p:nvSpPr>
+        <p:spPr>
+          <a:xfrm>
+            <a:off x="6172200" y="1828800"/>
+            <a:ext cx="5212080" cy="2011680"/>
+          </a:xfrm>
+          <a:prstGeom prst="roundRect">
+            <a:avLst/>
+          </a:prstGeom>
+          <a:solidFill>
+            <a:srgbClr val="FFFFFF"/>
+          </a:solidFill>
+          <a:ln>
+            <a:noFill/>
+          </a:ln>
+        </p:spPr>
+        <p:style>
+          <a:lnRef idx="1">
+            <a:schemeClr val="accent1"/>
+          </a:lnRef>
+          <a:fillRef idx="3">
+            <a:schemeClr val="accent1"/>
+          </a:fillRef>
+          <a:effectRef idx="2">
+            <a:schemeClr val="accent1"/>
+          </a:effectRef>
+          <a:fontRef idx="minor">
+            <a:schemeClr val="lt1"/>
+          </a:fontRef>
+        </p:style>
+        <p:txBody>
+          <a:bodyPr rtlCol="0" anchor="ctr"/>
+          <a:lstStyle/>
+          <a:p>
+            <a:pPr algn="ctr"/>
+          </a:p>
+        </p:txBody>
+      </p:sp>
+      <p:sp>
+        <p:nvSpPr>
+          <p:cNvPr id="10" name="Rectangle 9"/>
+          <p:cNvSpPr/>
+          <p:nvPr/>
+        </p:nvSpPr>
+        <p:spPr>
+          <a:xfrm>
+            <a:off x="6172200" y="1828800"/>
+            <a:ext cx="64008" cy="2011680"/>
+          </a:xfrm>
+          <a:prstGeom prst="rect">
+            <a:avLst/>
+          </a:prstGeom>
+          <a:solidFill>
+            <a:srgbClr val="F8BC4A"/>
+          </a:solidFill>
+          <a:ln>
+            <a:noFill/>
+          </a:ln>
+        </p:spPr>
+        <p:style>
+          <a:lnRef idx="1">
+            <a:schemeClr val="accent1"/>
+          </a:lnRef>
+          <a:fillRef idx="3">
+            <a:schemeClr val="accent1"/>
+          </a:fillRef>
+          <a:effectRef idx="2">
+            <a:schemeClr val="accent1"/>
+          </a:effectRef>
+          <a:fontRef idx="minor">
+            <a:schemeClr val="lt1"/>
+          </a:fontRef>
+        </p:style>
+        <p:txBody>
+          <a:bodyPr rtlCol="0" anchor="ctr"/>
+          <a:lstStyle/>
+          <a:p>
+            <a:pPr algn="ctr"/>
+          </a:p>
+        </p:txBody>
+      </p:sp>
+      <p:sp>
+        <p:nvSpPr>
+          <p:cNvPr id="11" name="TextBox 10"/>
+          <p:cNvSpPr txBox="1"/>
+          <p:nvPr/>
+        </p:nvSpPr>
+        <p:spPr>
+          <a:xfrm>
+            <a:off x="6373368" y="1956816"/>
+            <a:ext cx="4828032" cy="347472"/>
+          </a:xfrm>
+          <a:prstGeom prst="rect">
+            <a:avLst/>
+          </a:prstGeom>
+          <a:noFill/>
+        </p:spPr>
+        <p:txBody>
+          <a:bodyPr wrap="square" lIns="18288" rIns="18288" tIns="18288" bIns="18288" anchor="ctr">
+            <a:spAutoFit/>
+          </a:bodyPr>
+          <a:lstStyle/>
+          <a:p>
+            <a:pPr algn="l">
+              <a:defRPr sz="1600" b="1">
+                <a:solidFill>
+                  <a:srgbClr val="112240"/>
+                </a:solidFill>
+                <a:latin typeface="Aptos"/>
+              </a:defRPr>
+            </a:pPr>
+            <a:r>
+              <a:t>Kullanım sorumluluğu</a:t>
+            </a:r>
+          </a:p>
+        </p:txBody>
+      </p:sp>
+      <p:sp>
+        <p:nvSpPr>
+          <p:cNvPr id="12" name="TextBox 11"/>
+          <p:cNvSpPr txBox="1"/>
+          <p:nvPr/>
+        </p:nvSpPr>
+        <p:spPr>
+          <a:xfrm>
+            <a:off x="6391656" y="2377440"/>
+            <a:ext cx="4791456" cy="1353312"/>
+          </a:xfrm>
+          <a:prstGeom prst="rect">
+            <a:avLst/>
+          </a:prstGeom>
+          <a:noFill/>
+        </p:spPr>
+        <p:txBody>
+          <a:bodyPr wrap="square" lIns="18288" rIns="18288" tIns="18288" bIns="18288" anchor="ctr">
+            <a:spAutoFit/>
+          </a:bodyPr>
+          <a:lstStyle/>
+          <a:p>
+            <a:pPr algn="l">
+              <a:defRPr sz="1200" b="0">
+                <a:solidFill>
+                  <a:srgbClr val="223045"/>
+                </a:solidFill>
+                <a:latin typeface="Aptos"/>
+              </a:defRPr>
+            </a:pPr>
+            <a:r>
+              <a:t>•  İndirilen kaynağın güncelliğini denetleyin</a:t>
+            </a:r>
+            <a:br/>
+            <a:r>
+              <a:t>•  Yalnız güvendiğiniz projelerde test çalıştırın</a:t>
+            </a:r>
+            <a:br/>
+            <a:r>
+              <a:t>•  Model bulgusunu hukuk uzmanına doğrulatın</a:t>
+            </a:r>
+            <a:br/>
+            <a:r>
+              <a:t>•  Gerçek depoda yedek ve temiz çalışma alanı kullanın</a:t>
+            </a:r>
+          </a:p>
+        </p:txBody>
+      </p:sp>
+      <p:sp>
+        <p:nvSpPr>
+          <p:cNvPr id="13" name="Rounded Rectangle 12"/>
+          <p:cNvSpPr/>
+          <p:nvPr/>
+        </p:nvSpPr>
+        <p:spPr>
+          <a:xfrm>
+            <a:off x="713232" y="4279392"/>
+            <a:ext cx="10671048" cy="896112"/>
+          </a:xfrm>
+          <a:prstGeom prst="roundRect">
+            <a:avLst/>
+          </a:prstGeom>
+          <a:solidFill>
+            <a:srgbClr val="FFF6DF"/>
+          </a:solidFill>
+          <a:ln>
+            <a:noFill/>
+          </a:ln>
+        </p:spPr>
+        <p:style>
+          <a:lnRef idx="1">
+            <a:schemeClr val="accent1"/>
+          </a:lnRef>
+          <a:fillRef idx="3">
+            <a:schemeClr val="accent1"/>
+          </a:fillRef>
+          <a:effectRef idx="2">
+            <a:schemeClr val="accent1"/>
+          </a:effectRef>
+          <a:fontRef idx="minor">
+            <a:schemeClr val="lt1"/>
+          </a:fontRef>
+        </p:style>
+        <p:txBody>
+          <a:bodyPr rtlCol="0" anchor="ctr"/>
+          <a:lstStyle/>
+          <a:p>
+            <a:pPr algn="ctr"/>
+          </a:p>
+        </p:txBody>
+      </p:sp>
+      <p:sp>
+        <p:nvSpPr>
+          <p:cNvPr id="14" name="TextBox 13"/>
+          <p:cNvSpPr txBox="1"/>
+          <p:nvPr/>
+        </p:nvSpPr>
+        <p:spPr>
+          <a:xfrm>
+            <a:off x="932688" y="4498848"/>
+            <a:ext cx="10195560" cy="402336"/>
+          </a:xfrm>
+          <a:prstGeom prst="rect">
+            <a:avLst/>
+          </a:prstGeom>
+          <a:noFill/>
+        </p:spPr>
+        <p:txBody>
+          <a:bodyPr wrap="square" lIns="18288" rIns="18288" tIns="18288" bIns="18288" anchor="ctr">
+            <a:spAutoFit/>
+          </a:bodyPr>
+          <a:lstStyle/>
+          <a:p>
+            <a:pPr algn="ctr">
+              <a:defRPr sz="1400" b="1">
+                <a:solidFill>
+                  <a:srgbClr val="112240"/>
+                </a:solidFill>
+                <a:latin typeface="Aptos"/>
+              </a:defRPr>
+            </a:pPr>
+            <a:r>
+              <a:t>Otomasyon kanıtı düzenler; hukuki görüş, kesin uygunluk kararı veya güvenlik sertifikası vermez.</a:t>
+            </a:r>
+          </a:p>
+        </p:txBody>
+      </p:sp>
+      <p:sp>
+        <p:nvSpPr>
+          <p:cNvPr id="15" name="TextBox 14"/>
+          <p:cNvSpPr txBox="1"/>
+          <p:nvPr/>
+        </p:nvSpPr>
+        <p:spPr>
+          <a:xfrm>
+            <a:off x="566928" y="6473952"/>
+            <a:ext cx="9692640" cy="182880"/>
+          </a:xfrm>
+          <a:prstGeom prst="rect">
+            <a:avLst/>
+          </a:prstGeom>
+          <a:noFill/>
+        </p:spPr>
+        <p:txBody>
+          <a:bodyPr wrap="square" lIns="18288" rIns="18288" tIns="18288" bIns="18288" anchor="ctr">
+            <a:spAutoFit/>
+          </a:bodyPr>
+          <a:lstStyle/>
+          <a:p>
+            <a:pPr algn="l">
+              <a:defRPr sz="800" b="1">
+                <a:solidFill>
+                  <a:srgbClr val="637389"/>
+                </a:solidFill>
+                <a:latin typeface="Aptos"/>
+              </a:defRPr>
+            </a:pPr>
+            <a:r>
+              <a:t>MEVZUATAGENT  •  YEREL  •  ONAYLI  •  DENETLENEBİLİR</a:t>
+            </a:r>
+          </a:p>
+        </p:txBody>
+      </p:sp>
+      <p:sp>
+        <p:nvSpPr>
+          <p:cNvPr id="16" name="TextBox 15"/>
+          <p:cNvSpPr txBox="1"/>
+          <p:nvPr/>
+        </p:nvSpPr>
+        <p:spPr>
+          <a:xfrm>
+            <a:off x="11109960" y="6419088"/>
+            <a:ext cx="502920" cy="274320"/>
+          </a:xfrm>
+          <a:prstGeom prst="rect">
+            <a:avLst/>
+          </a:prstGeom>
+          <a:noFill/>
+        </p:spPr>
+        <p:txBody>
+          <a:bodyPr wrap="square" lIns="18288" rIns="18288" tIns="18288" bIns="18288" anchor="ctr">
+            <a:spAutoFit/>
+          </a:bodyPr>
+          <a:lstStyle/>
+          <a:p>
+            <a:pPr algn="r">
+              <a:defRPr sz="1000" b="1">
+                <a:solidFill>
+                  <a:srgbClr val="637389"/>
+                </a:solidFill>
+                <a:latin typeface="Aptos"/>
+              </a:defRPr>
+            </a:pPr>
+            <a:r>
+              <a:t>20</a:t>
+            </a:r>
+          </a:p>
+        </p:txBody>
+      </p:sp>
+    </p:spTree>
+  </p:cSld>
+  <p:clrMapOvr>
+    <a:masterClrMapping/>
+  </p:clrMapOvr>
+</p:sld>
+</file>
+
+<file path=ppt/slides/slide21.xml><?xml version="1.0" encoding="utf-8"?>
+<p:sld xmlns:a="http://schemas.openxmlformats.org/drawingml/2006/main" xmlns:p="http://schemas.openxmlformats.org/presentationml/2006/main" xmlns:r="http://schemas.openxmlformats.org/officeDocument/2006/relationships">
+  <p:cSld>
+    <p:bg>
+      <p:bgPr>
+        <a:solidFill>
+          <a:srgbClr val="F7F9FC"/>
+        </a:solidFill>
+        <a:effectLst/>
+      </p:bgPr>
+    </p:bg>
+    <p:spTree>
+      <p:nvGrpSpPr>
+        <p:cNvPr id="1" name=""/>
+        <p:cNvGrpSpPr/>
+        <p:nvPr/>
+      </p:nvGrpSpPr>
+      <p:grpSpPr/>
+      <p:sp>
+        <p:nvSpPr>
+          <p:cNvPr id="2" name="TextBox 1"/>
+          <p:cNvSpPr txBox="1"/>
+          <p:nvPr/>
+        </p:nvSpPr>
+        <p:spPr>
+          <a:xfrm>
+            <a:off x="640080" y="329184"/>
+            <a:ext cx="10881360" cy="228600"/>
+          </a:xfrm>
+          <a:prstGeom prst="rect">
+            <a:avLst/>
+          </a:prstGeom>
+          <a:noFill/>
+        </p:spPr>
+        <p:txBody>
+          <a:bodyPr wrap="square" lIns="18288" rIns="18288" tIns="18288" bIns="18288" anchor="ctr">
+            <a:spAutoFit/>
+          </a:bodyPr>
+          <a:lstStyle/>
+          <a:p>
+            <a:pPr algn="l">
+              <a:defRPr sz="900" b="1">
+                <a:solidFill>
+                  <a:srgbClr val="00AFA0"/>
+                </a:solidFill>
+                <a:latin typeface="Aptos"/>
+              </a:defRPr>
+            </a:pPr>
+            <a:r>
+              <a:t>21  •  GEREKSINIM IZLEME</a:t>
             </a:r>
           </a:p>
         </p:txBody>
@@ -12664,7 +15996,7 @@
                         </a:defRPr>
                       </a:pPr>
                       <a:r>
-                        <a:t>Python/PyCharm • Ollama • LangChain</a:t>
+                        <a:t>Python/PyCharm • sohbet • Ollama • LangChain</a:t>
                       </a:r>
                     </a:p>
                   </a:txBody>
@@ -12688,7 +16020,7 @@
                         </a:defRPr>
                       </a:pPr>
                       <a:r>
-                        <a:t>Proje paketi, yerel model ve Runnable zinciri</a:t>
+                        <a:t>Proje promptu, yerel sohbet ve Runnable zinciri</a:t>
                       </a:r>
                     </a:p>
                   </a:txBody>
@@ -12910,7 +16242,7 @@
                         </a:defRPr>
                       </a:pPr>
                       <a:r>
-                        <a:t>clone_repositories + menü onayı</a:t>
+                        <a:t>clone_repositories + sohbet/pipeline onayı</a:t>
                       </a:r>
                     </a:p>
                   </a:txBody>
@@ -13362,7 +16694,7 @@
               </a:defRPr>
             </a:pPr>
             <a:r>
-              <a:t>19</a:t>
+              <a:t>21</a:t>
             </a:r>
           </a:p>
         </p:txBody>
@@ -13375,7 +16707,7 @@
 </p:sld>
 </file>
 
-<file path=ppt/slides/slide2.xml><?xml version="1.0" encoding="utf-8"?>
+<file path=ppt/slides/slide22.xml><?xml version="1.0" encoding="utf-8"?>
 <p:sld xmlns:a="http://schemas.openxmlformats.org/drawingml/2006/main" xmlns:p="http://schemas.openxmlformats.org/presentationml/2006/main" xmlns:r="http://schemas.openxmlformats.org/officeDocument/2006/relationships">
   <p:cSld>
     <p:bg>
@@ -13424,7 +16756,7 @@
               </a:defRPr>
             </a:pPr>
             <a:r>
-              <a:t>01  •  NEDEN BU PROJE?</a:t>
+              <a:t>22  •  BILINEN SINIRLAMALAR</a:t>
             </a:r>
           </a:p>
         </p:txBody>
@@ -13460,7 +16792,7 @@
               </a:defRPr>
             </a:pPr>
             <a:r>
-              <a:t>Mevzuat bilgisini kod kararlarına yaklaştırmak</a:t>
+              <a:t>Tamamlanan iş ve sonraki geliştirme alanları</a:t>
             </a:r>
           </a:p>
         </p:txBody>
@@ -13496,7 +16828,7 @@
               </a:defRPr>
             </a:pPr>
             <a:r>
-              <a:t>Dağınık kaynaklar, manuel inceleme ve izlenmesi zor düzeltme adımlarını tek bir kontrollü akışta birleştirir.</a:t>
+              <a:t>Kapsamı dürüstçe ayırmak, model çıktısına gereğinden fazla güvenilmesini önler.</a:t>
             </a:r>
           </a:p>
         </p:txBody>
@@ -13509,8 +16841,8 @@
         </p:nvSpPr>
         <p:spPr>
           <a:xfrm>
-            <a:off x="658368" y="1874519"/>
-            <a:ext cx="3493008" cy="1920240"/>
+            <a:off x="713232" y="1847088"/>
+            <a:ext cx="5230368" cy="2423160"/>
           </a:xfrm>
           <a:prstGeom prst="roundRect">
             <a:avLst/>
@@ -13552,8 +16884,8 @@
         </p:nvSpPr>
         <p:spPr>
           <a:xfrm>
-            <a:off x="658368" y="1874519"/>
-            <a:ext cx="64008" cy="1920240"/>
+            <a:off x="713232" y="1847088"/>
+            <a:ext cx="64008" cy="2423160"/>
           </a:xfrm>
           <a:prstGeom prst="rect">
             <a:avLst/>
@@ -13595,8 +16927,8 @@
         </p:nvSpPr>
         <p:spPr>
           <a:xfrm>
-            <a:off x="859536" y="2002536"/>
-            <a:ext cx="3108960" cy="347472"/>
+            <a:off x="914400" y="1975104"/>
+            <a:ext cx="4846320" cy="347472"/>
           </a:xfrm>
           <a:prstGeom prst="rect">
             <a:avLst/>
@@ -13618,7 +16950,7 @@
               </a:defRPr>
             </a:pPr>
             <a:r>
-              <a:t>Girdi</a:t>
+              <a:t>Uygulanan</a:t>
             </a:r>
           </a:p>
         </p:txBody>
@@ -13631,8 +16963,8 @@
         </p:nvSpPr>
         <p:spPr>
           <a:xfrm>
-            <a:off x="877824" y="2423160"/>
-            <a:ext cx="3072384" cy="1261872"/>
+            <a:off x="932688" y="2395728"/>
+            <a:ext cx="4809744" cy="1764792"/>
           </a:xfrm>
           <a:prstGeom prst="rect">
             <a:avLst/>
@@ -13654,15 +16986,19 @@
               </a:defRPr>
             </a:pPr>
             <a:r>
-              <a:t>•  Mevzuat PDF bağlantıları</a:t>
+              <a:t>•  PDF indirme ve sayfa metnini parçalama</a:t>
             </a:r>
             <a:br/>
             <a:r>
-              <a:t>•  Kullanıcının seçtiği Git deposu</a:t>
+              <a:t>•  BM25 ile yerel mevzuat araması</a:t>
             </a:r>
             <a:br/>
             <a:r>
-              <a:t>•  Yerel Ollama model havuzu</a:t>
+              <a:t>•  Onaylı tarama ve MD/HTML rapor</a:t>
+            </a:r>
+            <a:br/>
+            <a:r>
+              <a:t>•  İzole düzeltme, test ve PR akışları</a:t>
             </a:r>
           </a:p>
         </p:txBody>
@@ -13675,8 +17011,8 @@
         </p:nvSpPr>
         <p:spPr>
           <a:xfrm>
-            <a:off x="4352544" y="1874519"/>
-            <a:ext cx="3493008" cy="1920240"/>
+            <a:off x="6144768" y="1847088"/>
+            <a:ext cx="5230368" cy="2423160"/>
           </a:xfrm>
           <a:prstGeom prst="roundRect">
             <a:avLst/>
@@ -13718,174 +17054,8 @@
         </p:nvSpPr>
         <p:spPr>
           <a:xfrm>
-            <a:off x="4352544" y="1874519"/>
-            <a:ext cx="64008" cy="1920240"/>
-          </a:xfrm>
-          <a:prstGeom prst="rect">
-            <a:avLst/>
-          </a:prstGeom>
-          <a:solidFill>
-            <a:srgbClr val="35BED7"/>
-          </a:solidFill>
-          <a:ln>
-            <a:noFill/>
-          </a:ln>
-        </p:spPr>
-        <p:style>
-          <a:lnRef idx="1">
-            <a:schemeClr val="accent1"/>
-          </a:lnRef>
-          <a:fillRef idx="3">
-            <a:schemeClr val="accent1"/>
-          </a:fillRef>
-          <a:effectRef idx="2">
-            <a:schemeClr val="accent1"/>
-          </a:effectRef>
-          <a:fontRef idx="minor">
-            <a:schemeClr val="lt1"/>
-          </a:fontRef>
-        </p:style>
-        <p:txBody>
-          <a:bodyPr rtlCol="0" anchor="ctr"/>
-          <a:lstStyle/>
-          <a:p>
-            <a:pPr algn="ctr"/>
-          </a:p>
-        </p:txBody>
-      </p:sp>
-      <p:sp>
-        <p:nvSpPr>
-          <p:cNvPr id="11" name="TextBox 10"/>
-          <p:cNvSpPr txBox="1"/>
-          <p:nvPr/>
-        </p:nvSpPr>
-        <p:spPr>
-          <a:xfrm>
-            <a:off x="4553712" y="2002536"/>
-            <a:ext cx="3108960" cy="347472"/>
-          </a:xfrm>
-          <a:prstGeom prst="rect">
-            <a:avLst/>
-          </a:prstGeom>
-          <a:noFill/>
-        </p:spPr>
-        <p:txBody>
-          <a:bodyPr wrap="square" lIns="18288" rIns="18288" tIns="18288" bIns="18288" anchor="ctr">
-            <a:spAutoFit/>
-          </a:bodyPr>
-          <a:lstStyle/>
-          <a:p>
-            <a:pPr algn="l">
-              <a:defRPr sz="1600" b="1">
-                <a:solidFill>
-                  <a:srgbClr val="112240"/>
-                </a:solidFill>
-                <a:latin typeface="Aptos"/>
-              </a:defRPr>
-            </a:pPr>
-            <a:r>
-              <a:t>İşleme</a:t>
-            </a:r>
-          </a:p>
-        </p:txBody>
-      </p:sp>
-      <p:sp>
-        <p:nvSpPr>
-          <p:cNvPr id="12" name="TextBox 11"/>
-          <p:cNvSpPr txBox="1"/>
-          <p:nvPr/>
-        </p:nvSpPr>
-        <p:spPr>
-          <a:xfrm>
-            <a:off x="4572000" y="2423160"/>
-            <a:ext cx="3072384" cy="1261872"/>
-          </a:xfrm>
-          <a:prstGeom prst="rect">
-            <a:avLst/>
-          </a:prstGeom>
-          <a:noFill/>
-        </p:spPr>
-        <p:txBody>
-          <a:bodyPr wrap="square" lIns="18288" rIns="18288" tIns="18288" bIns="18288" anchor="ctr">
-            <a:spAutoFit/>
-          </a:bodyPr>
-          <a:lstStyle/>
-          <a:p>
-            <a:pPr algn="l">
-              <a:defRPr sz="1200" b="0">
-                <a:solidFill>
-                  <a:srgbClr val="223045"/>
-                </a:solidFill>
-                <a:latin typeface="Aptos"/>
-              </a:defRPr>
-            </a:pPr>
-            <a:r>
-              <a:t>•  Metni parçala ve yerel ara</a:t>
-            </a:r>
-            <a:br/>
-            <a:r>
-              <a:t>•  Kapsam/süre tahmini yap</a:t>
-            </a:r>
-            <a:br/>
-            <a:r>
-              <a:t>•  İlgili kod ve kaynakları incele</a:t>
-            </a:r>
-          </a:p>
-        </p:txBody>
-      </p:sp>
-      <p:sp>
-        <p:nvSpPr>
-          <p:cNvPr id="13" name="Rounded Rectangle 12"/>
-          <p:cNvSpPr/>
-          <p:nvPr/>
-        </p:nvSpPr>
-        <p:spPr>
-          <a:xfrm>
-            <a:off x="8046720" y="1874519"/>
-            <a:ext cx="3493008" cy="1920240"/>
-          </a:xfrm>
-          <a:prstGeom prst="roundRect">
-            <a:avLst/>
-          </a:prstGeom>
-          <a:solidFill>
-            <a:srgbClr val="FFFFFF"/>
-          </a:solidFill>
-          <a:ln>
-            <a:noFill/>
-          </a:ln>
-        </p:spPr>
-        <p:style>
-          <a:lnRef idx="1">
-            <a:schemeClr val="accent1"/>
-          </a:lnRef>
-          <a:fillRef idx="3">
-            <a:schemeClr val="accent1"/>
-          </a:fillRef>
-          <a:effectRef idx="2">
-            <a:schemeClr val="accent1"/>
-          </a:effectRef>
-          <a:fontRef idx="minor">
-            <a:schemeClr val="lt1"/>
-          </a:fontRef>
-        </p:style>
-        <p:txBody>
-          <a:bodyPr rtlCol="0" anchor="ctr"/>
-          <a:lstStyle/>
-          <a:p>
-            <a:pPr algn="ctr"/>
-          </a:p>
-        </p:txBody>
-      </p:sp>
-      <p:sp>
-        <p:nvSpPr>
-          <p:cNvPr id="14" name="Rectangle 13"/>
-          <p:cNvSpPr/>
-          <p:nvPr/>
-        </p:nvSpPr>
-        <p:spPr>
-          <a:xfrm>
-            <a:off x="8046720" y="1874519"/>
-            <a:ext cx="64008" cy="1920240"/>
+            <a:off x="6144768" y="1847088"/>
+            <a:ext cx="64008" cy="2423160"/>
           </a:xfrm>
           <a:prstGeom prst="rect">
             <a:avLst/>
@@ -13921,14 +17091,14 @@
       </p:sp>
       <p:sp>
         <p:nvSpPr>
-          <p:cNvPr id="15" name="TextBox 14"/>
-          <p:cNvSpPr txBox="1"/>
-          <p:nvPr/>
-        </p:nvSpPr>
-        <p:spPr>
-          <a:xfrm>
-            <a:off x="8247888" y="2002536"/>
-            <a:ext cx="3108960" cy="347472"/>
+          <p:cNvPr id="11" name="TextBox 10"/>
+          <p:cNvSpPr txBox="1"/>
+          <p:nvPr/>
+        </p:nvSpPr>
+        <p:spPr>
+          <a:xfrm>
+            <a:off x="6345936" y="1975104"/>
+            <a:ext cx="4846320" cy="347472"/>
           </a:xfrm>
           <a:prstGeom prst="rect">
             <a:avLst/>
@@ -13950,21 +17120,21 @@
               </a:defRPr>
             </a:pPr>
             <a:r>
-              <a:t>Çıktı</a:t>
-            </a:r>
-          </a:p>
-        </p:txBody>
-      </p:sp>
-      <p:sp>
-        <p:nvSpPr>
-          <p:cNvPr id="16" name="TextBox 15"/>
-          <p:cNvSpPr txBox="1"/>
-          <p:nvPr/>
-        </p:nvSpPr>
-        <p:spPr>
-          <a:xfrm>
-            <a:off x="8266176" y="2423160"/>
-            <a:ext cx="3072384" cy="1261872"/>
+              <a:t>Henüz yok / garanti edilmez</a:t>
+            </a:r>
+          </a:p>
+        </p:txBody>
+      </p:sp>
+      <p:sp>
+        <p:nvSpPr>
+          <p:cNvPr id="12" name="TextBox 11"/>
+          <p:cNvSpPr txBox="1"/>
+          <p:nvPr/>
+        </p:nvSpPr>
+        <p:spPr>
+          <a:xfrm>
+            <a:off x="6364224" y="2395728"/>
+            <a:ext cx="4809744" cy="1764792"/>
           </a:xfrm>
           <a:prstGeom prst="rect">
             <a:avLst/>
@@ -13986,35 +17156,39 @@
               </a:defRPr>
             </a:pPr>
             <a:r>
-              <a:t>•  Kanıt bağlantılı bulgular</a:t>
+              <a:t>•  OCR, vektör arama ve belge sürüm takibi</a:t>
             </a:r>
             <a:br/>
             <a:r>
-              <a:t>•  Markdown ve HTML raporları</a:t>
+              <a:t>•  Hukuki doğruluğun otomatik kanıtlanması</a:t>
             </a:r>
             <a:br/>
             <a:r>
-              <a:t>•  Onaylı düzeltme ve PR akışı</a:t>
-            </a:r>
-          </a:p>
-        </p:txBody>
-      </p:sp>
-      <p:sp>
-        <p:nvSpPr>
-          <p:cNvPr id="17" name="Rounded Rectangle 16"/>
+              <a:t>•  Web arayüzü ve devam ettirilebilir işler</a:t>
+            </a:r>
+            <a:br/>
+            <a:r>
+              <a:t>•  Gerçek GitHub PR ile uçtan uca canlı doğrulama</a:t>
+            </a:r>
+          </a:p>
+        </p:txBody>
+      </p:sp>
+      <p:sp>
+        <p:nvSpPr>
+          <p:cNvPr id="13" name="Rounded Rectangle 12"/>
           <p:cNvSpPr/>
           <p:nvPr/>
         </p:nvSpPr>
         <p:spPr>
           <a:xfrm>
-            <a:off x="658368" y="4160520"/>
-            <a:ext cx="10881360" cy="960120"/>
+            <a:off x="713232" y="4681728"/>
+            <a:ext cx="10661904" cy="749808"/>
           </a:xfrm>
           <a:prstGeom prst="roundRect">
             <a:avLst/>
           </a:prstGeom>
           <a:solidFill>
-            <a:srgbClr val="E7F0FA"/>
+            <a:srgbClr val="FFF6DF"/>
           </a:solidFill>
           <a:ln>
             <a:noFill/>
@@ -14044,28 +17218,28 @@
       </p:sp>
       <p:sp>
         <p:nvSpPr>
-          <p:cNvPr id="18" name="TextBox 17"/>
-          <p:cNvSpPr txBox="1"/>
-          <p:nvPr/>
-        </p:nvSpPr>
-        <p:spPr>
-          <a:xfrm>
-            <a:off x="896112" y="4325112"/>
-            <a:ext cx="1645920" cy="274320"/>
-          </a:xfrm>
-          <a:prstGeom prst="rect">
-            <a:avLst/>
-          </a:prstGeom>
-          <a:noFill/>
-        </p:spPr>
-        <p:txBody>
-          <a:bodyPr wrap="square" lIns="18288" rIns="18288" tIns="18288" bIns="18288" anchor="ctr">
-            <a:spAutoFit/>
-          </a:bodyPr>
-          <a:lstStyle/>
-          <a:p>
-            <a:pPr algn="l">
-              <a:defRPr sz="1300" b="1">
+          <p:cNvPr id="14" name="TextBox 13"/>
+          <p:cNvSpPr txBox="1"/>
+          <p:nvPr/>
+        </p:nvSpPr>
+        <p:spPr>
+          <a:xfrm>
+            <a:off x="914400" y="4837176"/>
+            <a:ext cx="10241280" cy="411480"/>
+          </a:xfrm>
+          <a:prstGeom prst="rect">
+            <a:avLst/>
+          </a:prstGeom>
+          <a:noFill/>
+        </p:spPr>
+        <p:txBody>
+          <a:bodyPr wrap="square" lIns="18288" rIns="18288" tIns="18288" bIns="18288" anchor="ctr">
+            <a:spAutoFit/>
+          </a:bodyPr>
+          <a:lstStyle/>
+          <a:p>
+            <a:pPr algn="ctr">
+              <a:defRPr sz="1100" b="1">
                 <a:solidFill>
                   <a:srgbClr val="112240"/>
                 </a:solidFill>
@@ -14073,86 +17247,14 @@
               </a:defRPr>
             </a:pPr>
             <a:r>
-              <a:t>Temel yaklaşım</a:t>
-            </a:r>
-          </a:p>
-        </p:txBody>
-      </p:sp>
-      <p:sp>
-        <p:nvSpPr>
-          <p:cNvPr id="19" name="TextBox 18"/>
-          <p:cNvSpPr txBox="1"/>
-          <p:nvPr/>
-        </p:nvSpPr>
-        <p:spPr>
-          <a:xfrm>
-            <a:off x="2560320" y="4279392"/>
-            <a:ext cx="8458200" cy="402336"/>
-          </a:xfrm>
-          <a:prstGeom prst="rect">
-            <a:avLst/>
-          </a:prstGeom>
-          <a:noFill/>
-        </p:spPr>
-        <p:txBody>
-          <a:bodyPr wrap="square" lIns="18288" rIns="18288" tIns="18288" bIns="18288" anchor="ctr">
-            <a:spAutoFit/>
-          </a:bodyPr>
-          <a:lstStyle/>
-          <a:p>
-            <a:pPr algn="l">
-              <a:defRPr sz="1500" b="1">
-                <a:solidFill>
-                  <a:srgbClr val="223045"/>
-                </a:solidFill>
-                <a:latin typeface="Aptos"/>
-              </a:defRPr>
-            </a:pPr>
-            <a:r>
-              <a:t>Araç karar vermez: mevzuat uzmanının değerlendirmesine kanıt ve izlenebilir iş akışı sağlar.</a:t>
-            </a:r>
-          </a:p>
-        </p:txBody>
-      </p:sp>
-      <p:sp>
-        <p:nvSpPr>
-          <p:cNvPr id="20" name="TextBox 19"/>
-          <p:cNvSpPr txBox="1"/>
-          <p:nvPr/>
-        </p:nvSpPr>
-        <p:spPr>
-          <a:xfrm>
-            <a:off x="896112" y="5422392"/>
-            <a:ext cx="9875520" cy="320040"/>
-          </a:xfrm>
-          <a:prstGeom prst="rect">
-            <a:avLst/>
-          </a:prstGeom>
-          <a:noFill/>
-        </p:spPr>
-        <p:txBody>
-          <a:bodyPr wrap="square" lIns="18288" rIns="18288" tIns="18288" bIns="18288" anchor="ctr">
-            <a:spAutoFit/>
-          </a:bodyPr>
-          <a:lstStyle/>
-          <a:p>
-            <a:pPr algn="l">
-              <a:defRPr sz="1200" b="0">
-                <a:solidFill>
-                  <a:srgbClr val="637389"/>
-                </a:solidFill>
-                <a:latin typeface="Aptos"/>
-              </a:defRPr>
-            </a:pPr>
-            <a:r>
-              <a:t>Hukuk danışmanı değildir; otomatik tarama sonucu hukuki uygunluğu kanıtlamaz.</a:t>
-            </a:r>
-          </a:p>
-        </p:txBody>
-      </p:sp>
-      <p:sp>
-        <p:nvSpPr>
-          <p:cNvPr id="21" name="TextBox 20"/>
+              <a:t>Sonraki adımlar: PDF rubriğini doğrula • gerçek mevzuat örnekleriyle uzman değerlendirmesi yap • gerçek PR akışını yetkili test deposunda dene.</a:t>
+            </a:r>
+          </a:p>
+        </p:txBody>
+      </p:sp>
+      <p:sp>
+        <p:nvSpPr>
+          <p:cNvPr id="15" name="TextBox 14"/>
           <p:cNvSpPr txBox="1"/>
           <p:nvPr/>
         </p:nvSpPr>
@@ -14188,7 +17290,7 @@
       </p:sp>
       <p:sp>
         <p:nvSpPr>
-          <p:cNvPr id="22" name="TextBox 21"/>
+          <p:cNvPr id="16" name="TextBox 15"/>
           <p:cNvSpPr txBox="1"/>
           <p:nvPr/>
         </p:nvSpPr>
@@ -14217,7 +17319,7 @@
               </a:defRPr>
             </a:pPr>
             <a:r>
-              <a:t>02</a:t>
+              <a:t>22</a:t>
             </a:r>
           </a:p>
         </p:txBody>
@@ -14230,7 +17332,7 @@
 </p:sld>
 </file>
 
-<file path=ppt/slides/slide20.xml><?xml version="1.0" encoding="utf-8"?>
+<file path=ppt/slides/slide23.xml><?xml version="1.0" encoding="utf-8"?>
 <p:sld xmlns:a="http://schemas.openxmlformats.org/drawingml/2006/main" xmlns:p="http://schemas.openxmlformats.org/presentationml/2006/main" xmlns:r="http://schemas.openxmlformats.org/officeDocument/2006/relationships">
   <p:cSld>
     <p:bg>
@@ -14279,7 +17381,7 @@
               </a:defRPr>
             </a:pPr>
             <a:r>
-              <a:t>17  •  BILINEN SINIRLAMALAR</a:t>
+              <a:t>23  •  KISA DEMO</a:t>
             </a:r>
           </a:p>
         </p:txBody>
@@ -14315,7 +17417,7 @@
               </a:defRPr>
             </a:pPr>
             <a:r>
-              <a:t>Tamamlanan iş ve sonraki geliştirme alanları</a:t>
+              <a:t>Uygulamayı sunumda nasıl gösteririm?</a:t>
             </a:r>
           </a:p>
         </p:txBody>
@@ -14351,7 +17453,7 @@
               </a:defRPr>
             </a:pPr>
             <a:r>
-              <a:t>Kapsamı dürüstçe ayırmak, model çıktısına gereğinden fazla güvenilmesini önler.</a:t>
+              <a:t>Sentetik test deposunda, dış sisteme yan etki oluşturmadan ana akışı sergileyin.</a:t>
             </a:r>
           </a:p>
         </p:txBody>
@@ -14364,8 +17466,8 @@
         </p:nvSpPr>
         <p:spPr>
           <a:xfrm>
-            <a:off x="713232" y="1847088"/>
-            <a:ext cx="5230368" cy="2423160"/>
+            <a:off x="822960" y="1783080"/>
+            <a:ext cx="5074920" cy="987552"/>
           </a:xfrm>
           <a:prstGeom prst="roundRect">
             <a:avLst/>
@@ -14401,44 +17503,37 @@
       </p:sp>
       <p:sp>
         <p:nvSpPr>
-          <p:cNvPr id="6" name="Rectangle 5"/>
-          <p:cNvSpPr/>
-          <p:nvPr/>
-        </p:nvSpPr>
-        <p:spPr>
-          <a:xfrm>
-            <a:off x="713232" y="1847088"/>
-            <a:ext cx="64008" cy="2423160"/>
-          </a:xfrm>
-          <a:prstGeom prst="rect">
-            <a:avLst/>
-          </a:prstGeom>
-          <a:solidFill>
-            <a:srgbClr val="00AFA0"/>
-          </a:solidFill>
-          <a:ln>
-            <a:noFill/>
-          </a:ln>
-        </p:spPr>
-        <p:style>
-          <a:lnRef idx="1">
-            <a:schemeClr val="accent1"/>
-          </a:lnRef>
-          <a:fillRef idx="3">
-            <a:schemeClr val="accent1"/>
-          </a:fillRef>
-          <a:effectRef idx="2">
-            <a:schemeClr val="accent1"/>
-          </a:effectRef>
-          <a:fontRef idx="minor">
-            <a:schemeClr val="lt1"/>
-          </a:fontRef>
-        </p:style>
-        <p:txBody>
-          <a:bodyPr rtlCol="0" anchor="ctr"/>
-          <a:lstStyle/>
-          <a:p>
-            <a:pPr algn="ctr"/>
+          <p:cNvPr id="6" name="TextBox 5"/>
+          <p:cNvSpPr txBox="1"/>
+          <p:nvPr/>
+        </p:nvSpPr>
+        <p:spPr>
+          <a:xfrm>
+            <a:off x="978408" y="1984248"/>
+            <a:ext cx="493776" cy="292608"/>
+          </a:xfrm>
+          <a:prstGeom prst="rect">
+            <a:avLst/>
+          </a:prstGeom>
+          <a:noFill/>
+        </p:spPr>
+        <p:txBody>
+          <a:bodyPr wrap="square" lIns="18288" rIns="18288" tIns="18288" bIns="18288" anchor="ctr">
+            <a:spAutoFit/>
+          </a:bodyPr>
+          <a:lstStyle/>
+          <a:p>
+            <a:pPr algn="l">
+              <a:defRPr sz="1300" b="1">
+                <a:solidFill>
+                  <a:srgbClr val="00AFA0"/>
+                </a:solidFill>
+                <a:latin typeface="Aptos"/>
+              </a:defRPr>
+            </a:pPr>
+            <a:r>
+              <a:t>01</a:t>
+            </a:r>
           </a:p>
         </p:txBody>
       </p:sp>
@@ -14450,22 +17545,22 @@
         </p:nvSpPr>
         <p:spPr>
           <a:xfrm>
-            <a:off x="914400" y="1975104"/>
-            <a:ext cx="4846320" cy="347472"/>
-          </a:xfrm>
-          <a:prstGeom prst="rect">
-            <a:avLst/>
-          </a:prstGeom>
-          <a:noFill/>
-        </p:spPr>
-        <p:txBody>
-          <a:bodyPr wrap="square" lIns="18288" rIns="18288" tIns="18288" bIns="18288" anchor="ctr">
-            <a:spAutoFit/>
-          </a:bodyPr>
-          <a:lstStyle/>
-          <a:p>
-            <a:pPr algn="l">
-              <a:defRPr sz="1600" b="1">
+            <a:off x="1600200" y="1920240"/>
+            <a:ext cx="4023360" cy="292608"/>
+          </a:xfrm>
+          <a:prstGeom prst="rect">
+            <a:avLst/>
+          </a:prstGeom>
+          <a:noFill/>
+        </p:spPr>
+        <p:txBody>
+          <a:bodyPr wrap="square" lIns="18288" rIns="18288" tIns="18288" bIns="18288" anchor="ctr">
+            <a:spAutoFit/>
+          </a:bodyPr>
+          <a:lstStyle/>
+          <a:p>
+            <a:pPr algn="l">
+              <a:defRPr sz="1400" b="1">
                 <a:solidFill>
                   <a:srgbClr val="112240"/>
                 </a:solidFill>
@@ -14473,7 +17568,7 @@
               </a:defRPr>
             </a:pPr>
             <a:r>
-              <a:t>Uygulanan</a:t>
+              <a:t>Sohbeti başlat</a:t>
             </a:r>
           </a:p>
         </p:txBody>
@@ -14486,42 +17581,30 @@
         </p:nvSpPr>
         <p:spPr>
           <a:xfrm>
-            <a:off x="932688" y="2395728"/>
-            <a:ext cx="4809744" cy="1764792"/>
-          </a:xfrm>
-          <a:prstGeom prst="rect">
-            <a:avLst/>
-          </a:prstGeom>
-          <a:noFill/>
-        </p:spPr>
-        <p:txBody>
-          <a:bodyPr wrap="square" lIns="18288" rIns="18288" tIns="18288" bIns="18288" anchor="ctr">
-            <a:spAutoFit/>
-          </a:bodyPr>
-          <a:lstStyle/>
-          <a:p>
-            <a:pPr algn="l">
-              <a:defRPr sz="1200" b="0">
-                <a:solidFill>
-                  <a:srgbClr val="223045"/>
-                </a:solidFill>
-                <a:latin typeface="Aptos"/>
-              </a:defRPr>
-            </a:pPr>
-            <a:r>
-              <a:t>•  PDF indirme ve sayfa metnini parçalama</a:t>
-            </a:r>
-            <a:br/>
-            <a:r>
-              <a:t>•  BM25 ile yerel mevzuat araması</a:t>
-            </a:r>
-            <a:br/>
-            <a:r>
-              <a:t>•  Onaylı tarama ve MD/HTML rapor</a:t>
-            </a:r>
-            <a:br/>
-            <a:r>
-              <a:t>•  İzole düzeltme, test ve PR akışları</a:t>
+            <a:off x="1600200" y="2295144"/>
+            <a:ext cx="4023360" cy="274320"/>
+          </a:xfrm>
+          <a:prstGeom prst="rect">
+            <a:avLst/>
+          </a:prstGeom>
+          <a:noFill/>
+        </p:spPr>
+        <p:txBody>
+          <a:bodyPr wrap="square" lIns="18288" rIns="18288" tIns="18288" bIns="18288" anchor="ctr">
+            <a:spAutoFit/>
+          </a:bodyPr>
+          <a:lstStyle/>
+          <a:p>
+            <a:pPr algn="l">
+              <a:defRPr sz="1000" b="0">
+                <a:solidFill>
+                  <a:srgbClr val="637389"/>
+                </a:solidFill>
+                <a:latin typeface="Aptos"/>
+              </a:defRPr>
+            </a:pPr>
+            <a:r>
+              <a:t>mevzuat-agent → yerel Ollama modeli</a:t>
             </a:r>
           </a:p>
         </p:txBody>
@@ -14534,8 +17617,8 @@
         </p:nvSpPr>
         <p:spPr>
           <a:xfrm>
-            <a:off x="6144768" y="1847088"/>
-            <a:ext cx="5230368" cy="2423160"/>
+            <a:off x="6309360" y="1783080"/>
+            <a:ext cx="5074920" cy="987552"/>
           </a:xfrm>
           <a:prstGeom prst="roundRect">
             <a:avLst/>
@@ -14571,20 +17654,128 @@
       </p:sp>
       <p:sp>
         <p:nvSpPr>
-          <p:cNvPr id="10" name="Rectangle 9"/>
+          <p:cNvPr id="10" name="TextBox 9"/>
+          <p:cNvSpPr txBox="1"/>
+          <p:nvPr/>
+        </p:nvSpPr>
+        <p:spPr>
+          <a:xfrm>
+            <a:off x="6464808" y="1984248"/>
+            <a:ext cx="493776" cy="292608"/>
+          </a:xfrm>
+          <a:prstGeom prst="rect">
+            <a:avLst/>
+          </a:prstGeom>
+          <a:noFill/>
+        </p:spPr>
+        <p:txBody>
+          <a:bodyPr wrap="square" lIns="18288" rIns="18288" tIns="18288" bIns="18288" anchor="ctr">
+            <a:spAutoFit/>
+          </a:bodyPr>
+          <a:lstStyle/>
+          <a:p>
+            <a:pPr algn="l">
+              <a:defRPr sz="1300" b="1">
+                <a:solidFill>
+                  <a:srgbClr val="00AFA0"/>
+                </a:solidFill>
+                <a:latin typeface="Aptos"/>
+              </a:defRPr>
+            </a:pPr>
+            <a:r>
+              <a:t>02</a:t>
+            </a:r>
+          </a:p>
+        </p:txBody>
+      </p:sp>
+      <p:sp>
+        <p:nvSpPr>
+          <p:cNvPr id="11" name="TextBox 10"/>
+          <p:cNvSpPr txBox="1"/>
+          <p:nvPr/>
+        </p:nvSpPr>
+        <p:spPr>
+          <a:xfrm>
+            <a:off x="7086600" y="1920240"/>
+            <a:ext cx="4023360" cy="292608"/>
+          </a:xfrm>
+          <a:prstGeom prst="rect">
+            <a:avLst/>
+          </a:prstGeom>
+          <a:noFill/>
+        </p:spPr>
+        <p:txBody>
+          <a:bodyPr wrap="square" lIns="18288" rIns="18288" tIns="18288" bIns="18288" anchor="ctr">
+            <a:spAutoFit/>
+          </a:bodyPr>
+          <a:lstStyle/>
+          <a:p>
+            <a:pPr algn="l">
+              <a:defRPr sz="1400" b="1">
+                <a:solidFill>
+                  <a:srgbClr val="112240"/>
+                </a:solidFill>
+                <a:latin typeface="Aptos"/>
+              </a:defRPr>
+            </a:pPr>
+            <a:r>
+              <a:t>Kapsamı seç</a:t>
+            </a:r>
+          </a:p>
+        </p:txBody>
+      </p:sp>
+      <p:sp>
+        <p:nvSpPr>
+          <p:cNvPr id="12" name="TextBox 11"/>
+          <p:cNvSpPr txBox="1"/>
+          <p:nvPr/>
+        </p:nvSpPr>
+        <p:spPr>
+          <a:xfrm>
+            <a:off x="7086600" y="2295144"/>
+            <a:ext cx="4023360" cy="274320"/>
+          </a:xfrm>
+          <a:prstGeom prst="rect">
+            <a:avLst/>
+          </a:prstGeom>
+          <a:noFill/>
+        </p:spPr>
+        <p:txBody>
+          <a:bodyPr wrap="square" lIns="18288" rIns="18288" tIns="18288" bIns="18288" anchor="ctr">
+            <a:spAutoFit/>
+          </a:bodyPr>
+          <a:lstStyle/>
+          <a:p>
+            <a:pPr algn="l">
+              <a:defRPr sz="1000" b="0">
+                <a:solidFill>
+                  <a:srgbClr val="637389"/>
+                </a:solidFill>
+                <a:latin typeface="Aptos"/>
+              </a:defRPr>
+            </a:pPr>
+            <a:r>
+              <a:t>1 veya 2; * tüm mevzuatlar</a:t>
+            </a:r>
+          </a:p>
+        </p:txBody>
+      </p:sp>
+      <p:sp>
+        <p:nvSpPr>
+          <p:cNvPr id="13" name="Rounded Rectangle 12"/>
           <p:cNvSpPr/>
           <p:nvPr/>
         </p:nvSpPr>
         <p:spPr>
           <a:xfrm>
-            <a:off x="6144768" y="1847088"/>
-            <a:ext cx="64008" cy="2423160"/>
-          </a:xfrm>
-          <a:prstGeom prst="rect">
+            <a:off x="822960" y="3081528"/>
+            <a:ext cx="5074920" cy="987552"/>
+          </a:xfrm>
+          <a:prstGeom prst="roundRect">
             <a:avLst/>
           </a:prstGeom>
           <a:solidFill>
-            <a:srgbClr val="F8BC4A"/>
+            <a:srgbClr val="FFFFFF"/>
           </a:solidFill>
           <a:ln>
             <a:noFill/>
@@ -14614,28 +17805,64 @@
       </p:sp>
       <p:sp>
         <p:nvSpPr>
-          <p:cNvPr id="11" name="TextBox 10"/>
-          <p:cNvSpPr txBox="1"/>
-          <p:nvPr/>
-        </p:nvSpPr>
-        <p:spPr>
-          <a:xfrm>
-            <a:off x="6345936" y="1975104"/>
-            <a:ext cx="4846320" cy="347472"/>
-          </a:xfrm>
-          <a:prstGeom prst="rect">
-            <a:avLst/>
-          </a:prstGeom>
-          <a:noFill/>
-        </p:spPr>
-        <p:txBody>
-          <a:bodyPr wrap="square" lIns="18288" rIns="18288" tIns="18288" bIns="18288" anchor="ctr">
-            <a:spAutoFit/>
-          </a:bodyPr>
-          <a:lstStyle/>
-          <a:p>
-            <a:pPr algn="l">
-              <a:defRPr sz="1600" b="1">
+          <p:cNvPr id="14" name="TextBox 13"/>
+          <p:cNvSpPr txBox="1"/>
+          <p:nvPr/>
+        </p:nvSpPr>
+        <p:spPr>
+          <a:xfrm>
+            <a:off x="978408" y="3282696"/>
+            <a:ext cx="493776" cy="292608"/>
+          </a:xfrm>
+          <a:prstGeom prst="rect">
+            <a:avLst/>
+          </a:prstGeom>
+          <a:noFill/>
+        </p:spPr>
+        <p:txBody>
+          <a:bodyPr wrap="square" lIns="18288" rIns="18288" tIns="18288" bIns="18288" anchor="ctr">
+            <a:spAutoFit/>
+          </a:bodyPr>
+          <a:lstStyle/>
+          <a:p>
+            <a:pPr algn="l">
+              <a:defRPr sz="1300" b="1">
+                <a:solidFill>
+                  <a:srgbClr val="00AFA0"/>
+                </a:solidFill>
+                <a:latin typeface="Aptos"/>
+              </a:defRPr>
+            </a:pPr>
+            <a:r>
+              <a:t>03</a:t>
+            </a:r>
+          </a:p>
+        </p:txBody>
+      </p:sp>
+      <p:sp>
+        <p:nvSpPr>
+          <p:cNvPr id="15" name="TextBox 14"/>
+          <p:cNvSpPr txBox="1"/>
+          <p:nvPr/>
+        </p:nvSpPr>
+        <p:spPr>
+          <a:xfrm>
+            <a:off x="1600200" y="3218688"/>
+            <a:ext cx="4023360" cy="292608"/>
+          </a:xfrm>
+          <a:prstGeom prst="rect">
+            <a:avLst/>
+          </a:prstGeom>
+          <a:noFill/>
+        </p:spPr>
+        <p:txBody>
+          <a:bodyPr wrap="square" lIns="18288" rIns="18288" tIns="18288" bIns="18288" anchor="ctr">
+            <a:spAutoFit/>
+          </a:bodyPr>
+          <a:lstStyle/>
+          <a:p>
+            <a:pPr algn="l">
+              <a:defRPr sz="1400" b="1">
                 <a:solidFill>
                   <a:srgbClr val="112240"/>
                 </a:solidFill>
@@ -14643,75 +17870,63 @@
               </a:defRPr>
             </a:pPr>
             <a:r>
-              <a:t>Henüz yok / garanti edilmez</a:t>
-            </a:r>
-          </a:p>
-        </p:txBody>
-      </p:sp>
-      <p:sp>
-        <p:nvSpPr>
-          <p:cNvPr id="12" name="TextBox 11"/>
-          <p:cNvSpPr txBox="1"/>
-          <p:nvPr/>
-        </p:nvSpPr>
-        <p:spPr>
-          <a:xfrm>
-            <a:off x="6364224" y="2395728"/>
-            <a:ext cx="4809744" cy="1764792"/>
-          </a:xfrm>
-          <a:prstGeom prst="rect">
-            <a:avLst/>
-          </a:prstGeom>
-          <a:noFill/>
-        </p:spPr>
-        <p:txBody>
-          <a:bodyPr wrap="square" lIns="18288" rIns="18288" tIns="18288" bIns="18288" anchor="ctr">
-            <a:spAutoFit/>
-          </a:bodyPr>
-          <a:lstStyle/>
-          <a:p>
-            <a:pPr algn="l">
-              <a:defRPr sz="1200" b="0">
-                <a:solidFill>
-                  <a:srgbClr val="223045"/>
-                </a:solidFill>
-                <a:latin typeface="Aptos"/>
-              </a:defRPr>
-            </a:pPr>
-            <a:r>
-              <a:t>•  OCR, vektör arama ve belge sürüm takibi</a:t>
-            </a:r>
-            <a:br/>
-            <a:r>
-              <a:t>•  Hukuki doğruluğun otomatik kanıtlanması</a:t>
-            </a:r>
-            <a:br/>
-            <a:r>
-              <a:t>•  Web arayüzü ve devam ettirilebilir işler</a:t>
-            </a:r>
-            <a:br/>
-            <a:r>
-              <a:t>•  Gerçek GitHub PR ile uçtan uca canlı doğrulama</a:t>
-            </a:r>
-          </a:p>
-        </p:txBody>
-      </p:sp>
-      <p:sp>
-        <p:nvSpPr>
-          <p:cNvPr id="13" name="Rounded Rectangle 12"/>
+              <a:t>Pipeline'ı sürdür</a:t>
+            </a:r>
+          </a:p>
+        </p:txBody>
+      </p:sp>
+      <p:sp>
+        <p:nvSpPr>
+          <p:cNvPr id="16" name="TextBox 15"/>
+          <p:cNvSpPr txBox="1"/>
+          <p:nvPr/>
+        </p:nvSpPr>
+        <p:spPr>
+          <a:xfrm>
+            <a:off x="1600200" y="3593592"/>
+            <a:ext cx="4023360" cy="274320"/>
+          </a:xfrm>
+          <a:prstGeom prst="rect">
+            <a:avLst/>
+          </a:prstGeom>
+          <a:noFill/>
+        </p:spPr>
+        <p:txBody>
+          <a:bodyPr wrap="square" lIns="18288" rIns="18288" tIns="18288" bIns="18288" anchor="ctr">
+            <a:spAutoFit/>
+          </a:bodyPr>
+          <a:lstStyle/>
+          <a:p>
+            <a:pPr algn="l">
+              <a:defRPr sz="1000" b="0">
+                <a:solidFill>
+                  <a:srgbClr val="637389"/>
+                </a:solidFill>
+                <a:latin typeface="Aptos"/>
+              </a:defRPr>
+            </a:pPr>
+            <a:r>
+              <a:t>devam → sıradaki önerilen adım</a:t>
+            </a:r>
+          </a:p>
+        </p:txBody>
+      </p:sp>
+      <p:sp>
+        <p:nvSpPr>
+          <p:cNvPr id="17" name="Rounded Rectangle 16"/>
           <p:cNvSpPr/>
           <p:nvPr/>
         </p:nvSpPr>
         <p:spPr>
           <a:xfrm>
-            <a:off x="713232" y="4681728"/>
-            <a:ext cx="10661904" cy="749808"/>
+            <a:off x="6309360" y="3081528"/>
+            <a:ext cx="5074920" cy="987552"/>
           </a:xfrm>
           <a:prstGeom prst="roundRect">
             <a:avLst/>
           </a:prstGeom>
           <a:solidFill>
-            <a:srgbClr val="FFF6DF"/>
+            <a:srgbClr val="FFFFFF"/>
           </a:solidFill>
           <a:ln>
             <a:noFill/>
@@ -14741,28 +17956,64 @@
       </p:sp>
       <p:sp>
         <p:nvSpPr>
-          <p:cNvPr id="14" name="TextBox 13"/>
-          <p:cNvSpPr txBox="1"/>
-          <p:nvPr/>
-        </p:nvSpPr>
-        <p:spPr>
-          <a:xfrm>
-            <a:off x="914400" y="4837176"/>
-            <a:ext cx="10241280" cy="411480"/>
-          </a:xfrm>
-          <a:prstGeom prst="rect">
-            <a:avLst/>
-          </a:prstGeom>
-          <a:noFill/>
-        </p:spPr>
-        <p:txBody>
-          <a:bodyPr wrap="square" lIns="18288" rIns="18288" tIns="18288" bIns="18288" anchor="ctr">
-            <a:spAutoFit/>
-          </a:bodyPr>
-          <a:lstStyle/>
-          <a:p>
-            <a:pPr algn="ctr">
-              <a:defRPr sz="1100" b="1">
+          <p:cNvPr id="18" name="TextBox 17"/>
+          <p:cNvSpPr txBox="1"/>
+          <p:nvPr/>
+        </p:nvSpPr>
+        <p:spPr>
+          <a:xfrm>
+            <a:off x="6464808" y="3282696"/>
+            <a:ext cx="493776" cy="292608"/>
+          </a:xfrm>
+          <a:prstGeom prst="rect">
+            <a:avLst/>
+          </a:prstGeom>
+          <a:noFill/>
+        </p:spPr>
+        <p:txBody>
+          <a:bodyPr wrap="square" lIns="18288" rIns="18288" tIns="18288" bIns="18288" anchor="ctr">
+            <a:spAutoFit/>
+          </a:bodyPr>
+          <a:lstStyle/>
+          <a:p>
+            <a:pPr algn="l">
+              <a:defRPr sz="1300" b="1">
+                <a:solidFill>
+                  <a:srgbClr val="00AFA0"/>
+                </a:solidFill>
+                <a:latin typeface="Aptos"/>
+              </a:defRPr>
+            </a:pPr>
+            <a:r>
+              <a:t>04</a:t>
+            </a:r>
+          </a:p>
+        </p:txBody>
+      </p:sp>
+      <p:sp>
+        <p:nvSpPr>
+          <p:cNvPr id="19" name="TextBox 18"/>
+          <p:cNvSpPr txBox="1"/>
+          <p:nvPr/>
+        </p:nvSpPr>
+        <p:spPr>
+          <a:xfrm>
+            <a:off x="7086600" y="3218688"/>
+            <a:ext cx="4023360" cy="292608"/>
+          </a:xfrm>
+          <a:prstGeom prst="rect">
+            <a:avLst/>
+          </a:prstGeom>
+          <a:noFill/>
+        </p:spPr>
+        <p:txBody>
+          <a:bodyPr wrap="square" lIns="18288" rIns="18288" tIns="18288" bIns="18288" anchor="ctr">
+            <a:spAutoFit/>
+          </a:bodyPr>
+          <a:lstStyle/>
+          <a:p>
+            <a:pPr algn="l">
+              <a:defRPr sz="1400" b="1">
                 <a:solidFill>
                   <a:srgbClr val="112240"/>
                 </a:solidFill>
@@ -14770,14 +18021,352 @@
               </a:defRPr>
             </a:pPr>
             <a:r>
-              <a:t>Sonraki adımlar: PDF rubriğini doğrula • gerçek mevzuat örnekleriyle uzman değerlendirmesi yap • gerçek PR akışını yetkili test deposunda dene.</a:t>
-            </a:r>
-          </a:p>
-        </p:txBody>
-      </p:sp>
-      <p:sp>
-        <p:nvSpPr>
-          <p:cNvPr id="15" name="TextBox 14"/>
+              <a:t>Sentetik demo</a:t>
+            </a:r>
+          </a:p>
+        </p:txBody>
+      </p:sp>
+      <p:sp>
+        <p:nvSpPr>
+          <p:cNvPr id="20" name="TextBox 19"/>
+          <p:cNvSpPr txBox="1"/>
+          <p:nvPr/>
+        </p:nvSpPr>
+        <p:spPr>
+          <a:xfrm>
+            <a:off x="7086600" y="3593592"/>
+            <a:ext cx="4023360" cy="274320"/>
+          </a:xfrm>
+          <a:prstGeom prst="rect">
+            <a:avLst/>
+          </a:prstGeom>
+          <a:noFill/>
+        </p:spPr>
+        <p:txBody>
+          <a:bodyPr wrap="square" lIns="18288" rIns="18288" tIns="18288" bIns="18288" anchor="ctr">
+            <a:spAutoFit/>
+          </a:bodyPr>
+          <a:lstStyle/>
+          <a:p>
+            <a:pPr algn="l">
+              <a:defRPr sz="1000" b="0">
+                <a:solidFill>
+                  <a:srgbClr val="637389"/>
+                </a:solidFill>
+                <a:latin typeface="Aptos"/>
+              </a:defRPr>
+            </a:pPr>
+            <a:r>
+              <a:t>demo1 → beş deterministik fixture bulgusu</a:t>
+            </a:r>
+          </a:p>
+        </p:txBody>
+      </p:sp>
+      <p:sp>
+        <p:nvSpPr>
+          <p:cNvPr id="21" name="Rounded Rectangle 20"/>
+          <p:cNvSpPr/>
+          <p:nvPr/>
+        </p:nvSpPr>
+        <p:spPr>
+          <a:xfrm>
+            <a:off x="822960" y="4379976"/>
+            <a:ext cx="5074920" cy="987552"/>
+          </a:xfrm>
+          <a:prstGeom prst="roundRect">
+            <a:avLst/>
+          </a:prstGeom>
+          <a:solidFill>
+            <a:srgbClr val="FFFFFF"/>
+          </a:solidFill>
+          <a:ln>
+            <a:noFill/>
+          </a:ln>
+        </p:spPr>
+        <p:style>
+          <a:lnRef idx="1">
+            <a:schemeClr val="accent1"/>
+          </a:lnRef>
+          <a:fillRef idx="3">
+            <a:schemeClr val="accent1"/>
+          </a:fillRef>
+          <a:effectRef idx="2">
+            <a:schemeClr val="accent1"/>
+          </a:effectRef>
+          <a:fontRef idx="minor">
+            <a:schemeClr val="lt1"/>
+          </a:fontRef>
+        </p:style>
+        <p:txBody>
+          <a:bodyPr rtlCol="0" anchor="ctr"/>
+          <a:lstStyle/>
+          <a:p>
+            <a:pPr algn="ctr"/>
+          </a:p>
+        </p:txBody>
+      </p:sp>
+      <p:sp>
+        <p:nvSpPr>
+          <p:cNvPr id="22" name="TextBox 21"/>
+          <p:cNvSpPr txBox="1"/>
+          <p:nvPr/>
+        </p:nvSpPr>
+        <p:spPr>
+          <a:xfrm>
+            <a:off x="978408" y="4581144"/>
+            <a:ext cx="493776" cy="292608"/>
+          </a:xfrm>
+          <a:prstGeom prst="rect">
+            <a:avLst/>
+          </a:prstGeom>
+          <a:noFill/>
+        </p:spPr>
+        <p:txBody>
+          <a:bodyPr wrap="square" lIns="18288" rIns="18288" tIns="18288" bIns="18288" anchor="ctr">
+            <a:spAutoFit/>
+          </a:bodyPr>
+          <a:lstStyle/>
+          <a:p>
+            <a:pPr algn="l">
+              <a:defRPr sz="1300" b="1">
+                <a:solidFill>
+                  <a:srgbClr val="00AFA0"/>
+                </a:solidFill>
+                <a:latin typeface="Aptos"/>
+              </a:defRPr>
+            </a:pPr>
+            <a:r>
+              <a:t>05</a:t>
+            </a:r>
+          </a:p>
+        </p:txBody>
+      </p:sp>
+      <p:sp>
+        <p:nvSpPr>
+          <p:cNvPr id="23" name="TextBox 22"/>
+          <p:cNvSpPr txBox="1"/>
+          <p:nvPr/>
+        </p:nvSpPr>
+        <p:spPr>
+          <a:xfrm>
+            <a:off x="1600200" y="4517136"/>
+            <a:ext cx="4023360" cy="292608"/>
+          </a:xfrm>
+          <a:prstGeom prst="rect">
+            <a:avLst/>
+          </a:prstGeom>
+          <a:noFill/>
+        </p:spPr>
+        <p:txBody>
+          <a:bodyPr wrap="square" lIns="18288" rIns="18288" tIns="18288" bIns="18288" anchor="ctr">
+            <a:spAutoFit/>
+          </a:bodyPr>
+          <a:lstStyle/>
+          <a:p>
+            <a:pPr algn="l">
+              <a:defRPr sz="1400" b="1">
+                <a:solidFill>
+                  <a:srgbClr val="112240"/>
+                </a:solidFill>
+                <a:latin typeface="Aptos"/>
+              </a:defRPr>
+            </a:pPr>
+            <a:r>
+              <a:t>Raporu incele</a:t>
+            </a:r>
+          </a:p>
+        </p:txBody>
+      </p:sp>
+      <p:sp>
+        <p:nvSpPr>
+          <p:cNvPr id="24" name="TextBox 23"/>
+          <p:cNvSpPr txBox="1"/>
+          <p:nvPr/>
+        </p:nvSpPr>
+        <p:spPr>
+          <a:xfrm>
+            <a:off x="1600200" y="4892040"/>
+            <a:ext cx="4023360" cy="274320"/>
+          </a:xfrm>
+          <a:prstGeom prst="rect">
+            <a:avLst/>
+          </a:prstGeom>
+          <a:noFill/>
+        </p:spPr>
+        <p:txBody>
+          <a:bodyPr wrap="square" lIns="18288" rIns="18288" tIns="18288" bIns="18288" anchor="ctr">
+            <a:spAutoFit/>
+          </a:bodyPr>
+          <a:lstStyle/>
+          <a:p>
+            <a:pPr algn="l">
+              <a:defRPr sz="1000" b="0">
+                <a:solidFill>
+                  <a:srgbClr val="637389"/>
+                </a:solidFill>
+                <a:latin typeface="Aptos"/>
+              </a:defRPr>
+            </a:pPr>
+            <a:r>
+              <a:t>JSON/Markdown/HTML ve sınırlar</a:t>
+            </a:r>
+          </a:p>
+        </p:txBody>
+      </p:sp>
+      <p:sp>
+        <p:nvSpPr>
+          <p:cNvPr id="25" name="Rounded Rectangle 24"/>
+          <p:cNvSpPr/>
+          <p:nvPr/>
+        </p:nvSpPr>
+        <p:spPr>
+          <a:xfrm>
+            <a:off x="6309360" y="4379976"/>
+            <a:ext cx="5074920" cy="987552"/>
+          </a:xfrm>
+          <a:prstGeom prst="roundRect">
+            <a:avLst/>
+          </a:prstGeom>
+          <a:solidFill>
+            <a:srgbClr val="FFFFFF"/>
+          </a:solidFill>
+          <a:ln>
+            <a:noFill/>
+          </a:ln>
+        </p:spPr>
+        <p:style>
+          <a:lnRef idx="1">
+            <a:schemeClr val="accent1"/>
+          </a:lnRef>
+          <a:fillRef idx="3">
+            <a:schemeClr val="accent1"/>
+          </a:fillRef>
+          <a:effectRef idx="2">
+            <a:schemeClr val="accent1"/>
+          </a:effectRef>
+          <a:fontRef idx="minor">
+            <a:schemeClr val="lt1"/>
+          </a:fontRef>
+        </p:style>
+        <p:txBody>
+          <a:bodyPr rtlCol="0" anchor="ctr"/>
+          <a:lstStyle/>
+          <a:p>
+            <a:pPr algn="ctr"/>
+          </a:p>
+        </p:txBody>
+      </p:sp>
+      <p:sp>
+        <p:nvSpPr>
+          <p:cNvPr id="26" name="TextBox 25"/>
+          <p:cNvSpPr txBox="1"/>
+          <p:nvPr/>
+        </p:nvSpPr>
+        <p:spPr>
+          <a:xfrm>
+            <a:off x="6464808" y="4581144"/>
+            <a:ext cx="493776" cy="292608"/>
+          </a:xfrm>
+          <a:prstGeom prst="rect">
+            <a:avLst/>
+          </a:prstGeom>
+          <a:noFill/>
+        </p:spPr>
+        <p:txBody>
+          <a:bodyPr wrap="square" lIns="18288" rIns="18288" tIns="18288" bIns="18288" anchor="ctr">
+            <a:spAutoFit/>
+          </a:bodyPr>
+          <a:lstStyle/>
+          <a:p>
+            <a:pPr algn="l">
+              <a:defRPr sz="1300" b="1">
+                <a:solidFill>
+                  <a:srgbClr val="00AFA0"/>
+                </a:solidFill>
+                <a:latin typeface="Aptos"/>
+              </a:defRPr>
+            </a:pPr>
+            <a:r>
+              <a:t>06</a:t>
+            </a:r>
+          </a:p>
+        </p:txBody>
+      </p:sp>
+      <p:sp>
+        <p:nvSpPr>
+          <p:cNvPr id="27" name="TextBox 26"/>
+          <p:cNvSpPr txBox="1"/>
+          <p:nvPr/>
+        </p:nvSpPr>
+        <p:spPr>
+          <a:xfrm>
+            <a:off x="7086600" y="4517136"/>
+            <a:ext cx="4023360" cy="292608"/>
+          </a:xfrm>
+          <a:prstGeom prst="rect">
+            <a:avLst/>
+          </a:prstGeom>
+          <a:noFill/>
+        </p:spPr>
+        <p:txBody>
+          <a:bodyPr wrap="square" lIns="18288" rIns="18288" tIns="18288" bIns="18288" anchor="ctr">
+            <a:spAutoFit/>
+          </a:bodyPr>
+          <a:lstStyle/>
+          <a:p>
+            <a:pPr algn="l">
+              <a:defRPr sz="1400" b="1">
+                <a:solidFill>
+                  <a:srgbClr val="112240"/>
+                </a:solidFill>
+                <a:latin typeface="Aptos"/>
+              </a:defRPr>
+            </a:pPr>
+            <a:r>
+              <a:t>Remediation / PR</a:t>
+            </a:r>
+          </a:p>
+        </p:txBody>
+      </p:sp>
+      <p:sp>
+        <p:nvSpPr>
+          <p:cNvPr id="28" name="TextBox 27"/>
+          <p:cNvSpPr txBox="1"/>
+          <p:nvPr/>
+        </p:nvSpPr>
+        <p:spPr>
+          <a:xfrm>
+            <a:off x="7086600" y="4892040"/>
+            <a:ext cx="4023360" cy="274320"/>
+          </a:xfrm>
+          <a:prstGeom prst="rect">
+            <a:avLst/>
+          </a:prstGeom>
+          <a:noFill/>
+        </p:spPr>
+        <p:txBody>
+          <a:bodyPr wrap="square" lIns="18288" rIns="18288" tIns="18288" bIns="18288" anchor="ctr">
+            <a:spAutoFit/>
+          </a:bodyPr>
+          <a:lstStyle/>
+          <a:p>
+            <a:pPr algn="l">
+              <a:defRPr sz="1000" b="0">
+                <a:solidFill>
+                  <a:srgbClr val="637389"/>
+                </a:solidFill>
+                <a:latin typeface="Aptos"/>
+              </a:defRPr>
+            </a:pPr>
+            <a:r>
+              <a:t>Diff ve test; PR için ayrı onay gerekir</a:t>
+            </a:r>
+          </a:p>
+        </p:txBody>
+      </p:sp>
+      <p:sp>
+        <p:nvSpPr>
+          <p:cNvPr id="29" name="TextBox 28"/>
           <p:cNvSpPr txBox="1"/>
           <p:nvPr/>
         </p:nvSpPr>
@@ -14813,7 +18402,7 @@
       </p:sp>
       <p:sp>
         <p:nvSpPr>
-          <p:cNvPr id="16" name="TextBox 15"/>
+          <p:cNvPr id="30" name="TextBox 29"/>
           <p:cNvSpPr txBox="1"/>
           <p:nvPr/>
         </p:nvSpPr>
@@ -14842,7 +18431,7 @@
               </a:defRPr>
             </a:pPr>
             <a:r>
-              <a:t>20</a:t>
+              <a:t>23</a:t>
             </a:r>
           </a:p>
         </p:txBody>
@@ -14855,1119 +18444,7 @@
 </p:sld>
 </file>
 
-<file path=ppt/slides/slide21.xml><?xml version="1.0" encoding="utf-8"?>
-<p:sld xmlns:a="http://schemas.openxmlformats.org/drawingml/2006/main" xmlns:p="http://schemas.openxmlformats.org/presentationml/2006/main" xmlns:r="http://schemas.openxmlformats.org/officeDocument/2006/relationships">
-  <p:cSld>
-    <p:bg>
-      <p:bgPr>
-        <a:solidFill>
-          <a:srgbClr val="F7F9FC"/>
-        </a:solidFill>
-        <a:effectLst/>
-      </p:bgPr>
-    </p:bg>
-    <p:spTree>
-      <p:nvGrpSpPr>
-        <p:cNvPr id="1" name=""/>
-        <p:cNvGrpSpPr/>
-        <p:nvPr/>
-      </p:nvGrpSpPr>
-      <p:grpSpPr/>
-      <p:sp>
-        <p:nvSpPr>
-          <p:cNvPr id="2" name="TextBox 1"/>
-          <p:cNvSpPr txBox="1"/>
-          <p:nvPr/>
-        </p:nvSpPr>
-        <p:spPr>
-          <a:xfrm>
-            <a:off x="640080" y="329184"/>
-            <a:ext cx="10881360" cy="228600"/>
-          </a:xfrm>
-          <a:prstGeom prst="rect">
-            <a:avLst/>
-          </a:prstGeom>
-          <a:noFill/>
-        </p:spPr>
-        <p:txBody>
-          <a:bodyPr wrap="square" lIns="18288" rIns="18288" tIns="18288" bIns="18288" anchor="ctr">
-            <a:spAutoFit/>
-          </a:bodyPr>
-          <a:lstStyle/>
-          <a:p>
-            <a:pPr algn="l">
-              <a:defRPr sz="900" b="1">
-                <a:solidFill>
-                  <a:srgbClr val="00AFA0"/>
-                </a:solidFill>
-                <a:latin typeface="Aptos"/>
-              </a:defRPr>
-            </a:pPr>
-            <a:r>
-              <a:t>18  •  KISA DEMO</a:t>
-            </a:r>
-          </a:p>
-        </p:txBody>
-      </p:sp>
-      <p:sp>
-        <p:nvSpPr>
-          <p:cNvPr id="3" name="TextBox 2"/>
-          <p:cNvSpPr txBox="1"/>
-          <p:nvPr/>
-        </p:nvSpPr>
-        <p:spPr>
-          <a:xfrm>
-            <a:off x="640080" y="658368"/>
-            <a:ext cx="10972800" cy="502920"/>
-          </a:xfrm>
-          <a:prstGeom prst="rect">
-            <a:avLst/>
-          </a:prstGeom>
-          <a:noFill/>
-        </p:spPr>
-        <p:txBody>
-          <a:bodyPr wrap="square" lIns="18288" rIns="18288" tIns="18288" bIns="18288" anchor="ctr">
-            <a:spAutoFit/>
-          </a:bodyPr>
-          <a:lstStyle/>
-          <a:p>
-            <a:pPr algn="l">
-              <a:defRPr sz="2700" b="1">
-                <a:solidFill>
-                  <a:srgbClr val="112240"/>
-                </a:solidFill>
-                <a:latin typeface="Aptos"/>
-              </a:defRPr>
-            </a:pPr>
-            <a:r>
-              <a:t>Uygulamayı sunumda nasıl gösteririm?</a:t>
-            </a:r>
-          </a:p>
-        </p:txBody>
-      </p:sp>
-      <p:sp>
-        <p:nvSpPr>
-          <p:cNvPr id="4" name="TextBox 3"/>
-          <p:cNvSpPr txBox="1"/>
-          <p:nvPr/>
-        </p:nvSpPr>
-        <p:spPr>
-          <a:xfrm>
-            <a:off x="658368" y="1197864"/>
-            <a:ext cx="10881360" cy="420624"/>
-          </a:xfrm>
-          <a:prstGeom prst="rect">
-            <a:avLst/>
-          </a:prstGeom>
-          <a:noFill/>
-        </p:spPr>
-        <p:txBody>
-          <a:bodyPr wrap="square" lIns="18288" rIns="18288" tIns="18288" bIns="18288" anchor="ctr">
-            <a:spAutoFit/>
-          </a:bodyPr>
-          <a:lstStyle/>
-          <a:p>
-            <a:pPr algn="l">
-              <a:defRPr sz="1300" b="0">
-                <a:solidFill>
-                  <a:srgbClr val="637389"/>
-                </a:solidFill>
-                <a:latin typeface="Aptos"/>
-              </a:defRPr>
-            </a:pPr>
-            <a:r>
-              <a:t>Sentetik test deposunda, dış sisteme yan etki oluşturmadan ana akışı sergileyin.</a:t>
-            </a:r>
-          </a:p>
-        </p:txBody>
-      </p:sp>
-      <p:sp>
-        <p:nvSpPr>
-          <p:cNvPr id="5" name="Rounded Rectangle 4"/>
-          <p:cNvSpPr/>
-          <p:nvPr/>
-        </p:nvSpPr>
-        <p:spPr>
-          <a:xfrm>
-            <a:off x="822960" y="1783080"/>
-            <a:ext cx="5074920" cy="987552"/>
-          </a:xfrm>
-          <a:prstGeom prst="roundRect">
-            <a:avLst/>
-          </a:prstGeom>
-          <a:solidFill>
-            <a:srgbClr val="FFFFFF"/>
-          </a:solidFill>
-          <a:ln>
-            <a:noFill/>
-          </a:ln>
-        </p:spPr>
-        <p:style>
-          <a:lnRef idx="1">
-            <a:schemeClr val="accent1"/>
-          </a:lnRef>
-          <a:fillRef idx="3">
-            <a:schemeClr val="accent1"/>
-          </a:fillRef>
-          <a:effectRef idx="2">
-            <a:schemeClr val="accent1"/>
-          </a:effectRef>
-          <a:fontRef idx="minor">
-            <a:schemeClr val="lt1"/>
-          </a:fontRef>
-        </p:style>
-        <p:txBody>
-          <a:bodyPr rtlCol="0" anchor="ctr"/>
-          <a:lstStyle/>
-          <a:p>
-            <a:pPr algn="ctr"/>
-          </a:p>
-        </p:txBody>
-      </p:sp>
-      <p:sp>
-        <p:nvSpPr>
-          <p:cNvPr id="6" name="TextBox 5"/>
-          <p:cNvSpPr txBox="1"/>
-          <p:nvPr/>
-        </p:nvSpPr>
-        <p:spPr>
-          <a:xfrm>
-            <a:off x="978408" y="1984248"/>
-            <a:ext cx="493776" cy="292608"/>
-          </a:xfrm>
-          <a:prstGeom prst="rect">
-            <a:avLst/>
-          </a:prstGeom>
-          <a:noFill/>
-        </p:spPr>
-        <p:txBody>
-          <a:bodyPr wrap="square" lIns="18288" rIns="18288" tIns="18288" bIns="18288" anchor="ctr">
-            <a:spAutoFit/>
-          </a:bodyPr>
-          <a:lstStyle/>
-          <a:p>
-            <a:pPr algn="l">
-              <a:defRPr sz="1300" b="1">
-                <a:solidFill>
-                  <a:srgbClr val="00AFA0"/>
-                </a:solidFill>
-                <a:latin typeface="Aptos"/>
-              </a:defRPr>
-            </a:pPr>
-            <a:r>
-              <a:t>01</a:t>
-            </a:r>
-          </a:p>
-        </p:txBody>
-      </p:sp>
-      <p:sp>
-        <p:nvSpPr>
-          <p:cNvPr id="7" name="TextBox 6"/>
-          <p:cNvSpPr txBox="1"/>
-          <p:nvPr/>
-        </p:nvSpPr>
-        <p:spPr>
-          <a:xfrm>
-            <a:off x="1600200" y="1920240"/>
-            <a:ext cx="4023360" cy="292608"/>
-          </a:xfrm>
-          <a:prstGeom prst="rect">
-            <a:avLst/>
-          </a:prstGeom>
-          <a:noFill/>
-        </p:spPr>
-        <p:txBody>
-          <a:bodyPr wrap="square" lIns="18288" rIns="18288" tIns="18288" bIns="18288" anchor="ctr">
-            <a:spAutoFit/>
-          </a:bodyPr>
-          <a:lstStyle/>
-          <a:p>
-            <a:pPr algn="l">
-              <a:defRPr sz="1400" b="1">
-                <a:solidFill>
-                  <a:srgbClr val="112240"/>
-                </a:solidFill>
-                <a:latin typeface="Aptos"/>
-              </a:defRPr>
-            </a:pPr>
-            <a:r>
-              <a:t>Kurulumu başlat</a:t>
-            </a:r>
-          </a:p>
-        </p:txBody>
-      </p:sp>
-      <p:sp>
-        <p:nvSpPr>
-          <p:cNvPr id="8" name="TextBox 7"/>
-          <p:cNvSpPr txBox="1"/>
-          <p:nvPr/>
-        </p:nvSpPr>
-        <p:spPr>
-          <a:xfrm>
-            <a:off x="1600200" y="2295144"/>
-            <a:ext cx="4023360" cy="274320"/>
-          </a:xfrm>
-          <a:prstGeom prst="rect">
-            <a:avLst/>
-          </a:prstGeom>
-          <a:noFill/>
-        </p:spPr>
-        <p:txBody>
-          <a:bodyPr wrap="square" lIns="18288" rIns="18288" tIns="18288" bIns="18288" anchor="ctr">
-            <a:spAutoFit/>
-          </a:bodyPr>
-          <a:lstStyle/>
-          <a:p>
-            <a:pPr algn="l">
-              <a:defRPr sz="1000" b="0">
-                <a:solidFill>
-                  <a:srgbClr val="637389"/>
-                </a:solidFill>
-                <a:latin typeface="Aptos"/>
-              </a:defRPr>
-            </a:pPr>
-            <a:r>
-              <a:t>Kurulum.command → Python ve paket kontrolü</a:t>
-            </a:r>
-          </a:p>
-        </p:txBody>
-      </p:sp>
-      <p:sp>
-        <p:nvSpPr>
-          <p:cNvPr id="9" name="Rounded Rectangle 8"/>
-          <p:cNvSpPr/>
-          <p:nvPr/>
-        </p:nvSpPr>
-        <p:spPr>
-          <a:xfrm>
-            <a:off x="6309360" y="1783080"/>
-            <a:ext cx="5074920" cy="987552"/>
-          </a:xfrm>
-          <a:prstGeom prst="roundRect">
-            <a:avLst/>
-          </a:prstGeom>
-          <a:solidFill>
-            <a:srgbClr val="FFFFFF"/>
-          </a:solidFill>
-          <a:ln>
-            <a:noFill/>
-          </a:ln>
-        </p:spPr>
-        <p:style>
-          <a:lnRef idx="1">
-            <a:schemeClr val="accent1"/>
-          </a:lnRef>
-          <a:fillRef idx="3">
-            <a:schemeClr val="accent1"/>
-          </a:fillRef>
-          <a:effectRef idx="2">
-            <a:schemeClr val="accent1"/>
-          </a:effectRef>
-          <a:fontRef idx="minor">
-            <a:schemeClr val="lt1"/>
-          </a:fontRef>
-        </p:style>
-        <p:txBody>
-          <a:bodyPr rtlCol="0" anchor="ctr"/>
-          <a:lstStyle/>
-          <a:p>
-            <a:pPr algn="ctr"/>
-          </a:p>
-        </p:txBody>
-      </p:sp>
-      <p:sp>
-        <p:nvSpPr>
-          <p:cNvPr id="10" name="TextBox 9"/>
-          <p:cNvSpPr txBox="1"/>
-          <p:nvPr/>
-        </p:nvSpPr>
-        <p:spPr>
-          <a:xfrm>
-            <a:off x="6464808" y="1984248"/>
-            <a:ext cx="493776" cy="292608"/>
-          </a:xfrm>
-          <a:prstGeom prst="rect">
-            <a:avLst/>
-          </a:prstGeom>
-          <a:noFill/>
-        </p:spPr>
-        <p:txBody>
-          <a:bodyPr wrap="square" lIns="18288" rIns="18288" tIns="18288" bIns="18288" anchor="ctr">
-            <a:spAutoFit/>
-          </a:bodyPr>
-          <a:lstStyle/>
-          <a:p>
-            <a:pPr algn="l">
-              <a:defRPr sz="1300" b="1">
-                <a:solidFill>
-                  <a:srgbClr val="00AFA0"/>
-                </a:solidFill>
-                <a:latin typeface="Aptos"/>
-              </a:defRPr>
-            </a:pPr>
-            <a:r>
-              <a:t>02</a:t>
-            </a:r>
-          </a:p>
-        </p:txBody>
-      </p:sp>
-      <p:sp>
-        <p:nvSpPr>
-          <p:cNvPr id="11" name="TextBox 10"/>
-          <p:cNvSpPr txBox="1"/>
-          <p:nvPr/>
-        </p:nvSpPr>
-        <p:spPr>
-          <a:xfrm>
-            <a:off x="7086600" y="1920240"/>
-            <a:ext cx="4023360" cy="292608"/>
-          </a:xfrm>
-          <a:prstGeom prst="rect">
-            <a:avLst/>
-          </a:prstGeom>
-          <a:noFill/>
-        </p:spPr>
-        <p:txBody>
-          <a:bodyPr wrap="square" lIns="18288" rIns="18288" tIns="18288" bIns="18288" anchor="ctr">
-            <a:spAutoFit/>
-          </a:bodyPr>
-          <a:lstStyle/>
-          <a:p>
-            <a:pPr algn="l">
-              <a:defRPr sz="1400" b="1">
-                <a:solidFill>
-                  <a:srgbClr val="112240"/>
-                </a:solidFill>
-                <a:latin typeface="Aptos"/>
-              </a:defRPr>
-            </a:pPr>
-            <a:r>
-              <a:t>Menüyü aç</a:t>
-            </a:r>
-          </a:p>
-        </p:txBody>
-      </p:sp>
-      <p:sp>
-        <p:nvSpPr>
-          <p:cNvPr id="12" name="TextBox 11"/>
-          <p:cNvSpPr txBox="1"/>
-          <p:nvPr/>
-        </p:nvSpPr>
-        <p:spPr>
-          <a:xfrm>
-            <a:off x="7086600" y="2295144"/>
-            <a:ext cx="4023360" cy="274320"/>
-          </a:xfrm>
-          <a:prstGeom prst="rect">
-            <a:avLst/>
-          </a:prstGeom>
-          <a:noFill/>
-        </p:spPr>
-        <p:txBody>
-          <a:bodyPr wrap="square" lIns="18288" rIns="18288" tIns="18288" bIns="18288" anchor="ctr">
-            <a:spAutoFit/>
-          </a:bodyPr>
-          <a:lstStyle/>
-          <a:p>
-            <a:pPr algn="l">
-              <a:defRPr sz="1000" b="0">
-                <a:solidFill>
-                  <a:srgbClr val="637389"/>
-                </a:solidFill>
-                <a:latin typeface="Aptos"/>
-              </a:defRPr>
-            </a:pPr>
-            <a:r>
-              <a:t>mevzuat-agent → yapılandırma kontrolü</a:t>
-            </a:r>
-          </a:p>
-        </p:txBody>
-      </p:sp>
-      <p:sp>
-        <p:nvSpPr>
-          <p:cNvPr id="13" name="Rounded Rectangle 12"/>
-          <p:cNvSpPr/>
-          <p:nvPr/>
-        </p:nvSpPr>
-        <p:spPr>
-          <a:xfrm>
-            <a:off x="822960" y="3081528"/>
-            <a:ext cx="5074920" cy="987552"/>
-          </a:xfrm>
-          <a:prstGeom prst="roundRect">
-            <a:avLst/>
-          </a:prstGeom>
-          <a:solidFill>
-            <a:srgbClr val="FFFFFF"/>
-          </a:solidFill>
-          <a:ln>
-            <a:noFill/>
-          </a:ln>
-        </p:spPr>
-        <p:style>
-          <a:lnRef idx="1">
-            <a:schemeClr val="accent1"/>
-          </a:lnRef>
-          <a:fillRef idx="3">
-            <a:schemeClr val="accent1"/>
-          </a:fillRef>
-          <a:effectRef idx="2">
-            <a:schemeClr val="accent1"/>
-          </a:effectRef>
-          <a:fontRef idx="minor">
-            <a:schemeClr val="lt1"/>
-          </a:fontRef>
-        </p:style>
-        <p:txBody>
-          <a:bodyPr rtlCol="0" anchor="ctr"/>
-          <a:lstStyle/>
-          <a:p>
-            <a:pPr algn="ctr"/>
-          </a:p>
-        </p:txBody>
-      </p:sp>
-      <p:sp>
-        <p:nvSpPr>
-          <p:cNvPr id="14" name="TextBox 13"/>
-          <p:cNvSpPr txBox="1"/>
-          <p:nvPr/>
-        </p:nvSpPr>
-        <p:spPr>
-          <a:xfrm>
-            <a:off x="978408" y="3282696"/>
-            <a:ext cx="493776" cy="292608"/>
-          </a:xfrm>
-          <a:prstGeom prst="rect">
-            <a:avLst/>
-          </a:prstGeom>
-          <a:noFill/>
-        </p:spPr>
-        <p:txBody>
-          <a:bodyPr wrap="square" lIns="18288" rIns="18288" tIns="18288" bIns="18288" anchor="ctr">
-            <a:spAutoFit/>
-          </a:bodyPr>
-          <a:lstStyle/>
-          <a:p>
-            <a:pPr algn="l">
-              <a:defRPr sz="1300" b="1">
-                <a:solidFill>
-                  <a:srgbClr val="00AFA0"/>
-                </a:solidFill>
-                <a:latin typeface="Aptos"/>
-              </a:defRPr>
-            </a:pPr>
-            <a:r>
-              <a:t>03</a:t>
-            </a:r>
-          </a:p>
-        </p:txBody>
-      </p:sp>
-      <p:sp>
-        <p:nvSpPr>
-          <p:cNvPr id="15" name="TextBox 14"/>
-          <p:cNvSpPr txBox="1"/>
-          <p:nvPr/>
-        </p:nvSpPr>
-        <p:spPr>
-          <a:xfrm>
-            <a:off x="1600200" y="3218688"/>
-            <a:ext cx="4023360" cy="292608"/>
-          </a:xfrm>
-          <a:prstGeom prst="rect">
-            <a:avLst/>
-          </a:prstGeom>
-          <a:noFill/>
-        </p:spPr>
-        <p:txBody>
-          <a:bodyPr wrap="square" lIns="18288" rIns="18288" tIns="18288" bIns="18288" anchor="ctr">
-            <a:spAutoFit/>
-          </a:bodyPr>
-          <a:lstStyle/>
-          <a:p>
-            <a:pPr algn="l">
-              <a:defRPr sz="1400" b="1">
-                <a:solidFill>
-                  <a:srgbClr val="112240"/>
-                </a:solidFill>
-                <a:latin typeface="Aptos"/>
-              </a:defRPr>
-            </a:pPr>
-            <a:r>
-              <a:t>Demo depoyu seç</a:t>
-            </a:r>
-          </a:p>
-        </p:txBody>
-      </p:sp>
-      <p:sp>
-        <p:nvSpPr>
-          <p:cNvPr id="16" name="TextBox 15"/>
-          <p:cNvSpPr txBox="1"/>
-          <p:nvPr/>
-        </p:nvSpPr>
-        <p:spPr>
-          <a:xfrm>
-            <a:off x="1600200" y="3593592"/>
-            <a:ext cx="4023360" cy="274320"/>
-          </a:xfrm>
-          <a:prstGeom prst="rect">
-            <a:avLst/>
-          </a:prstGeom>
-          <a:noFill/>
-        </p:spPr>
-        <p:txBody>
-          <a:bodyPr wrap="square" lIns="18288" rIns="18288" tIns="18288" bIns="18288" anchor="ctr">
-            <a:spAutoFit/>
-          </a:bodyPr>
-          <a:lstStyle/>
-          <a:p>
-            <a:pPr algn="l">
-              <a:defRPr sz="1000" b="0">
-                <a:solidFill>
-                  <a:srgbClr val="637389"/>
-                </a:solidFill>
-                <a:latin typeface="Aptos"/>
-              </a:defRPr>
-            </a:pPr>
-            <a:r>
-              <a:t>Yalnızca test için hazırlanmış sentetik depo</a:t>
-            </a:r>
-          </a:p>
-        </p:txBody>
-      </p:sp>
-      <p:sp>
-        <p:nvSpPr>
-          <p:cNvPr id="17" name="Rounded Rectangle 16"/>
-          <p:cNvSpPr/>
-          <p:nvPr/>
-        </p:nvSpPr>
-        <p:spPr>
-          <a:xfrm>
-            <a:off x="6309360" y="3081528"/>
-            <a:ext cx="5074920" cy="987552"/>
-          </a:xfrm>
-          <a:prstGeom prst="roundRect">
-            <a:avLst/>
-          </a:prstGeom>
-          <a:solidFill>
-            <a:srgbClr val="FFFFFF"/>
-          </a:solidFill>
-          <a:ln>
-            <a:noFill/>
-          </a:ln>
-        </p:spPr>
-        <p:style>
-          <a:lnRef idx="1">
-            <a:schemeClr val="accent1"/>
-          </a:lnRef>
-          <a:fillRef idx="3">
-            <a:schemeClr val="accent1"/>
-          </a:fillRef>
-          <a:effectRef idx="2">
-            <a:schemeClr val="accent1"/>
-          </a:effectRef>
-          <a:fontRef idx="minor">
-            <a:schemeClr val="lt1"/>
-          </a:fontRef>
-        </p:style>
-        <p:txBody>
-          <a:bodyPr rtlCol="0" anchor="ctr"/>
-          <a:lstStyle/>
-          <a:p>
-            <a:pPr algn="ctr"/>
-          </a:p>
-        </p:txBody>
-      </p:sp>
-      <p:sp>
-        <p:nvSpPr>
-          <p:cNvPr id="18" name="TextBox 17"/>
-          <p:cNvSpPr txBox="1"/>
-          <p:nvPr/>
-        </p:nvSpPr>
-        <p:spPr>
-          <a:xfrm>
-            <a:off x="6464808" y="3282696"/>
-            <a:ext cx="493776" cy="292608"/>
-          </a:xfrm>
-          <a:prstGeom prst="rect">
-            <a:avLst/>
-          </a:prstGeom>
-          <a:noFill/>
-        </p:spPr>
-        <p:txBody>
-          <a:bodyPr wrap="square" lIns="18288" rIns="18288" tIns="18288" bIns="18288" anchor="ctr">
-            <a:spAutoFit/>
-          </a:bodyPr>
-          <a:lstStyle/>
-          <a:p>
-            <a:pPr algn="l">
-              <a:defRPr sz="1300" b="1">
-                <a:solidFill>
-                  <a:srgbClr val="00AFA0"/>
-                </a:solidFill>
-                <a:latin typeface="Aptos"/>
-              </a:defRPr>
-            </a:pPr>
-            <a:r>
-              <a:t>04</a:t>
-            </a:r>
-          </a:p>
-        </p:txBody>
-      </p:sp>
-      <p:sp>
-        <p:nvSpPr>
-          <p:cNvPr id="19" name="TextBox 18"/>
-          <p:cNvSpPr txBox="1"/>
-          <p:nvPr/>
-        </p:nvSpPr>
-        <p:spPr>
-          <a:xfrm>
-            <a:off x="7086600" y="3218688"/>
-            <a:ext cx="4023360" cy="292608"/>
-          </a:xfrm>
-          <a:prstGeom prst="rect">
-            <a:avLst/>
-          </a:prstGeom>
-          <a:noFill/>
-        </p:spPr>
-        <p:txBody>
-          <a:bodyPr wrap="square" lIns="18288" rIns="18288" tIns="18288" bIns="18288" anchor="ctr">
-            <a:spAutoFit/>
-          </a:bodyPr>
-          <a:lstStyle/>
-          <a:p>
-            <a:pPr algn="l">
-              <a:defRPr sz="1400" b="1">
-                <a:solidFill>
-                  <a:srgbClr val="112240"/>
-                </a:solidFill>
-                <a:latin typeface="Aptos"/>
-              </a:defRPr>
-            </a:pPr>
-            <a:r>
-              <a:t>Tahmini gör</a:t>
-            </a:r>
-          </a:p>
-        </p:txBody>
-      </p:sp>
-      <p:sp>
-        <p:nvSpPr>
-          <p:cNvPr id="20" name="TextBox 19"/>
-          <p:cNvSpPr txBox="1"/>
-          <p:nvPr/>
-        </p:nvSpPr>
-        <p:spPr>
-          <a:xfrm>
-            <a:off x="7086600" y="3593592"/>
-            <a:ext cx="4023360" cy="274320"/>
-          </a:xfrm>
-          <a:prstGeom prst="rect">
-            <a:avLst/>
-          </a:prstGeom>
-          <a:noFill/>
-        </p:spPr>
-        <p:txBody>
-          <a:bodyPr wrap="square" lIns="18288" rIns="18288" tIns="18288" bIns="18288" anchor="ctr">
-            <a:spAutoFit/>
-          </a:bodyPr>
-          <a:lstStyle/>
-          <a:p>
-            <a:pPr algn="l">
-              <a:defRPr sz="1000" b="0">
-                <a:solidFill>
-                  <a:srgbClr val="637389"/>
-                </a:solidFill>
-                <a:latin typeface="Aptos"/>
-              </a:defRPr>
-            </a:pPr>
-            <a:r>
-              <a:t>Kurulu Ollama modelleri ve süreler</a:t>
-            </a:r>
-          </a:p>
-        </p:txBody>
-      </p:sp>
-      <p:sp>
-        <p:nvSpPr>
-          <p:cNvPr id="21" name="Rounded Rectangle 20"/>
-          <p:cNvSpPr/>
-          <p:nvPr/>
-        </p:nvSpPr>
-        <p:spPr>
-          <a:xfrm>
-            <a:off x="822960" y="4379976"/>
-            <a:ext cx="5074920" cy="987552"/>
-          </a:xfrm>
-          <a:prstGeom prst="roundRect">
-            <a:avLst/>
-          </a:prstGeom>
-          <a:solidFill>
-            <a:srgbClr val="FFFFFF"/>
-          </a:solidFill>
-          <a:ln>
-            <a:noFill/>
-          </a:ln>
-        </p:spPr>
-        <p:style>
-          <a:lnRef idx="1">
-            <a:schemeClr val="accent1"/>
-          </a:lnRef>
-          <a:fillRef idx="3">
-            <a:schemeClr val="accent1"/>
-          </a:fillRef>
-          <a:effectRef idx="2">
-            <a:schemeClr val="accent1"/>
-          </a:effectRef>
-          <a:fontRef idx="minor">
-            <a:schemeClr val="lt1"/>
-          </a:fontRef>
-        </p:style>
-        <p:txBody>
-          <a:bodyPr rtlCol="0" anchor="ctr"/>
-          <a:lstStyle/>
-          <a:p>
-            <a:pPr algn="ctr"/>
-          </a:p>
-        </p:txBody>
-      </p:sp>
-      <p:sp>
-        <p:nvSpPr>
-          <p:cNvPr id="22" name="TextBox 21"/>
-          <p:cNvSpPr txBox="1"/>
-          <p:nvPr/>
-        </p:nvSpPr>
-        <p:spPr>
-          <a:xfrm>
-            <a:off x="978408" y="4581144"/>
-            <a:ext cx="493776" cy="292608"/>
-          </a:xfrm>
-          <a:prstGeom prst="rect">
-            <a:avLst/>
-          </a:prstGeom>
-          <a:noFill/>
-        </p:spPr>
-        <p:txBody>
-          <a:bodyPr wrap="square" lIns="18288" rIns="18288" tIns="18288" bIns="18288" anchor="ctr">
-            <a:spAutoFit/>
-          </a:bodyPr>
-          <a:lstStyle/>
-          <a:p>
-            <a:pPr algn="l">
-              <a:defRPr sz="1300" b="1">
-                <a:solidFill>
-                  <a:srgbClr val="00AFA0"/>
-                </a:solidFill>
-                <a:latin typeface="Aptos"/>
-              </a:defRPr>
-            </a:pPr>
-            <a:r>
-              <a:t>05</a:t>
-            </a:r>
-          </a:p>
-        </p:txBody>
-      </p:sp>
-      <p:sp>
-        <p:nvSpPr>
-          <p:cNvPr id="23" name="TextBox 22"/>
-          <p:cNvSpPr txBox="1"/>
-          <p:nvPr/>
-        </p:nvSpPr>
-        <p:spPr>
-          <a:xfrm>
-            <a:off x="1600200" y="4517136"/>
-            <a:ext cx="4023360" cy="292608"/>
-          </a:xfrm>
-          <a:prstGeom prst="rect">
-            <a:avLst/>
-          </a:prstGeom>
-          <a:noFill/>
-        </p:spPr>
-        <p:txBody>
-          <a:bodyPr wrap="square" lIns="18288" rIns="18288" tIns="18288" bIns="18288" anchor="ctr">
-            <a:spAutoFit/>
-          </a:bodyPr>
-          <a:lstStyle/>
-          <a:p>
-            <a:pPr algn="l">
-              <a:defRPr sz="1400" b="1">
-                <a:solidFill>
-                  <a:srgbClr val="112240"/>
-                </a:solidFill>
-                <a:latin typeface="Aptos"/>
-              </a:defRPr>
-            </a:pPr>
-            <a:r>
-              <a:t>Raporu incele</a:t>
-            </a:r>
-          </a:p>
-        </p:txBody>
-      </p:sp>
-      <p:sp>
-        <p:nvSpPr>
-          <p:cNvPr id="24" name="TextBox 23"/>
-          <p:cNvSpPr txBox="1"/>
-          <p:nvPr/>
-        </p:nvSpPr>
-        <p:spPr>
-          <a:xfrm>
-            <a:off x="1600200" y="4892040"/>
-            <a:ext cx="4023360" cy="274320"/>
-          </a:xfrm>
-          <a:prstGeom prst="rect">
-            <a:avLst/>
-          </a:prstGeom>
-          <a:noFill/>
-        </p:spPr>
-        <p:txBody>
-          <a:bodyPr wrap="square" lIns="18288" rIns="18288" tIns="18288" bIns="18288" anchor="ctr">
-            <a:spAutoFit/>
-          </a:bodyPr>
-          <a:lstStyle/>
-          <a:p>
-            <a:pPr algn="l">
-              <a:defRPr sz="1000" b="0">
-                <a:solidFill>
-                  <a:srgbClr val="637389"/>
-                </a:solidFill>
-                <a:latin typeface="Aptos"/>
-              </a:defRPr>
-            </a:pPr>
-            <a:r>
-              <a:t>Kaynak/kanıt ve tarama kapsamı</a:t>
-            </a:r>
-          </a:p>
-        </p:txBody>
-      </p:sp>
-      <p:sp>
-        <p:nvSpPr>
-          <p:cNvPr id="25" name="Rounded Rectangle 24"/>
-          <p:cNvSpPr/>
-          <p:nvPr/>
-        </p:nvSpPr>
-        <p:spPr>
-          <a:xfrm>
-            <a:off x="6309360" y="4379976"/>
-            <a:ext cx="5074920" cy="987552"/>
-          </a:xfrm>
-          <a:prstGeom prst="roundRect">
-            <a:avLst/>
-          </a:prstGeom>
-          <a:solidFill>
-            <a:srgbClr val="FFFFFF"/>
-          </a:solidFill>
-          <a:ln>
-            <a:noFill/>
-          </a:ln>
-        </p:spPr>
-        <p:style>
-          <a:lnRef idx="1">
-            <a:schemeClr val="accent1"/>
-          </a:lnRef>
-          <a:fillRef idx="3">
-            <a:schemeClr val="accent1"/>
-          </a:fillRef>
-          <a:effectRef idx="2">
-            <a:schemeClr val="accent1"/>
-          </a:effectRef>
-          <a:fontRef idx="minor">
-            <a:schemeClr val="lt1"/>
-          </a:fontRef>
-        </p:style>
-        <p:txBody>
-          <a:bodyPr rtlCol="0" anchor="ctr"/>
-          <a:lstStyle/>
-          <a:p>
-            <a:pPr algn="ctr"/>
-          </a:p>
-        </p:txBody>
-      </p:sp>
-      <p:sp>
-        <p:nvSpPr>
-          <p:cNvPr id="26" name="TextBox 25"/>
-          <p:cNvSpPr txBox="1"/>
-          <p:nvPr/>
-        </p:nvSpPr>
-        <p:spPr>
-          <a:xfrm>
-            <a:off x="6464808" y="4581144"/>
-            <a:ext cx="493776" cy="292608"/>
-          </a:xfrm>
-          <a:prstGeom prst="rect">
-            <a:avLst/>
-          </a:prstGeom>
-          <a:noFill/>
-        </p:spPr>
-        <p:txBody>
-          <a:bodyPr wrap="square" lIns="18288" rIns="18288" tIns="18288" bIns="18288" anchor="ctr">
-            <a:spAutoFit/>
-          </a:bodyPr>
-          <a:lstStyle/>
-          <a:p>
-            <a:pPr algn="l">
-              <a:defRPr sz="1300" b="1">
-                <a:solidFill>
-                  <a:srgbClr val="00AFA0"/>
-                </a:solidFill>
-                <a:latin typeface="Aptos"/>
-              </a:defRPr>
-            </a:pPr>
-            <a:r>
-              <a:t>06</a:t>
-            </a:r>
-          </a:p>
-        </p:txBody>
-      </p:sp>
-      <p:sp>
-        <p:nvSpPr>
-          <p:cNvPr id="27" name="TextBox 26"/>
-          <p:cNvSpPr txBox="1"/>
-          <p:nvPr/>
-        </p:nvSpPr>
-        <p:spPr>
-          <a:xfrm>
-            <a:off x="7086600" y="4517136"/>
-            <a:ext cx="4023360" cy="292608"/>
-          </a:xfrm>
-          <a:prstGeom prst="rect">
-            <a:avLst/>
-          </a:prstGeom>
-          <a:noFill/>
-        </p:spPr>
-        <p:txBody>
-          <a:bodyPr wrap="square" lIns="18288" rIns="18288" tIns="18288" bIns="18288" anchor="ctr">
-            <a:spAutoFit/>
-          </a:bodyPr>
-          <a:lstStyle/>
-          <a:p>
-            <a:pPr algn="l">
-              <a:defRPr sz="1400" b="1">
-                <a:solidFill>
-                  <a:srgbClr val="112240"/>
-                </a:solidFill>
-                <a:latin typeface="Aptos"/>
-              </a:defRPr>
-            </a:pPr>
-            <a:r>
-              <a:t>Düzeltmeyi göster</a:t>
-            </a:r>
-          </a:p>
-        </p:txBody>
-      </p:sp>
-      <p:sp>
-        <p:nvSpPr>
-          <p:cNvPr id="28" name="TextBox 27"/>
-          <p:cNvSpPr txBox="1"/>
-          <p:nvPr/>
-        </p:nvSpPr>
-        <p:spPr>
-          <a:xfrm>
-            <a:off x="7086600" y="4892040"/>
-            <a:ext cx="4023360" cy="274320"/>
-          </a:xfrm>
-          <a:prstGeom prst="rect">
-            <a:avLst/>
-          </a:prstGeom>
-          <a:noFill/>
-        </p:spPr>
-        <p:txBody>
-          <a:bodyPr wrap="square" lIns="18288" rIns="18288" tIns="18288" bIns="18288" anchor="ctr">
-            <a:spAutoFit/>
-          </a:bodyPr>
-          <a:lstStyle/>
-          <a:p>
-            <a:pPr algn="l">
-              <a:defRPr sz="1000" b="0">
-                <a:solidFill>
-                  <a:srgbClr val="637389"/>
-                </a:solidFill>
-                <a:latin typeface="Aptos"/>
-              </a:defRPr>
-            </a:pPr>
-            <a:r>
-              <a:t>İzole dal ve diff; PR onayı verme</a:t>
-            </a:r>
-          </a:p>
-        </p:txBody>
-      </p:sp>
-      <p:sp>
-        <p:nvSpPr>
-          <p:cNvPr id="29" name="TextBox 28"/>
-          <p:cNvSpPr txBox="1"/>
-          <p:nvPr/>
-        </p:nvSpPr>
-        <p:spPr>
-          <a:xfrm>
-            <a:off x="566928" y="6473952"/>
-            <a:ext cx="9692640" cy="182880"/>
-          </a:xfrm>
-          <a:prstGeom prst="rect">
-            <a:avLst/>
-          </a:prstGeom>
-          <a:noFill/>
-        </p:spPr>
-        <p:txBody>
-          <a:bodyPr wrap="square" lIns="18288" rIns="18288" tIns="18288" bIns="18288" anchor="ctr">
-            <a:spAutoFit/>
-          </a:bodyPr>
-          <a:lstStyle/>
-          <a:p>
-            <a:pPr algn="l">
-              <a:defRPr sz="800" b="1">
-                <a:solidFill>
-                  <a:srgbClr val="637389"/>
-                </a:solidFill>
-                <a:latin typeface="Aptos"/>
-              </a:defRPr>
-            </a:pPr>
-            <a:r>
-              <a:t>MEVZUATAGENT  •  YEREL  •  ONAYLI  •  DENETLENEBİLİR</a:t>
-            </a:r>
-          </a:p>
-        </p:txBody>
-      </p:sp>
-      <p:sp>
-        <p:nvSpPr>
-          <p:cNvPr id="30" name="TextBox 29"/>
-          <p:cNvSpPr txBox="1"/>
-          <p:nvPr/>
-        </p:nvSpPr>
-        <p:spPr>
-          <a:xfrm>
-            <a:off x="11109960" y="6419088"/>
-            <a:ext cx="502920" cy="274320"/>
-          </a:xfrm>
-          <a:prstGeom prst="rect">
-            <a:avLst/>
-          </a:prstGeom>
-          <a:noFill/>
-        </p:spPr>
-        <p:txBody>
-          <a:bodyPr wrap="square" lIns="18288" rIns="18288" tIns="18288" bIns="18288" anchor="ctr">
-            <a:spAutoFit/>
-          </a:bodyPr>
-          <a:lstStyle/>
-          <a:p>
-            <a:pPr algn="r">
-              <a:defRPr sz="1000" b="1">
-                <a:solidFill>
-                  <a:srgbClr val="637389"/>
-                </a:solidFill>
-                <a:latin typeface="Aptos"/>
-              </a:defRPr>
-            </a:pPr>
-            <a:r>
-              <a:t>21</a:t>
-            </a:r>
-          </a:p>
-        </p:txBody>
-      </p:sp>
-    </p:spTree>
-  </p:cSld>
-  <p:clrMapOvr>
-    <a:masterClrMapping/>
-  </p:clrMapOvr>
-</p:sld>
-</file>
-
-<file path=ppt/slides/slide22.xml><?xml version="1.0" encoding="utf-8"?>
+<file path=ppt/slides/slide24.xml><?xml version="1.0" encoding="utf-8"?>
 <p:sld xmlns:a="http://schemas.openxmlformats.org/drawingml/2006/main" xmlns:p="http://schemas.openxmlformats.org/presentationml/2006/main" xmlns:r="http://schemas.openxmlformats.org/officeDocument/2006/relationships">
   <p:cSld>
     <p:bg>
@@ -16243,7 +18720,7 @@
               </a:defRPr>
             </a:pPr>
             <a:r>
-              <a:t>22</a:t>
+              <a:t>24</a:t>
             </a:r>
           </a:p>
         </p:txBody>
@@ -21630,7 +24107,7 @@
               </a:defRPr>
             </a:pPr>
             <a:r>
-              <a:t>Kullanıcı arayüzü</a:t>
+              <a:t>Sohbet arayüzü</a:t>
             </a:r>
           </a:p>
         </p:txBody>
@@ -21666,11 +24143,11 @@
               </a:defRPr>
             </a:pPr>
             <a:r>
-              <a:t>•  Türkçe terminal menüsü</a:t>
+              <a:t>•  Türkçe doğal dil etkileşimi</a:t>
             </a:r>
             <a:br/>
             <a:r>
-              <a:t>•  Yapılandırma ve onay istemleri</a:t>
+              <a:t>•  Proje promptu ve onay istemleri</a:t>
             </a:r>
           </a:p>
         </p:txBody>

--- a/docs/MevzuatAgent_Odev_Sunumu_TR.pptx
+++ b/docs/MevzuatAgent_Odev_Sunumu_TR.pptx
@@ -29,6 +29,10 @@
     <p:sldId id="277" r:id="rId28"/>
     <p:sldId id="278" r:id="rId29"/>
     <p:sldId id="279" r:id="rId30"/>
+    <p:sldId id="280" r:id="rId31"/>
+    <p:sldId id="281" r:id="rId32"/>
+    <p:sldId id="282" r:id="rId33"/>
+    <p:sldId id="283" r:id="rId34"/>
   </p:sldIdLst>
   <p:sldSz cx="12191695" cy="6858000" type="screen4x3"/>
   <p:notesSz cx="6858000" cy="9144000"/>
@@ -10522,7 +10526,7 @@
             </a:r>
             <a:br/>
             <a:r>
-              <a:t>•  Model taraması: 0 doğrulanmış dosya</a:t>
+              <a:t>•  gemma3:4b: 1 dosya tarandı, 0 bulgu</a:t>
             </a:r>
             <a:br/>
             <a:r>
@@ -10530,7 +10534,7 @@
             </a:r>
             <a:br/>
             <a:r>
-              <a:t>•  Hata raporda açıkça gösterildi</a:t>
+              <a:t>•  Bulgu yok, uygunluk kanıtı değildir</a:t>
             </a:r>
           </a:p>
         </p:txBody>
@@ -10913,7 +10917,7 @@
               </a:defRPr>
             </a:pPr>
             <a:r>
-              <a:t>16  •  REMEDIATION KABUL DENEMESI</a:t>
+              <a:t>17  •  REMEDIATION, KOD FARKI VE PR</a:t>
             </a:r>
           </a:p>
         </p:txBody>
@@ -10949,7 +10953,7 @@
               </a:defRPr>
             </a:pPr>
             <a:r>
-              <a:t>İlk iki sentetik bulgu, izole dalda test edildi</a:t>
+              <a:t>İlk iki bulgu: diff → izole dal → test → PR</a:t>
             </a:r>
           </a:p>
         </p:txBody>
@@ -10985,7 +10989,7 @@
               </a:defRPr>
             </a:pPr>
             <a:r>
-              <a:t>Model taramasının bulguları tutarsız olduğundan düzeltme hattı önceden etiketlenmiş sentetik fixture bulgularıyla ayrıca sınandı.</a:t>
+              <a:t>Aşağıdaki değişiklik sentetik E2E fixture'ından alınmıştır; mevzuat düzeltmesi veya gerçek GitHub PR'ı değildir.</a:t>
             </a:r>
           </a:p>
         </p:txBody>
@@ -10998,8 +11002,221 @@
         </p:nvSpPr>
         <p:spPr>
           <a:xfrm>
-            <a:off x="749808" y="1874519"/>
-            <a:ext cx="3401568" cy="1298448"/>
+            <a:off x="713232" y="1783080"/>
+            <a:ext cx="6656832" cy="3520440"/>
+          </a:xfrm>
+          <a:prstGeom prst="roundRect">
+            <a:avLst/>
+          </a:prstGeom>
+          <a:solidFill>
+            <a:srgbClr val="112240"/>
+          </a:solidFill>
+          <a:ln>
+            <a:noFill/>
+          </a:ln>
+        </p:spPr>
+        <p:style>
+          <a:lnRef idx="1">
+            <a:schemeClr val="accent1"/>
+          </a:lnRef>
+          <a:fillRef idx="3">
+            <a:schemeClr val="accent1"/>
+          </a:fillRef>
+          <a:effectRef idx="2">
+            <a:schemeClr val="accent1"/>
+          </a:effectRef>
+          <a:fontRef idx="minor">
+            <a:schemeClr val="lt1"/>
+          </a:fontRef>
+        </p:style>
+        <p:txBody>
+          <a:bodyPr rtlCol="0" anchor="ctr"/>
+          <a:lstStyle/>
+          <a:p>
+            <a:pPr algn="ctr"/>
+          </a:p>
+        </p:txBody>
+      </p:sp>
+      <p:sp>
+        <p:nvSpPr>
+          <p:cNvPr id="6" name="TextBox 5"/>
+          <p:cNvSpPr txBox="1"/>
+          <p:nvPr/>
+        </p:nvSpPr>
+        <p:spPr>
+          <a:xfrm>
+            <a:off x="960120" y="1965960"/>
+            <a:ext cx="6126480" cy="256032"/>
+          </a:xfrm>
+          <a:prstGeom prst="rect">
+            <a:avLst/>
+          </a:prstGeom>
+          <a:noFill/>
+        </p:spPr>
+        <p:txBody>
+          <a:bodyPr wrap="square" lIns="18288" rIns="18288" tIns="18288" bIns="18288" anchor="ctr">
+            <a:spAutoFit/>
+          </a:bodyPr>
+          <a:lstStyle/>
+          <a:p>
+            <a:pPr algn="l">
+              <a:defRPr sz="1100" b="1">
+                <a:solidFill>
+                  <a:srgbClr val="D6575E"/>
+                </a:solidFill>
+                <a:latin typeface="Aptos Mono"/>
+              </a:defRPr>
+            </a:pPr>
+            <a:r>
+              <a:t>ÖNCE  (payment_rules.py)</a:t>
+            </a:r>
+          </a:p>
+        </p:txBody>
+      </p:sp>
+      <p:sp>
+        <p:nvSpPr>
+          <p:cNvPr id="7" name="TextBox 6"/>
+          <p:cNvSpPr txBox="1"/>
+          <p:nvPr/>
+        </p:nvSpPr>
+        <p:spPr>
+          <a:xfrm>
+            <a:off x="960120" y="2304288"/>
+            <a:ext cx="6126480" cy="1005840"/>
+          </a:xfrm>
+          <a:prstGeom prst="rect">
+            <a:avLst/>
+          </a:prstGeom>
+          <a:noFill/>
+        </p:spPr>
+        <p:txBody>
+          <a:bodyPr wrap="square" lIns="18288" rIns="18288" tIns="18288" bIns="18288" anchor="ctr">
+            <a:spAutoFit/>
+          </a:bodyPr>
+          <a:lstStyle/>
+          <a:p>
+            <a:pPr algn="l">
+              <a:defRPr sz="1200" b="0">
+                <a:solidFill>
+                  <a:srgbClr val="FFFFFF"/>
+                </a:solidFill>
+                <a:latin typeface="Aptos Mono"/>
+              </a:defRPr>
+            </a:pPr>
+            <a:r>
+              <a:t>def mask_reference(value, visible=4):</a:t>
+            </a:r>
+            <a:br/>
+            <a:r>
+              <a:t>    return value</a:t>
+            </a:r>
+            <a:br/>
+            <a:br/>
+            <a:r>
+              <a:t>def is_positive_amount(amount):</a:t>
+            </a:r>
+            <a:br/>
+            <a:r>
+              <a:t>    return amount &gt;= 0</a:t>
+            </a:r>
+          </a:p>
+        </p:txBody>
+      </p:sp>
+      <p:sp>
+        <p:nvSpPr>
+          <p:cNvPr id="8" name="TextBox 7"/>
+          <p:cNvSpPr txBox="1"/>
+          <p:nvPr/>
+        </p:nvSpPr>
+        <p:spPr>
+          <a:xfrm>
+            <a:off x="960120" y="3493008"/>
+            <a:ext cx="6126480" cy="256032"/>
+          </a:xfrm>
+          <a:prstGeom prst="rect">
+            <a:avLst/>
+          </a:prstGeom>
+          <a:noFill/>
+        </p:spPr>
+        <p:txBody>
+          <a:bodyPr wrap="square" lIns="18288" rIns="18288" tIns="18288" bIns="18288" anchor="ctr">
+            <a:spAutoFit/>
+          </a:bodyPr>
+          <a:lstStyle/>
+          <a:p>
+            <a:pPr algn="l">
+              <a:defRPr sz="1100" b="1">
+                <a:solidFill>
+                  <a:srgbClr val="00AFA0"/>
+                </a:solidFill>
+                <a:latin typeface="Aptos Mono"/>
+              </a:defRPr>
+            </a:pPr>
+            <a:r>
+              <a:t>SONRA  (yalnızca kullanıcı onayıyla)</a:t>
+            </a:r>
+          </a:p>
+        </p:txBody>
+      </p:sp>
+      <p:sp>
+        <p:nvSpPr>
+          <p:cNvPr id="9" name="TextBox 8"/>
+          <p:cNvSpPr txBox="1"/>
+          <p:nvPr/>
+        </p:nvSpPr>
+        <p:spPr>
+          <a:xfrm>
+            <a:off x="960120" y="3822191"/>
+            <a:ext cx="6126480" cy="1207008"/>
+          </a:xfrm>
+          <a:prstGeom prst="rect">
+            <a:avLst/>
+          </a:prstGeom>
+          <a:noFill/>
+        </p:spPr>
+        <p:txBody>
+          <a:bodyPr wrap="square" lIns="18288" rIns="18288" tIns="18288" bIns="18288" anchor="ctr">
+            <a:spAutoFit/>
+          </a:bodyPr>
+          <a:lstStyle/>
+          <a:p>
+            <a:pPr algn="l">
+              <a:defRPr sz="1000" b="0">
+                <a:solidFill>
+                  <a:srgbClr val="FFFFFF"/>
+                </a:solidFill>
+                <a:latin typeface="Aptos Mono"/>
+              </a:defRPr>
+            </a:pPr>
+            <a:r>
+              <a:t>def mask_reference(value, visible=4):</a:t>
+            </a:r>
+            <a:br/>
+            <a:r>
+              <a:t>    return "*" * max(0, len(value)-visible) + value[-visible:]</a:t>
+            </a:r>
+            <a:br/>
+            <a:br/>
+            <a:r>
+              <a:t>def is_positive_amount(amount):</a:t>
+            </a:r>
+            <a:br/>
+            <a:r>
+              <a:t>    return amount &gt; 0</a:t>
+            </a:r>
+          </a:p>
+        </p:txBody>
+      </p:sp>
+      <p:sp>
+        <p:nvSpPr>
+          <p:cNvPr id="10" name="Rounded Rectangle 9"/>
+          <p:cNvSpPr/>
+          <p:nvPr/>
+        </p:nvSpPr>
+        <p:spPr>
+          <a:xfrm>
+            <a:off x="7662672" y="1810512"/>
+            <a:ext cx="3794760" cy="932688"/>
           </a:xfrm>
           <a:prstGeom prst="roundRect">
             <a:avLst/>
@@ -11035,20 +11252,20 @@
       </p:sp>
       <p:sp>
         <p:nvSpPr>
-          <p:cNvPr id="6" name="Rounded Rectangle 5"/>
+          <p:cNvPr id="11" name="Rectangle 10"/>
           <p:cNvSpPr/>
           <p:nvPr/>
         </p:nvSpPr>
         <p:spPr>
           <a:xfrm>
-            <a:off x="896112" y="2039112"/>
-            <a:ext cx="384048" cy="384048"/>
-          </a:xfrm>
-          <a:prstGeom prst="roundRect">
+            <a:off x="7662672" y="1810512"/>
+            <a:ext cx="64008" cy="932688"/>
+          </a:xfrm>
+          <a:prstGeom prst="rect">
             <a:avLst/>
           </a:prstGeom>
           <a:solidFill>
-            <a:srgbClr val="D6575E"/>
+            <a:srgbClr val="00AFA0"/>
           </a:solidFill>
           <a:ln>
             <a:noFill/>
@@ -11078,64 +11295,28 @@
       </p:sp>
       <p:sp>
         <p:nvSpPr>
-          <p:cNvPr id="7" name="TextBox 6"/>
-          <p:cNvSpPr txBox="1"/>
-          <p:nvPr/>
-        </p:nvSpPr>
-        <p:spPr>
-          <a:xfrm>
-            <a:off x="896112" y="2039112"/>
-            <a:ext cx="384048" cy="365760"/>
-          </a:xfrm>
-          <a:prstGeom prst="rect">
-            <a:avLst/>
-          </a:prstGeom>
-          <a:noFill/>
-        </p:spPr>
-        <p:txBody>
-          <a:bodyPr wrap="square" lIns="18288" rIns="18288" tIns="18288" bIns="18288" anchor="ctr">
-            <a:spAutoFit/>
-          </a:bodyPr>
-          <a:lstStyle/>
-          <a:p>
-            <a:pPr algn="ctr">
-              <a:defRPr sz="1300" b="1">
-                <a:solidFill>
-                  <a:srgbClr val="FFFFFF"/>
-                </a:solidFill>
-                <a:latin typeface="Aptos"/>
-              </a:defRPr>
-            </a:pPr>
-            <a:r>
-              <a:t>1</a:t>
-            </a:r>
-          </a:p>
-        </p:txBody>
-      </p:sp>
-      <p:sp>
-        <p:nvSpPr>
-          <p:cNvPr id="8" name="TextBox 7"/>
-          <p:cNvSpPr txBox="1"/>
-          <p:nvPr/>
-        </p:nvSpPr>
-        <p:spPr>
-          <a:xfrm>
-            <a:off x="1389888" y="2020824"/>
-            <a:ext cx="2615184" cy="310896"/>
-          </a:xfrm>
-          <a:prstGeom prst="rect">
-            <a:avLst/>
-          </a:prstGeom>
-          <a:noFill/>
-        </p:spPr>
-        <p:txBody>
-          <a:bodyPr wrap="square" lIns="18288" rIns="18288" tIns="18288" bIns="18288" anchor="ctr">
-            <a:spAutoFit/>
-          </a:bodyPr>
-          <a:lstStyle/>
-          <a:p>
-            <a:pPr algn="l">
-              <a:defRPr sz="1300" b="1">
+          <p:cNvPr id="12" name="TextBox 11"/>
+          <p:cNvSpPr txBox="1"/>
+          <p:nvPr/>
+        </p:nvSpPr>
+        <p:spPr>
+          <a:xfrm>
+            <a:off x="7863840" y="1938528"/>
+            <a:ext cx="3410712" cy="347472"/>
+          </a:xfrm>
+          <a:prstGeom prst="rect">
+            <a:avLst/>
+          </a:prstGeom>
+          <a:noFill/>
+        </p:spPr>
+        <p:txBody>
+          <a:bodyPr wrap="square" lIns="18288" rIns="18288" tIns="18288" bIns="18288" anchor="ctr">
+            <a:spAutoFit/>
+          </a:bodyPr>
+          <a:lstStyle/>
+          <a:p>
+            <a:pPr algn="l">
+              <a:defRPr sz="1600" b="1">
                 <a:solidFill>
                   <a:srgbClr val="112240"/>
                 </a:solidFill>
@@ -11143,57 +11324,61 @@
               </a:defRPr>
             </a:pPr>
             <a:r>
-              <a:t>Önce başarısız</a:t>
-            </a:r>
-          </a:p>
-        </p:txBody>
-      </p:sp>
-      <p:sp>
-        <p:nvSpPr>
-          <p:cNvPr id="9" name="TextBox 8"/>
-          <p:cNvSpPr txBox="1"/>
-          <p:nvPr/>
-        </p:nvSpPr>
-        <p:spPr>
-          <a:xfrm>
-            <a:off x="932688" y="2487168"/>
-            <a:ext cx="3035808" cy="502920"/>
-          </a:xfrm>
-          <a:prstGeom prst="rect">
-            <a:avLst/>
-          </a:prstGeom>
-          <a:noFill/>
-        </p:spPr>
-        <p:txBody>
-          <a:bodyPr wrap="square" lIns="18288" rIns="18288" tIns="18288" bIns="18288" anchor="ctr">
-            <a:spAutoFit/>
-          </a:bodyPr>
-          <a:lstStyle/>
-          <a:p>
-            <a:pPr algn="l">
-              <a:defRPr sz="1000" b="0">
-                <a:solidFill>
-                  <a:srgbClr val="637389"/>
-                </a:solidFill>
-                <a:latin typeface="Aptos"/>
-              </a:defRPr>
-            </a:pPr>
-            <a:r>
-              <a:t>Yeni kabul testleri iki bilinen hatayı yakaladı.</a:t>
-            </a:r>
-          </a:p>
-        </p:txBody>
-      </p:sp>
-      <p:sp>
-        <p:nvSpPr>
-          <p:cNvPr id="10" name="Rounded Rectangle 9"/>
+              <a:t>1 • İncele ve uygula</a:t>
+            </a:r>
+          </a:p>
+        </p:txBody>
+      </p:sp>
+      <p:sp>
+        <p:nvSpPr>
+          <p:cNvPr id="13" name="TextBox 12"/>
+          <p:cNvSpPr txBox="1"/>
+          <p:nvPr/>
+        </p:nvSpPr>
+        <p:spPr>
+          <a:xfrm>
+            <a:off x="7882128" y="2359152"/>
+            <a:ext cx="3374136" cy="274320"/>
+          </a:xfrm>
+          <a:prstGeom prst="rect">
+            <a:avLst/>
+          </a:prstGeom>
+          <a:noFill/>
+        </p:spPr>
+        <p:txBody>
+          <a:bodyPr wrap="square" lIns="18288" rIns="18288" tIns="18288" bIns="18288" anchor="ctr">
+            <a:spAutoFit/>
+          </a:bodyPr>
+          <a:lstStyle/>
+          <a:p>
+            <a:pPr algn="l">
+              <a:defRPr sz="1200" b="0">
+                <a:solidFill>
+                  <a:srgbClr val="223045"/>
+                </a:solidFill>
+                <a:latin typeface="Aptos"/>
+              </a:defRPr>
+            </a:pPr>
+            <a:r>
+              <a:t>•  En yüksek iki bulgu</a:t>
+            </a:r>
+            <a:br/>
+            <a:r>
+              <a:t>•  Ayrı worktree / branch</a:t>
+            </a:r>
+          </a:p>
+        </p:txBody>
+      </p:sp>
+      <p:sp>
+        <p:nvSpPr>
+          <p:cNvPr id="14" name="Rounded Rectangle 13"/>
           <p:cNvSpPr/>
           <p:nvPr/>
         </p:nvSpPr>
         <p:spPr>
           <a:xfrm>
-            <a:off x="4407408" y="1874519"/>
-            <a:ext cx="3401568" cy="1298448"/>
+            <a:off x="7662672" y="2907792"/>
+            <a:ext cx="3794760" cy="932688"/>
           </a:xfrm>
           <a:prstGeom prst="roundRect">
             <a:avLst/>
@@ -11229,16 +11414,16 @@
       </p:sp>
       <p:sp>
         <p:nvSpPr>
-          <p:cNvPr id="11" name="Rounded Rectangle 10"/>
+          <p:cNvPr id="15" name="Rectangle 14"/>
           <p:cNvSpPr/>
           <p:nvPr/>
         </p:nvSpPr>
         <p:spPr>
           <a:xfrm>
-            <a:off x="4553712" y="2039112"/>
-            <a:ext cx="384048" cy="384048"/>
-          </a:xfrm>
-          <a:prstGeom prst="roundRect">
+            <a:off x="7662672" y="2907792"/>
+            <a:ext cx="64008" cy="932688"/>
+          </a:xfrm>
+          <a:prstGeom prst="rect">
             <a:avLst/>
           </a:prstGeom>
           <a:solidFill>
@@ -11272,64 +11457,28 @@
       </p:sp>
       <p:sp>
         <p:nvSpPr>
-          <p:cNvPr id="12" name="TextBox 11"/>
-          <p:cNvSpPr txBox="1"/>
-          <p:nvPr/>
-        </p:nvSpPr>
-        <p:spPr>
-          <a:xfrm>
-            <a:off x="4553712" y="2039112"/>
-            <a:ext cx="384048" cy="365760"/>
-          </a:xfrm>
-          <a:prstGeom prst="rect">
-            <a:avLst/>
-          </a:prstGeom>
-          <a:noFill/>
-        </p:spPr>
-        <p:txBody>
-          <a:bodyPr wrap="square" lIns="18288" rIns="18288" tIns="18288" bIns="18288" anchor="ctr">
-            <a:spAutoFit/>
-          </a:bodyPr>
-          <a:lstStyle/>
-          <a:p>
-            <a:pPr algn="ctr">
-              <a:defRPr sz="1300" b="1">
-                <a:solidFill>
-                  <a:srgbClr val="FFFFFF"/>
-                </a:solidFill>
-                <a:latin typeface="Aptos"/>
-              </a:defRPr>
-            </a:pPr>
-            <a:r>
-              <a:t>2</a:t>
-            </a:r>
-          </a:p>
-        </p:txBody>
-      </p:sp>
-      <p:sp>
-        <p:nvSpPr>
-          <p:cNvPr id="13" name="TextBox 12"/>
-          <p:cNvSpPr txBox="1"/>
-          <p:nvPr/>
-        </p:nvSpPr>
-        <p:spPr>
-          <a:xfrm>
-            <a:off x="5047488" y="2020824"/>
-            <a:ext cx="2615184" cy="310896"/>
-          </a:xfrm>
-          <a:prstGeom prst="rect">
-            <a:avLst/>
-          </a:prstGeom>
-          <a:noFill/>
-        </p:spPr>
-        <p:txBody>
-          <a:bodyPr wrap="square" lIns="18288" rIns="18288" tIns="18288" bIns="18288" anchor="ctr">
-            <a:spAutoFit/>
-          </a:bodyPr>
-          <a:lstStyle/>
-          <a:p>
-            <a:pPr algn="l">
-              <a:defRPr sz="1300" b="1">
+          <p:cNvPr id="16" name="TextBox 15"/>
+          <p:cNvSpPr txBox="1"/>
+          <p:nvPr/>
+        </p:nvSpPr>
+        <p:spPr>
+          <a:xfrm>
+            <a:off x="7863840" y="3035808"/>
+            <a:ext cx="3410712" cy="347472"/>
+          </a:xfrm>
+          <a:prstGeom prst="rect">
+            <a:avLst/>
+          </a:prstGeom>
+          <a:noFill/>
+        </p:spPr>
+        <p:txBody>
+          <a:bodyPr wrap="square" lIns="18288" rIns="18288" tIns="18288" bIns="18288" anchor="ctr">
+            <a:spAutoFit/>
+          </a:bodyPr>
+          <a:lstStyle/>
+          <a:p>
+            <a:pPr algn="l">
+              <a:defRPr sz="1600" b="1">
                 <a:solidFill>
                   <a:srgbClr val="112240"/>
                 </a:solidFill>
@@ -11337,57 +11486,61 @@
               </a:defRPr>
             </a:pPr>
             <a:r>
-              <a:t>Öneri ve diff</a:t>
-            </a:r>
-          </a:p>
-        </p:txBody>
-      </p:sp>
-      <p:sp>
-        <p:nvSpPr>
-          <p:cNvPr id="14" name="TextBox 13"/>
-          <p:cNvSpPr txBox="1"/>
-          <p:nvPr/>
-        </p:nvSpPr>
-        <p:spPr>
-          <a:xfrm>
-            <a:off x="4590288" y="2487168"/>
-            <a:ext cx="3035808" cy="502920"/>
-          </a:xfrm>
-          <a:prstGeom prst="rect">
-            <a:avLst/>
-          </a:prstGeom>
-          <a:noFill/>
-        </p:spPr>
-        <p:txBody>
-          <a:bodyPr wrap="square" lIns="18288" rIns="18288" tIns="18288" bIns="18288" anchor="ctr">
-            <a:spAutoFit/>
-          </a:bodyPr>
-          <a:lstStyle/>
-          <a:p>
-            <a:pPr algn="l">
-              <a:defRPr sz="1000" b="0">
-                <a:solidFill>
-                  <a:srgbClr val="637389"/>
-                </a:solidFill>
-                <a:latin typeface="Aptos"/>
-              </a:defRPr>
-            </a:pPr>
-            <a:r>
-              <a:t>Model maskenin yanlış tarafını önerdi; incelemede düzeltildi ve worktree'ye uygulandı.</a:t>
-            </a:r>
-          </a:p>
-        </p:txBody>
-      </p:sp>
-      <p:sp>
-        <p:nvSpPr>
-          <p:cNvPr id="15" name="Rounded Rectangle 14"/>
+              <a:t>2 • Testi onayla</a:t>
+            </a:r>
+          </a:p>
+        </p:txBody>
+      </p:sp>
+      <p:sp>
+        <p:nvSpPr>
+          <p:cNvPr id="17" name="TextBox 16"/>
+          <p:cNvSpPr txBox="1"/>
+          <p:nvPr/>
+        </p:nvSpPr>
+        <p:spPr>
+          <a:xfrm>
+            <a:off x="7882128" y="3456432"/>
+            <a:ext cx="3374136" cy="274320"/>
+          </a:xfrm>
+          <a:prstGeom prst="rect">
+            <a:avLst/>
+          </a:prstGeom>
+          <a:noFill/>
+        </p:spPr>
+        <p:txBody>
+          <a:bodyPr wrap="square" lIns="18288" rIns="18288" tIns="18288" bIns="18288" anchor="ctr">
+            <a:spAutoFit/>
+          </a:bodyPr>
+          <a:lstStyle/>
+          <a:p>
+            <a:pPr algn="l">
+              <a:defRPr sz="1200" b="0">
+                <a:solidFill>
+                  <a:srgbClr val="223045"/>
+                </a:solidFill>
+                <a:latin typeface="Aptos"/>
+              </a:defRPr>
+            </a:pPr>
+            <a:r>
+              <a:t>•  Test raporu MD/HTML</a:t>
+            </a:r>
+            <a:br/>
+            <a:r>
+              <a:t>•  Başarısızsa PR durur</a:t>
+            </a:r>
+          </a:p>
+        </p:txBody>
+      </p:sp>
+      <p:sp>
+        <p:nvSpPr>
+          <p:cNvPr id="18" name="Rounded Rectangle 17"/>
           <p:cNvSpPr/>
           <p:nvPr/>
         </p:nvSpPr>
         <p:spPr>
           <a:xfrm>
-            <a:off x="8065008" y="1874519"/>
-            <a:ext cx="3401568" cy="1298448"/>
+            <a:off x="7662672" y="4005072"/>
+            <a:ext cx="3794760" cy="932688"/>
           </a:xfrm>
           <a:prstGeom prst="roundRect">
             <a:avLst/>
@@ -11423,20 +11576,20 @@
       </p:sp>
       <p:sp>
         <p:nvSpPr>
-          <p:cNvPr id="16" name="Rounded Rectangle 15"/>
+          <p:cNvPr id="19" name="Rectangle 18"/>
           <p:cNvSpPr/>
           <p:nvPr/>
         </p:nvSpPr>
         <p:spPr>
           <a:xfrm>
-            <a:off x="8211312" y="2039112"/>
-            <a:ext cx="384048" cy="384048"/>
-          </a:xfrm>
-          <a:prstGeom prst="roundRect">
+            <a:off x="7662672" y="4005072"/>
+            <a:ext cx="64008" cy="932688"/>
+          </a:xfrm>
+          <a:prstGeom prst="rect">
             <a:avLst/>
           </a:prstGeom>
           <a:solidFill>
-            <a:srgbClr val="00AFA0"/>
+            <a:srgbClr val="F8BC4A"/>
           </a:solidFill>
           <a:ln>
             <a:noFill/>
@@ -11466,64 +11619,28 @@
       </p:sp>
       <p:sp>
         <p:nvSpPr>
-          <p:cNvPr id="17" name="TextBox 16"/>
-          <p:cNvSpPr txBox="1"/>
-          <p:nvPr/>
-        </p:nvSpPr>
-        <p:spPr>
-          <a:xfrm>
-            <a:off x="8211312" y="2039112"/>
-            <a:ext cx="384048" cy="365760"/>
-          </a:xfrm>
-          <a:prstGeom prst="rect">
-            <a:avLst/>
-          </a:prstGeom>
-          <a:noFill/>
-        </p:spPr>
-        <p:txBody>
-          <a:bodyPr wrap="square" lIns="18288" rIns="18288" tIns="18288" bIns="18288" anchor="ctr">
-            <a:spAutoFit/>
-          </a:bodyPr>
-          <a:lstStyle/>
-          <a:p>
-            <a:pPr algn="ctr">
-              <a:defRPr sz="1300" b="1">
-                <a:solidFill>
-                  <a:srgbClr val="FFFFFF"/>
-                </a:solidFill>
-                <a:latin typeface="Aptos"/>
-              </a:defRPr>
-            </a:pPr>
-            <a:r>
-              <a:t>3</a:t>
-            </a:r>
-          </a:p>
-        </p:txBody>
-      </p:sp>
-      <p:sp>
-        <p:nvSpPr>
-          <p:cNvPr id="18" name="TextBox 17"/>
-          <p:cNvSpPr txBox="1"/>
-          <p:nvPr/>
-        </p:nvSpPr>
-        <p:spPr>
-          <a:xfrm>
-            <a:off x="8705088" y="2020824"/>
-            <a:ext cx="2615184" cy="310896"/>
-          </a:xfrm>
-          <a:prstGeom prst="rect">
-            <a:avLst/>
-          </a:prstGeom>
-          <a:noFill/>
-        </p:spPr>
-        <p:txBody>
-          <a:bodyPr wrap="square" lIns="18288" rIns="18288" tIns="18288" bIns="18288" anchor="ctr">
-            <a:spAutoFit/>
-          </a:bodyPr>
-          <a:lstStyle/>
-          <a:p>
-            <a:pPr algn="l">
-              <a:defRPr sz="1300" b="1">
+          <p:cNvPr id="20" name="TextBox 19"/>
+          <p:cNvSpPr txBox="1"/>
+          <p:nvPr/>
+        </p:nvSpPr>
+        <p:spPr>
+          <a:xfrm>
+            <a:off x="7863840" y="4133087"/>
+            <a:ext cx="3410712" cy="347472"/>
+          </a:xfrm>
+          <a:prstGeom prst="rect">
+            <a:avLst/>
+          </a:prstGeom>
+          <a:noFill/>
+        </p:spPr>
+        <p:txBody>
+          <a:bodyPr wrap="square" lIns="18288" rIns="18288" tIns="18288" bIns="18288" anchor="ctr">
+            <a:spAutoFit/>
+          </a:bodyPr>
+          <a:lstStyle/>
+          <a:p>
+            <a:pPr algn="l">
+              <a:defRPr sz="1600" b="1">
                 <a:solidFill>
                   <a:srgbClr val="112240"/>
                 </a:solidFill>
@@ -11531,63 +11648,67 @@
               </a:defRPr>
             </a:pPr>
             <a:r>
-              <a:t>Test ve PR provası</a:t>
-            </a:r>
-          </a:p>
-        </p:txBody>
-      </p:sp>
-      <p:sp>
-        <p:nvSpPr>
-          <p:cNvPr id="19" name="TextBox 18"/>
-          <p:cNvSpPr txBox="1"/>
-          <p:nvPr/>
-        </p:nvSpPr>
-        <p:spPr>
-          <a:xfrm>
-            <a:off x="8247888" y="2487168"/>
-            <a:ext cx="3035808" cy="502920"/>
-          </a:xfrm>
-          <a:prstGeom prst="rect">
-            <a:avLst/>
-          </a:prstGeom>
-          <a:noFill/>
-        </p:spPr>
-        <p:txBody>
-          <a:bodyPr wrap="square" lIns="18288" rIns="18288" tIns="18288" bIns="18288" anchor="ctr">
-            <a:spAutoFit/>
-          </a:bodyPr>
-          <a:lstStyle/>
-          <a:p>
-            <a:pPr algn="l">
-              <a:defRPr sz="1000" b="0">
-                <a:solidFill>
-                  <a:srgbClr val="637389"/>
-                </a:solidFill>
-                <a:latin typeface="Aptos"/>
-              </a:defRPr>
-            </a:pPr>
-            <a:r>
-              <a:t>2 kabul testi geçti; push yerel bare remote'a, gh yanıtı taklitçiye yöneldi.</a:t>
-            </a:r>
-          </a:p>
-        </p:txBody>
-      </p:sp>
-      <p:sp>
-        <p:nvSpPr>
-          <p:cNvPr id="20" name="Rounded Rectangle 19"/>
+              <a:t>3 • PR için son onay</a:t>
+            </a:r>
+          </a:p>
+        </p:txBody>
+      </p:sp>
+      <p:sp>
+        <p:nvSpPr>
+          <p:cNvPr id="21" name="TextBox 20"/>
+          <p:cNvSpPr txBox="1"/>
+          <p:nvPr/>
+        </p:nvSpPr>
+        <p:spPr>
+          <a:xfrm>
+            <a:off x="7882128" y="4553712"/>
+            <a:ext cx="3374136" cy="274320"/>
+          </a:xfrm>
+          <a:prstGeom prst="rect">
+            <a:avLst/>
+          </a:prstGeom>
+          <a:noFill/>
+        </p:spPr>
+        <p:txBody>
+          <a:bodyPr wrap="square" lIns="18288" rIns="18288" tIns="18288" bIns="18288" anchor="ctr">
+            <a:spAutoFit/>
+          </a:bodyPr>
+          <a:lstStyle/>
+          <a:p>
+            <a:pPr algn="l">
+              <a:defRPr sz="1200" b="0">
+                <a:solidFill>
+                  <a:srgbClr val="223045"/>
+                </a:solidFill>
+                <a:latin typeface="Aptos"/>
+              </a:defRPr>
+            </a:pPr>
+            <a:r>
+              <a:t>•  Commit + push + gh PR</a:t>
+            </a:r>
+            <a:br/>
+            <a:r>
+              <a:t>•  Her adım ayrı izin</a:t>
+            </a:r>
+          </a:p>
+        </p:txBody>
+      </p:sp>
+      <p:sp>
+        <p:nvSpPr>
+          <p:cNvPr id="22" name="Rounded Rectangle 21"/>
           <p:cNvSpPr/>
           <p:nvPr/>
         </p:nvSpPr>
         <p:spPr>
           <a:xfrm>
-            <a:off x="749808" y="3675887"/>
-            <a:ext cx="10716768" cy="1078992"/>
+            <a:off x="749808" y="5522976"/>
+            <a:ext cx="10698480" cy="530352"/>
           </a:xfrm>
           <a:prstGeom prst="roundRect">
             <a:avLst/>
           </a:prstGeom>
           <a:solidFill>
-            <a:srgbClr val="E7F0FA"/>
+            <a:srgbClr val="FFF6DF"/>
           </a:solidFill>
           <a:ln>
             <a:noFill/>
@@ -11617,28 +11738,28 @@
       </p:sp>
       <p:sp>
         <p:nvSpPr>
-          <p:cNvPr id="21" name="TextBox 20"/>
-          <p:cNvSpPr txBox="1"/>
-          <p:nvPr/>
-        </p:nvSpPr>
-        <p:spPr>
-          <a:xfrm>
-            <a:off x="1024128" y="3877056"/>
-            <a:ext cx="2286000" cy="310896"/>
-          </a:xfrm>
-          <a:prstGeom prst="rect">
-            <a:avLst/>
-          </a:prstGeom>
-          <a:noFill/>
-        </p:spPr>
-        <p:txBody>
-          <a:bodyPr wrap="square" lIns="18288" rIns="18288" tIns="18288" bIns="18288" anchor="ctr">
-            <a:spAutoFit/>
-          </a:bodyPr>
-          <a:lstStyle/>
-          <a:p>
-            <a:pPr algn="l">
-              <a:defRPr sz="1500" b="1">
+          <p:cNvPr id="23" name="TextBox 22"/>
+          <p:cNvSpPr txBox="1"/>
+          <p:nvPr/>
+        </p:nvSpPr>
+        <p:spPr>
+          <a:xfrm>
+            <a:off x="914400" y="5623560"/>
+            <a:ext cx="10241280" cy="292608"/>
+          </a:xfrm>
+          <a:prstGeom prst="rect">
+            <a:avLst/>
+          </a:prstGeom>
+          <a:noFill/>
+        </p:spPr>
+        <p:txBody>
+          <a:bodyPr wrap="square" lIns="18288" rIns="18288" tIns="18288" bIns="18288" anchor="ctr">
+            <a:spAutoFit/>
+          </a:bodyPr>
+          <a:lstStyle/>
+          <a:p>
+            <a:pPr algn="ctr">
+              <a:defRPr sz="1100" b="1">
                 <a:solidFill>
                   <a:srgbClr val="112240"/>
                 </a:solidFill>
@@ -11646,79 +11767,7 @@
               </a:defRPr>
             </a:pPr>
             <a:r>
-              <a:t>Dış GitHub etkisi yok</a:t>
-            </a:r>
-          </a:p>
-        </p:txBody>
-      </p:sp>
-      <p:sp>
-        <p:nvSpPr>
-          <p:cNvPr id="22" name="TextBox 21"/>
-          <p:cNvSpPr txBox="1"/>
-          <p:nvPr/>
-        </p:nvSpPr>
-        <p:spPr>
-          <a:xfrm>
-            <a:off x="3401568" y="3813048"/>
-            <a:ext cx="7635240" cy="530352"/>
-          </a:xfrm>
-          <a:prstGeom prst="rect">
-            <a:avLst/>
-          </a:prstGeom>
-          <a:noFill/>
-        </p:spPr>
-        <p:txBody>
-          <a:bodyPr wrap="square" lIns="18288" rIns="18288" tIns="18288" bIns="18288" anchor="ctr">
-            <a:spAutoFit/>
-          </a:bodyPr>
-          <a:lstStyle/>
-          <a:p>
-            <a:pPr algn="l">
-              <a:defRPr sz="1300" b="0">
-                <a:solidFill>
-                  <a:srgbClr val="223045"/>
-                </a:solidFill>
-                <a:latin typeface="Aptos"/>
-              </a:defRPr>
-            </a:pPr>
-            <a:r>
-              <a:t>Gerçek PR açılmadı. Akışın commit/push/PR bağlantısı adımları gerçek fixture Git geçmişi ve yerel sahte GitHub CLI ile sınandı.</a:t>
-            </a:r>
-          </a:p>
-        </p:txBody>
-      </p:sp>
-      <p:sp>
-        <p:nvSpPr>
-          <p:cNvPr id="23" name="TextBox 22"/>
-          <p:cNvSpPr txBox="1"/>
-          <p:nvPr/>
-        </p:nvSpPr>
-        <p:spPr>
-          <a:xfrm>
-            <a:off x="1024128" y="5065776"/>
-            <a:ext cx="10058400" cy="347472"/>
-          </a:xfrm>
-          <a:prstGeom prst="rect">
-            <a:avLst/>
-          </a:prstGeom>
-          <a:noFill/>
-        </p:spPr>
-        <p:txBody>
-          <a:bodyPr wrap="square" lIns="18288" rIns="18288" tIns="18288" bIns="18288" anchor="ctr">
-            <a:spAutoFit/>
-          </a:bodyPr>
-          <a:lstStyle/>
-          <a:p>
-            <a:pPr algn="ctr">
-              <a:defRPr sz="1200" b="0">
-                <a:solidFill>
-                  <a:srgbClr val="637389"/>
-                </a:solidFill>
-                <a:latin typeface="Aptos"/>
-              </a:defRPr>
-            </a:pPr>
-            <a:r>
-              <a:t>Test verisi `TEST_FIXTURE_NOT_LAW` olarak işaretlidir; düzeltmeler hukuki uyumluluk kanıtı değildir.</a:t>
+              <a:t>E2E kanıtı: test geçti; push yerel bare remote'a, PR yanıtı mock gh'ye yapıldı. Gerçek GitHub PR açılmadı.</a:t>
             </a:r>
           </a:p>
         </p:txBody>
@@ -11852,7 +11901,7 @@
               </a:defRPr>
             </a:pPr>
             <a:r>
-              <a:t>18  •  SOHBETTEN RAPORA UÇTAN UCA AKIŞ</a:t>
+              <a:t>18  •  TERMINAL ÇIKTISI</a:t>
             </a:r>
           </a:p>
         </p:txBody>
@@ -11888,7 +11937,7 @@
               </a:defRPr>
             </a:pPr>
             <a:r>
-              <a:t>Kullanıcı sohbeti yönlendirir; pipeline her adımda onay ister</a:t>
+              <a:t>Sohbetten mevzuat seçimine ve RAG'e</a:t>
             </a:r>
           </a:p>
         </p:txBody>
@@ -11924,1275 +11973,38 @@
               </a:defRPr>
             </a:pPr>
             <a:r>
-              <a:t>Sistem promptu proje kapsamını korur; Ollama yanıtı ve pipeline işlemleri birbirinden ayrıdır.</a:t>
-            </a:r>
-          </a:p>
-        </p:txBody>
-      </p:sp>
-      <p:sp>
-        <p:nvSpPr>
-          <p:cNvPr id="5" name="Rounded Rectangle 4"/>
-          <p:cNvSpPr/>
-          <p:nvPr/>
-        </p:nvSpPr>
-        <p:spPr>
-          <a:xfrm>
-            <a:off x="658368" y="1965960"/>
-            <a:ext cx="1627632" cy="1536192"/>
-          </a:xfrm>
-          <a:prstGeom prst="roundRect">
-            <a:avLst/>
-          </a:prstGeom>
-          <a:solidFill>
-            <a:srgbClr val="FFFFFF"/>
-          </a:solidFill>
-          <a:ln>
-            <a:noFill/>
-          </a:ln>
-        </p:spPr>
-        <p:style>
-          <a:lnRef idx="1">
-            <a:schemeClr val="accent1"/>
-          </a:lnRef>
-          <a:fillRef idx="3">
-            <a:schemeClr val="accent1"/>
-          </a:fillRef>
-          <a:effectRef idx="2">
-            <a:schemeClr val="accent1"/>
-          </a:effectRef>
-          <a:fontRef idx="minor">
-            <a:schemeClr val="lt1"/>
-          </a:fontRef>
-        </p:style>
-        <p:txBody>
-          <a:bodyPr rtlCol="0" anchor="ctr"/>
-          <a:lstStyle/>
-          <a:p>
-            <a:pPr algn="ctr"/>
-          </a:p>
-        </p:txBody>
-      </p:sp>
+              <a:t>Gerçek yerel uygulama çıktısı: kullanıcı kapsamı seçer, PDF metni parçalanır ve RAG indeksi hazırlanır.</a:t>
+            </a:r>
+          </a:p>
+        </p:txBody>
+      </p:sp>
+      <p:pic>
+        <p:nvPicPr>
+          <p:cNvPr id="5" name="Picture 4" descr="01_chat_and_rag.png"/>
+          <p:cNvPicPr>
+            <a:picLocks noChangeAspect="1"/>
+          </p:cNvPicPr>
+          <p:nvPr/>
+        </p:nvPicPr>
+        <p:blipFill>
+          <a:blip r:embed="rId2"/>
+          <a:stretch>
+            <a:fillRect/>
+          </a:stretch>
+        </p:blipFill>
+        <p:spPr>
+          <a:xfrm>
+            <a:off x="713232" y="1828800"/>
+            <a:ext cx="10771632" cy="3889756"/>
+          </a:xfrm>
+          <a:prstGeom prst="rect">
+            <a:avLst/>
+          </a:prstGeom>
+        </p:spPr>
+      </p:pic>
       <p:sp>
         <p:nvSpPr>
           <p:cNvPr id="6" name="TextBox 5"/>
-          <p:cNvSpPr txBox="1"/>
-          <p:nvPr/>
-        </p:nvSpPr>
-        <p:spPr>
-          <a:xfrm>
-            <a:off x="795528" y="2121408"/>
-            <a:ext cx="365760" cy="219456"/>
-          </a:xfrm>
-          <a:prstGeom prst="rect">
-            <a:avLst/>
-          </a:prstGeom>
-          <a:noFill/>
-        </p:spPr>
-        <p:txBody>
-          <a:bodyPr wrap="square" lIns="18288" rIns="18288" tIns="18288" bIns="18288" anchor="ctr">
-            <a:spAutoFit/>
-          </a:bodyPr>
-          <a:lstStyle/>
-          <a:p>
-            <a:pPr algn="l">
-              <a:defRPr sz="1000" b="1">
-                <a:solidFill>
-                  <a:srgbClr val="00AFA0"/>
-                </a:solidFill>
-                <a:latin typeface="Aptos"/>
-              </a:defRPr>
-            </a:pPr>
-            <a:r>
-              <a:t>01</a:t>
-            </a:r>
-          </a:p>
-        </p:txBody>
-      </p:sp>
-      <p:sp>
-        <p:nvSpPr>
-          <p:cNvPr id="7" name="TextBox 6"/>
-          <p:cNvSpPr txBox="1"/>
-          <p:nvPr/>
-        </p:nvSpPr>
-        <p:spPr>
-          <a:xfrm>
-            <a:off x="795528" y="2441448"/>
-            <a:ext cx="1353312" cy="292608"/>
-          </a:xfrm>
-          <a:prstGeom prst="rect">
-            <a:avLst/>
-          </a:prstGeom>
-          <a:noFill/>
-        </p:spPr>
-        <p:txBody>
-          <a:bodyPr wrap="square" lIns="18288" rIns="18288" tIns="18288" bIns="18288" anchor="ctr">
-            <a:spAutoFit/>
-          </a:bodyPr>
-          <a:lstStyle/>
-          <a:p>
-            <a:pPr algn="l">
-              <a:defRPr sz="1400" b="1">
-                <a:solidFill>
-                  <a:srgbClr val="112240"/>
-                </a:solidFill>
-                <a:latin typeface="Aptos"/>
-              </a:defRPr>
-            </a:pPr>
-            <a:r>
-              <a:t>Sohbet</a:t>
-            </a:r>
-          </a:p>
-        </p:txBody>
-      </p:sp>
-      <p:sp>
-        <p:nvSpPr>
-          <p:cNvPr id="8" name="TextBox 7"/>
-          <p:cNvSpPr txBox="1"/>
-          <p:nvPr/>
-        </p:nvSpPr>
-        <p:spPr>
-          <a:xfrm>
-            <a:off x="795528" y="2834640"/>
-            <a:ext cx="1353312" cy="457200"/>
-          </a:xfrm>
-          <a:prstGeom prst="rect">
-            <a:avLst/>
-          </a:prstGeom>
-          <a:noFill/>
-        </p:spPr>
-        <p:txBody>
-          <a:bodyPr wrap="square" lIns="18288" rIns="18288" tIns="18288" bIns="18288" anchor="ctr">
-            <a:spAutoFit/>
-          </a:bodyPr>
-          <a:lstStyle/>
-          <a:p>
-            <a:pPr algn="l">
-              <a:defRPr sz="1000" b="0">
-                <a:solidFill>
-                  <a:srgbClr val="637389"/>
-                </a:solidFill>
-                <a:latin typeface="Aptos"/>
-              </a:defRPr>
-            </a:pPr>
-            <a:r>
-              <a:t>Soru sor</a:t>
-            </a:r>
-            <a:br/>
-            <a:r>
-              <a:t>veya devam yaz</a:t>
-            </a:r>
-          </a:p>
-        </p:txBody>
-      </p:sp>
-      <p:sp>
-        <p:nvSpPr>
-          <p:cNvPr id="9" name="TextBox 8"/>
-          <p:cNvSpPr txBox="1"/>
-          <p:nvPr/>
-        </p:nvSpPr>
-        <p:spPr>
-          <a:xfrm>
-            <a:off x="2304288" y="2542032"/>
-            <a:ext cx="237744" cy="292608"/>
-          </a:xfrm>
-          <a:prstGeom prst="rect">
-            <a:avLst/>
-          </a:prstGeom>
-          <a:noFill/>
-        </p:spPr>
-        <p:txBody>
-          <a:bodyPr wrap="square" lIns="18288" rIns="18288" tIns="18288" bIns="18288" anchor="ctr">
-            <a:spAutoFit/>
-          </a:bodyPr>
-          <a:lstStyle/>
-          <a:p>
-            <a:pPr algn="ctr">
-              <a:defRPr sz="1700" b="1">
-                <a:solidFill>
-                  <a:srgbClr val="00AFA0"/>
-                </a:solidFill>
-                <a:latin typeface="Aptos"/>
-              </a:defRPr>
-            </a:pPr>
-            <a:r>
-              <a:t>→</a:t>
-            </a:r>
-          </a:p>
-        </p:txBody>
-      </p:sp>
-      <p:sp>
-        <p:nvSpPr>
-          <p:cNvPr id="10" name="Rounded Rectangle 9"/>
-          <p:cNvSpPr/>
-          <p:nvPr/>
-        </p:nvSpPr>
-        <p:spPr>
-          <a:xfrm>
-            <a:off x="2560320" y="1965960"/>
-            <a:ext cx="1627632" cy="1536192"/>
-          </a:xfrm>
-          <a:prstGeom prst="roundRect">
-            <a:avLst/>
-          </a:prstGeom>
-          <a:solidFill>
-            <a:srgbClr val="FFFFFF"/>
-          </a:solidFill>
-          <a:ln>
-            <a:noFill/>
-          </a:ln>
-        </p:spPr>
-        <p:style>
-          <a:lnRef idx="1">
-            <a:schemeClr val="accent1"/>
-          </a:lnRef>
-          <a:fillRef idx="3">
-            <a:schemeClr val="accent1"/>
-          </a:fillRef>
-          <a:effectRef idx="2">
-            <a:schemeClr val="accent1"/>
-          </a:effectRef>
-          <a:fontRef idx="minor">
-            <a:schemeClr val="lt1"/>
-          </a:fontRef>
-        </p:style>
-        <p:txBody>
-          <a:bodyPr rtlCol="0" anchor="ctr"/>
-          <a:lstStyle/>
-          <a:p>
-            <a:pPr algn="ctr"/>
-          </a:p>
-        </p:txBody>
-      </p:sp>
-      <p:sp>
-        <p:nvSpPr>
-          <p:cNvPr id="11" name="TextBox 10"/>
-          <p:cNvSpPr txBox="1"/>
-          <p:nvPr/>
-        </p:nvSpPr>
-        <p:spPr>
-          <a:xfrm>
-            <a:off x="2697479" y="2121408"/>
-            <a:ext cx="365760" cy="219456"/>
-          </a:xfrm>
-          <a:prstGeom prst="rect">
-            <a:avLst/>
-          </a:prstGeom>
-          <a:noFill/>
-        </p:spPr>
-        <p:txBody>
-          <a:bodyPr wrap="square" lIns="18288" rIns="18288" tIns="18288" bIns="18288" anchor="ctr">
-            <a:spAutoFit/>
-          </a:bodyPr>
-          <a:lstStyle/>
-          <a:p>
-            <a:pPr algn="l">
-              <a:defRPr sz="1000" b="1">
-                <a:solidFill>
-                  <a:srgbClr val="00AFA0"/>
-                </a:solidFill>
-                <a:latin typeface="Aptos"/>
-              </a:defRPr>
-            </a:pPr>
-            <a:r>
-              <a:t>02</a:t>
-            </a:r>
-          </a:p>
-        </p:txBody>
-      </p:sp>
-      <p:sp>
-        <p:nvSpPr>
-          <p:cNvPr id="12" name="TextBox 11"/>
-          <p:cNvSpPr txBox="1"/>
-          <p:nvPr/>
-        </p:nvSpPr>
-        <p:spPr>
-          <a:xfrm>
-            <a:off x="2697479" y="2441448"/>
-            <a:ext cx="1353312" cy="292608"/>
-          </a:xfrm>
-          <a:prstGeom prst="rect">
-            <a:avLst/>
-          </a:prstGeom>
-          <a:noFill/>
-        </p:spPr>
-        <p:txBody>
-          <a:bodyPr wrap="square" lIns="18288" rIns="18288" tIns="18288" bIns="18288" anchor="ctr">
-            <a:spAutoFit/>
-          </a:bodyPr>
-          <a:lstStyle/>
-          <a:p>
-            <a:pPr algn="l">
-              <a:defRPr sz="1400" b="1">
-                <a:solidFill>
-                  <a:srgbClr val="112240"/>
-                </a:solidFill>
-                <a:latin typeface="Aptos"/>
-              </a:defRPr>
-            </a:pPr>
-            <a:r>
-              <a:t>Kapsam</a:t>
-            </a:r>
-          </a:p>
-        </p:txBody>
-      </p:sp>
-      <p:sp>
-        <p:nvSpPr>
-          <p:cNvPr id="13" name="TextBox 12"/>
-          <p:cNvSpPr txBox="1"/>
-          <p:nvPr/>
-        </p:nvSpPr>
-        <p:spPr>
-          <a:xfrm>
-            <a:off x="2697479" y="2834640"/>
-            <a:ext cx="1353312" cy="457200"/>
-          </a:xfrm>
-          <a:prstGeom prst="rect">
-            <a:avLst/>
-          </a:prstGeom>
-          <a:noFill/>
-        </p:spPr>
-        <p:txBody>
-          <a:bodyPr wrap="square" lIns="18288" rIns="18288" tIns="18288" bIns="18288" anchor="ctr">
-            <a:spAutoFit/>
-          </a:bodyPr>
-          <a:lstStyle/>
-          <a:p>
-            <a:pPr algn="l">
-              <a:defRPr sz="1000" b="0">
-                <a:solidFill>
-                  <a:srgbClr val="637389"/>
-                </a:solidFill>
-                <a:latin typeface="Aptos"/>
-              </a:defRPr>
-            </a:pPr>
-            <a:r>
-              <a:t>Mevzuat seç</a:t>
-            </a:r>
-            <a:br/>
-            <a:r>
-              <a:t>1 • 2 • tümü</a:t>
-            </a:r>
-          </a:p>
-        </p:txBody>
-      </p:sp>
-      <p:sp>
-        <p:nvSpPr>
-          <p:cNvPr id="14" name="TextBox 13"/>
-          <p:cNvSpPr txBox="1"/>
-          <p:nvPr/>
-        </p:nvSpPr>
-        <p:spPr>
-          <a:xfrm>
-            <a:off x="4206240" y="2542032"/>
-            <a:ext cx="237744" cy="292608"/>
-          </a:xfrm>
-          <a:prstGeom prst="rect">
-            <a:avLst/>
-          </a:prstGeom>
-          <a:noFill/>
-        </p:spPr>
-        <p:txBody>
-          <a:bodyPr wrap="square" lIns="18288" rIns="18288" tIns="18288" bIns="18288" anchor="ctr">
-            <a:spAutoFit/>
-          </a:bodyPr>
-          <a:lstStyle/>
-          <a:p>
-            <a:pPr algn="ctr">
-              <a:defRPr sz="1700" b="1">
-                <a:solidFill>
-                  <a:srgbClr val="00AFA0"/>
-                </a:solidFill>
-                <a:latin typeface="Aptos"/>
-              </a:defRPr>
-            </a:pPr>
-            <a:r>
-              <a:t>→</a:t>
-            </a:r>
-          </a:p>
-        </p:txBody>
-      </p:sp>
-      <p:sp>
-        <p:nvSpPr>
-          <p:cNvPr id="15" name="Rounded Rectangle 14"/>
-          <p:cNvSpPr/>
-          <p:nvPr/>
-        </p:nvSpPr>
-        <p:spPr>
-          <a:xfrm>
-            <a:off x="4462272" y="1965960"/>
-            <a:ext cx="1627632" cy="1536192"/>
-          </a:xfrm>
-          <a:prstGeom prst="roundRect">
-            <a:avLst/>
-          </a:prstGeom>
-          <a:solidFill>
-            <a:srgbClr val="FFFFFF"/>
-          </a:solidFill>
-          <a:ln>
-            <a:noFill/>
-          </a:ln>
-        </p:spPr>
-        <p:style>
-          <a:lnRef idx="1">
-            <a:schemeClr val="accent1"/>
-          </a:lnRef>
-          <a:fillRef idx="3">
-            <a:schemeClr val="accent1"/>
-          </a:fillRef>
-          <a:effectRef idx="2">
-            <a:schemeClr val="accent1"/>
-          </a:effectRef>
-          <a:fontRef idx="minor">
-            <a:schemeClr val="lt1"/>
-          </a:fontRef>
-        </p:style>
-        <p:txBody>
-          <a:bodyPr rtlCol="0" anchor="ctr"/>
-          <a:lstStyle/>
-          <a:p>
-            <a:pPr algn="ctr"/>
-          </a:p>
-        </p:txBody>
-      </p:sp>
-      <p:sp>
-        <p:nvSpPr>
-          <p:cNvPr id="16" name="TextBox 15"/>
-          <p:cNvSpPr txBox="1"/>
-          <p:nvPr/>
-        </p:nvSpPr>
-        <p:spPr>
-          <a:xfrm>
-            <a:off x="4599432" y="2121408"/>
-            <a:ext cx="365760" cy="219456"/>
-          </a:xfrm>
-          <a:prstGeom prst="rect">
-            <a:avLst/>
-          </a:prstGeom>
-          <a:noFill/>
-        </p:spPr>
-        <p:txBody>
-          <a:bodyPr wrap="square" lIns="18288" rIns="18288" tIns="18288" bIns="18288" anchor="ctr">
-            <a:spAutoFit/>
-          </a:bodyPr>
-          <a:lstStyle/>
-          <a:p>
-            <a:pPr algn="l">
-              <a:defRPr sz="1000" b="1">
-                <a:solidFill>
-                  <a:srgbClr val="00AFA0"/>
-                </a:solidFill>
-                <a:latin typeface="Aptos"/>
-              </a:defRPr>
-            </a:pPr>
-            <a:r>
-              <a:t>03</a:t>
-            </a:r>
-          </a:p>
-        </p:txBody>
-      </p:sp>
-      <p:sp>
-        <p:nvSpPr>
-          <p:cNvPr id="17" name="TextBox 16"/>
-          <p:cNvSpPr txBox="1"/>
-          <p:nvPr/>
-        </p:nvSpPr>
-        <p:spPr>
-          <a:xfrm>
-            <a:off x="4599432" y="2441448"/>
-            <a:ext cx="1353312" cy="292608"/>
-          </a:xfrm>
-          <a:prstGeom prst="rect">
-            <a:avLst/>
-          </a:prstGeom>
-          <a:noFill/>
-        </p:spPr>
-        <p:txBody>
-          <a:bodyPr wrap="square" lIns="18288" rIns="18288" tIns="18288" bIns="18288" anchor="ctr">
-            <a:spAutoFit/>
-          </a:bodyPr>
-          <a:lstStyle/>
-          <a:p>
-            <a:pPr algn="l">
-              <a:defRPr sz="1400" b="1">
-                <a:solidFill>
-                  <a:srgbClr val="112240"/>
-                </a:solidFill>
-                <a:latin typeface="Aptos"/>
-              </a:defRPr>
-            </a:pPr>
-            <a:r>
-              <a:t>Hazırlık</a:t>
-            </a:r>
-          </a:p>
-        </p:txBody>
-      </p:sp>
-      <p:sp>
-        <p:nvSpPr>
-          <p:cNvPr id="18" name="TextBox 17"/>
-          <p:cNvSpPr txBox="1"/>
-          <p:nvPr/>
-        </p:nvSpPr>
-        <p:spPr>
-          <a:xfrm>
-            <a:off x="4599432" y="2834640"/>
-            <a:ext cx="1353312" cy="457200"/>
-          </a:xfrm>
-          <a:prstGeom prst="rect">
-            <a:avLst/>
-          </a:prstGeom>
-          <a:noFill/>
-        </p:spPr>
-        <p:txBody>
-          <a:bodyPr wrap="square" lIns="18288" rIns="18288" tIns="18288" bIns="18288" anchor="ctr">
-            <a:spAutoFit/>
-          </a:bodyPr>
-          <a:lstStyle/>
-          <a:p>
-            <a:pPr algn="l">
-              <a:defRPr sz="1000" b="0">
-                <a:solidFill>
-                  <a:srgbClr val="637389"/>
-                </a:solidFill>
-                <a:latin typeface="Aptos"/>
-              </a:defRPr>
-            </a:pPr>
-            <a:r>
-              <a:t>PDF → RAG</a:t>
-            </a:r>
-            <a:br/>
-            <a:r>
-              <a:t>Repo → klon</a:t>
-            </a:r>
-          </a:p>
-        </p:txBody>
-      </p:sp>
-      <p:sp>
-        <p:nvSpPr>
-          <p:cNvPr id="19" name="TextBox 18"/>
-          <p:cNvSpPr txBox="1"/>
-          <p:nvPr/>
-        </p:nvSpPr>
-        <p:spPr>
-          <a:xfrm>
-            <a:off x="6108192" y="2542032"/>
-            <a:ext cx="237744" cy="292608"/>
-          </a:xfrm>
-          <a:prstGeom prst="rect">
-            <a:avLst/>
-          </a:prstGeom>
-          <a:noFill/>
-        </p:spPr>
-        <p:txBody>
-          <a:bodyPr wrap="square" lIns="18288" rIns="18288" tIns="18288" bIns="18288" anchor="ctr">
-            <a:spAutoFit/>
-          </a:bodyPr>
-          <a:lstStyle/>
-          <a:p>
-            <a:pPr algn="ctr">
-              <a:defRPr sz="1700" b="1">
-                <a:solidFill>
-                  <a:srgbClr val="00AFA0"/>
-                </a:solidFill>
-                <a:latin typeface="Aptos"/>
-              </a:defRPr>
-            </a:pPr>
-            <a:r>
-              <a:t>→</a:t>
-            </a:r>
-          </a:p>
-        </p:txBody>
-      </p:sp>
-      <p:sp>
-        <p:nvSpPr>
-          <p:cNvPr id="20" name="Rounded Rectangle 19"/>
-          <p:cNvSpPr/>
-          <p:nvPr/>
-        </p:nvSpPr>
-        <p:spPr>
-          <a:xfrm>
-            <a:off x="6364224" y="1965960"/>
-            <a:ext cx="1627632" cy="1536192"/>
-          </a:xfrm>
-          <a:prstGeom prst="roundRect">
-            <a:avLst/>
-          </a:prstGeom>
-          <a:solidFill>
-            <a:srgbClr val="FFFFFF"/>
-          </a:solidFill>
-          <a:ln>
-            <a:noFill/>
-          </a:ln>
-        </p:spPr>
-        <p:style>
-          <a:lnRef idx="1">
-            <a:schemeClr val="accent1"/>
-          </a:lnRef>
-          <a:fillRef idx="3">
-            <a:schemeClr val="accent1"/>
-          </a:fillRef>
-          <a:effectRef idx="2">
-            <a:schemeClr val="accent1"/>
-          </a:effectRef>
-          <a:fontRef idx="minor">
-            <a:schemeClr val="lt1"/>
-          </a:fontRef>
-        </p:style>
-        <p:txBody>
-          <a:bodyPr rtlCol="0" anchor="ctr"/>
-          <a:lstStyle/>
-          <a:p>
-            <a:pPr algn="ctr"/>
-          </a:p>
-        </p:txBody>
-      </p:sp>
-      <p:sp>
-        <p:nvSpPr>
-          <p:cNvPr id="21" name="TextBox 20"/>
-          <p:cNvSpPr txBox="1"/>
-          <p:nvPr/>
-        </p:nvSpPr>
-        <p:spPr>
-          <a:xfrm>
-            <a:off x="6501384" y="2121408"/>
-            <a:ext cx="365760" cy="219456"/>
-          </a:xfrm>
-          <a:prstGeom prst="rect">
-            <a:avLst/>
-          </a:prstGeom>
-          <a:noFill/>
-        </p:spPr>
-        <p:txBody>
-          <a:bodyPr wrap="square" lIns="18288" rIns="18288" tIns="18288" bIns="18288" anchor="ctr">
-            <a:spAutoFit/>
-          </a:bodyPr>
-          <a:lstStyle/>
-          <a:p>
-            <a:pPr algn="l">
-              <a:defRPr sz="1000" b="1">
-                <a:solidFill>
-                  <a:srgbClr val="00AFA0"/>
-                </a:solidFill>
-                <a:latin typeface="Aptos"/>
-              </a:defRPr>
-            </a:pPr>
-            <a:r>
-              <a:t>04</a:t>
-            </a:r>
-          </a:p>
-        </p:txBody>
-      </p:sp>
-      <p:sp>
-        <p:nvSpPr>
-          <p:cNvPr id="22" name="TextBox 21"/>
-          <p:cNvSpPr txBox="1"/>
-          <p:nvPr/>
-        </p:nvSpPr>
-        <p:spPr>
-          <a:xfrm>
-            <a:off x="6501384" y="2441448"/>
-            <a:ext cx="1353312" cy="292608"/>
-          </a:xfrm>
-          <a:prstGeom prst="rect">
-            <a:avLst/>
-          </a:prstGeom>
-          <a:noFill/>
-        </p:spPr>
-        <p:txBody>
-          <a:bodyPr wrap="square" lIns="18288" rIns="18288" tIns="18288" bIns="18288" anchor="ctr">
-            <a:spAutoFit/>
-          </a:bodyPr>
-          <a:lstStyle/>
-          <a:p>
-            <a:pPr algn="l">
-              <a:defRPr sz="1400" b="1">
-                <a:solidFill>
-                  <a:srgbClr val="112240"/>
-                </a:solidFill>
-                <a:latin typeface="Aptos"/>
-              </a:defRPr>
-            </a:pPr>
-            <a:r>
-              <a:t>Tahmin</a:t>
-            </a:r>
-          </a:p>
-        </p:txBody>
-      </p:sp>
-      <p:sp>
-        <p:nvSpPr>
-          <p:cNvPr id="23" name="TextBox 22"/>
-          <p:cNvSpPr txBox="1"/>
-          <p:nvPr/>
-        </p:nvSpPr>
-        <p:spPr>
-          <a:xfrm>
-            <a:off x="6501384" y="2834640"/>
-            <a:ext cx="1353312" cy="457200"/>
-          </a:xfrm>
-          <a:prstGeom prst="rect">
-            <a:avLst/>
-          </a:prstGeom>
-          <a:noFill/>
-        </p:spPr>
-        <p:txBody>
-          <a:bodyPr wrap="square" lIns="18288" rIns="18288" tIns="18288" bIns="18288" anchor="ctr">
-            <a:spAutoFit/>
-          </a:bodyPr>
-          <a:lstStyle/>
-          <a:p>
-            <a:pPr algn="l">
-              <a:defRPr sz="1000" b="0">
-                <a:solidFill>
-                  <a:srgbClr val="637389"/>
-                </a:solidFill>
-                <a:latin typeface="Aptos"/>
-              </a:defRPr>
-            </a:pPr>
-            <a:r>
-              <a:t>Model hızı</a:t>
-            </a:r>
-            <a:br/>
-            <a:r>
-              <a:t>Token • süre</a:t>
-            </a:r>
-          </a:p>
-        </p:txBody>
-      </p:sp>
-      <p:sp>
-        <p:nvSpPr>
-          <p:cNvPr id="24" name="TextBox 23"/>
-          <p:cNvSpPr txBox="1"/>
-          <p:nvPr/>
-        </p:nvSpPr>
-        <p:spPr>
-          <a:xfrm>
-            <a:off x="8010144" y="2542032"/>
-            <a:ext cx="237744" cy="292608"/>
-          </a:xfrm>
-          <a:prstGeom prst="rect">
-            <a:avLst/>
-          </a:prstGeom>
-          <a:noFill/>
-        </p:spPr>
-        <p:txBody>
-          <a:bodyPr wrap="square" lIns="18288" rIns="18288" tIns="18288" bIns="18288" anchor="ctr">
-            <a:spAutoFit/>
-          </a:bodyPr>
-          <a:lstStyle/>
-          <a:p>
-            <a:pPr algn="ctr">
-              <a:defRPr sz="1700" b="1">
-                <a:solidFill>
-                  <a:srgbClr val="00AFA0"/>
-                </a:solidFill>
-                <a:latin typeface="Aptos"/>
-              </a:defRPr>
-            </a:pPr>
-            <a:r>
-              <a:t>→</a:t>
-            </a:r>
-          </a:p>
-        </p:txBody>
-      </p:sp>
-      <p:sp>
-        <p:nvSpPr>
-          <p:cNvPr id="25" name="Rounded Rectangle 24"/>
-          <p:cNvSpPr/>
-          <p:nvPr/>
-        </p:nvSpPr>
-        <p:spPr>
-          <a:xfrm>
-            <a:off x="8266176" y="1965960"/>
-            <a:ext cx="1627632" cy="1536192"/>
-          </a:xfrm>
-          <a:prstGeom prst="roundRect">
-            <a:avLst/>
-          </a:prstGeom>
-          <a:solidFill>
-            <a:srgbClr val="FFFFFF"/>
-          </a:solidFill>
-          <a:ln>
-            <a:noFill/>
-          </a:ln>
-        </p:spPr>
-        <p:style>
-          <a:lnRef idx="1">
-            <a:schemeClr val="accent1"/>
-          </a:lnRef>
-          <a:fillRef idx="3">
-            <a:schemeClr val="accent1"/>
-          </a:fillRef>
-          <a:effectRef idx="2">
-            <a:schemeClr val="accent1"/>
-          </a:effectRef>
-          <a:fontRef idx="minor">
-            <a:schemeClr val="lt1"/>
-          </a:fontRef>
-        </p:style>
-        <p:txBody>
-          <a:bodyPr rtlCol="0" anchor="ctr"/>
-          <a:lstStyle/>
-          <a:p>
-            <a:pPr algn="ctr"/>
-          </a:p>
-        </p:txBody>
-      </p:sp>
-      <p:sp>
-        <p:nvSpPr>
-          <p:cNvPr id="26" name="TextBox 25"/>
-          <p:cNvSpPr txBox="1"/>
-          <p:nvPr/>
-        </p:nvSpPr>
-        <p:spPr>
-          <a:xfrm>
-            <a:off x="8403336" y="2121408"/>
-            <a:ext cx="365760" cy="219456"/>
-          </a:xfrm>
-          <a:prstGeom prst="rect">
-            <a:avLst/>
-          </a:prstGeom>
-          <a:noFill/>
-        </p:spPr>
-        <p:txBody>
-          <a:bodyPr wrap="square" lIns="18288" rIns="18288" tIns="18288" bIns="18288" anchor="ctr">
-            <a:spAutoFit/>
-          </a:bodyPr>
-          <a:lstStyle/>
-          <a:p>
-            <a:pPr algn="l">
-              <a:defRPr sz="1000" b="1">
-                <a:solidFill>
-                  <a:srgbClr val="00AFA0"/>
-                </a:solidFill>
-                <a:latin typeface="Aptos"/>
-              </a:defRPr>
-            </a:pPr>
-            <a:r>
-              <a:t>05</a:t>
-            </a:r>
-          </a:p>
-        </p:txBody>
-      </p:sp>
-      <p:sp>
-        <p:nvSpPr>
-          <p:cNvPr id="27" name="TextBox 26"/>
-          <p:cNvSpPr txBox="1"/>
-          <p:nvPr/>
-        </p:nvSpPr>
-        <p:spPr>
-          <a:xfrm>
-            <a:off x="8403336" y="2441448"/>
-            <a:ext cx="1353312" cy="292608"/>
-          </a:xfrm>
-          <a:prstGeom prst="rect">
-            <a:avLst/>
-          </a:prstGeom>
-          <a:noFill/>
-        </p:spPr>
-        <p:txBody>
-          <a:bodyPr wrap="square" lIns="18288" rIns="18288" tIns="18288" bIns="18288" anchor="ctr">
-            <a:spAutoFit/>
-          </a:bodyPr>
-          <a:lstStyle/>
-          <a:p>
-            <a:pPr algn="l">
-              <a:defRPr sz="1400" b="1">
-                <a:solidFill>
-                  <a:srgbClr val="112240"/>
-                </a:solidFill>
-                <a:latin typeface="Aptos"/>
-              </a:defRPr>
-            </a:pPr>
-            <a:r>
-              <a:t>Tarama</a:t>
-            </a:r>
-          </a:p>
-        </p:txBody>
-      </p:sp>
-      <p:sp>
-        <p:nvSpPr>
-          <p:cNvPr id="28" name="TextBox 27"/>
-          <p:cNvSpPr txBox="1"/>
-          <p:nvPr/>
-        </p:nvSpPr>
-        <p:spPr>
-          <a:xfrm>
-            <a:off x="8403336" y="2834640"/>
-            <a:ext cx="1353312" cy="457200"/>
-          </a:xfrm>
-          <a:prstGeom prst="rect">
-            <a:avLst/>
-          </a:prstGeom>
-          <a:noFill/>
-        </p:spPr>
-        <p:txBody>
-          <a:bodyPr wrap="square" lIns="18288" rIns="18288" tIns="18288" bIns="18288" anchor="ctr">
-            <a:spAutoFit/>
-          </a:bodyPr>
-          <a:lstStyle/>
-          <a:p>
-            <a:pPr algn="l">
-              <a:defRPr sz="1000" b="0">
-                <a:solidFill>
-                  <a:srgbClr val="637389"/>
-                </a:solidFill>
-                <a:latin typeface="Aptos"/>
-              </a:defRPr>
-            </a:pPr>
-            <a:r>
-              <a:t>Kapsam ve model</a:t>
-            </a:r>
-            <a:br/>
-            <a:r>
-              <a:t>kullanıcı onayı</a:t>
-            </a:r>
-          </a:p>
-        </p:txBody>
-      </p:sp>
-      <p:sp>
-        <p:nvSpPr>
-          <p:cNvPr id="29" name="TextBox 28"/>
-          <p:cNvSpPr txBox="1"/>
-          <p:nvPr/>
-        </p:nvSpPr>
-        <p:spPr>
-          <a:xfrm>
-            <a:off x="9912096" y="2542032"/>
-            <a:ext cx="237744" cy="292608"/>
-          </a:xfrm>
-          <a:prstGeom prst="rect">
-            <a:avLst/>
-          </a:prstGeom>
-          <a:noFill/>
-        </p:spPr>
-        <p:txBody>
-          <a:bodyPr wrap="square" lIns="18288" rIns="18288" tIns="18288" bIns="18288" anchor="ctr">
-            <a:spAutoFit/>
-          </a:bodyPr>
-          <a:lstStyle/>
-          <a:p>
-            <a:pPr algn="ctr">
-              <a:defRPr sz="1700" b="1">
-                <a:solidFill>
-                  <a:srgbClr val="00AFA0"/>
-                </a:solidFill>
-                <a:latin typeface="Aptos"/>
-              </a:defRPr>
-            </a:pPr>
-            <a:r>
-              <a:t>→</a:t>
-            </a:r>
-          </a:p>
-        </p:txBody>
-      </p:sp>
-      <p:sp>
-        <p:nvSpPr>
-          <p:cNvPr id="30" name="Rounded Rectangle 29"/>
-          <p:cNvSpPr/>
-          <p:nvPr/>
-        </p:nvSpPr>
-        <p:spPr>
-          <a:xfrm>
-            <a:off x="10168128" y="1965960"/>
-            <a:ext cx="1627632" cy="1536192"/>
-          </a:xfrm>
-          <a:prstGeom prst="roundRect">
-            <a:avLst/>
-          </a:prstGeom>
-          <a:solidFill>
-            <a:srgbClr val="FFFFFF"/>
-          </a:solidFill>
-          <a:ln>
-            <a:noFill/>
-          </a:ln>
-        </p:spPr>
-        <p:style>
-          <a:lnRef idx="1">
-            <a:schemeClr val="accent1"/>
-          </a:lnRef>
-          <a:fillRef idx="3">
-            <a:schemeClr val="accent1"/>
-          </a:fillRef>
-          <a:effectRef idx="2">
-            <a:schemeClr val="accent1"/>
-          </a:effectRef>
-          <a:fontRef idx="minor">
-            <a:schemeClr val="lt1"/>
-          </a:fontRef>
-        </p:style>
-        <p:txBody>
-          <a:bodyPr rtlCol="0" anchor="ctr"/>
-          <a:lstStyle/>
-          <a:p>
-            <a:pPr algn="ctr"/>
-          </a:p>
-        </p:txBody>
-      </p:sp>
-      <p:sp>
-        <p:nvSpPr>
-          <p:cNvPr id="31" name="TextBox 30"/>
-          <p:cNvSpPr txBox="1"/>
-          <p:nvPr/>
-        </p:nvSpPr>
-        <p:spPr>
-          <a:xfrm>
-            <a:off x="10305288" y="2121408"/>
-            <a:ext cx="365760" cy="219456"/>
-          </a:xfrm>
-          <a:prstGeom prst="rect">
-            <a:avLst/>
-          </a:prstGeom>
-          <a:noFill/>
-        </p:spPr>
-        <p:txBody>
-          <a:bodyPr wrap="square" lIns="18288" rIns="18288" tIns="18288" bIns="18288" anchor="ctr">
-            <a:spAutoFit/>
-          </a:bodyPr>
-          <a:lstStyle/>
-          <a:p>
-            <a:pPr algn="l">
-              <a:defRPr sz="1000" b="1">
-                <a:solidFill>
-                  <a:srgbClr val="00AFA0"/>
-                </a:solidFill>
-                <a:latin typeface="Aptos"/>
-              </a:defRPr>
-            </a:pPr>
-            <a:r>
-              <a:t>06</a:t>
-            </a:r>
-          </a:p>
-        </p:txBody>
-      </p:sp>
-      <p:sp>
-        <p:nvSpPr>
-          <p:cNvPr id="32" name="TextBox 31"/>
-          <p:cNvSpPr txBox="1"/>
-          <p:nvPr/>
-        </p:nvSpPr>
-        <p:spPr>
-          <a:xfrm>
-            <a:off x="10305288" y="2441448"/>
-            <a:ext cx="1353312" cy="292608"/>
-          </a:xfrm>
-          <a:prstGeom prst="rect">
-            <a:avLst/>
-          </a:prstGeom>
-          <a:noFill/>
-        </p:spPr>
-        <p:txBody>
-          <a:bodyPr wrap="square" lIns="18288" rIns="18288" tIns="18288" bIns="18288" anchor="ctr">
-            <a:spAutoFit/>
-          </a:bodyPr>
-          <a:lstStyle/>
-          <a:p>
-            <a:pPr algn="l">
-              <a:defRPr sz="1400" b="1">
-                <a:solidFill>
-                  <a:srgbClr val="112240"/>
-                </a:solidFill>
-                <a:latin typeface="Aptos"/>
-              </a:defRPr>
-            </a:pPr>
-            <a:r>
-              <a:t>Rapor</a:t>
-            </a:r>
-          </a:p>
-        </p:txBody>
-      </p:sp>
-      <p:sp>
-        <p:nvSpPr>
-          <p:cNvPr id="33" name="TextBox 32"/>
-          <p:cNvSpPr txBox="1"/>
-          <p:nvPr/>
-        </p:nvSpPr>
-        <p:spPr>
-          <a:xfrm>
-            <a:off x="10305288" y="2834640"/>
-            <a:ext cx="1353312" cy="457200"/>
-          </a:xfrm>
-          <a:prstGeom prst="rect">
-            <a:avLst/>
-          </a:prstGeom>
-          <a:noFill/>
-        </p:spPr>
-        <p:txBody>
-          <a:bodyPr wrap="square" lIns="18288" rIns="18288" tIns="18288" bIns="18288" anchor="ctr">
-            <a:spAutoFit/>
-          </a:bodyPr>
-          <a:lstStyle/>
-          <a:p>
-            <a:pPr algn="l">
-              <a:defRPr sz="1000" b="0">
-                <a:solidFill>
-                  <a:srgbClr val="637389"/>
-                </a:solidFill>
-                <a:latin typeface="Aptos"/>
-              </a:defRPr>
-            </a:pPr>
-            <a:r>
-              <a:t>JSON • MD</a:t>
-            </a:r>
-            <a:br/>
-            <a:r>
-              <a:t>HTML • bulgu</a:t>
-            </a:r>
-          </a:p>
-        </p:txBody>
-      </p:sp>
-      <p:sp>
-        <p:nvSpPr>
-          <p:cNvPr id="34" name="Rounded Rectangle 33"/>
-          <p:cNvSpPr/>
-          <p:nvPr/>
-        </p:nvSpPr>
-        <p:spPr>
-          <a:xfrm>
-            <a:off x="749808" y="3913632"/>
-            <a:ext cx="10698480" cy="1051560"/>
-          </a:xfrm>
-          <a:prstGeom prst="roundRect">
-            <a:avLst/>
-          </a:prstGeom>
-          <a:solidFill>
-            <a:srgbClr val="E7F0FA"/>
-          </a:solidFill>
-          <a:ln>
-            <a:noFill/>
-          </a:ln>
-        </p:spPr>
-        <p:style>
-          <a:lnRef idx="1">
-            <a:schemeClr val="accent1"/>
-          </a:lnRef>
-          <a:fillRef idx="3">
-            <a:schemeClr val="accent1"/>
-          </a:fillRef>
-          <a:effectRef idx="2">
-            <a:schemeClr val="accent1"/>
-          </a:effectRef>
-          <a:fontRef idx="minor">
-            <a:schemeClr val="lt1"/>
-          </a:fontRef>
-        </p:style>
-        <p:txBody>
-          <a:bodyPr rtlCol="0" anchor="ctr"/>
-          <a:lstStyle/>
-          <a:p>
-            <a:pPr algn="ctr"/>
-          </a:p>
-        </p:txBody>
-      </p:sp>
-      <p:sp>
-        <p:nvSpPr>
-          <p:cNvPr id="35" name="TextBox 34"/>
-          <p:cNvSpPr txBox="1"/>
-          <p:nvPr/>
-        </p:nvSpPr>
-        <p:spPr>
-          <a:xfrm>
-            <a:off x="987552" y="4114800"/>
-            <a:ext cx="1920240" cy="274320"/>
-          </a:xfrm>
-          <a:prstGeom prst="rect">
-            <a:avLst/>
-          </a:prstGeom>
-          <a:noFill/>
-        </p:spPr>
-        <p:txBody>
-          <a:bodyPr wrap="square" lIns="18288" rIns="18288" tIns="18288" bIns="18288" anchor="ctr">
-            <a:spAutoFit/>
-          </a:bodyPr>
-          <a:lstStyle/>
-          <a:p>
-            <a:pPr algn="l">
-              <a:defRPr sz="1400" b="1">
-                <a:solidFill>
-                  <a:srgbClr val="112240"/>
-                </a:solidFill>
-                <a:latin typeface="Aptos"/>
-              </a:defRPr>
-            </a:pPr>
-            <a:r>
-              <a:t>Deterministik demo</a:t>
-            </a:r>
-          </a:p>
-        </p:txBody>
-      </p:sp>
-      <p:sp>
-        <p:nvSpPr>
-          <p:cNvPr id="36" name="TextBox 35"/>
-          <p:cNvSpPr txBox="1"/>
-          <p:nvPr/>
-        </p:nvSpPr>
-        <p:spPr>
-          <a:xfrm>
-            <a:off x="2852928" y="4050791"/>
-            <a:ext cx="8229600" cy="548640"/>
-          </a:xfrm>
-          <a:prstGeom prst="rect">
-            <a:avLst/>
-          </a:prstGeom>
-          <a:noFill/>
-        </p:spPr>
-        <p:txBody>
-          <a:bodyPr wrap="square" lIns="18288" rIns="18288" tIns="18288" bIns="18288" anchor="ctr">
-            <a:spAutoFit/>
-          </a:bodyPr>
-          <a:lstStyle/>
-          <a:p>
-            <a:pPr algn="l">
-              <a:defRPr sz="1200" b="0">
-                <a:solidFill>
-                  <a:srgbClr val="223045"/>
-                </a:solidFill>
-                <a:latin typeface="Aptos"/>
-              </a:defRPr>
-            </a:pPr>
-            <a:r>
-              <a:t>Model taraması JSON hatası veya bulgusuz sonuç verirse demo1/demo2 için ayrı sentetik rapor üretilebilir. Bu rapor gerçek mevzuat tespiti ve remediation girdisi değildir.</a:t>
-            </a:r>
-          </a:p>
-        </p:txBody>
-      </p:sp>
-      <p:sp>
-        <p:nvSpPr>
-          <p:cNvPr id="37" name="TextBox 36"/>
-          <p:cNvSpPr txBox="1"/>
-          <p:nvPr/>
-        </p:nvSpPr>
-        <p:spPr>
-          <a:xfrm>
-            <a:off x="932688" y="5321808"/>
-            <a:ext cx="10195560" cy="320040"/>
-          </a:xfrm>
-          <a:prstGeom prst="rect">
-            <a:avLst/>
-          </a:prstGeom>
-          <a:noFill/>
-        </p:spPr>
-        <p:txBody>
-          <a:bodyPr wrap="square" lIns="18288" rIns="18288" tIns="18288" bIns="18288" anchor="ctr">
-            <a:spAutoFit/>
-          </a:bodyPr>
-          <a:lstStyle/>
-          <a:p>
-            <a:pPr algn="ctr">
-              <a:defRPr sz="1200" b="1">
-                <a:solidFill>
-                  <a:srgbClr val="637389"/>
-                </a:solidFill>
-                <a:latin typeface="Aptos"/>
-              </a:defRPr>
-            </a:pPr>
-            <a:r>
-              <a:t>İşlem adımları: sohbet komutu → pipeline önerisi → açık kullanıcı onayı → çıktı/rapor → sonraki adım.</a:t>
-            </a:r>
-          </a:p>
-        </p:txBody>
-      </p:sp>
-      <p:sp>
-        <p:nvSpPr>
-          <p:cNvPr id="38" name="TextBox 37"/>
           <p:cNvSpPr txBox="1"/>
           <p:nvPr/>
         </p:nvSpPr>
@@ -13228,7 +12040,7 @@
       </p:sp>
       <p:sp>
         <p:nvSpPr>
-          <p:cNvPr id="39" name="TextBox 38"/>
+          <p:cNvPr id="7" name="TextBox 6"/>
           <p:cNvSpPr txBox="1"/>
           <p:nvPr/>
         </p:nvSpPr>
@@ -13319,7 +12131,7 @@
               </a:defRPr>
             </a:pPr>
             <a:r>
-              <a:t>19  •  REMEDIATION, KOD FARKI VE PR</a:t>
+              <a:t>19  •  TERMINAL ÇIKTISI</a:t>
             </a:r>
           </a:p>
         </p:txBody>
@@ -13355,7 +12167,7 @@
               </a:defRPr>
             </a:pPr>
             <a:r>
-              <a:t>İlk iki bulgu: diff → izole dal → test → PR</a:t>
+              <a:t>Depo ve tarama tahmini</a:t>
             </a:r>
           </a:p>
         </p:txBody>
@@ -13391,792 +12203,38 @@
               </a:defRPr>
             </a:pPr>
             <a:r>
-              <a:t>Aşağıdaki değişiklik sentetik E2E fixture'ından alınmıştır; mevzuat düzeltmesi veya gerçek GitHub PR'ı değildir.</a:t>
-            </a:r>
-          </a:p>
-        </p:txBody>
-      </p:sp>
-      <p:sp>
-        <p:nvSpPr>
-          <p:cNvPr id="5" name="Rounded Rectangle 4"/>
-          <p:cNvSpPr/>
-          <p:nvPr/>
-        </p:nvSpPr>
-        <p:spPr>
-          <a:xfrm>
-            <a:off x="713232" y="1783080"/>
-            <a:ext cx="6656832" cy="3520440"/>
-          </a:xfrm>
-          <a:prstGeom prst="roundRect">
-            <a:avLst/>
-          </a:prstGeom>
-          <a:solidFill>
-            <a:srgbClr val="112240"/>
-          </a:solidFill>
-          <a:ln>
-            <a:noFill/>
-          </a:ln>
-        </p:spPr>
-        <p:style>
-          <a:lnRef idx="1">
-            <a:schemeClr val="accent1"/>
-          </a:lnRef>
-          <a:fillRef idx="3">
-            <a:schemeClr val="accent1"/>
-          </a:fillRef>
-          <a:effectRef idx="2">
-            <a:schemeClr val="accent1"/>
-          </a:effectRef>
-          <a:fontRef idx="minor">
-            <a:schemeClr val="lt1"/>
-          </a:fontRef>
-        </p:style>
-        <p:txBody>
-          <a:bodyPr rtlCol="0" anchor="ctr"/>
-          <a:lstStyle/>
-          <a:p>
-            <a:pPr algn="ctr"/>
-          </a:p>
-        </p:txBody>
-      </p:sp>
+              <a:t>Hazırlanmış yerel test deposu; gerçek RAG eşleşmesiyle yaklaşık token ve süre tahmini.</a:t>
+            </a:r>
+          </a:p>
+        </p:txBody>
+      </p:sp>
+      <p:pic>
+        <p:nvPicPr>
+          <p:cNvPr id="5" name="Picture 4" descr="02_repository_and_estimate.png"/>
+          <p:cNvPicPr>
+            <a:picLocks noChangeAspect="1"/>
+          </p:cNvPicPr>
+          <p:nvPr/>
+        </p:nvPicPr>
+        <p:blipFill>
+          <a:blip r:embed="rId2"/>
+          <a:stretch>
+            <a:fillRect/>
+          </a:stretch>
+        </p:blipFill>
+        <p:spPr>
+          <a:xfrm>
+            <a:off x="713232" y="1828800"/>
+            <a:ext cx="10771632" cy="3889756"/>
+          </a:xfrm>
+          <a:prstGeom prst="rect">
+            <a:avLst/>
+          </a:prstGeom>
+        </p:spPr>
+      </p:pic>
       <p:sp>
         <p:nvSpPr>
           <p:cNvPr id="6" name="TextBox 5"/>
-          <p:cNvSpPr txBox="1"/>
-          <p:nvPr/>
-        </p:nvSpPr>
-        <p:spPr>
-          <a:xfrm>
-            <a:off x="960120" y="1965960"/>
-            <a:ext cx="6126480" cy="256032"/>
-          </a:xfrm>
-          <a:prstGeom prst="rect">
-            <a:avLst/>
-          </a:prstGeom>
-          <a:noFill/>
-        </p:spPr>
-        <p:txBody>
-          <a:bodyPr wrap="square" lIns="18288" rIns="18288" tIns="18288" bIns="18288" anchor="ctr">
-            <a:spAutoFit/>
-          </a:bodyPr>
-          <a:lstStyle/>
-          <a:p>
-            <a:pPr algn="l">
-              <a:defRPr sz="1100" b="1">
-                <a:solidFill>
-                  <a:srgbClr val="D6575E"/>
-                </a:solidFill>
-                <a:latin typeface="Aptos Mono"/>
-              </a:defRPr>
-            </a:pPr>
-            <a:r>
-              <a:t>ÖNCE  (payment_rules.py)</a:t>
-            </a:r>
-          </a:p>
-        </p:txBody>
-      </p:sp>
-      <p:sp>
-        <p:nvSpPr>
-          <p:cNvPr id="7" name="TextBox 6"/>
-          <p:cNvSpPr txBox="1"/>
-          <p:nvPr/>
-        </p:nvSpPr>
-        <p:spPr>
-          <a:xfrm>
-            <a:off x="960120" y="2304288"/>
-            <a:ext cx="6126480" cy="1005840"/>
-          </a:xfrm>
-          <a:prstGeom prst="rect">
-            <a:avLst/>
-          </a:prstGeom>
-          <a:noFill/>
-        </p:spPr>
-        <p:txBody>
-          <a:bodyPr wrap="square" lIns="18288" rIns="18288" tIns="18288" bIns="18288" anchor="ctr">
-            <a:spAutoFit/>
-          </a:bodyPr>
-          <a:lstStyle/>
-          <a:p>
-            <a:pPr algn="l">
-              <a:defRPr sz="1200" b="0">
-                <a:solidFill>
-                  <a:srgbClr val="FFFFFF"/>
-                </a:solidFill>
-                <a:latin typeface="Aptos Mono"/>
-              </a:defRPr>
-            </a:pPr>
-            <a:r>
-              <a:t>def mask_reference(value, visible=4):</a:t>
-            </a:r>
-            <a:br/>
-            <a:r>
-              <a:t>    return value</a:t>
-            </a:r>
-            <a:br/>
-            <a:br/>
-            <a:r>
-              <a:t>def is_positive_amount(amount):</a:t>
-            </a:r>
-            <a:br/>
-            <a:r>
-              <a:t>    return amount &gt;= 0</a:t>
-            </a:r>
-          </a:p>
-        </p:txBody>
-      </p:sp>
-      <p:sp>
-        <p:nvSpPr>
-          <p:cNvPr id="8" name="TextBox 7"/>
-          <p:cNvSpPr txBox="1"/>
-          <p:nvPr/>
-        </p:nvSpPr>
-        <p:spPr>
-          <a:xfrm>
-            <a:off x="960120" y="3493008"/>
-            <a:ext cx="6126480" cy="256032"/>
-          </a:xfrm>
-          <a:prstGeom prst="rect">
-            <a:avLst/>
-          </a:prstGeom>
-          <a:noFill/>
-        </p:spPr>
-        <p:txBody>
-          <a:bodyPr wrap="square" lIns="18288" rIns="18288" tIns="18288" bIns="18288" anchor="ctr">
-            <a:spAutoFit/>
-          </a:bodyPr>
-          <a:lstStyle/>
-          <a:p>
-            <a:pPr algn="l">
-              <a:defRPr sz="1100" b="1">
-                <a:solidFill>
-                  <a:srgbClr val="00AFA0"/>
-                </a:solidFill>
-                <a:latin typeface="Aptos Mono"/>
-              </a:defRPr>
-            </a:pPr>
-            <a:r>
-              <a:t>SONRA  (yalnızca kullanıcı onayıyla)</a:t>
-            </a:r>
-          </a:p>
-        </p:txBody>
-      </p:sp>
-      <p:sp>
-        <p:nvSpPr>
-          <p:cNvPr id="9" name="TextBox 8"/>
-          <p:cNvSpPr txBox="1"/>
-          <p:nvPr/>
-        </p:nvSpPr>
-        <p:spPr>
-          <a:xfrm>
-            <a:off x="960120" y="3822191"/>
-            <a:ext cx="6126480" cy="1207008"/>
-          </a:xfrm>
-          <a:prstGeom prst="rect">
-            <a:avLst/>
-          </a:prstGeom>
-          <a:noFill/>
-        </p:spPr>
-        <p:txBody>
-          <a:bodyPr wrap="square" lIns="18288" rIns="18288" tIns="18288" bIns="18288" anchor="ctr">
-            <a:spAutoFit/>
-          </a:bodyPr>
-          <a:lstStyle/>
-          <a:p>
-            <a:pPr algn="l">
-              <a:defRPr sz="1000" b="0">
-                <a:solidFill>
-                  <a:srgbClr val="FFFFFF"/>
-                </a:solidFill>
-                <a:latin typeface="Aptos Mono"/>
-              </a:defRPr>
-            </a:pPr>
-            <a:r>
-              <a:t>def mask_reference(value, visible=4):</a:t>
-            </a:r>
-            <a:br/>
-            <a:r>
-              <a:t>    return "*" * max(0, len(value)-visible) + value[-visible:]</a:t>
-            </a:r>
-            <a:br/>
-            <a:br/>
-            <a:r>
-              <a:t>def is_positive_amount(amount):</a:t>
-            </a:r>
-            <a:br/>
-            <a:r>
-              <a:t>    return amount &gt; 0</a:t>
-            </a:r>
-          </a:p>
-        </p:txBody>
-      </p:sp>
-      <p:sp>
-        <p:nvSpPr>
-          <p:cNvPr id="10" name="Rounded Rectangle 9"/>
-          <p:cNvSpPr/>
-          <p:nvPr/>
-        </p:nvSpPr>
-        <p:spPr>
-          <a:xfrm>
-            <a:off x="7662672" y="1810512"/>
-            <a:ext cx="3794760" cy="932688"/>
-          </a:xfrm>
-          <a:prstGeom prst="roundRect">
-            <a:avLst/>
-          </a:prstGeom>
-          <a:solidFill>
-            <a:srgbClr val="FFFFFF"/>
-          </a:solidFill>
-          <a:ln>
-            <a:noFill/>
-          </a:ln>
-        </p:spPr>
-        <p:style>
-          <a:lnRef idx="1">
-            <a:schemeClr val="accent1"/>
-          </a:lnRef>
-          <a:fillRef idx="3">
-            <a:schemeClr val="accent1"/>
-          </a:fillRef>
-          <a:effectRef idx="2">
-            <a:schemeClr val="accent1"/>
-          </a:effectRef>
-          <a:fontRef idx="minor">
-            <a:schemeClr val="lt1"/>
-          </a:fontRef>
-        </p:style>
-        <p:txBody>
-          <a:bodyPr rtlCol="0" anchor="ctr"/>
-          <a:lstStyle/>
-          <a:p>
-            <a:pPr algn="ctr"/>
-          </a:p>
-        </p:txBody>
-      </p:sp>
-      <p:sp>
-        <p:nvSpPr>
-          <p:cNvPr id="11" name="Rectangle 10"/>
-          <p:cNvSpPr/>
-          <p:nvPr/>
-        </p:nvSpPr>
-        <p:spPr>
-          <a:xfrm>
-            <a:off x="7662672" y="1810512"/>
-            <a:ext cx="64008" cy="932688"/>
-          </a:xfrm>
-          <a:prstGeom prst="rect">
-            <a:avLst/>
-          </a:prstGeom>
-          <a:solidFill>
-            <a:srgbClr val="00AFA0"/>
-          </a:solidFill>
-          <a:ln>
-            <a:noFill/>
-          </a:ln>
-        </p:spPr>
-        <p:style>
-          <a:lnRef idx="1">
-            <a:schemeClr val="accent1"/>
-          </a:lnRef>
-          <a:fillRef idx="3">
-            <a:schemeClr val="accent1"/>
-          </a:fillRef>
-          <a:effectRef idx="2">
-            <a:schemeClr val="accent1"/>
-          </a:effectRef>
-          <a:fontRef idx="minor">
-            <a:schemeClr val="lt1"/>
-          </a:fontRef>
-        </p:style>
-        <p:txBody>
-          <a:bodyPr rtlCol="0" anchor="ctr"/>
-          <a:lstStyle/>
-          <a:p>
-            <a:pPr algn="ctr"/>
-          </a:p>
-        </p:txBody>
-      </p:sp>
-      <p:sp>
-        <p:nvSpPr>
-          <p:cNvPr id="12" name="TextBox 11"/>
-          <p:cNvSpPr txBox="1"/>
-          <p:nvPr/>
-        </p:nvSpPr>
-        <p:spPr>
-          <a:xfrm>
-            <a:off x="7863840" y="1938528"/>
-            <a:ext cx="3410712" cy="347472"/>
-          </a:xfrm>
-          <a:prstGeom prst="rect">
-            <a:avLst/>
-          </a:prstGeom>
-          <a:noFill/>
-        </p:spPr>
-        <p:txBody>
-          <a:bodyPr wrap="square" lIns="18288" rIns="18288" tIns="18288" bIns="18288" anchor="ctr">
-            <a:spAutoFit/>
-          </a:bodyPr>
-          <a:lstStyle/>
-          <a:p>
-            <a:pPr algn="l">
-              <a:defRPr sz="1600" b="1">
-                <a:solidFill>
-                  <a:srgbClr val="112240"/>
-                </a:solidFill>
-                <a:latin typeface="Aptos"/>
-              </a:defRPr>
-            </a:pPr>
-            <a:r>
-              <a:t>1 • İncele ve uygula</a:t>
-            </a:r>
-          </a:p>
-        </p:txBody>
-      </p:sp>
-      <p:sp>
-        <p:nvSpPr>
-          <p:cNvPr id="13" name="TextBox 12"/>
-          <p:cNvSpPr txBox="1"/>
-          <p:nvPr/>
-        </p:nvSpPr>
-        <p:spPr>
-          <a:xfrm>
-            <a:off x="7882128" y="2359152"/>
-            <a:ext cx="3374136" cy="274320"/>
-          </a:xfrm>
-          <a:prstGeom prst="rect">
-            <a:avLst/>
-          </a:prstGeom>
-          <a:noFill/>
-        </p:spPr>
-        <p:txBody>
-          <a:bodyPr wrap="square" lIns="18288" rIns="18288" tIns="18288" bIns="18288" anchor="ctr">
-            <a:spAutoFit/>
-          </a:bodyPr>
-          <a:lstStyle/>
-          <a:p>
-            <a:pPr algn="l">
-              <a:defRPr sz="1200" b="0">
-                <a:solidFill>
-                  <a:srgbClr val="223045"/>
-                </a:solidFill>
-                <a:latin typeface="Aptos"/>
-              </a:defRPr>
-            </a:pPr>
-            <a:r>
-              <a:t>•  En yüksek iki bulgu</a:t>
-            </a:r>
-            <a:br/>
-            <a:r>
-              <a:t>•  Ayrı worktree / branch</a:t>
-            </a:r>
-          </a:p>
-        </p:txBody>
-      </p:sp>
-      <p:sp>
-        <p:nvSpPr>
-          <p:cNvPr id="14" name="Rounded Rectangle 13"/>
-          <p:cNvSpPr/>
-          <p:nvPr/>
-        </p:nvSpPr>
-        <p:spPr>
-          <a:xfrm>
-            <a:off x="7662672" y="2907792"/>
-            <a:ext cx="3794760" cy="932688"/>
-          </a:xfrm>
-          <a:prstGeom prst="roundRect">
-            <a:avLst/>
-          </a:prstGeom>
-          <a:solidFill>
-            <a:srgbClr val="FFFFFF"/>
-          </a:solidFill>
-          <a:ln>
-            <a:noFill/>
-          </a:ln>
-        </p:spPr>
-        <p:style>
-          <a:lnRef idx="1">
-            <a:schemeClr val="accent1"/>
-          </a:lnRef>
-          <a:fillRef idx="3">
-            <a:schemeClr val="accent1"/>
-          </a:fillRef>
-          <a:effectRef idx="2">
-            <a:schemeClr val="accent1"/>
-          </a:effectRef>
-          <a:fontRef idx="minor">
-            <a:schemeClr val="lt1"/>
-          </a:fontRef>
-        </p:style>
-        <p:txBody>
-          <a:bodyPr rtlCol="0" anchor="ctr"/>
-          <a:lstStyle/>
-          <a:p>
-            <a:pPr algn="ctr"/>
-          </a:p>
-        </p:txBody>
-      </p:sp>
-      <p:sp>
-        <p:nvSpPr>
-          <p:cNvPr id="15" name="Rectangle 14"/>
-          <p:cNvSpPr/>
-          <p:nvPr/>
-        </p:nvSpPr>
-        <p:spPr>
-          <a:xfrm>
-            <a:off x="7662672" y="2907792"/>
-            <a:ext cx="64008" cy="932688"/>
-          </a:xfrm>
-          <a:prstGeom prst="rect">
-            <a:avLst/>
-          </a:prstGeom>
-          <a:solidFill>
-            <a:srgbClr val="35BED7"/>
-          </a:solidFill>
-          <a:ln>
-            <a:noFill/>
-          </a:ln>
-        </p:spPr>
-        <p:style>
-          <a:lnRef idx="1">
-            <a:schemeClr val="accent1"/>
-          </a:lnRef>
-          <a:fillRef idx="3">
-            <a:schemeClr val="accent1"/>
-          </a:fillRef>
-          <a:effectRef idx="2">
-            <a:schemeClr val="accent1"/>
-          </a:effectRef>
-          <a:fontRef idx="minor">
-            <a:schemeClr val="lt1"/>
-          </a:fontRef>
-        </p:style>
-        <p:txBody>
-          <a:bodyPr rtlCol="0" anchor="ctr"/>
-          <a:lstStyle/>
-          <a:p>
-            <a:pPr algn="ctr"/>
-          </a:p>
-        </p:txBody>
-      </p:sp>
-      <p:sp>
-        <p:nvSpPr>
-          <p:cNvPr id="16" name="TextBox 15"/>
-          <p:cNvSpPr txBox="1"/>
-          <p:nvPr/>
-        </p:nvSpPr>
-        <p:spPr>
-          <a:xfrm>
-            <a:off x="7863840" y="3035808"/>
-            <a:ext cx="3410712" cy="347472"/>
-          </a:xfrm>
-          <a:prstGeom prst="rect">
-            <a:avLst/>
-          </a:prstGeom>
-          <a:noFill/>
-        </p:spPr>
-        <p:txBody>
-          <a:bodyPr wrap="square" lIns="18288" rIns="18288" tIns="18288" bIns="18288" anchor="ctr">
-            <a:spAutoFit/>
-          </a:bodyPr>
-          <a:lstStyle/>
-          <a:p>
-            <a:pPr algn="l">
-              <a:defRPr sz="1600" b="1">
-                <a:solidFill>
-                  <a:srgbClr val="112240"/>
-                </a:solidFill>
-                <a:latin typeface="Aptos"/>
-              </a:defRPr>
-            </a:pPr>
-            <a:r>
-              <a:t>2 • Testi onayla</a:t>
-            </a:r>
-          </a:p>
-        </p:txBody>
-      </p:sp>
-      <p:sp>
-        <p:nvSpPr>
-          <p:cNvPr id="17" name="TextBox 16"/>
-          <p:cNvSpPr txBox="1"/>
-          <p:nvPr/>
-        </p:nvSpPr>
-        <p:spPr>
-          <a:xfrm>
-            <a:off x="7882128" y="3456432"/>
-            <a:ext cx="3374136" cy="274320"/>
-          </a:xfrm>
-          <a:prstGeom prst="rect">
-            <a:avLst/>
-          </a:prstGeom>
-          <a:noFill/>
-        </p:spPr>
-        <p:txBody>
-          <a:bodyPr wrap="square" lIns="18288" rIns="18288" tIns="18288" bIns="18288" anchor="ctr">
-            <a:spAutoFit/>
-          </a:bodyPr>
-          <a:lstStyle/>
-          <a:p>
-            <a:pPr algn="l">
-              <a:defRPr sz="1200" b="0">
-                <a:solidFill>
-                  <a:srgbClr val="223045"/>
-                </a:solidFill>
-                <a:latin typeface="Aptos"/>
-              </a:defRPr>
-            </a:pPr>
-            <a:r>
-              <a:t>•  Test raporu MD/HTML</a:t>
-            </a:r>
-            <a:br/>
-            <a:r>
-              <a:t>•  Başarısızsa PR durur</a:t>
-            </a:r>
-          </a:p>
-        </p:txBody>
-      </p:sp>
-      <p:sp>
-        <p:nvSpPr>
-          <p:cNvPr id="18" name="Rounded Rectangle 17"/>
-          <p:cNvSpPr/>
-          <p:nvPr/>
-        </p:nvSpPr>
-        <p:spPr>
-          <a:xfrm>
-            <a:off x="7662672" y="4005072"/>
-            <a:ext cx="3794760" cy="932688"/>
-          </a:xfrm>
-          <a:prstGeom prst="roundRect">
-            <a:avLst/>
-          </a:prstGeom>
-          <a:solidFill>
-            <a:srgbClr val="FFFFFF"/>
-          </a:solidFill>
-          <a:ln>
-            <a:noFill/>
-          </a:ln>
-        </p:spPr>
-        <p:style>
-          <a:lnRef idx="1">
-            <a:schemeClr val="accent1"/>
-          </a:lnRef>
-          <a:fillRef idx="3">
-            <a:schemeClr val="accent1"/>
-          </a:fillRef>
-          <a:effectRef idx="2">
-            <a:schemeClr val="accent1"/>
-          </a:effectRef>
-          <a:fontRef idx="minor">
-            <a:schemeClr val="lt1"/>
-          </a:fontRef>
-        </p:style>
-        <p:txBody>
-          <a:bodyPr rtlCol="0" anchor="ctr"/>
-          <a:lstStyle/>
-          <a:p>
-            <a:pPr algn="ctr"/>
-          </a:p>
-        </p:txBody>
-      </p:sp>
-      <p:sp>
-        <p:nvSpPr>
-          <p:cNvPr id="19" name="Rectangle 18"/>
-          <p:cNvSpPr/>
-          <p:nvPr/>
-        </p:nvSpPr>
-        <p:spPr>
-          <a:xfrm>
-            <a:off x="7662672" y="4005072"/>
-            <a:ext cx="64008" cy="932688"/>
-          </a:xfrm>
-          <a:prstGeom prst="rect">
-            <a:avLst/>
-          </a:prstGeom>
-          <a:solidFill>
-            <a:srgbClr val="F8BC4A"/>
-          </a:solidFill>
-          <a:ln>
-            <a:noFill/>
-          </a:ln>
-        </p:spPr>
-        <p:style>
-          <a:lnRef idx="1">
-            <a:schemeClr val="accent1"/>
-          </a:lnRef>
-          <a:fillRef idx="3">
-            <a:schemeClr val="accent1"/>
-          </a:fillRef>
-          <a:effectRef idx="2">
-            <a:schemeClr val="accent1"/>
-          </a:effectRef>
-          <a:fontRef idx="minor">
-            <a:schemeClr val="lt1"/>
-          </a:fontRef>
-        </p:style>
-        <p:txBody>
-          <a:bodyPr rtlCol="0" anchor="ctr"/>
-          <a:lstStyle/>
-          <a:p>
-            <a:pPr algn="ctr"/>
-          </a:p>
-        </p:txBody>
-      </p:sp>
-      <p:sp>
-        <p:nvSpPr>
-          <p:cNvPr id="20" name="TextBox 19"/>
-          <p:cNvSpPr txBox="1"/>
-          <p:nvPr/>
-        </p:nvSpPr>
-        <p:spPr>
-          <a:xfrm>
-            <a:off x="7863840" y="4133087"/>
-            <a:ext cx="3410712" cy="347472"/>
-          </a:xfrm>
-          <a:prstGeom prst="rect">
-            <a:avLst/>
-          </a:prstGeom>
-          <a:noFill/>
-        </p:spPr>
-        <p:txBody>
-          <a:bodyPr wrap="square" lIns="18288" rIns="18288" tIns="18288" bIns="18288" anchor="ctr">
-            <a:spAutoFit/>
-          </a:bodyPr>
-          <a:lstStyle/>
-          <a:p>
-            <a:pPr algn="l">
-              <a:defRPr sz="1600" b="1">
-                <a:solidFill>
-                  <a:srgbClr val="112240"/>
-                </a:solidFill>
-                <a:latin typeface="Aptos"/>
-              </a:defRPr>
-            </a:pPr>
-            <a:r>
-              <a:t>3 • PR için son onay</a:t>
-            </a:r>
-          </a:p>
-        </p:txBody>
-      </p:sp>
-      <p:sp>
-        <p:nvSpPr>
-          <p:cNvPr id="21" name="TextBox 20"/>
-          <p:cNvSpPr txBox="1"/>
-          <p:nvPr/>
-        </p:nvSpPr>
-        <p:spPr>
-          <a:xfrm>
-            <a:off x="7882128" y="4553712"/>
-            <a:ext cx="3374136" cy="274320"/>
-          </a:xfrm>
-          <a:prstGeom prst="rect">
-            <a:avLst/>
-          </a:prstGeom>
-          <a:noFill/>
-        </p:spPr>
-        <p:txBody>
-          <a:bodyPr wrap="square" lIns="18288" rIns="18288" tIns="18288" bIns="18288" anchor="ctr">
-            <a:spAutoFit/>
-          </a:bodyPr>
-          <a:lstStyle/>
-          <a:p>
-            <a:pPr algn="l">
-              <a:defRPr sz="1200" b="0">
-                <a:solidFill>
-                  <a:srgbClr val="223045"/>
-                </a:solidFill>
-                <a:latin typeface="Aptos"/>
-              </a:defRPr>
-            </a:pPr>
-            <a:r>
-              <a:t>•  Commit + push + gh PR</a:t>
-            </a:r>
-            <a:br/>
-            <a:r>
-              <a:t>•  Her adım ayrı izin</a:t>
-            </a:r>
-          </a:p>
-        </p:txBody>
-      </p:sp>
-      <p:sp>
-        <p:nvSpPr>
-          <p:cNvPr id="22" name="Rounded Rectangle 21"/>
-          <p:cNvSpPr/>
-          <p:nvPr/>
-        </p:nvSpPr>
-        <p:spPr>
-          <a:xfrm>
-            <a:off x="749808" y="5522976"/>
-            <a:ext cx="10698480" cy="530352"/>
-          </a:xfrm>
-          <a:prstGeom prst="roundRect">
-            <a:avLst/>
-          </a:prstGeom>
-          <a:solidFill>
-            <a:srgbClr val="FFF6DF"/>
-          </a:solidFill>
-          <a:ln>
-            <a:noFill/>
-          </a:ln>
-        </p:spPr>
-        <p:style>
-          <a:lnRef idx="1">
-            <a:schemeClr val="accent1"/>
-          </a:lnRef>
-          <a:fillRef idx="3">
-            <a:schemeClr val="accent1"/>
-          </a:fillRef>
-          <a:effectRef idx="2">
-            <a:schemeClr val="accent1"/>
-          </a:effectRef>
-          <a:fontRef idx="minor">
-            <a:schemeClr val="lt1"/>
-          </a:fontRef>
-        </p:style>
-        <p:txBody>
-          <a:bodyPr rtlCol="0" anchor="ctr"/>
-          <a:lstStyle/>
-          <a:p>
-            <a:pPr algn="ctr"/>
-          </a:p>
-        </p:txBody>
-      </p:sp>
-      <p:sp>
-        <p:nvSpPr>
-          <p:cNvPr id="23" name="TextBox 22"/>
-          <p:cNvSpPr txBox="1"/>
-          <p:nvPr/>
-        </p:nvSpPr>
-        <p:spPr>
-          <a:xfrm>
-            <a:off x="914400" y="5623560"/>
-            <a:ext cx="10241280" cy="292608"/>
-          </a:xfrm>
-          <a:prstGeom prst="rect">
-            <a:avLst/>
-          </a:prstGeom>
-          <a:noFill/>
-        </p:spPr>
-        <p:txBody>
-          <a:bodyPr wrap="square" lIns="18288" rIns="18288" tIns="18288" bIns="18288" anchor="ctr">
-            <a:spAutoFit/>
-          </a:bodyPr>
-          <a:lstStyle/>
-          <a:p>
-            <a:pPr algn="ctr">
-              <a:defRPr sz="1100" b="1">
-                <a:solidFill>
-                  <a:srgbClr val="112240"/>
-                </a:solidFill>
-                <a:latin typeface="Aptos"/>
-              </a:defRPr>
-            </a:pPr>
-            <a:r>
-              <a:t>E2E kanıtı: test geçti; push yerel bare remote'a, PR yanıtı mock gh'ye yapıldı. Gerçek GitHub PR açılmadı.</a:t>
-            </a:r>
-          </a:p>
-        </p:txBody>
-      </p:sp>
-      <p:sp>
-        <p:nvSpPr>
-          <p:cNvPr id="24" name="TextBox 23"/>
           <p:cNvSpPr txBox="1"/>
           <p:nvPr/>
         </p:nvSpPr>
@@ -14212,7 +12270,7 @@
       </p:sp>
       <p:sp>
         <p:nvSpPr>
-          <p:cNvPr id="25" name="TextBox 24"/>
+          <p:cNvPr id="7" name="TextBox 6"/>
           <p:cNvSpPr txBox="1"/>
           <p:nvPr/>
         </p:nvSpPr>
@@ -15158,7 +13216,7 @@
               </a:defRPr>
             </a:pPr>
             <a:r>
-              <a:t>20  •  GÜVENLIK VE MAHREMIYET</a:t>
+              <a:t>20  •  TERMINAL ÇIKTISI</a:t>
             </a:r>
           </a:p>
         </p:txBody>
@@ -15194,7 +13252,7 @@
               </a:defRPr>
             </a:pPr>
             <a:r>
-              <a:t>Güvenli varsayılanlar ve açık sınırlar</a:t>
+              <a:t>Canlı tarama sonucu ve sentetik demo ayrımı</a:t>
             </a:r>
           </a:p>
         </p:txBody>
@@ -15230,433 +13288,38 @@
               </a:defRPr>
             </a:pPr>
             <a:r>
-              <a:t>Kod ve mevzuat bağlamı yerel Ollama'ya gider; tarama akışı bulguları uzman incelemesine sunar.</a:t>
-            </a:r>
-          </a:p>
-        </p:txBody>
-      </p:sp>
-      <p:sp>
-        <p:nvSpPr>
-          <p:cNvPr id="5" name="Rounded Rectangle 4"/>
-          <p:cNvSpPr/>
-          <p:nvPr/>
-        </p:nvSpPr>
+              <a:t>Gemma canlı denemesinde 1 dosya tarandı, doğrulanmış bulgu çıkmadı. Beş bulgulu rapor ayrı TEST_FIXTURE_NOT_LAW verisidir.</a:t>
+            </a:r>
+          </a:p>
+        </p:txBody>
+      </p:sp>
+      <p:pic>
+        <p:nvPicPr>
+          <p:cNvPr id="5" name="Picture 4" descr="03_live_and_synthetic_scan.png"/>
+          <p:cNvPicPr>
+            <a:picLocks noChangeAspect="1"/>
+          </p:cNvPicPr>
+          <p:nvPr/>
+        </p:nvPicPr>
+        <p:blipFill>
+          <a:blip r:embed="rId2"/>
+          <a:stretch>
+            <a:fillRect/>
+          </a:stretch>
+        </p:blipFill>
         <p:spPr>
           <a:xfrm>
             <a:off x="713232" y="1828800"/>
-            <a:ext cx="5212080" cy="2011680"/>
-          </a:xfrm>
-          <a:prstGeom prst="roundRect">
-            <a:avLst/>
-          </a:prstGeom>
-          <a:solidFill>
-            <a:srgbClr val="FFFFFF"/>
-          </a:solidFill>
-          <a:ln>
-            <a:noFill/>
-          </a:ln>
-        </p:spPr>
-        <p:style>
-          <a:lnRef idx="1">
-            <a:schemeClr val="accent1"/>
-          </a:lnRef>
-          <a:fillRef idx="3">
-            <a:schemeClr val="accent1"/>
-          </a:fillRef>
-          <a:effectRef idx="2">
-            <a:schemeClr val="accent1"/>
-          </a:effectRef>
-          <a:fontRef idx="minor">
-            <a:schemeClr val="lt1"/>
-          </a:fontRef>
-        </p:style>
-        <p:txBody>
-          <a:bodyPr rtlCol="0" anchor="ctr"/>
-          <a:lstStyle/>
-          <a:p>
-            <a:pPr algn="ctr"/>
-          </a:p>
-        </p:txBody>
-      </p:sp>
-      <p:sp>
-        <p:nvSpPr>
-          <p:cNvPr id="6" name="Rectangle 5"/>
-          <p:cNvSpPr/>
-          <p:nvPr/>
-        </p:nvSpPr>
-        <p:spPr>
-          <a:xfrm>
-            <a:off x="713232" y="1828800"/>
-            <a:ext cx="64008" cy="2011680"/>
-          </a:xfrm>
-          <a:prstGeom prst="rect">
-            <a:avLst/>
-          </a:prstGeom>
-          <a:solidFill>
-            <a:srgbClr val="00AFA0"/>
-          </a:solidFill>
-          <a:ln>
-            <a:noFill/>
-          </a:ln>
-        </p:spPr>
-        <p:style>
-          <a:lnRef idx="1">
-            <a:schemeClr val="accent1"/>
-          </a:lnRef>
-          <a:fillRef idx="3">
-            <a:schemeClr val="accent1"/>
-          </a:fillRef>
-          <a:effectRef idx="2">
-            <a:schemeClr val="accent1"/>
-          </a:effectRef>
-          <a:fontRef idx="minor">
-            <a:schemeClr val="lt1"/>
-          </a:fontRef>
-        </p:style>
-        <p:txBody>
-          <a:bodyPr rtlCol="0" anchor="ctr"/>
-          <a:lstStyle/>
-          <a:p>
-            <a:pPr algn="ctr"/>
-          </a:p>
-        </p:txBody>
-      </p:sp>
-      <p:sp>
-        <p:nvSpPr>
-          <p:cNvPr id="7" name="TextBox 6"/>
-          <p:cNvSpPr txBox="1"/>
-          <p:nvPr/>
-        </p:nvSpPr>
-        <p:spPr>
-          <a:xfrm>
-            <a:off x="914400" y="1956816"/>
-            <a:ext cx="4828032" cy="347472"/>
-          </a:xfrm>
-          <a:prstGeom prst="rect">
-            <a:avLst/>
-          </a:prstGeom>
-          <a:noFill/>
-        </p:spPr>
-        <p:txBody>
-          <a:bodyPr wrap="square" lIns="18288" rIns="18288" tIns="18288" bIns="18288" anchor="ctr">
-            <a:spAutoFit/>
-          </a:bodyPr>
-          <a:lstStyle/>
-          <a:p>
-            <a:pPr algn="l">
-              <a:defRPr sz="1600" b="1">
-                <a:solidFill>
-                  <a:srgbClr val="112240"/>
-                </a:solidFill>
-                <a:latin typeface="Aptos"/>
-              </a:defRPr>
-            </a:pPr>
-            <a:r>
-              <a:t>Kontroller</a:t>
-            </a:r>
-          </a:p>
-        </p:txBody>
-      </p:sp>
-      <p:sp>
-        <p:nvSpPr>
-          <p:cNvPr id="8" name="TextBox 7"/>
-          <p:cNvSpPr txBox="1"/>
-          <p:nvPr/>
-        </p:nvSpPr>
-        <p:spPr>
-          <a:xfrm>
-            <a:off x="932688" y="2377440"/>
-            <a:ext cx="4791456" cy="1353312"/>
-          </a:xfrm>
-          <a:prstGeom prst="rect">
-            <a:avLst/>
-          </a:prstGeom>
-          <a:noFill/>
-        </p:spPr>
-        <p:txBody>
-          <a:bodyPr wrap="square" lIns="18288" rIns="18288" tIns="18288" bIns="18288" anchor="ctr">
-            <a:spAutoFit/>
-          </a:bodyPr>
-          <a:lstStyle/>
-          <a:p>
-            <a:pPr algn="l">
-              <a:defRPr sz="1200" b="0">
-                <a:solidFill>
-                  <a:srgbClr val="223045"/>
-                </a:solidFill>
-                <a:latin typeface="Aptos"/>
-              </a:defRPr>
-            </a:pPr>
-            <a:r>
-              <a:t>•  Klonlama ve tarama kullanıcı onaylıdır</a:t>
-            </a:r>
-            <a:br/>
-            <a:r>
-              <a:t>•  Düzeltme ayrı worktree'de uygulanır</a:t>
-            </a:r>
-            <a:br/>
-            <a:r>
-              <a:t>•  Test ve PR ayrı onay ister</a:t>
-            </a:r>
-            <a:br/>
-            <a:r>
-              <a:t>•  PR için yalnız beklenen dosyalar seçilir</a:t>
-            </a:r>
-          </a:p>
-        </p:txBody>
-      </p:sp>
-      <p:sp>
-        <p:nvSpPr>
-          <p:cNvPr id="9" name="Rounded Rectangle 8"/>
-          <p:cNvSpPr/>
-          <p:nvPr/>
-        </p:nvSpPr>
-        <p:spPr>
-          <a:xfrm>
-            <a:off x="6172200" y="1828800"/>
-            <a:ext cx="5212080" cy="2011680"/>
-          </a:xfrm>
-          <a:prstGeom prst="roundRect">
-            <a:avLst/>
-          </a:prstGeom>
-          <a:solidFill>
-            <a:srgbClr val="FFFFFF"/>
-          </a:solidFill>
-          <a:ln>
-            <a:noFill/>
-          </a:ln>
-        </p:spPr>
-        <p:style>
-          <a:lnRef idx="1">
-            <a:schemeClr val="accent1"/>
-          </a:lnRef>
-          <a:fillRef idx="3">
-            <a:schemeClr val="accent1"/>
-          </a:fillRef>
-          <a:effectRef idx="2">
-            <a:schemeClr val="accent1"/>
-          </a:effectRef>
-          <a:fontRef idx="minor">
-            <a:schemeClr val="lt1"/>
-          </a:fontRef>
-        </p:style>
-        <p:txBody>
-          <a:bodyPr rtlCol="0" anchor="ctr"/>
-          <a:lstStyle/>
-          <a:p>
-            <a:pPr algn="ctr"/>
-          </a:p>
-        </p:txBody>
-      </p:sp>
-      <p:sp>
-        <p:nvSpPr>
-          <p:cNvPr id="10" name="Rectangle 9"/>
-          <p:cNvSpPr/>
-          <p:nvPr/>
-        </p:nvSpPr>
-        <p:spPr>
-          <a:xfrm>
-            <a:off x="6172200" y="1828800"/>
-            <a:ext cx="64008" cy="2011680"/>
-          </a:xfrm>
-          <a:prstGeom prst="rect">
-            <a:avLst/>
-          </a:prstGeom>
-          <a:solidFill>
-            <a:srgbClr val="F8BC4A"/>
-          </a:solidFill>
-          <a:ln>
-            <a:noFill/>
-          </a:ln>
-        </p:spPr>
-        <p:style>
-          <a:lnRef idx="1">
-            <a:schemeClr val="accent1"/>
-          </a:lnRef>
-          <a:fillRef idx="3">
-            <a:schemeClr val="accent1"/>
-          </a:fillRef>
-          <a:effectRef idx="2">
-            <a:schemeClr val="accent1"/>
-          </a:effectRef>
-          <a:fontRef idx="minor">
-            <a:schemeClr val="lt1"/>
-          </a:fontRef>
-        </p:style>
-        <p:txBody>
-          <a:bodyPr rtlCol="0" anchor="ctr"/>
-          <a:lstStyle/>
-          <a:p>
-            <a:pPr algn="ctr"/>
-          </a:p>
-        </p:txBody>
-      </p:sp>
-      <p:sp>
-        <p:nvSpPr>
-          <p:cNvPr id="11" name="TextBox 10"/>
-          <p:cNvSpPr txBox="1"/>
-          <p:nvPr/>
-        </p:nvSpPr>
-        <p:spPr>
-          <a:xfrm>
-            <a:off x="6373368" y="1956816"/>
-            <a:ext cx="4828032" cy="347472"/>
-          </a:xfrm>
-          <a:prstGeom prst="rect">
-            <a:avLst/>
-          </a:prstGeom>
-          <a:noFill/>
-        </p:spPr>
-        <p:txBody>
-          <a:bodyPr wrap="square" lIns="18288" rIns="18288" tIns="18288" bIns="18288" anchor="ctr">
-            <a:spAutoFit/>
-          </a:bodyPr>
-          <a:lstStyle/>
-          <a:p>
-            <a:pPr algn="l">
-              <a:defRPr sz="1600" b="1">
-                <a:solidFill>
-                  <a:srgbClr val="112240"/>
-                </a:solidFill>
-                <a:latin typeface="Aptos"/>
-              </a:defRPr>
-            </a:pPr>
-            <a:r>
-              <a:t>Kullanım sorumluluğu</a:t>
-            </a:r>
-          </a:p>
-        </p:txBody>
-      </p:sp>
-      <p:sp>
-        <p:nvSpPr>
-          <p:cNvPr id="12" name="TextBox 11"/>
-          <p:cNvSpPr txBox="1"/>
-          <p:nvPr/>
-        </p:nvSpPr>
-        <p:spPr>
-          <a:xfrm>
-            <a:off x="6391656" y="2377440"/>
-            <a:ext cx="4791456" cy="1353312"/>
-          </a:xfrm>
-          <a:prstGeom prst="rect">
-            <a:avLst/>
-          </a:prstGeom>
-          <a:noFill/>
-        </p:spPr>
-        <p:txBody>
-          <a:bodyPr wrap="square" lIns="18288" rIns="18288" tIns="18288" bIns="18288" anchor="ctr">
-            <a:spAutoFit/>
-          </a:bodyPr>
-          <a:lstStyle/>
-          <a:p>
-            <a:pPr algn="l">
-              <a:defRPr sz="1200" b="0">
-                <a:solidFill>
-                  <a:srgbClr val="223045"/>
-                </a:solidFill>
-                <a:latin typeface="Aptos"/>
-              </a:defRPr>
-            </a:pPr>
-            <a:r>
-              <a:t>•  İndirilen kaynağın güncelliğini denetleyin</a:t>
-            </a:r>
-            <a:br/>
-            <a:r>
-              <a:t>•  Yalnız güvendiğiniz projelerde test çalıştırın</a:t>
-            </a:r>
-            <a:br/>
-            <a:r>
-              <a:t>•  Model bulgusunu hukuk uzmanına doğrulatın</a:t>
-            </a:r>
-            <a:br/>
-            <a:r>
-              <a:t>•  Gerçek depoda yedek ve temiz çalışma alanı kullanın</a:t>
-            </a:r>
-          </a:p>
-        </p:txBody>
-      </p:sp>
-      <p:sp>
-        <p:nvSpPr>
-          <p:cNvPr id="13" name="Rounded Rectangle 12"/>
-          <p:cNvSpPr/>
-          <p:nvPr/>
-        </p:nvSpPr>
-        <p:spPr>
-          <a:xfrm>
-            <a:off x="713232" y="4279392"/>
-            <a:ext cx="10671048" cy="896112"/>
-          </a:xfrm>
-          <a:prstGeom prst="roundRect">
-            <a:avLst/>
-          </a:prstGeom>
-          <a:solidFill>
-            <a:srgbClr val="FFF6DF"/>
-          </a:solidFill>
-          <a:ln>
-            <a:noFill/>
-          </a:ln>
-        </p:spPr>
-        <p:style>
-          <a:lnRef idx="1">
-            <a:schemeClr val="accent1"/>
-          </a:lnRef>
-          <a:fillRef idx="3">
-            <a:schemeClr val="accent1"/>
-          </a:fillRef>
-          <a:effectRef idx="2">
-            <a:schemeClr val="accent1"/>
-          </a:effectRef>
-          <a:fontRef idx="minor">
-            <a:schemeClr val="lt1"/>
-          </a:fontRef>
-        </p:style>
-        <p:txBody>
-          <a:bodyPr rtlCol="0" anchor="ctr"/>
-          <a:lstStyle/>
-          <a:p>
-            <a:pPr algn="ctr"/>
-          </a:p>
-        </p:txBody>
-      </p:sp>
-      <p:sp>
-        <p:nvSpPr>
-          <p:cNvPr id="14" name="TextBox 13"/>
-          <p:cNvSpPr txBox="1"/>
-          <p:nvPr/>
-        </p:nvSpPr>
-        <p:spPr>
-          <a:xfrm>
-            <a:off x="932688" y="4498848"/>
-            <a:ext cx="10195560" cy="402336"/>
-          </a:xfrm>
-          <a:prstGeom prst="rect">
-            <a:avLst/>
-          </a:prstGeom>
-          <a:noFill/>
-        </p:spPr>
-        <p:txBody>
-          <a:bodyPr wrap="square" lIns="18288" rIns="18288" tIns="18288" bIns="18288" anchor="ctr">
-            <a:spAutoFit/>
-          </a:bodyPr>
-          <a:lstStyle/>
-          <a:p>
-            <a:pPr algn="ctr">
-              <a:defRPr sz="1400" b="1">
-                <a:solidFill>
-                  <a:srgbClr val="112240"/>
-                </a:solidFill>
-                <a:latin typeface="Aptos"/>
-              </a:defRPr>
-            </a:pPr>
-            <a:r>
-              <a:t>Otomasyon kanıtı düzenler; hukuki görüş, kesin uygunluk kararı veya güvenlik sertifikası vermez.</a:t>
-            </a:r>
-          </a:p>
-        </p:txBody>
-      </p:sp>
-      <p:sp>
-        <p:nvSpPr>
-          <p:cNvPr id="15" name="TextBox 14"/>
+            <a:ext cx="10771632" cy="3889756"/>
+          </a:xfrm>
+          <a:prstGeom prst="rect">
+            <a:avLst/>
+          </a:prstGeom>
+        </p:spPr>
+      </p:pic>
+      <p:sp>
+        <p:nvSpPr>
+          <p:cNvPr id="6" name="TextBox 5"/>
           <p:cNvSpPr txBox="1"/>
           <p:nvPr/>
         </p:nvSpPr>
@@ -15692,7 +13355,7 @@
       </p:sp>
       <p:sp>
         <p:nvSpPr>
-          <p:cNvPr id="16" name="TextBox 15"/>
+          <p:cNvPr id="7" name="TextBox 6"/>
           <p:cNvSpPr txBox="1"/>
           <p:nvPr/>
         </p:nvSpPr>
@@ -15783,7 +13446,7 @@
               </a:defRPr>
             </a:pPr>
             <a:r>
-              <a:t>21  •  GEREKSINIM IZLEME</a:t>
+              <a:t>21  •  RAPOR GÖRSELI</a:t>
             </a:r>
           </a:p>
         </p:txBody>
@@ -15819,7 +13482,7 @@
               </a:defRPr>
             </a:pPr>
             <a:r>
-              <a:t>Ödev maddeleri ve uygulamadaki karşılıkları</a:t>
+              <a:t>HTML tarama raporu: bulgu ve kod kanıtı</a:t>
             </a:r>
           </a:p>
         </p:txBody>
@@ -15855,778 +13518,35 @@
               </a:defRPr>
             </a:pPr>
             <a:r>
-              <a:t>Maddeler, konuşmada verilen dokuz gereksinim üzerinden eşleştirilmiştir.</a:t>
-            </a:r>
-          </a:p>
-        </p:txBody>
-      </p:sp>
-      <p:graphicFrame>
-        <p:nvGraphicFramePr>
-          <p:cNvPr id="5" name="Table 4"/>
-          <p:cNvGraphicFramePr>
-            <a:graphicFrameLocks noGrp="1"/>
-          </p:cNvGraphicFramePr>
-          <p:nvPr/>
-        </p:nvGraphicFramePr>
-        <p:xfrm>
-          <a:off x="713232" y="1755648"/>
-          <a:ext cx="10753344" cy="4343400"/>
-        </p:xfrm>
-        <a:graphic>
-          <a:graphicData uri="http://schemas.openxmlformats.org/drawingml/2006/table">
-            <a:tbl>
-              <a:tblPr firstRow="1" bandRow="1">
-                <a:tableStyleId>{5C22544A-7EE6-4342-B048-85BDC9FD1C3A}</a:tableStyleId>
-              </a:tblPr>
-              <a:tblGrid>
-                <a:gridCol w="594360"/>
-                <a:gridCol w="4069080"/>
-                <a:gridCol w="6089904"/>
-              </a:tblGrid>
-              <a:tr h="434340">
-                <a:tc>
-                  <a:txBody>
-                    <a:bodyPr/>
-                    <a:lstStyle/>
-                    <a:p>
-                      <a:pPr>
-                        <a:defRPr sz="1200" b="1">
-                          <a:solidFill>
-                            <a:srgbClr val="FFFFFF"/>
-                          </a:solidFill>
-                          <a:latin typeface="Aptos"/>
-                        </a:defRPr>
-                      </a:pPr>
-                      <a:r>
-                        <a:t>No</a:t>
-                      </a:r>
-                    </a:p>
-                  </a:txBody>
-                  <a:tcPr marL="91440" marR="73152" marT="32004" marB="18288">
-                    <a:solidFill>
-                      <a:srgbClr val="112240"/>
-                    </a:solidFill>
-                  </a:tcPr>
-                </a:tc>
-                <a:tc>
-                  <a:txBody>
-                    <a:bodyPr/>
-                    <a:lstStyle/>
-                    <a:p>
-                      <a:pPr>
-                        <a:defRPr sz="1200" b="1">
-                          <a:solidFill>
-                            <a:srgbClr val="FFFFFF"/>
-                          </a:solidFill>
-                          <a:latin typeface="Aptos"/>
-                        </a:defRPr>
-                      </a:pPr>
-                      <a:r>
-                        <a:t>Gereksinim</a:t>
-                      </a:r>
-                    </a:p>
-                  </a:txBody>
-                  <a:tcPr marL="91440" marR="73152" marT="32004" marB="18288">
-                    <a:solidFill>
-                      <a:srgbClr val="112240"/>
-                    </a:solidFill>
-                  </a:tcPr>
-                </a:tc>
-                <a:tc>
-                  <a:txBody>
-                    <a:bodyPr/>
-                    <a:lstStyle/>
-                    <a:p>
-                      <a:pPr>
-                        <a:defRPr sz="1200" b="1">
-                          <a:solidFill>
-                            <a:srgbClr val="FFFFFF"/>
-                          </a:solidFill>
-                          <a:latin typeface="Aptos"/>
-                        </a:defRPr>
-                      </a:pPr>
-                      <a:r>
-                        <a:t>Uygulamadaki karşılık</a:t>
-                      </a:r>
-                    </a:p>
-                  </a:txBody>
-                  <a:tcPr marL="91440" marR="73152" marT="32004" marB="18288">
-                    <a:solidFill>
-                      <a:srgbClr val="112240"/>
-                    </a:solidFill>
-                  </a:tcPr>
-                </a:tc>
-              </a:tr>
-              <a:tr h="434340">
-                <a:tc>
-                  <a:txBody>
-                    <a:bodyPr/>
-                    <a:lstStyle/>
-                    <a:p>
-                      <a:pPr>
-                        <a:defRPr sz="1100" b="0">
-                          <a:solidFill>
-                            <a:srgbClr val="223045"/>
-                          </a:solidFill>
-                          <a:latin typeface="Aptos"/>
-                        </a:defRPr>
-                      </a:pPr>
-                      <a:r>
-                        <a:t>1</a:t>
-                      </a:r>
-                    </a:p>
-                  </a:txBody>
-                  <a:tcPr marL="91440" marR="73152" marT="32004" marB="18288">
-                    <a:solidFill>
-                      <a:srgbClr val="FFFFFF"/>
-                    </a:solidFill>
-                  </a:tcPr>
-                </a:tc>
-                <a:tc>
-                  <a:txBody>
-                    <a:bodyPr/>
-                    <a:lstStyle/>
-                    <a:p>
-                      <a:pPr>
-                        <a:defRPr sz="1100" b="0">
-                          <a:solidFill>
-                            <a:srgbClr val="223045"/>
-                          </a:solidFill>
-                          <a:latin typeface="Aptos"/>
-                        </a:defRPr>
-                      </a:pPr>
-                      <a:r>
-                        <a:t>Python/PyCharm • sohbet • Ollama • LangChain</a:t>
-                      </a:r>
-                    </a:p>
-                  </a:txBody>
-                  <a:tcPr marL="91440" marR="73152" marT="32004" marB="18288">
-                    <a:solidFill>
-                      <a:srgbClr val="FFFFFF"/>
-                    </a:solidFill>
-                  </a:tcPr>
-                </a:tc>
-                <a:tc>
-                  <a:txBody>
-                    <a:bodyPr/>
-                    <a:lstStyle/>
-                    <a:p>
-                      <a:pPr>
-                        <a:defRPr sz="1100" b="0">
-                          <a:solidFill>
-                            <a:srgbClr val="223045"/>
-                          </a:solidFill>
-                          <a:latin typeface="Aptos"/>
-                        </a:defRPr>
-                      </a:pPr>
-                      <a:r>
-                        <a:t>Proje promptu, yerel sohbet ve Runnable zinciri</a:t>
-                      </a:r>
-                    </a:p>
-                  </a:txBody>
-                  <a:tcPr marL="91440" marR="73152" marT="32004" marB="18288">
-                    <a:solidFill>
-                      <a:srgbClr val="FFFFFF"/>
-                    </a:solidFill>
-                  </a:tcPr>
-                </a:tc>
-              </a:tr>
-              <a:tr h="434340">
-                <a:tc>
-                  <a:txBody>
-                    <a:bodyPr/>
-                    <a:lstStyle/>
-                    <a:p>
-                      <a:pPr>
-                        <a:defRPr sz="1100" b="0">
-                          <a:solidFill>
-                            <a:srgbClr val="223045"/>
-                          </a:solidFill>
-                          <a:latin typeface="Aptos"/>
-                        </a:defRPr>
-                      </a:pPr>
-                      <a:r>
-                        <a:t>2</a:t>
-                      </a:r>
-                    </a:p>
-                  </a:txBody>
-                  <a:tcPr marL="91440" marR="73152" marT="32004" marB="18288">
-                    <a:solidFill>
-                      <a:srgbClr val="E7F0FA"/>
-                    </a:solidFill>
-                  </a:tcPr>
-                </a:tc>
-                <a:tc>
-                  <a:txBody>
-                    <a:bodyPr/>
-                    <a:lstStyle/>
-                    <a:p>
-                      <a:pPr>
-                        <a:defRPr sz="1100" b="0">
-                          <a:solidFill>
-                            <a:srgbClr val="223045"/>
-                          </a:solidFill>
-                          <a:latin typeface="Aptos"/>
-                        </a:defRPr>
-                      </a:pPr>
-                      <a:r>
-                        <a:t>mevzuat_link.json'dan indirme</a:t>
-                      </a:r>
-                    </a:p>
-                  </a:txBody>
-                  <a:tcPr marL="91440" marR="73152" marT="32004" marB="18288">
-                    <a:solidFill>
-                      <a:srgbClr val="E7F0FA"/>
-                    </a:solidFill>
-                  </a:tcPr>
-                </a:tc>
-                <a:tc>
-                  <a:txBody>
-                    <a:bodyPr/>
-                    <a:lstStyle/>
-                    <a:p>
-                      <a:pPr>
-                        <a:defRPr sz="1100" b="0">
-                          <a:solidFill>
-                            <a:srgbClr val="223045"/>
-                          </a:solidFill>
-                          <a:latin typeface="Aptos"/>
-                        </a:defRPr>
-                      </a:pPr>
-                      <a:r>
-                        <a:t>download_mevzuat aracı</a:t>
-                      </a:r>
-                    </a:p>
-                  </a:txBody>
-                  <a:tcPr marL="91440" marR="73152" marT="32004" marB="18288">
-                    <a:solidFill>
-                      <a:srgbClr val="E7F0FA"/>
-                    </a:solidFill>
-                  </a:tcPr>
-                </a:tc>
-              </a:tr>
-              <a:tr h="434340">
-                <a:tc>
-                  <a:txBody>
-                    <a:bodyPr/>
-                    <a:lstStyle/>
-                    <a:p>
-                      <a:pPr>
-                        <a:defRPr sz="1100" b="0">
-                          <a:solidFill>
-                            <a:srgbClr val="223045"/>
-                          </a:solidFill>
-                          <a:latin typeface="Aptos"/>
-                        </a:defRPr>
-                      </a:pPr>
-                      <a:r>
-                        <a:t>3</a:t>
-                      </a:r>
-                    </a:p>
-                  </a:txBody>
-                  <a:tcPr marL="91440" marR="73152" marT="32004" marB="18288">
-                    <a:solidFill>
-                      <a:srgbClr val="FFFFFF"/>
-                    </a:solidFill>
-                  </a:tcPr>
-                </a:tc>
-                <a:tc>
-                  <a:txBody>
-                    <a:bodyPr/>
-                    <a:lstStyle/>
-                    <a:p>
-                      <a:pPr>
-                        <a:defRPr sz="1100" b="0">
-                          <a:solidFill>
-                            <a:srgbClr val="223045"/>
-                          </a:solidFill>
-                          <a:latin typeface="Aptos"/>
-                        </a:defRPr>
-                      </a:pPr>
-                      <a:r>
-                        <a:t>Orta boy RAG parçaları</a:t>
-                      </a:r>
-                    </a:p>
-                  </a:txBody>
-                  <a:tcPr marL="91440" marR="73152" marT="32004" marB="18288">
-                    <a:solidFill>
-                      <a:srgbClr val="FFFFFF"/>
-                    </a:solidFill>
-                  </a:tcPr>
-                </a:tc>
-                <a:tc>
-                  <a:txBody>
-                    <a:bodyPr/>
-                    <a:lstStyle/>
-                    <a:p>
-                      <a:pPr>
-                        <a:defRPr sz="1100" b="0">
-                          <a:solidFill>
-                            <a:srgbClr val="223045"/>
-                          </a:solidFill>
-                          <a:latin typeface="Aptos"/>
-                        </a:defRPr>
-                      </a:pPr>
-                      <a:r>
-                        <a:t>1.200 karakter • 200 örtüşme • BM25</a:t>
-                      </a:r>
-                    </a:p>
-                  </a:txBody>
-                  <a:tcPr marL="91440" marR="73152" marT="32004" marB="18288">
-                    <a:solidFill>
-                      <a:srgbClr val="FFFFFF"/>
-                    </a:solidFill>
-                  </a:tcPr>
-                </a:tc>
-              </a:tr>
-              <a:tr h="434340">
-                <a:tc>
-                  <a:txBody>
-                    <a:bodyPr/>
-                    <a:lstStyle/>
-                    <a:p>
-                      <a:pPr>
-                        <a:defRPr sz="1100" b="0">
-                          <a:solidFill>
-                            <a:srgbClr val="223045"/>
-                          </a:solidFill>
-                          <a:latin typeface="Aptos"/>
-                        </a:defRPr>
-                      </a:pPr>
-                      <a:r>
-                        <a:t>4</a:t>
-                      </a:r>
-                    </a:p>
-                  </a:txBody>
-                  <a:tcPr marL="91440" marR="73152" marT="32004" marB="18288">
-                    <a:solidFill>
-                      <a:srgbClr val="E7F0FA"/>
-                    </a:solidFill>
-                  </a:tcPr>
-                </a:tc>
-                <a:tc>
-                  <a:txBody>
-                    <a:bodyPr/>
-                    <a:lstStyle/>
-                    <a:p>
-                      <a:pPr>
-                        <a:defRPr sz="1100" b="0">
-                          <a:solidFill>
-                            <a:srgbClr val="223045"/>
-                          </a:solidFill>
-                          <a:latin typeface="Aptos"/>
-                        </a:defRPr>
-                      </a:pPr>
-                      <a:r>
-                        <a:t>Onaylı depo klonlama</a:t>
-                      </a:r>
-                    </a:p>
-                  </a:txBody>
-                  <a:tcPr marL="91440" marR="73152" marT="32004" marB="18288">
-                    <a:solidFill>
-                      <a:srgbClr val="E7F0FA"/>
-                    </a:solidFill>
-                  </a:tcPr>
-                </a:tc>
-                <a:tc>
-                  <a:txBody>
-                    <a:bodyPr/>
-                    <a:lstStyle/>
-                    <a:p>
-                      <a:pPr>
-                        <a:defRPr sz="1100" b="0">
-                          <a:solidFill>
-                            <a:srgbClr val="223045"/>
-                          </a:solidFill>
-                          <a:latin typeface="Aptos"/>
-                        </a:defRPr>
-                      </a:pPr>
-                      <a:r>
-                        <a:t>clone_repositories + sohbet/pipeline onayı</a:t>
-                      </a:r>
-                    </a:p>
-                  </a:txBody>
-                  <a:tcPr marL="91440" marR="73152" marT="32004" marB="18288">
-                    <a:solidFill>
-                      <a:srgbClr val="E7F0FA"/>
-                    </a:solidFill>
-                  </a:tcPr>
-                </a:tc>
-              </a:tr>
-              <a:tr h="434340">
-                <a:tc>
-                  <a:txBody>
-                    <a:bodyPr/>
-                    <a:lstStyle/>
-                    <a:p>
-                      <a:pPr>
-                        <a:defRPr sz="1100" b="0">
-                          <a:solidFill>
-                            <a:srgbClr val="223045"/>
-                          </a:solidFill>
-                          <a:latin typeface="Aptos"/>
-                        </a:defRPr>
-                      </a:pPr>
-                      <a:r>
-                        <a:t>5</a:t>
-                      </a:r>
-                    </a:p>
-                  </a:txBody>
-                  <a:tcPr marL="91440" marR="73152" marT="32004" marB="18288">
-                    <a:solidFill>
-                      <a:srgbClr val="FFFFFF"/>
-                    </a:solidFill>
-                  </a:tcPr>
-                </a:tc>
-                <a:tc>
-                  <a:txBody>
-                    <a:bodyPr/>
-                    <a:lstStyle/>
-                    <a:p>
-                      <a:pPr>
-                        <a:defRPr sz="1100" b="0">
-                          <a:solidFill>
-                            <a:srgbClr val="223045"/>
-                          </a:solidFill>
-                          <a:latin typeface="Aptos"/>
-                        </a:defRPr>
-                      </a:pPr>
-                      <a:r>
-                        <a:t>Model havuzu tahmini</a:t>
-                      </a:r>
-                    </a:p>
-                  </a:txBody>
-                  <a:tcPr marL="91440" marR="73152" marT="32004" marB="18288">
-                    <a:solidFill>
-                      <a:srgbClr val="FFFFFF"/>
-                    </a:solidFill>
-                  </a:tcPr>
-                </a:tc>
-                <a:tc>
-                  <a:txBody>
-                    <a:bodyPr/>
-                    <a:lstStyle/>
-                    <a:p>
-                      <a:pPr>
-                        <a:defRPr sz="1100" b="0">
-                          <a:solidFill>
-                            <a:srgbClr val="223045"/>
-                          </a:solidFill>
-                          <a:latin typeface="Aptos"/>
-                        </a:defRPr>
-                      </a:pPr>
-                      <a:r>
-                        <a:t>Kurulu modelleri ölç • hızlıyı öner</a:t>
-                      </a:r>
-                    </a:p>
-                  </a:txBody>
-                  <a:tcPr marL="91440" marR="73152" marT="32004" marB="18288">
-                    <a:solidFill>
-                      <a:srgbClr val="FFFFFF"/>
-                    </a:solidFill>
-                  </a:tcPr>
-                </a:tc>
-              </a:tr>
-              <a:tr h="434340">
-                <a:tc>
-                  <a:txBody>
-                    <a:bodyPr/>
-                    <a:lstStyle/>
-                    <a:p>
-                      <a:pPr>
-                        <a:defRPr sz="1100" b="0">
-                          <a:solidFill>
-                            <a:srgbClr val="223045"/>
-                          </a:solidFill>
-                          <a:latin typeface="Aptos"/>
-                        </a:defRPr>
-                      </a:pPr>
-                      <a:r>
-                        <a:t>6</a:t>
-                      </a:r>
-                    </a:p>
-                  </a:txBody>
-                  <a:tcPr marL="91440" marR="73152" marT="32004" marB="18288">
-                    <a:solidFill>
-                      <a:srgbClr val="E7F0FA"/>
-                    </a:solidFill>
-                  </a:tcPr>
-                </a:tc>
-                <a:tc>
-                  <a:txBody>
-                    <a:bodyPr/>
-                    <a:lstStyle/>
-                    <a:p>
-                      <a:pPr>
-                        <a:defRPr sz="1100" b="0">
-                          <a:solidFill>
-                            <a:srgbClr val="223045"/>
-                          </a:solidFill>
-                          <a:latin typeface="Aptos"/>
-                        </a:defRPr>
-                      </a:pPr>
-                      <a:r>
-                        <a:t>Tahmin sonrası onaylı tarama</a:t>
-                      </a:r>
-                    </a:p>
-                  </a:txBody>
-                  <a:tcPr marL="91440" marR="73152" marT="32004" marB="18288">
-                    <a:solidFill>
-                      <a:srgbClr val="E7F0FA"/>
-                    </a:solidFill>
-                  </a:tcPr>
-                </a:tc>
-                <a:tc>
-                  <a:txBody>
-                    <a:bodyPr/>
-                    <a:lstStyle/>
-                    <a:p>
-                      <a:pPr>
-                        <a:defRPr sz="1100" b="0">
-                          <a:solidFill>
-                            <a:srgbClr val="223045"/>
-                          </a:solidFill>
-                          <a:latin typeface="Aptos"/>
-                        </a:defRPr>
-                      </a:pPr>
-                      <a:r>
-                        <a:t>Seçilen model/kapsam onayı</a:t>
-                      </a:r>
-                    </a:p>
-                  </a:txBody>
-                  <a:tcPr marL="91440" marR="73152" marT="32004" marB="18288">
-                    <a:solidFill>
-                      <a:srgbClr val="E7F0FA"/>
-                    </a:solidFill>
-                  </a:tcPr>
-                </a:tc>
-              </a:tr>
-              <a:tr h="434340">
-                <a:tc>
-                  <a:txBody>
-                    <a:bodyPr/>
-                    <a:lstStyle/>
-                    <a:p>
-                      <a:pPr>
-                        <a:defRPr sz="1100" b="0">
-                          <a:solidFill>
-                            <a:srgbClr val="223045"/>
-                          </a:solidFill>
-                          <a:latin typeface="Aptos"/>
-                        </a:defRPr>
-                      </a:pPr>
-                      <a:r>
-                        <a:t>7</a:t>
-                      </a:r>
-                    </a:p>
-                  </a:txBody>
-                  <a:tcPr marL="91440" marR="73152" marT="32004" marB="18288">
-                    <a:solidFill>
-                      <a:srgbClr val="FFFFFF"/>
-                    </a:solidFill>
-                  </a:tcPr>
-                </a:tc>
-                <a:tc>
-                  <a:txBody>
-                    <a:bodyPr/>
-                    <a:lstStyle/>
-                    <a:p>
-                      <a:pPr>
-                        <a:defRPr sz="1100" b="0">
-                          <a:solidFill>
-                            <a:srgbClr val="223045"/>
-                          </a:solidFill>
-                          <a:latin typeface="Aptos"/>
-                        </a:defRPr>
-                      </a:pPr>
-                      <a:r>
-                        <a:t>MD ve HTML tarama raporu</a:t>
-                      </a:r>
-                    </a:p>
-                  </a:txBody>
-                  <a:tcPr marL="91440" marR="73152" marT="32004" marB="18288">
-                    <a:solidFill>
-                      <a:srgbClr val="FFFFFF"/>
-                    </a:solidFill>
-                  </a:tcPr>
-                </a:tc>
-                <a:tc>
-                  <a:txBody>
-                    <a:bodyPr/>
-                    <a:lstStyle/>
-                    <a:p>
-                      <a:pPr>
-                        <a:defRPr sz="1100" b="0">
-                          <a:solidFill>
-                            <a:srgbClr val="223045"/>
-                          </a:solidFill>
-                          <a:latin typeface="Aptos"/>
-                        </a:defRPr>
-                      </a:pPr>
-                      <a:r>
-                        <a:t>Bulgular, kanıt, dosya sonucu, sınır</a:t>
-                      </a:r>
-                    </a:p>
-                  </a:txBody>
-                  <a:tcPr marL="91440" marR="73152" marT="32004" marB="18288">
-                    <a:solidFill>
-                      <a:srgbClr val="FFFFFF"/>
-                    </a:solidFill>
-                  </a:tcPr>
-                </a:tc>
-              </a:tr>
-              <a:tr h="434340">
-                <a:tc>
-                  <a:txBody>
-                    <a:bodyPr/>
-                    <a:lstStyle/>
-                    <a:p>
-                      <a:pPr>
-                        <a:defRPr sz="1100" b="0">
-                          <a:solidFill>
-                            <a:srgbClr val="223045"/>
-                          </a:solidFill>
-                          <a:latin typeface="Aptos"/>
-                        </a:defRPr>
-                      </a:pPr>
-                      <a:r>
-                        <a:t>8</a:t>
-                      </a:r>
-                    </a:p>
-                  </a:txBody>
-                  <a:tcPr marL="91440" marR="73152" marT="32004" marB="18288">
-                    <a:solidFill>
-                      <a:srgbClr val="E7F0FA"/>
-                    </a:solidFill>
-                  </a:tcPr>
-                </a:tc>
-                <a:tc>
-                  <a:txBody>
-                    <a:bodyPr/>
-                    <a:lstStyle/>
-                    <a:p>
-                      <a:pPr>
-                        <a:defRPr sz="1100" b="0">
-                          <a:solidFill>
-                            <a:srgbClr val="223045"/>
-                          </a:solidFill>
-                          <a:latin typeface="Aptos"/>
-                        </a:defRPr>
-                      </a:pPr>
-                      <a:r>
-                        <a:t>İlk iki bulguyu iyileştir</a:t>
-                      </a:r>
-                    </a:p>
-                  </a:txBody>
-                  <a:tcPr marL="91440" marR="73152" marT="32004" marB="18288">
-                    <a:solidFill>
-                      <a:srgbClr val="E7F0FA"/>
-                    </a:solidFill>
-                  </a:tcPr>
-                </a:tc>
-                <a:tc>
-                  <a:txBody>
-                    <a:bodyPr/>
-                    <a:lstStyle/>
-                    <a:p>
-                      <a:pPr>
-                        <a:defRPr sz="1100" b="0">
-                          <a:solidFill>
-                            <a:srgbClr val="223045"/>
-                          </a:solidFill>
-                          <a:latin typeface="Aptos"/>
-                        </a:defRPr>
-                      </a:pPr>
-                      <a:r>
-                        <a:t>Öneri • diff raporu • izole worktree</a:t>
-                      </a:r>
-                    </a:p>
-                  </a:txBody>
-                  <a:tcPr marL="91440" marR="73152" marT="32004" marB="18288">
-                    <a:solidFill>
-                      <a:srgbClr val="E7F0FA"/>
-                    </a:solidFill>
-                  </a:tcPr>
-                </a:tc>
-              </a:tr>
-              <a:tr h="434340">
-                <a:tc>
-                  <a:txBody>
-                    <a:bodyPr/>
-                    <a:lstStyle/>
-                    <a:p>
-                      <a:pPr>
-                        <a:defRPr sz="1100" b="0">
-                          <a:solidFill>
-                            <a:srgbClr val="223045"/>
-                          </a:solidFill>
-                          <a:latin typeface="Aptos"/>
-                        </a:defRPr>
-                      </a:pPr>
-                      <a:r>
-                        <a:t>9</a:t>
-                      </a:r>
-                    </a:p>
-                  </a:txBody>
-                  <a:tcPr marL="91440" marR="73152" marT="32004" marB="18288">
-                    <a:solidFill>
-                      <a:srgbClr val="FFFFFF"/>
-                    </a:solidFill>
-                  </a:tcPr>
-                </a:tc>
-                <a:tc>
-                  <a:txBody>
-                    <a:bodyPr/>
-                    <a:lstStyle/>
-                    <a:p>
-                      <a:pPr>
-                        <a:defRPr sz="1100" b="0">
-                          <a:solidFill>
-                            <a:srgbClr val="223045"/>
-                          </a:solidFill>
-                          <a:latin typeface="Aptos"/>
-                        </a:defRPr>
-                      </a:pPr>
-                      <a:r>
-                        <a:t>Top iki bulgu için GitHub PR</a:t>
-                      </a:r>
-                    </a:p>
-                  </a:txBody>
-                  <a:tcPr marL="91440" marR="73152" marT="32004" marB="18288">
-                    <a:solidFill>
-                      <a:srgbClr val="FFFFFF"/>
-                    </a:solidFill>
-                  </a:tcPr>
-                </a:tc>
-                <a:tc>
-                  <a:txBody>
-                    <a:bodyPr/>
-                    <a:lstStyle/>
-                    <a:p>
-                      <a:pPr>
-                        <a:defRPr sz="1100" b="0">
-                          <a:solidFill>
-                            <a:srgbClr val="223045"/>
-                          </a:solidFill>
-                          <a:latin typeface="Aptos"/>
-                        </a:defRPr>
-                      </a:pPr>
-                      <a:r>
-                        <a:t>Test onayı • son PR onayı • gh</a:t>
-                      </a:r>
-                    </a:p>
-                  </a:txBody>
-                  <a:tcPr marL="91440" marR="73152" marT="32004" marB="18288">
-                    <a:solidFill>
-                      <a:srgbClr val="FFFFFF"/>
-                    </a:solidFill>
-                  </a:tcPr>
-                </a:tc>
-              </a:tr>
-            </a:tbl>
-          </a:graphicData>
-        </a:graphic>
-      </p:graphicFrame>
+              <a:t>İki sentetik E2E bulgusu; rapor örneğidir, canlı model taramasıyla karıştırılmamalıdır.</a:t>
+            </a:r>
+          </a:p>
+        </p:txBody>
+      </p:sp>
+      <p:pic>
+        <p:nvPicPr>
+          <p:cNvPr id="5" name="Picture 4" descr="scan_report_preview.png"/>
+          <p:cNvPicPr>
+            <a:picLocks noChangeAspect="1"/>
+          </p:cNvPicPr>
+          <p:nvPr/>
+        </p:nvPicPr>
+        <p:blipFill>
+          <a:blip r:embed="rId2"/>
+          <a:stretch>
+            <a:fillRect/>
+          </a:stretch>
+        </p:blipFill>
+        <p:spPr>
+          <a:xfrm>
+            <a:off x="713232" y="1828800"/>
+            <a:ext cx="10771632" cy="4308653"/>
+          </a:xfrm>
+          <a:prstGeom prst="rect">
+            <a:avLst/>
+          </a:prstGeom>
+        </p:spPr>
+      </p:pic>
       <p:sp>
         <p:nvSpPr>
           <p:cNvPr id="6" name="TextBox 5"/>
@@ -16756,7 +13676,7 @@
               </a:defRPr>
             </a:pPr>
             <a:r>
-              <a:t>22  •  BILINEN SINIRLAMALAR</a:t>
+              <a:t>22  •  TERMINAL ÇIKTISI</a:t>
             </a:r>
           </a:p>
         </p:txBody>
@@ -16792,7 +13712,7 @@
               </a:defRPr>
             </a:pPr>
             <a:r>
-              <a:t>Tamamlanan iş ve sonraki geliştirme alanları</a:t>
+              <a:t>Remediation kod farkı</a:t>
             </a:r>
           </a:p>
         </p:txBody>
@@ -16828,433 +13748,38 @@
               </a:defRPr>
             </a:pPr>
             <a:r>
-              <a:t>Kapsamı dürüstçe ayırmak, model çıktısına gereğinden fazla güvenilmesini önler.</a:t>
-            </a:r>
-          </a:p>
-        </p:txBody>
-      </p:sp>
-      <p:sp>
-        <p:nvSpPr>
-          <p:cNvPr id="5" name="Rounded Rectangle 4"/>
-          <p:cNvSpPr/>
-          <p:nvPr/>
-        </p:nvSpPr>
-        <p:spPr>
-          <a:xfrm>
-            <a:off x="713232" y="1847088"/>
-            <a:ext cx="5230368" cy="2423160"/>
-          </a:xfrm>
-          <a:prstGeom prst="roundRect">
-            <a:avLst/>
-          </a:prstGeom>
-          <a:solidFill>
-            <a:srgbClr val="FFFFFF"/>
-          </a:solidFill>
-          <a:ln>
-            <a:noFill/>
-          </a:ln>
-        </p:spPr>
-        <p:style>
-          <a:lnRef idx="1">
-            <a:schemeClr val="accent1"/>
-          </a:lnRef>
-          <a:fillRef idx="3">
-            <a:schemeClr val="accent1"/>
-          </a:fillRef>
-          <a:effectRef idx="2">
-            <a:schemeClr val="accent1"/>
-          </a:effectRef>
-          <a:fontRef idx="minor">
-            <a:schemeClr val="lt1"/>
-          </a:fontRef>
-        </p:style>
-        <p:txBody>
-          <a:bodyPr rtlCol="0" anchor="ctr"/>
-          <a:lstStyle/>
-          <a:p>
-            <a:pPr algn="ctr"/>
-          </a:p>
-        </p:txBody>
-      </p:sp>
-      <p:sp>
-        <p:nvSpPr>
-          <p:cNvPr id="6" name="Rectangle 5"/>
-          <p:cNvSpPr/>
-          <p:nvPr/>
-        </p:nvSpPr>
-        <p:spPr>
-          <a:xfrm>
-            <a:off x="713232" y="1847088"/>
-            <a:ext cx="64008" cy="2423160"/>
-          </a:xfrm>
-          <a:prstGeom prst="rect">
-            <a:avLst/>
-          </a:prstGeom>
-          <a:solidFill>
-            <a:srgbClr val="00AFA0"/>
-          </a:solidFill>
-          <a:ln>
-            <a:noFill/>
-          </a:ln>
-        </p:spPr>
-        <p:style>
-          <a:lnRef idx="1">
-            <a:schemeClr val="accent1"/>
-          </a:lnRef>
-          <a:fillRef idx="3">
-            <a:schemeClr val="accent1"/>
-          </a:fillRef>
-          <a:effectRef idx="2">
-            <a:schemeClr val="accent1"/>
-          </a:effectRef>
-          <a:fontRef idx="minor">
-            <a:schemeClr val="lt1"/>
-          </a:fontRef>
-        </p:style>
-        <p:txBody>
-          <a:bodyPr rtlCol="0" anchor="ctr"/>
-          <a:lstStyle/>
-          <a:p>
-            <a:pPr algn="ctr"/>
-          </a:p>
-        </p:txBody>
-      </p:sp>
-      <p:sp>
-        <p:nvSpPr>
-          <p:cNvPr id="7" name="TextBox 6"/>
-          <p:cNvSpPr txBox="1"/>
-          <p:nvPr/>
-        </p:nvSpPr>
-        <p:spPr>
-          <a:xfrm>
-            <a:off x="914400" y="1975104"/>
-            <a:ext cx="4846320" cy="347472"/>
-          </a:xfrm>
-          <a:prstGeom prst="rect">
-            <a:avLst/>
-          </a:prstGeom>
-          <a:noFill/>
-        </p:spPr>
-        <p:txBody>
-          <a:bodyPr wrap="square" lIns="18288" rIns="18288" tIns="18288" bIns="18288" anchor="ctr">
-            <a:spAutoFit/>
-          </a:bodyPr>
-          <a:lstStyle/>
-          <a:p>
-            <a:pPr algn="l">
-              <a:defRPr sz="1600" b="1">
-                <a:solidFill>
-                  <a:srgbClr val="112240"/>
-                </a:solidFill>
-                <a:latin typeface="Aptos"/>
-              </a:defRPr>
-            </a:pPr>
-            <a:r>
-              <a:t>Uygulanan</a:t>
-            </a:r>
-          </a:p>
-        </p:txBody>
-      </p:sp>
-      <p:sp>
-        <p:nvSpPr>
-          <p:cNvPr id="8" name="TextBox 7"/>
-          <p:cNvSpPr txBox="1"/>
-          <p:nvPr/>
-        </p:nvSpPr>
-        <p:spPr>
-          <a:xfrm>
-            <a:off x="932688" y="2395728"/>
-            <a:ext cx="4809744" cy="1764792"/>
-          </a:xfrm>
-          <a:prstGeom prst="rect">
-            <a:avLst/>
-          </a:prstGeom>
-          <a:noFill/>
-        </p:spPr>
-        <p:txBody>
-          <a:bodyPr wrap="square" lIns="18288" rIns="18288" tIns="18288" bIns="18288" anchor="ctr">
-            <a:spAutoFit/>
-          </a:bodyPr>
-          <a:lstStyle/>
-          <a:p>
-            <a:pPr algn="l">
-              <a:defRPr sz="1200" b="0">
-                <a:solidFill>
-                  <a:srgbClr val="223045"/>
-                </a:solidFill>
-                <a:latin typeface="Aptos"/>
-              </a:defRPr>
-            </a:pPr>
-            <a:r>
-              <a:t>•  PDF indirme ve sayfa metnini parçalama</a:t>
-            </a:r>
-            <a:br/>
-            <a:r>
-              <a:t>•  BM25 ile yerel mevzuat araması</a:t>
-            </a:r>
-            <a:br/>
-            <a:r>
-              <a:t>•  Onaylı tarama ve MD/HTML rapor</a:t>
-            </a:r>
-            <a:br/>
-            <a:r>
-              <a:t>•  İzole düzeltme, test ve PR akışları</a:t>
-            </a:r>
-          </a:p>
-        </p:txBody>
-      </p:sp>
-      <p:sp>
-        <p:nvSpPr>
-          <p:cNvPr id="9" name="Rounded Rectangle 8"/>
-          <p:cNvSpPr/>
-          <p:nvPr/>
-        </p:nvSpPr>
-        <p:spPr>
-          <a:xfrm>
-            <a:off x="6144768" y="1847088"/>
-            <a:ext cx="5230368" cy="2423160"/>
-          </a:xfrm>
-          <a:prstGeom prst="roundRect">
-            <a:avLst/>
-          </a:prstGeom>
-          <a:solidFill>
-            <a:srgbClr val="FFFFFF"/>
-          </a:solidFill>
-          <a:ln>
-            <a:noFill/>
-          </a:ln>
-        </p:spPr>
-        <p:style>
-          <a:lnRef idx="1">
-            <a:schemeClr val="accent1"/>
-          </a:lnRef>
-          <a:fillRef idx="3">
-            <a:schemeClr val="accent1"/>
-          </a:fillRef>
-          <a:effectRef idx="2">
-            <a:schemeClr val="accent1"/>
-          </a:effectRef>
-          <a:fontRef idx="minor">
-            <a:schemeClr val="lt1"/>
-          </a:fontRef>
-        </p:style>
-        <p:txBody>
-          <a:bodyPr rtlCol="0" anchor="ctr"/>
-          <a:lstStyle/>
-          <a:p>
-            <a:pPr algn="ctr"/>
-          </a:p>
-        </p:txBody>
-      </p:sp>
-      <p:sp>
-        <p:nvSpPr>
-          <p:cNvPr id="10" name="Rectangle 9"/>
-          <p:cNvSpPr/>
-          <p:nvPr/>
-        </p:nvSpPr>
-        <p:spPr>
-          <a:xfrm>
-            <a:off x="6144768" y="1847088"/>
-            <a:ext cx="64008" cy="2423160"/>
-          </a:xfrm>
-          <a:prstGeom prst="rect">
-            <a:avLst/>
-          </a:prstGeom>
-          <a:solidFill>
-            <a:srgbClr val="F8BC4A"/>
-          </a:solidFill>
-          <a:ln>
-            <a:noFill/>
-          </a:ln>
-        </p:spPr>
-        <p:style>
-          <a:lnRef idx="1">
-            <a:schemeClr val="accent1"/>
-          </a:lnRef>
-          <a:fillRef idx="3">
-            <a:schemeClr val="accent1"/>
-          </a:fillRef>
-          <a:effectRef idx="2">
-            <a:schemeClr val="accent1"/>
-          </a:effectRef>
-          <a:fontRef idx="minor">
-            <a:schemeClr val="lt1"/>
-          </a:fontRef>
-        </p:style>
-        <p:txBody>
-          <a:bodyPr rtlCol="0" anchor="ctr"/>
-          <a:lstStyle/>
-          <a:p>
-            <a:pPr algn="ctr"/>
-          </a:p>
-        </p:txBody>
-      </p:sp>
-      <p:sp>
-        <p:nvSpPr>
-          <p:cNvPr id="11" name="TextBox 10"/>
-          <p:cNvSpPr txBox="1"/>
-          <p:nvPr/>
-        </p:nvSpPr>
-        <p:spPr>
-          <a:xfrm>
-            <a:off x="6345936" y="1975104"/>
-            <a:ext cx="4846320" cy="347472"/>
-          </a:xfrm>
-          <a:prstGeom prst="rect">
-            <a:avLst/>
-          </a:prstGeom>
-          <a:noFill/>
-        </p:spPr>
-        <p:txBody>
-          <a:bodyPr wrap="square" lIns="18288" rIns="18288" tIns="18288" bIns="18288" anchor="ctr">
-            <a:spAutoFit/>
-          </a:bodyPr>
-          <a:lstStyle/>
-          <a:p>
-            <a:pPr algn="l">
-              <a:defRPr sz="1600" b="1">
-                <a:solidFill>
-                  <a:srgbClr val="112240"/>
-                </a:solidFill>
-                <a:latin typeface="Aptos"/>
-              </a:defRPr>
-            </a:pPr>
-            <a:r>
-              <a:t>Henüz yok / garanti edilmez</a:t>
-            </a:r>
-          </a:p>
-        </p:txBody>
-      </p:sp>
-      <p:sp>
-        <p:nvSpPr>
-          <p:cNvPr id="12" name="TextBox 11"/>
-          <p:cNvSpPr txBox="1"/>
-          <p:nvPr/>
-        </p:nvSpPr>
-        <p:spPr>
-          <a:xfrm>
-            <a:off x="6364224" y="2395728"/>
-            <a:ext cx="4809744" cy="1764792"/>
-          </a:xfrm>
-          <a:prstGeom prst="rect">
-            <a:avLst/>
-          </a:prstGeom>
-          <a:noFill/>
-        </p:spPr>
-        <p:txBody>
-          <a:bodyPr wrap="square" lIns="18288" rIns="18288" tIns="18288" bIns="18288" anchor="ctr">
-            <a:spAutoFit/>
-          </a:bodyPr>
-          <a:lstStyle/>
-          <a:p>
-            <a:pPr algn="l">
-              <a:defRPr sz="1200" b="0">
-                <a:solidFill>
-                  <a:srgbClr val="223045"/>
-                </a:solidFill>
-                <a:latin typeface="Aptos"/>
-              </a:defRPr>
-            </a:pPr>
-            <a:r>
-              <a:t>•  OCR, vektör arama ve belge sürüm takibi</a:t>
-            </a:r>
-            <a:br/>
-            <a:r>
-              <a:t>•  Hukuki doğruluğun otomatik kanıtlanması</a:t>
-            </a:r>
-            <a:br/>
-            <a:r>
-              <a:t>•  Web arayüzü ve devam ettirilebilir işler</a:t>
-            </a:r>
-            <a:br/>
-            <a:r>
-              <a:t>•  Gerçek GitHub PR ile uçtan uca canlı doğrulama</a:t>
-            </a:r>
-          </a:p>
-        </p:txBody>
-      </p:sp>
-      <p:sp>
-        <p:nvSpPr>
-          <p:cNvPr id="13" name="Rounded Rectangle 12"/>
-          <p:cNvSpPr/>
-          <p:nvPr/>
-        </p:nvSpPr>
-        <p:spPr>
-          <a:xfrm>
-            <a:off x="713232" y="4681728"/>
-            <a:ext cx="10661904" cy="749808"/>
-          </a:xfrm>
-          <a:prstGeom prst="roundRect">
-            <a:avLst/>
-          </a:prstGeom>
-          <a:solidFill>
-            <a:srgbClr val="FFF6DF"/>
-          </a:solidFill>
-          <a:ln>
-            <a:noFill/>
-          </a:ln>
-        </p:spPr>
-        <p:style>
-          <a:lnRef idx="1">
-            <a:schemeClr val="accent1"/>
-          </a:lnRef>
-          <a:fillRef idx="3">
-            <a:schemeClr val="accent1"/>
-          </a:fillRef>
-          <a:effectRef idx="2">
-            <a:schemeClr val="accent1"/>
-          </a:effectRef>
-          <a:fontRef idx="minor">
-            <a:schemeClr val="lt1"/>
-          </a:fontRef>
-        </p:style>
-        <p:txBody>
-          <a:bodyPr rtlCol="0" anchor="ctr"/>
-          <a:lstStyle/>
-          <a:p>
-            <a:pPr algn="ctr"/>
-          </a:p>
-        </p:txBody>
-      </p:sp>
-      <p:sp>
-        <p:nvSpPr>
-          <p:cNvPr id="14" name="TextBox 13"/>
-          <p:cNvSpPr txBox="1"/>
-          <p:nvPr/>
-        </p:nvSpPr>
-        <p:spPr>
-          <a:xfrm>
-            <a:off x="914400" y="4837176"/>
-            <a:ext cx="10241280" cy="411480"/>
-          </a:xfrm>
-          <a:prstGeom prst="rect">
-            <a:avLst/>
-          </a:prstGeom>
-          <a:noFill/>
-        </p:spPr>
-        <p:txBody>
-          <a:bodyPr wrap="square" lIns="18288" rIns="18288" tIns="18288" bIns="18288" anchor="ctr">
-            <a:spAutoFit/>
-          </a:bodyPr>
-          <a:lstStyle/>
-          <a:p>
-            <a:pPr algn="ctr">
-              <a:defRPr sz="1100" b="1">
-                <a:solidFill>
-                  <a:srgbClr val="112240"/>
-                </a:solidFill>
-                <a:latin typeface="Aptos"/>
-              </a:defRPr>
-            </a:pPr>
-            <a:r>
-              <a:t>Sonraki adımlar: PDF rubriğini doğrula • gerçek mevzuat örnekleriyle uzman değerlendirmesi yap • gerçek PR akışını yetkili test deposunda dene.</a:t>
-            </a:r>
-          </a:p>
-        </p:txBody>
-      </p:sp>
-      <p:sp>
-        <p:nvSpPr>
-          <p:cNvPr id="15" name="TextBox 14"/>
+              <a:t>Aşağıdaki terminal kaydı deterministik sentetik E2E testine aittir; hukukî tespit veya gerçek mevzuat düzeltmesi değildir.</a:t>
+            </a:r>
+          </a:p>
+        </p:txBody>
+      </p:sp>
+      <p:pic>
+        <p:nvPicPr>
+          <p:cNvPr id="5" name="Picture 4" descr="04_remediation_diff.png"/>
+          <p:cNvPicPr>
+            <a:picLocks noChangeAspect="1"/>
+          </p:cNvPicPr>
+          <p:nvPr/>
+        </p:nvPicPr>
+        <p:blipFill>
+          <a:blip r:embed="rId2"/>
+          <a:stretch>
+            <a:fillRect/>
+          </a:stretch>
+        </p:blipFill>
+        <p:spPr>
+          <a:xfrm>
+            <a:off x="713232" y="1828800"/>
+            <a:ext cx="10771632" cy="3889756"/>
+          </a:xfrm>
+          <a:prstGeom prst="rect">
+            <a:avLst/>
+          </a:prstGeom>
+        </p:spPr>
+      </p:pic>
+      <p:sp>
+        <p:nvSpPr>
+          <p:cNvPr id="6" name="TextBox 5"/>
           <p:cNvSpPr txBox="1"/>
           <p:nvPr/>
         </p:nvSpPr>
@@ -17290,7 +13815,7 @@
       </p:sp>
       <p:sp>
         <p:nvSpPr>
-          <p:cNvPr id="16" name="TextBox 15"/>
+          <p:cNvPr id="7" name="TextBox 6"/>
           <p:cNvSpPr txBox="1"/>
           <p:nvPr/>
         </p:nvSpPr>
@@ -17381,7 +13906,7 @@
               </a:defRPr>
             </a:pPr>
             <a:r>
-              <a:t>23  •  KISA DEMO</a:t>
+              <a:t>23  •  RAPOR GÖRSELI</a:t>
             </a:r>
           </a:p>
         </p:txBody>
@@ -17417,7 +13942,7 @@
               </a:defRPr>
             </a:pPr>
             <a:r>
-              <a:t>Uygulamayı sunumda nasıl gösteririm?</a:t>
+              <a:t>HTML remediation raporu ve diff</a:t>
             </a:r>
           </a:p>
         </p:txBody>
@@ -17453,920 +13978,38 @@
               </a:defRPr>
             </a:pPr>
             <a:r>
-              <a:t>Sentetik test deposunda, dış sisteme yan etki oluşturmadan ana akışı sergileyin.</a:t>
-            </a:r>
-          </a:p>
-        </p:txBody>
-      </p:sp>
-      <p:sp>
-        <p:nvSpPr>
-          <p:cNvPr id="5" name="Rounded Rectangle 4"/>
-          <p:cNvSpPr/>
-          <p:nvPr/>
-        </p:nvSpPr>
-        <p:spPr>
-          <a:xfrm>
-            <a:off x="822960" y="1783080"/>
-            <a:ext cx="5074920" cy="987552"/>
-          </a:xfrm>
-          <a:prstGeom prst="roundRect">
-            <a:avLst/>
-          </a:prstGeom>
-          <a:solidFill>
-            <a:srgbClr val="FFFFFF"/>
-          </a:solidFill>
-          <a:ln>
-            <a:noFill/>
-          </a:ln>
-        </p:spPr>
-        <p:style>
-          <a:lnRef idx="1">
-            <a:schemeClr val="accent1"/>
-          </a:lnRef>
-          <a:fillRef idx="3">
-            <a:schemeClr val="accent1"/>
-          </a:fillRef>
-          <a:effectRef idx="2">
-            <a:schemeClr val="accent1"/>
-          </a:effectRef>
-          <a:fontRef idx="minor">
-            <a:schemeClr val="lt1"/>
-          </a:fontRef>
-        </p:style>
-        <p:txBody>
-          <a:bodyPr rtlCol="0" anchor="ctr"/>
-          <a:lstStyle/>
-          <a:p>
-            <a:pPr algn="ctr"/>
-          </a:p>
-        </p:txBody>
-      </p:sp>
+              <a:t>Sentetik test fixture'ının HTML raporu; TEST ONLY uyarısı ve izole dal değişikliği görünür.</a:t>
+            </a:r>
+          </a:p>
+        </p:txBody>
+      </p:sp>
+      <p:pic>
+        <p:nvPicPr>
+          <p:cNvPr id="5" name="Picture 4" descr="remediation_report_preview.png"/>
+          <p:cNvPicPr>
+            <a:picLocks noChangeAspect="1"/>
+          </p:cNvPicPr>
+          <p:nvPr/>
+        </p:nvPicPr>
+        <p:blipFill>
+          <a:blip r:embed="rId2"/>
+          <a:stretch>
+            <a:fillRect/>
+          </a:stretch>
+        </p:blipFill>
+        <p:spPr>
+          <a:xfrm>
+            <a:off x="713232" y="1828800"/>
+            <a:ext cx="10771632" cy="4308653"/>
+          </a:xfrm>
+          <a:prstGeom prst="rect">
+            <a:avLst/>
+          </a:prstGeom>
+        </p:spPr>
+      </p:pic>
       <p:sp>
         <p:nvSpPr>
           <p:cNvPr id="6" name="TextBox 5"/>
-          <p:cNvSpPr txBox="1"/>
-          <p:nvPr/>
-        </p:nvSpPr>
-        <p:spPr>
-          <a:xfrm>
-            <a:off x="978408" y="1984248"/>
-            <a:ext cx="493776" cy="292608"/>
-          </a:xfrm>
-          <a:prstGeom prst="rect">
-            <a:avLst/>
-          </a:prstGeom>
-          <a:noFill/>
-        </p:spPr>
-        <p:txBody>
-          <a:bodyPr wrap="square" lIns="18288" rIns="18288" tIns="18288" bIns="18288" anchor="ctr">
-            <a:spAutoFit/>
-          </a:bodyPr>
-          <a:lstStyle/>
-          <a:p>
-            <a:pPr algn="l">
-              <a:defRPr sz="1300" b="1">
-                <a:solidFill>
-                  <a:srgbClr val="00AFA0"/>
-                </a:solidFill>
-                <a:latin typeface="Aptos"/>
-              </a:defRPr>
-            </a:pPr>
-            <a:r>
-              <a:t>01</a:t>
-            </a:r>
-          </a:p>
-        </p:txBody>
-      </p:sp>
-      <p:sp>
-        <p:nvSpPr>
-          <p:cNvPr id="7" name="TextBox 6"/>
-          <p:cNvSpPr txBox="1"/>
-          <p:nvPr/>
-        </p:nvSpPr>
-        <p:spPr>
-          <a:xfrm>
-            <a:off x="1600200" y="1920240"/>
-            <a:ext cx="4023360" cy="292608"/>
-          </a:xfrm>
-          <a:prstGeom prst="rect">
-            <a:avLst/>
-          </a:prstGeom>
-          <a:noFill/>
-        </p:spPr>
-        <p:txBody>
-          <a:bodyPr wrap="square" lIns="18288" rIns="18288" tIns="18288" bIns="18288" anchor="ctr">
-            <a:spAutoFit/>
-          </a:bodyPr>
-          <a:lstStyle/>
-          <a:p>
-            <a:pPr algn="l">
-              <a:defRPr sz="1400" b="1">
-                <a:solidFill>
-                  <a:srgbClr val="112240"/>
-                </a:solidFill>
-                <a:latin typeface="Aptos"/>
-              </a:defRPr>
-            </a:pPr>
-            <a:r>
-              <a:t>Sohbeti başlat</a:t>
-            </a:r>
-          </a:p>
-        </p:txBody>
-      </p:sp>
-      <p:sp>
-        <p:nvSpPr>
-          <p:cNvPr id="8" name="TextBox 7"/>
-          <p:cNvSpPr txBox="1"/>
-          <p:nvPr/>
-        </p:nvSpPr>
-        <p:spPr>
-          <a:xfrm>
-            <a:off x="1600200" y="2295144"/>
-            <a:ext cx="4023360" cy="274320"/>
-          </a:xfrm>
-          <a:prstGeom prst="rect">
-            <a:avLst/>
-          </a:prstGeom>
-          <a:noFill/>
-        </p:spPr>
-        <p:txBody>
-          <a:bodyPr wrap="square" lIns="18288" rIns="18288" tIns="18288" bIns="18288" anchor="ctr">
-            <a:spAutoFit/>
-          </a:bodyPr>
-          <a:lstStyle/>
-          <a:p>
-            <a:pPr algn="l">
-              <a:defRPr sz="1000" b="0">
-                <a:solidFill>
-                  <a:srgbClr val="637389"/>
-                </a:solidFill>
-                <a:latin typeface="Aptos"/>
-              </a:defRPr>
-            </a:pPr>
-            <a:r>
-              <a:t>mevzuat-agent → yerel Ollama modeli</a:t>
-            </a:r>
-          </a:p>
-        </p:txBody>
-      </p:sp>
-      <p:sp>
-        <p:nvSpPr>
-          <p:cNvPr id="9" name="Rounded Rectangle 8"/>
-          <p:cNvSpPr/>
-          <p:nvPr/>
-        </p:nvSpPr>
-        <p:spPr>
-          <a:xfrm>
-            <a:off x="6309360" y="1783080"/>
-            <a:ext cx="5074920" cy="987552"/>
-          </a:xfrm>
-          <a:prstGeom prst="roundRect">
-            <a:avLst/>
-          </a:prstGeom>
-          <a:solidFill>
-            <a:srgbClr val="FFFFFF"/>
-          </a:solidFill>
-          <a:ln>
-            <a:noFill/>
-          </a:ln>
-        </p:spPr>
-        <p:style>
-          <a:lnRef idx="1">
-            <a:schemeClr val="accent1"/>
-          </a:lnRef>
-          <a:fillRef idx="3">
-            <a:schemeClr val="accent1"/>
-          </a:fillRef>
-          <a:effectRef idx="2">
-            <a:schemeClr val="accent1"/>
-          </a:effectRef>
-          <a:fontRef idx="minor">
-            <a:schemeClr val="lt1"/>
-          </a:fontRef>
-        </p:style>
-        <p:txBody>
-          <a:bodyPr rtlCol="0" anchor="ctr"/>
-          <a:lstStyle/>
-          <a:p>
-            <a:pPr algn="ctr"/>
-          </a:p>
-        </p:txBody>
-      </p:sp>
-      <p:sp>
-        <p:nvSpPr>
-          <p:cNvPr id="10" name="TextBox 9"/>
-          <p:cNvSpPr txBox="1"/>
-          <p:nvPr/>
-        </p:nvSpPr>
-        <p:spPr>
-          <a:xfrm>
-            <a:off x="6464808" y="1984248"/>
-            <a:ext cx="493776" cy="292608"/>
-          </a:xfrm>
-          <a:prstGeom prst="rect">
-            <a:avLst/>
-          </a:prstGeom>
-          <a:noFill/>
-        </p:spPr>
-        <p:txBody>
-          <a:bodyPr wrap="square" lIns="18288" rIns="18288" tIns="18288" bIns="18288" anchor="ctr">
-            <a:spAutoFit/>
-          </a:bodyPr>
-          <a:lstStyle/>
-          <a:p>
-            <a:pPr algn="l">
-              <a:defRPr sz="1300" b="1">
-                <a:solidFill>
-                  <a:srgbClr val="00AFA0"/>
-                </a:solidFill>
-                <a:latin typeface="Aptos"/>
-              </a:defRPr>
-            </a:pPr>
-            <a:r>
-              <a:t>02</a:t>
-            </a:r>
-          </a:p>
-        </p:txBody>
-      </p:sp>
-      <p:sp>
-        <p:nvSpPr>
-          <p:cNvPr id="11" name="TextBox 10"/>
-          <p:cNvSpPr txBox="1"/>
-          <p:nvPr/>
-        </p:nvSpPr>
-        <p:spPr>
-          <a:xfrm>
-            <a:off x="7086600" y="1920240"/>
-            <a:ext cx="4023360" cy="292608"/>
-          </a:xfrm>
-          <a:prstGeom prst="rect">
-            <a:avLst/>
-          </a:prstGeom>
-          <a:noFill/>
-        </p:spPr>
-        <p:txBody>
-          <a:bodyPr wrap="square" lIns="18288" rIns="18288" tIns="18288" bIns="18288" anchor="ctr">
-            <a:spAutoFit/>
-          </a:bodyPr>
-          <a:lstStyle/>
-          <a:p>
-            <a:pPr algn="l">
-              <a:defRPr sz="1400" b="1">
-                <a:solidFill>
-                  <a:srgbClr val="112240"/>
-                </a:solidFill>
-                <a:latin typeface="Aptos"/>
-              </a:defRPr>
-            </a:pPr>
-            <a:r>
-              <a:t>Kapsamı seç</a:t>
-            </a:r>
-          </a:p>
-        </p:txBody>
-      </p:sp>
-      <p:sp>
-        <p:nvSpPr>
-          <p:cNvPr id="12" name="TextBox 11"/>
-          <p:cNvSpPr txBox="1"/>
-          <p:nvPr/>
-        </p:nvSpPr>
-        <p:spPr>
-          <a:xfrm>
-            <a:off x="7086600" y="2295144"/>
-            <a:ext cx="4023360" cy="274320"/>
-          </a:xfrm>
-          <a:prstGeom prst="rect">
-            <a:avLst/>
-          </a:prstGeom>
-          <a:noFill/>
-        </p:spPr>
-        <p:txBody>
-          <a:bodyPr wrap="square" lIns="18288" rIns="18288" tIns="18288" bIns="18288" anchor="ctr">
-            <a:spAutoFit/>
-          </a:bodyPr>
-          <a:lstStyle/>
-          <a:p>
-            <a:pPr algn="l">
-              <a:defRPr sz="1000" b="0">
-                <a:solidFill>
-                  <a:srgbClr val="637389"/>
-                </a:solidFill>
-                <a:latin typeface="Aptos"/>
-              </a:defRPr>
-            </a:pPr>
-            <a:r>
-              <a:t>1 veya 2; * tüm mevzuatlar</a:t>
-            </a:r>
-          </a:p>
-        </p:txBody>
-      </p:sp>
-      <p:sp>
-        <p:nvSpPr>
-          <p:cNvPr id="13" name="Rounded Rectangle 12"/>
-          <p:cNvSpPr/>
-          <p:nvPr/>
-        </p:nvSpPr>
-        <p:spPr>
-          <a:xfrm>
-            <a:off x="822960" y="3081528"/>
-            <a:ext cx="5074920" cy="987552"/>
-          </a:xfrm>
-          <a:prstGeom prst="roundRect">
-            <a:avLst/>
-          </a:prstGeom>
-          <a:solidFill>
-            <a:srgbClr val="FFFFFF"/>
-          </a:solidFill>
-          <a:ln>
-            <a:noFill/>
-          </a:ln>
-        </p:spPr>
-        <p:style>
-          <a:lnRef idx="1">
-            <a:schemeClr val="accent1"/>
-          </a:lnRef>
-          <a:fillRef idx="3">
-            <a:schemeClr val="accent1"/>
-          </a:fillRef>
-          <a:effectRef idx="2">
-            <a:schemeClr val="accent1"/>
-          </a:effectRef>
-          <a:fontRef idx="minor">
-            <a:schemeClr val="lt1"/>
-          </a:fontRef>
-        </p:style>
-        <p:txBody>
-          <a:bodyPr rtlCol="0" anchor="ctr"/>
-          <a:lstStyle/>
-          <a:p>
-            <a:pPr algn="ctr"/>
-          </a:p>
-        </p:txBody>
-      </p:sp>
-      <p:sp>
-        <p:nvSpPr>
-          <p:cNvPr id="14" name="TextBox 13"/>
-          <p:cNvSpPr txBox="1"/>
-          <p:nvPr/>
-        </p:nvSpPr>
-        <p:spPr>
-          <a:xfrm>
-            <a:off x="978408" y="3282696"/>
-            <a:ext cx="493776" cy="292608"/>
-          </a:xfrm>
-          <a:prstGeom prst="rect">
-            <a:avLst/>
-          </a:prstGeom>
-          <a:noFill/>
-        </p:spPr>
-        <p:txBody>
-          <a:bodyPr wrap="square" lIns="18288" rIns="18288" tIns="18288" bIns="18288" anchor="ctr">
-            <a:spAutoFit/>
-          </a:bodyPr>
-          <a:lstStyle/>
-          <a:p>
-            <a:pPr algn="l">
-              <a:defRPr sz="1300" b="1">
-                <a:solidFill>
-                  <a:srgbClr val="00AFA0"/>
-                </a:solidFill>
-                <a:latin typeface="Aptos"/>
-              </a:defRPr>
-            </a:pPr>
-            <a:r>
-              <a:t>03</a:t>
-            </a:r>
-          </a:p>
-        </p:txBody>
-      </p:sp>
-      <p:sp>
-        <p:nvSpPr>
-          <p:cNvPr id="15" name="TextBox 14"/>
-          <p:cNvSpPr txBox="1"/>
-          <p:nvPr/>
-        </p:nvSpPr>
-        <p:spPr>
-          <a:xfrm>
-            <a:off x="1600200" y="3218688"/>
-            <a:ext cx="4023360" cy="292608"/>
-          </a:xfrm>
-          <a:prstGeom prst="rect">
-            <a:avLst/>
-          </a:prstGeom>
-          <a:noFill/>
-        </p:spPr>
-        <p:txBody>
-          <a:bodyPr wrap="square" lIns="18288" rIns="18288" tIns="18288" bIns="18288" anchor="ctr">
-            <a:spAutoFit/>
-          </a:bodyPr>
-          <a:lstStyle/>
-          <a:p>
-            <a:pPr algn="l">
-              <a:defRPr sz="1400" b="1">
-                <a:solidFill>
-                  <a:srgbClr val="112240"/>
-                </a:solidFill>
-                <a:latin typeface="Aptos"/>
-              </a:defRPr>
-            </a:pPr>
-            <a:r>
-              <a:t>Pipeline'ı sürdür</a:t>
-            </a:r>
-          </a:p>
-        </p:txBody>
-      </p:sp>
-      <p:sp>
-        <p:nvSpPr>
-          <p:cNvPr id="16" name="TextBox 15"/>
-          <p:cNvSpPr txBox="1"/>
-          <p:nvPr/>
-        </p:nvSpPr>
-        <p:spPr>
-          <a:xfrm>
-            <a:off x="1600200" y="3593592"/>
-            <a:ext cx="4023360" cy="274320"/>
-          </a:xfrm>
-          <a:prstGeom prst="rect">
-            <a:avLst/>
-          </a:prstGeom>
-          <a:noFill/>
-        </p:spPr>
-        <p:txBody>
-          <a:bodyPr wrap="square" lIns="18288" rIns="18288" tIns="18288" bIns="18288" anchor="ctr">
-            <a:spAutoFit/>
-          </a:bodyPr>
-          <a:lstStyle/>
-          <a:p>
-            <a:pPr algn="l">
-              <a:defRPr sz="1000" b="0">
-                <a:solidFill>
-                  <a:srgbClr val="637389"/>
-                </a:solidFill>
-                <a:latin typeface="Aptos"/>
-              </a:defRPr>
-            </a:pPr>
-            <a:r>
-              <a:t>devam → sıradaki önerilen adım</a:t>
-            </a:r>
-          </a:p>
-        </p:txBody>
-      </p:sp>
-      <p:sp>
-        <p:nvSpPr>
-          <p:cNvPr id="17" name="Rounded Rectangle 16"/>
-          <p:cNvSpPr/>
-          <p:nvPr/>
-        </p:nvSpPr>
-        <p:spPr>
-          <a:xfrm>
-            <a:off x="6309360" y="3081528"/>
-            <a:ext cx="5074920" cy="987552"/>
-          </a:xfrm>
-          <a:prstGeom prst="roundRect">
-            <a:avLst/>
-          </a:prstGeom>
-          <a:solidFill>
-            <a:srgbClr val="FFFFFF"/>
-          </a:solidFill>
-          <a:ln>
-            <a:noFill/>
-          </a:ln>
-        </p:spPr>
-        <p:style>
-          <a:lnRef idx="1">
-            <a:schemeClr val="accent1"/>
-          </a:lnRef>
-          <a:fillRef idx="3">
-            <a:schemeClr val="accent1"/>
-          </a:fillRef>
-          <a:effectRef idx="2">
-            <a:schemeClr val="accent1"/>
-          </a:effectRef>
-          <a:fontRef idx="minor">
-            <a:schemeClr val="lt1"/>
-          </a:fontRef>
-        </p:style>
-        <p:txBody>
-          <a:bodyPr rtlCol="0" anchor="ctr"/>
-          <a:lstStyle/>
-          <a:p>
-            <a:pPr algn="ctr"/>
-          </a:p>
-        </p:txBody>
-      </p:sp>
-      <p:sp>
-        <p:nvSpPr>
-          <p:cNvPr id="18" name="TextBox 17"/>
-          <p:cNvSpPr txBox="1"/>
-          <p:nvPr/>
-        </p:nvSpPr>
-        <p:spPr>
-          <a:xfrm>
-            <a:off x="6464808" y="3282696"/>
-            <a:ext cx="493776" cy="292608"/>
-          </a:xfrm>
-          <a:prstGeom prst="rect">
-            <a:avLst/>
-          </a:prstGeom>
-          <a:noFill/>
-        </p:spPr>
-        <p:txBody>
-          <a:bodyPr wrap="square" lIns="18288" rIns="18288" tIns="18288" bIns="18288" anchor="ctr">
-            <a:spAutoFit/>
-          </a:bodyPr>
-          <a:lstStyle/>
-          <a:p>
-            <a:pPr algn="l">
-              <a:defRPr sz="1300" b="1">
-                <a:solidFill>
-                  <a:srgbClr val="00AFA0"/>
-                </a:solidFill>
-                <a:latin typeface="Aptos"/>
-              </a:defRPr>
-            </a:pPr>
-            <a:r>
-              <a:t>04</a:t>
-            </a:r>
-          </a:p>
-        </p:txBody>
-      </p:sp>
-      <p:sp>
-        <p:nvSpPr>
-          <p:cNvPr id="19" name="TextBox 18"/>
-          <p:cNvSpPr txBox="1"/>
-          <p:nvPr/>
-        </p:nvSpPr>
-        <p:spPr>
-          <a:xfrm>
-            <a:off x="7086600" y="3218688"/>
-            <a:ext cx="4023360" cy="292608"/>
-          </a:xfrm>
-          <a:prstGeom prst="rect">
-            <a:avLst/>
-          </a:prstGeom>
-          <a:noFill/>
-        </p:spPr>
-        <p:txBody>
-          <a:bodyPr wrap="square" lIns="18288" rIns="18288" tIns="18288" bIns="18288" anchor="ctr">
-            <a:spAutoFit/>
-          </a:bodyPr>
-          <a:lstStyle/>
-          <a:p>
-            <a:pPr algn="l">
-              <a:defRPr sz="1400" b="1">
-                <a:solidFill>
-                  <a:srgbClr val="112240"/>
-                </a:solidFill>
-                <a:latin typeface="Aptos"/>
-              </a:defRPr>
-            </a:pPr>
-            <a:r>
-              <a:t>Sentetik demo</a:t>
-            </a:r>
-          </a:p>
-        </p:txBody>
-      </p:sp>
-      <p:sp>
-        <p:nvSpPr>
-          <p:cNvPr id="20" name="TextBox 19"/>
-          <p:cNvSpPr txBox="1"/>
-          <p:nvPr/>
-        </p:nvSpPr>
-        <p:spPr>
-          <a:xfrm>
-            <a:off x="7086600" y="3593592"/>
-            <a:ext cx="4023360" cy="274320"/>
-          </a:xfrm>
-          <a:prstGeom prst="rect">
-            <a:avLst/>
-          </a:prstGeom>
-          <a:noFill/>
-        </p:spPr>
-        <p:txBody>
-          <a:bodyPr wrap="square" lIns="18288" rIns="18288" tIns="18288" bIns="18288" anchor="ctr">
-            <a:spAutoFit/>
-          </a:bodyPr>
-          <a:lstStyle/>
-          <a:p>
-            <a:pPr algn="l">
-              <a:defRPr sz="1000" b="0">
-                <a:solidFill>
-                  <a:srgbClr val="637389"/>
-                </a:solidFill>
-                <a:latin typeface="Aptos"/>
-              </a:defRPr>
-            </a:pPr>
-            <a:r>
-              <a:t>demo1 → beş deterministik fixture bulgusu</a:t>
-            </a:r>
-          </a:p>
-        </p:txBody>
-      </p:sp>
-      <p:sp>
-        <p:nvSpPr>
-          <p:cNvPr id="21" name="Rounded Rectangle 20"/>
-          <p:cNvSpPr/>
-          <p:nvPr/>
-        </p:nvSpPr>
-        <p:spPr>
-          <a:xfrm>
-            <a:off x="822960" y="4379976"/>
-            <a:ext cx="5074920" cy="987552"/>
-          </a:xfrm>
-          <a:prstGeom prst="roundRect">
-            <a:avLst/>
-          </a:prstGeom>
-          <a:solidFill>
-            <a:srgbClr val="FFFFFF"/>
-          </a:solidFill>
-          <a:ln>
-            <a:noFill/>
-          </a:ln>
-        </p:spPr>
-        <p:style>
-          <a:lnRef idx="1">
-            <a:schemeClr val="accent1"/>
-          </a:lnRef>
-          <a:fillRef idx="3">
-            <a:schemeClr val="accent1"/>
-          </a:fillRef>
-          <a:effectRef idx="2">
-            <a:schemeClr val="accent1"/>
-          </a:effectRef>
-          <a:fontRef idx="minor">
-            <a:schemeClr val="lt1"/>
-          </a:fontRef>
-        </p:style>
-        <p:txBody>
-          <a:bodyPr rtlCol="0" anchor="ctr"/>
-          <a:lstStyle/>
-          <a:p>
-            <a:pPr algn="ctr"/>
-          </a:p>
-        </p:txBody>
-      </p:sp>
-      <p:sp>
-        <p:nvSpPr>
-          <p:cNvPr id="22" name="TextBox 21"/>
-          <p:cNvSpPr txBox="1"/>
-          <p:nvPr/>
-        </p:nvSpPr>
-        <p:spPr>
-          <a:xfrm>
-            <a:off x="978408" y="4581144"/>
-            <a:ext cx="493776" cy="292608"/>
-          </a:xfrm>
-          <a:prstGeom prst="rect">
-            <a:avLst/>
-          </a:prstGeom>
-          <a:noFill/>
-        </p:spPr>
-        <p:txBody>
-          <a:bodyPr wrap="square" lIns="18288" rIns="18288" tIns="18288" bIns="18288" anchor="ctr">
-            <a:spAutoFit/>
-          </a:bodyPr>
-          <a:lstStyle/>
-          <a:p>
-            <a:pPr algn="l">
-              <a:defRPr sz="1300" b="1">
-                <a:solidFill>
-                  <a:srgbClr val="00AFA0"/>
-                </a:solidFill>
-                <a:latin typeface="Aptos"/>
-              </a:defRPr>
-            </a:pPr>
-            <a:r>
-              <a:t>05</a:t>
-            </a:r>
-          </a:p>
-        </p:txBody>
-      </p:sp>
-      <p:sp>
-        <p:nvSpPr>
-          <p:cNvPr id="23" name="TextBox 22"/>
-          <p:cNvSpPr txBox="1"/>
-          <p:nvPr/>
-        </p:nvSpPr>
-        <p:spPr>
-          <a:xfrm>
-            <a:off x="1600200" y="4517136"/>
-            <a:ext cx="4023360" cy="292608"/>
-          </a:xfrm>
-          <a:prstGeom prst="rect">
-            <a:avLst/>
-          </a:prstGeom>
-          <a:noFill/>
-        </p:spPr>
-        <p:txBody>
-          <a:bodyPr wrap="square" lIns="18288" rIns="18288" tIns="18288" bIns="18288" anchor="ctr">
-            <a:spAutoFit/>
-          </a:bodyPr>
-          <a:lstStyle/>
-          <a:p>
-            <a:pPr algn="l">
-              <a:defRPr sz="1400" b="1">
-                <a:solidFill>
-                  <a:srgbClr val="112240"/>
-                </a:solidFill>
-                <a:latin typeface="Aptos"/>
-              </a:defRPr>
-            </a:pPr>
-            <a:r>
-              <a:t>Raporu incele</a:t>
-            </a:r>
-          </a:p>
-        </p:txBody>
-      </p:sp>
-      <p:sp>
-        <p:nvSpPr>
-          <p:cNvPr id="24" name="TextBox 23"/>
-          <p:cNvSpPr txBox="1"/>
-          <p:nvPr/>
-        </p:nvSpPr>
-        <p:spPr>
-          <a:xfrm>
-            <a:off x="1600200" y="4892040"/>
-            <a:ext cx="4023360" cy="274320"/>
-          </a:xfrm>
-          <a:prstGeom prst="rect">
-            <a:avLst/>
-          </a:prstGeom>
-          <a:noFill/>
-        </p:spPr>
-        <p:txBody>
-          <a:bodyPr wrap="square" lIns="18288" rIns="18288" tIns="18288" bIns="18288" anchor="ctr">
-            <a:spAutoFit/>
-          </a:bodyPr>
-          <a:lstStyle/>
-          <a:p>
-            <a:pPr algn="l">
-              <a:defRPr sz="1000" b="0">
-                <a:solidFill>
-                  <a:srgbClr val="637389"/>
-                </a:solidFill>
-                <a:latin typeface="Aptos"/>
-              </a:defRPr>
-            </a:pPr>
-            <a:r>
-              <a:t>JSON/Markdown/HTML ve sınırlar</a:t>
-            </a:r>
-          </a:p>
-        </p:txBody>
-      </p:sp>
-      <p:sp>
-        <p:nvSpPr>
-          <p:cNvPr id="25" name="Rounded Rectangle 24"/>
-          <p:cNvSpPr/>
-          <p:nvPr/>
-        </p:nvSpPr>
-        <p:spPr>
-          <a:xfrm>
-            <a:off x="6309360" y="4379976"/>
-            <a:ext cx="5074920" cy="987552"/>
-          </a:xfrm>
-          <a:prstGeom prst="roundRect">
-            <a:avLst/>
-          </a:prstGeom>
-          <a:solidFill>
-            <a:srgbClr val="FFFFFF"/>
-          </a:solidFill>
-          <a:ln>
-            <a:noFill/>
-          </a:ln>
-        </p:spPr>
-        <p:style>
-          <a:lnRef idx="1">
-            <a:schemeClr val="accent1"/>
-          </a:lnRef>
-          <a:fillRef idx="3">
-            <a:schemeClr val="accent1"/>
-          </a:fillRef>
-          <a:effectRef idx="2">
-            <a:schemeClr val="accent1"/>
-          </a:effectRef>
-          <a:fontRef idx="minor">
-            <a:schemeClr val="lt1"/>
-          </a:fontRef>
-        </p:style>
-        <p:txBody>
-          <a:bodyPr rtlCol="0" anchor="ctr"/>
-          <a:lstStyle/>
-          <a:p>
-            <a:pPr algn="ctr"/>
-          </a:p>
-        </p:txBody>
-      </p:sp>
-      <p:sp>
-        <p:nvSpPr>
-          <p:cNvPr id="26" name="TextBox 25"/>
-          <p:cNvSpPr txBox="1"/>
-          <p:nvPr/>
-        </p:nvSpPr>
-        <p:spPr>
-          <a:xfrm>
-            <a:off x="6464808" y="4581144"/>
-            <a:ext cx="493776" cy="292608"/>
-          </a:xfrm>
-          <a:prstGeom prst="rect">
-            <a:avLst/>
-          </a:prstGeom>
-          <a:noFill/>
-        </p:spPr>
-        <p:txBody>
-          <a:bodyPr wrap="square" lIns="18288" rIns="18288" tIns="18288" bIns="18288" anchor="ctr">
-            <a:spAutoFit/>
-          </a:bodyPr>
-          <a:lstStyle/>
-          <a:p>
-            <a:pPr algn="l">
-              <a:defRPr sz="1300" b="1">
-                <a:solidFill>
-                  <a:srgbClr val="00AFA0"/>
-                </a:solidFill>
-                <a:latin typeface="Aptos"/>
-              </a:defRPr>
-            </a:pPr>
-            <a:r>
-              <a:t>06</a:t>
-            </a:r>
-          </a:p>
-        </p:txBody>
-      </p:sp>
-      <p:sp>
-        <p:nvSpPr>
-          <p:cNvPr id="27" name="TextBox 26"/>
-          <p:cNvSpPr txBox="1"/>
-          <p:nvPr/>
-        </p:nvSpPr>
-        <p:spPr>
-          <a:xfrm>
-            <a:off x="7086600" y="4517136"/>
-            <a:ext cx="4023360" cy="292608"/>
-          </a:xfrm>
-          <a:prstGeom prst="rect">
-            <a:avLst/>
-          </a:prstGeom>
-          <a:noFill/>
-        </p:spPr>
-        <p:txBody>
-          <a:bodyPr wrap="square" lIns="18288" rIns="18288" tIns="18288" bIns="18288" anchor="ctr">
-            <a:spAutoFit/>
-          </a:bodyPr>
-          <a:lstStyle/>
-          <a:p>
-            <a:pPr algn="l">
-              <a:defRPr sz="1400" b="1">
-                <a:solidFill>
-                  <a:srgbClr val="112240"/>
-                </a:solidFill>
-                <a:latin typeface="Aptos"/>
-              </a:defRPr>
-            </a:pPr>
-            <a:r>
-              <a:t>Remediation / PR</a:t>
-            </a:r>
-          </a:p>
-        </p:txBody>
-      </p:sp>
-      <p:sp>
-        <p:nvSpPr>
-          <p:cNvPr id="28" name="TextBox 27"/>
-          <p:cNvSpPr txBox="1"/>
-          <p:nvPr/>
-        </p:nvSpPr>
-        <p:spPr>
-          <a:xfrm>
-            <a:off x="7086600" y="4892040"/>
-            <a:ext cx="4023360" cy="274320"/>
-          </a:xfrm>
-          <a:prstGeom prst="rect">
-            <a:avLst/>
-          </a:prstGeom>
-          <a:noFill/>
-        </p:spPr>
-        <p:txBody>
-          <a:bodyPr wrap="square" lIns="18288" rIns="18288" tIns="18288" bIns="18288" anchor="ctr">
-            <a:spAutoFit/>
-          </a:bodyPr>
-          <a:lstStyle/>
-          <a:p>
-            <a:pPr algn="l">
-              <a:defRPr sz="1000" b="0">
-                <a:solidFill>
-                  <a:srgbClr val="637389"/>
-                </a:solidFill>
-                <a:latin typeface="Aptos"/>
-              </a:defRPr>
-            </a:pPr>
-            <a:r>
-              <a:t>Diff ve test; PR için ayrı onay gerekir</a:t>
-            </a:r>
-          </a:p>
-        </p:txBody>
-      </p:sp>
-      <p:sp>
-        <p:nvSpPr>
-          <p:cNvPr id="29" name="TextBox 28"/>
           <p:cNvSpPr txBox="1"/>
           <p:nvPr/>
         </p:nvSpPr>
@@ -18402,7 +14045,7 @@
       </p:sp>
       <p:sp>
         <p:nvSpPr>
-          <p:cNvPr id="30" name="TextBox 29"/>
+          <p:cNvPr id="7" name="TextBox 6"/>
           <p:cNvSpPr txBox="1"/>
           <p:nvPr/>
         </p:nvSpPr>
@@ -18445,6 +14088,2585 @@
 </file>
 
 <file path=ppt/slides/slide24.xml><?xml version="1.0" encoding="utf-8"?>
+<p:sld xmlns:a="http://schemas.openxmlformats.org/drawingml/2006/main" xmlns:p="http://schemas.openxmlformats.org/presentationml/2006/main" xmlns:r="http://schemas.openxmlformats.org/officeDocument/2006/relationships">
+  <p:cSld>
+    <p:bg>
+      <p:bgPr>
+        <a:solidFill>
+          <a:srgbClr val="F7F9FC"/>
+        </a:solidFill>
+        <a:effectLst/>
+      </p:bgPr>
+    </p:bg>
+    <p:spTree>
+      <p:nvGrpSpPr>
+        <p:cNvPr id="1" name=""/>
+        <p:cNvGrpSpPr/>
+        <p:nvPr/>
+      </p:nvGrpSpPr>
+      <p:grpSpPr/>
+      <p:sp>
+        <p:nvSpPr>
+          <p:cNvPr id="2" name="TextBox 1"/>
+          <p:cNvSpPr txBox="1"/>
+          <p:nvPr/>
+        </p:nvSpPr>
+        <p:spPr>
+          <a:xfrm>
+            <a:off x="640080" y="329184"/>
+            <a:ext cx="10881360" cy="228600"/>
+          </a:xfrm>
+          <a:prstGeom prst="rect">
+            <a:avLst/>
+          </a:prstGeom>
+          <a:noFill/>
+        </p:spPr>
+        <p:txBody>
+          <a:bodyPr wrap="square" lIns="18288" rIns="18288" tIns="18288" bIns="18288" anchor="ctr">
+            <a:spAutoFit/>
+          </a:bodyPr>
+          <a:lstStyle/>
+          <a:p>
+            <a:pPr algn="l">
+              <a:defRPr sz="900" b="1">
+                <a:solidFill>
+                  <a:srgbClr val="00AFA0"/>
+                </a:solidFill>
+                <a:latin typeface="Aptos"/>
+              </a:defRPr>
+            </a:pPr>
+            <a:r>
+              <a:t>24  •  TERMINAL ÇIKTISI</a:t>
+            </a:r>
+          </a:p>
+        </p:txBody>
+      </p:sp>
+      <p:sp>
+        <p:nvSpPr>
+          <p:cNvPr id="3" name="TextBox 2"/>
+          <p:cNvSpPr txBox="1"/>
+          <p:nvPr/>
+        </p:nvSpPr>
+        <p:spPr>
+          <a:xfrm>
+            <a:off x="640080" y="658368"/>
+            <a:ext cx="10972800" cy="502920"/>
+          </a:xfrm>
+          <a:prstGeom prst="rect">
+            <a:avLst/>
+          </a:prstGeom>
+          <a:noFill/>
+        </p:spPr>
+        <p:txBody>
+          <a:bodyPr wrap="square" lIns="18288" rIns="18288" tIns="18288" bIns="18288" anchor="ctr">
+            <a:spAutoFit/>
+          </a:bodyPr>
+          <a:lstStyle/>
+          <a:p>
+            <a:pPr algn="l">
+              <a:defRPr sz="2700" b="1">
+                <a:solidFill>
+                  <a:srgbClr val="112240"/>
+                </a:solidFill>
+                <a:latin typeface="Aptos"/>
+              </a:defRPr>
+            </a:pPr>
+            <a:r>
+              <a:t>Test ve PR provasının terminal kanıtı</a:t>
+            </a:r>
+          </a:p>
+        </p:txBody>
+      </p:sp>
+      <p:sp>
+        <p:nvSpPr>
+          <p:cNvPr id="4" name="TextBox 3"/>
+          <p:cNvSpPr txBox="1"/>
+          <p:nvPr/>
+        </p:nvSpPr>
+        <p:spPr>
+          <a:xfrm>
+            <a:off x="658368" y="1197864"/>
+            <a:ext cx="10881360" cy="420624"/>
+          </a:xfrm>
+          <a:prstGeom prst="rect">
+            <a:avLst/>
+          </a:prstGeom>
+          <a:noFill/>
+        </p:spPr>
+        <p:txBody>
+          <a:bodyPr wrap="square" lIns="18288" rIns="18288" tIns="18288" bIns="18288" anchor="ctr">
+            <a:spAutoFit/>
+          </a:bodyPr>
+          <a:lstStyle/>
+          <a:p>
+            <a:pPr algn="l">
+              <a:defRPr sz="1300" b="0">
+                <a:solidFill>
+                  <a:srgbClr val="637389"/>
+                </a:solidFill>
+                <a:latin typeface="Aptos"/>
+              </a:defRPr>
+            </a:pPr>
+            <a:r>
+              <a:t>2 test geçti; push yerel bare remote'a yapıldı. Görünen PR bağlantısı mock gh yanıtıdır; gerçek GitHub PR'ı yoktur.</a:t>
+            </a:r>
+          </a:p>
+        </p:txBody>
+      </p:sp>
+      <p:pic>
+        <p:nvPicPr>
+          <p:cNvPr id="5" name="Picture 4" descr="05_test_and_mock_pr.png"/>
+          <p:cNvPicPr>
+            <a:picLocks noChangeAspect="1"/>
+          </p:cNvPicPr>
+          <p:nvPr/>
+        </p:nvPicPr>
+        <p:blipFill>
+          <a:blip r:embed="rId2"/>
+          <a:stretch>
+            <a:fillRect/>
+          </a:stretch>
+        </p:blipFill>
+        <p:spPr>
+          <a:xfrm>
+            <a:off x="713232" y="1828800"/>
+            <a:ext cx="10771632" cy="3889756"/>
+          </a:xfrm>
+          <a:prstGeom prst="rect">
+            <a:avLst/>
+          </a:prstGeom>
+        </p:spPr>
+      </p:pic>
+      <p:sp>
+        <p:nvSpPr>
+          <p:cNvPr id="6" name="TextBox 5"/>
+          <p:cNvSpPr txBox="1"/>
+          <p:nvPr/>
+        </p:nvSpPr>
+        <p:spPr>
+          <a:xfrm>
+            <a:off x="566928" y="6473952"/>
+            <a:ext cx="9692640" cy="182880"/>
+          </a:xfrm>
+          <a:prstGeom prst="rect">
+            <a:avLst/>
+          </a:prstGeom>
+          <a:noFill/>
+        </p:spPr>
+        <p:txBody>
+          <a:bodyPr wrap="square" lIns="18288" rIns="18288" tIns="18288" bIns="18288" anchor="ctr">
+            <a:spAutoFit/>
+          </a:bodyPr>
+          <a:lstStyle/>
+          <a:p>
+            <a:pPr algn="l">
+              <a:defRPr sz="800" b="1">
+                <a:solidFill>
+                  <a:srgbClr val="637389"/>
+                </a:solidFill>
+                <a:latin typeface="Aptos"/>
+              </a:defRPr>
+            </a:pPr>
+            <a:r>
+              <a:t>MEVZUATAGENT  •  YEREL  •  ONAYLI  •  DENETLENEBİLİR</a:t>
+            </a:r>
+          </a:p>
+        </p:txBody>
+      </p:sp>
+      <p:sp>
+        <p:nvSpPr>
+          <p:cNvPr id="7" name="TextBox 6"/>
+          <p:cNvSpPr txBox="1"/>
+          <p:nvPr/>
+        </p:nvSpPr>
+        <p:spPr>
+          <a:xfrm>
+            <a:off x="11109960" y="6419088"/>
+            <a:ext cx="502920" cy="274320"/>
+          </a:xfrm>
+          <a:prstGeom prst="rect">
+            <a:avLst/>
+          </a:prstGeom>
+          <a:noFill/>
+        </p:spPr>
+        <p:txBody>
+          <a:bodyPr wrap="square" lIns="18288" rIns="18288" tIns="18288" bIns="18288" anchor="ctr">
+            <a:spAutoFit/>
+          </a:bodyPr>
+          <a:lstStyle/>
+          <a:p>
+            <a:pPr algn="r">
+              <a:defRPr sz="1000" b="1">
+                <a:solidFill>
+                  <a:srgbClr val="637389"/>
+                </a:solidFill>
+                <a:latin typeface="Aptos"/>
+              </a:defRPr>
+            </a:pPr>
+            <a:r>
+              <a:t>24</a:t>
+            </a:r>
+          </a:p>
+        </p:txBody>
+      </p:sp>
+    </p:spTree>
+  </p:cSld>
+  <p:clrMapOvr>
+    <a:masterClrMapping/>
+  </p:clrMapOvr>
+</p:sld>
+</file>
+
+<file path=ppt/slides/slide25.xml><?xml version="1.0" encoding="utf-8"?>
+<p:sld xmlns:a="http://schemas.openxmlformats.org/drawingml/2006/main" xmlns:p="http://schemas.openxmlformats.org/presentationml/2006/main" xmlns:r="http://schemas.openxmlformats.org/officeDocument/2006/relationships">
+  <p:cSld>
+    <p:bg>
+      <p:bgPr>
+        <a:solidFill>
+          <a:srgbClr val="F7F9FC"/>
+        </a:solidFill>
+        <a:effectLst/>
+      </p:bgPr>
+    </p:bg>
+    <p:spTree>
+      <p:nvGrpSpPr>
+        <p:cNvPr id="1" name=""/>
+        <p:cNvGrpSpPr/>
+        <p:nvPr/>
+      </p:nvGrpSpPr>
+      <p:grpSpPr/>
+      <p:sp>
+        <p:nvSpPr>
+          <p:cNvPr id="2" name="TextBox 1"/>
+          <p:cNvSpPr txBox="1"/>
+          <p:nvPr/>
+        </p:nvSpPr>
+        <p:spPr>
+          <a:xfrm>
+            <a:off x="640080" y="329184"/>
+            <a:ext cx="10881360" cy="228600"/>
+          </a:xfrm>
+          <a:prstGeom prst="rect">
+            <a:avLst/>
+          </a:prstGeom>
+          <a:noFill/>
+        </p:spPr>
+        <p:txBody>
+          <a:bodyPr wrap="square" lIns="18288" rIns="18288" tIns="18288" bIns="18288" anchor="ctr">
+            <a:spAutoFit/>
+          </a:bodyPr>
+          <a:lstStyle/>
+          <a:p>
+            <a:pPr algn="l">
+              <a:defRPr sz="900" b="1">
+                <a:solidFill>
+                  <a:srgbClr val="00AFA0"/>
+                </a:solidFill>
+                <a:latin typeface="Aptos"/>
+              </a:defRPr>
+            </a:pPr>
+            <a:r>
+              <a:t>25  •  GÜVENLIK VE MAHREMIYET</a:t>
+            </a:r>
+          </a:p>
+        </p:txBody>
+      </p:sp>
+      <p:sp>
+        <p:nvSpPr>
+          <p:cNvPr id="3" name="TextBox 2"/>
+          <p:cNvSpPr txBox="1"/>
+          <p:nvPr/>
+        </p:nvSpPr>
+        <p:spPr>
+          <a:xfrm>
+            <a:off x="640080" y="658368"/>
+            <a:ext cx="10972800" cy="502920"/>
+          </a:xfrm>
+          <a:prstGeom prst="rect">
+            <a:avLst/>
+          </a:prstGeom>
+          <a:noFill/>
+        </p:spPr>
+        <p:txBody>
+          <a:bodyPr wrap="square" lIns="18288" rIns="18288" tIns="18288" bIns="18288" anchor="ctr">
+            <a:spAutoFit/>
+          </a:bodyPr>
+          <a:lstStyle/>
+          <a:p>
+            <a:pPr algn="l">
+              <a:defRPr sz="2700" b="1">
+                <a:solidFill>
+                  <a:srgbClr val="112240"/>
+                </a:solidFill>
+                <a:latin typeface="Aptos"/>
+              </a:defRPr>
+            </a:pPr>
+            <a:r>
+              <a:t>Güvenli varsayılanlar ve açık sınırlar</a:t>
+            </a:r>
+          </a:p>
+        </p:txBody>
+      </p:sp>
+      <p:sp>
+        <p:nvSpPr>
+          <p:cNvPr id="4" name="TextBox 3"/>
+          <p:cNvSpPr txBox="1"/>
+          <p:nvPr/>
+        </p:nvSpPr>
+        <p:spPr>
+          <a:xfrm>
+            <a:off x="658368" y="1197864"/>
+            <a:ext cx="10881360" cy="420624"/>
+          </a:xfrm>
+          <a:prstGeom prst="rect">
+            <a:avLst/>
+          </a:prstGeom>
+          <a:noFill/>
+        </p:spPr>
+        <p:txBody>
+          <a:bodyPr wrap="square" lIns="18288" rIns="18288" tIns="18288" bIns="18288" anchor="ctr">
+            <a:spAutoFit/>
+          </a:bodyPr>
+          <a:lstStyle/>
+          <a:p>
+            <a:pPr algn="l">
+              <a:defRPr sz="1300" b="0">
+                <a:solidFill>
+                  <a:srgbClr val="637389"/>
+                </a:solidFill>
+                <a:latin typeface="Aptos"/>
+              </a:defRPr>
+            </a:pPr>
+            <a:r>
+              <a:t>Kod ve mevzuat bağlamı yerel Ollama'ya gider; tarama akışı bulguları uzman incelemesine sunar.</a:t>
+            </a:r>
+          </a:p>
+        </p:txBody>
+      </p:sp>
+      <p:sp>
+        <p:nvSpPr>
+          <p:cNvPr id="5" name="Rounded Rectangle 4"/>
+          <p:cNvSpPr/>
+          <p:nvPr/>
+        </p:nvSpPr>
+        <p:spPr>
+          <a:xfrm>
+            <a:off x="713232" y="1828800"/>
+            <a:ext cx="5212080" cy="2011680"/>
+          </a:xfrm>
+          <a:prstGeom prst="roundRect">
+            <a:avLst/>
+          </a:prstGeom>
+          <a:solidFill>
+            <a:srgbClr val="FFFFFF"/>
+          </a:solidFill>
+          <a:ln>
+            <a:noFill/>
+          </a:ln>
+        </p:spPr>
+        <p:style>
+          <a:lnRef idx="1">
+            <a:schemeClr val="accent1"/>
+          </a:lnRef>
+          <a:fillRef idx="3">
+            <a:schemeClr val="accent1"/>
+          </a:fillRef>
+          <a:effectRef idx="2">
+            <a:schemeClr val="accent1"/>
+          </a:effectRef>
+          <a:fontRef idx="minor">
+            <a:schemeClr val="lt1"/>
+          </a:fontRef>
+        </p:style>
+        <p:txBody>
+          <a:bodyPr rtlCol="0" anchor="ctr"/>
+          <a:lstStyle/>
+          <a:p>
+            <a:pPr algn="ctr"/>
+          </a:p>
+        </p:txBody>
+      </p:sp>
+      <p:sp>
+        <p:nvSpPr>
+          <p:cNvPr id="6" name="Rectangle 5"/>
+          <p:cNvSpPr/>
+          <p:nvPr/>
+        </p:nvSpPr>
+        <p:spPr>
+          <a:xfrm>
+            <a:off x="713232" y="1828800"/>
+            <a:ext cx="64008" cy="2011680"/>
+          </a:xfrm>
+          <a:prstGeom prst="rect">
+            <a:avLst/>
+          </a:prstGeom>
+          <a:solidFill>
+            <a:srgbClr val="00AFA0"/>
+          </a:solidFill>
+          <a:ln>
+            <a:noFill/>
+          </a:ln>
+        </p:spPr>
+        <p:style>
+          <a:lnRef idx="1">
+            <a:schemeClr val="accent1"/>
+          </a:lnRef>
+          <a:fillRef idx="3">
+            <a:schemeClr val="accent1"/>
+          </a:fillRef>
+          <a:effectRef idx="2">
+            <a:schemeClr val="accent1"/>
+          </a:effectRef>
+          <a:fontRef idx="minor">
+            <a:schemeClr val="lt1"/>
+          </a:fontRef>
+        </p:style>
+        <p:txBody>
+          <a:bodyPr rtlCol="0" anchor="ctr"/>
+          <a:lstStyle/>
+          <a:p>
+            <a:pPr algn="ctr"/>
+          </a:p>
+        </p:txBody>
+      </p:sp>
+      <p:sp>
+        <p:nvSpPr>
+          <p:cNvPr id="7" name="TextBox 6"/>
+          <p:cNvSpPr txBox="1"/>
+          <p:nvPr/>
+        </p:nvSpPr>
+        <p:spPr>
+          <a:xfrm>
+            <a:off x="914400" y="1956816"/>
+            <a:ext cx="4828032" cy="347472"/>
+          </a:xfrm>
+          <a:prstGeom prst="rect">
+            <a:avLst/>
+          </a:prstGeom>
+          <a:noFill/>
+        </p:spPr>
+        <p:txBody>
+          <a:bodyPr wrap="square" lIns="18288" rIns="18288" tIns="18288" bIns="18288" anchor="ctr">
+            <a:spAutoFit/>
+          </a:bodyPr>
+          <a:lstStyle/>
+          <a:p>
+            <a:pPr algn="l">
+              <a:defRPr sz="1600" b="1">
+                <a:solidFill>
+                  <a:srgbClr val="112240"/>
+                </a:solidFill>
+                <a:latin typeface="Aptos"/>
+              </a:defRPr>
+            </a:pPr>
+            <a:r>
+              <a:t>Kontroller</a:t>
+            </a:r>
+          </a:p>
+        </p:txBody>
+      </p:sp>
+      <p:sp>
+        <p:nvSpPr>
+          <p:cNvPr id="8" name="TextBox 7"/>
+          <p:cNvSpPr txBox="1"/>
+          <p:nvPr/>
+        </p:nvSpPr>
+        <p:spPr>
+          <a:xfrm>
+            <a:off x="932688" y="2377440"/>
+            <a:ext cx="4791456" cy="1353312"/>
+          </a:xfrm>
+          <a:prstGeom prst="rect">
+            <a:avLst/>
+          </a:prstGeom>
+          <a:noFill/>
+        </p:spPr>
+        <p:txBody>
+          <a:bodyPr wrap="square" lIns="18288" rIns="18288" tIns="18288" bIns="18288" anchor="ctr">
+            <a:spAutoFit/>
+          </a:bodyPr>
+          <a:lstStyle/>
+          <a:p>
+            <a:pPr algn="l">
+              <a:defRPr sz="1200" b="0">
+                <a:solidFill>
+                  <a:srgbClr val="223045"/>
+                </a:solidFill>
+                <a:latin typeface="Aptos"/>
+              </a:defRPr>
+            </a:pPr>
+            <a:r>
+              <a:t>•  Klonlama ve tarama kullanıcı onaylıdır</a:t>
+            </a:r>
+            <a:br/>
+            <a:r>
+              <a:t>•  Düzeltme ayrı worktree'de uygulanır</a:t>
+            </a:r>
+            <a:br/>
+            <a:r>
+              <a:t>•  Test ve PR ayrı onay ister</a:t>
+            </a:r>
+            <a:br/>
+            <a:r>
+              <a:t>•  PR için yalnız beklenen dosyalar seçilir</a:t>
+            </a:r>
+          </a:p>
+        </p:txBody>
+      </p:sp>
+      <p:sp>
+        <p:nvSpPr>
+          <p:cNvPr id="9" name="Rounded Rectangle 8"/>
+          <p:cNvSpPr/>
+          <p:nvPr/>
+        </p:nvSpPr>
+        <p:spPr>
+          <a:xfrm>
+            <a:off x="6172200" y="1828800"/>
+            <a:ext cx="5212080" cy="2011680"/>
+          </a:xfrm>
+          <a:prstGeom prst="roundRect">
+            <a:avLst/>
+          </a:prstGeom>
+          <a:solidFill>
+            <a:srgbClr val="FFFFFF"/>
+          </a:solidFill>
+          <a:ln>
+            <a:noFill/>
+          </a:ln>
+        </p:spPr>
+        <p:style>
+          <a:lnRef idx="1">
+            <a:schemeClr val="accent1"/>
+          </a:lnRef>
+          <a:fillRef idx="3">
+            <a:schemeClr val="accent1"/>
+          </a:fillRef>
+          <a:effectRef idx="2">
+            <a:schemeClr val="accent1"/>
+          </a:effectRef>
+          <a:fontRef idx="minor">
+            <a:schemeClr val="lt1"/>
+          </a:fontRef>
+        </p:style>
+        <p:txBody>
+          <a:bodyPr rtlCol="0" anchor="ctr"/>
+          <a:lstStyle/>
+          <a:p>
+            <a:pPr algn="ctr"/>
+          </a:p>
+        </p:txBody>
+      </p:sp>
+      <p:sp>
+        <p:nvSpPr>
+          <p:cNvPr id="10" name="Rectangle 9"/>
+          <p:cNvSpPr/>
+          <p:nvPr/>
+        </p:nvSpPr>
+        <p:spPr>
+          <a:xfrm>
+            <a:off x="6172200" y="1828800"/>
+            <a:ext cx="64008" cy="2011680"/>
+          </a:xfrm>
+          <a:prstGeom prst="rect">
+            <a:avLst/>
+          </a:prstGeom>
+          <a:solidFill>
+            <a:srgbClr val="F8BC4A"/>
+          </a:solidFill>
+          <a:ln>
+            <a:noFill/>
+          </a:ln>
+        </p:spPr>
+        <p:style>
+          <a:lnRef idx="1">
+            <a:schemeClr val="accent1"/>
+          </a:lnRef>
+          <a:fillRef idx="3">
+            <a:schemeClr val="accent1"/>
+          </a:fillRef>
+          <a:effectRef idx="2">
+            <a:schemeClr val="accent1"/>
+          </a:effectRef>
+          <a:fontRef idx="minor">
+            <a:schemeClr val="lt1"/>
+          </a:fontRef>
+        </p:style>
+        <p:txBody>
+          <a:bodyPr rtlCol="0" anchor="ctr"/>
+          <a:lstStyle/>
+          <a:p>
+            <a:pPr algn="ctr"/>
+          </a:p>
+        </p:txBody>
+      </p:sp>
+      <p:sp>
+        <p:nvSpPr>
+          <p:cNvPr id="11" name="TextBox 10"/>
+          <p:cNvSpPr txBox="1"/>
+          <p:nvPr/>
+        </p:nvSpPr>
+        <p:spPr>
+          <a:xfrm>
+            <a:off x="6373368" y="1956816"/>
+            <a:ext cx="4828032" cy="347472"/>
+          </a:xfrm>
+          <a:prstGeom prst="rect">
+            <a:avLst/>
+          </a:prstGeom>
+          <a:noFill/>
+        </p:spPr>
+        <p:txBody>
+          <a:bodyPr wrap="square" lIns="18288" rIns="18288" tIns="18288" bIns="18288" anchor="ctr">
+            <a:spAutoFit/>
+          </a:bodyPr>
+          <a:lstStyle/>
+          <a:p>
+            <a:pPr algn="l">
+              <a:defRPr sz="1600" b="1">
+                <a:solidFill>
+                  <a:srgbClr val="112240"/>
+                </a:solidFill>
+                <a:latin typeface="Aptos"/>
+              </a:defRPr>
+            </a:pPr>
+            <a:r>
+              <a:t>Kullanım sorumluluğu</a:t>
+            </a:r>
+          </a:p>
+        </p:txBody>
+      </p:sp>
+      <p:sp>
+        <p:nvSpPr>
+          <p:cNvPr id="12" name="TextBox 11"/>
+          <p:cNvSpPr txBox="1"/>
+          <p:nvPr/>
+        </p:nvSpPr>
+        <p:spPr>
+          <a:xfrm>
+            <a:off x="6391656" y="2377440"/>
+            <a:ext cx="4791456" cy="1353312"/>
+          </a:xfrm>
+          <a:prstGeom prst="rect">
+            <a:avLst/>
+          </a:prstGeom>
+          <a:noFill/>
+        </p:spPr>
+        <p:txBody>
+          <a:bodyPr wrap="square" lIns="18288" rIns="18288" tIns="18288" bIns="18288" anchor="ctr">
+            <a:spAutoFit/>
+          </a:bodyPr>
+          <a:lstStyle/>
+          <a:p>
+            <a:pPr algn="l">
+              <a:defRPr sz="1200" b="0">
+                <a:solidFill>
+                  <a:srgbClr val="223045"/>
+                </a:solidFill>
+                <a:latin typeface="Aptos"/>
+              </a:defRPr>
+            </a:pPr>
+            <a:r>
+              <a:t>•  İndirilen kaynağın güncelliğini denetleyin</a:t>
+            </a:r>
+            <a:br/>
+            <a:r>
+              <a:t>•  Yalnız güvendiğiniz projelerde test çalıştırın</a:t>
+            </a:r>
+            <a:br/>
+            <a:r>
+              <a:t>•  Model bulgusunu hukuk uzmanına doğrulatın</a:t>
+            </a:r>
+            <a:br/>
+            <a:r>
+              <a:t>•  Gerçek depoda yedek ve temiz çalışma alanı kullanın</a:t>
+            </a:r>
+          </a:p>
+        </p:txBody>
+      </p:sp>
+      <p:sp>
+        <p:nvSpPr>
+          <p:cNvPr id="13" name="Rounded Rectangle 12"/>
+          <p:cNvSpPr/>
+          <p:nvPr/>
+        </p:nvSpPr>
+        <p:spPr>
+          <a:xfrm>
+            <a:off x="713232" y="4279392"/>
+            <a:ext cx="10671048" cy="896112"/>
+          </a:xfrm>
+          <a:prstGeom prst="roundRect">
+            <a:avLst/>
+          </a:prstGeom>
+          <a:solidFill>
+            <a:srgbClr val="FFF6DF"/>
+          </a:solidFill>
+          <a:ln>
+            <a:noFill/>
+          </a:ln>
+        </p:spPr>
+        <p:style>
+          <a:lnRef idx="1">
+            <a:schemeClr val="accent1"/>
+          </a:lnRef>
+          <a:fillRef idx="3">
+            <a:schemeClr val="accent1"/>
+          </a:fillRef>
+          <a:effectRef idx="2">
+            <a:schemeClr val="accent1"/>
+          </a:effectRef>
+          <a:fontRef idx="minor">
+            <a:schemeClr val="lt1"/>
+          </a:fontRef>
+        </p:style>
+        <p:txBody>
+          <a:bodyPr rtlCol="0" anchor="ctr"/>
+          <a:lstStyle/>
+          <a:p>
+            <a:pPr algn="ctr"/>
+          </a:p>
+        </p:txBody>
+      </p:sp>
+      <p:sp>
+        <p:nvSpPr>
+          <p:cNvPr id="14" name="TextBox 13"/>
+          <p:cNvSpPr txBox="1"/>
+          <p:nvPr/>
+        </p:nvSpPr>
+        <p:spPr>
+          <a:xfrm>
+            <a:off x="932688" y="4498848"/>
+            <a:ext cx="10195560" cy="402336"/>
+          </a:xfrm>
+          <a:prstGeom prst="rect">
+            <a:avLst/>
+          </a:prstGeom>
+          <a:noFill/>
+        </p:spPr>
+        <p:txBody>
+          <a:bodyPr wrap="square" lIns="18288" rIns="18288" tIns="18288" bIns="18288" anchor="ctr">
+            <a:spAutoFit/>
+          </a:bodyPr>
+          <a:lstStyle/>
+          <a:p>
+            <a:pPr algn="ctr">
+              <a:defRPr sz="1400" b="1">
+                <a:solidFill>
+                  <a:srgbClr val="112240"/>
+                </a:solidFill>
+                <a:latin typeface="Aptos"/>
+              </a:defRPr>
+            </a:pPr>
+            <a:r>
+              <a:t>Otomasyon kanıtı düzenler; hukuki görüş, kesin uygunluk kararı veya güvenlik sertifikası vermez.</a:t>
+            </a:r>
+          </a:p>
+        </p:txBody>
+      </p:sp>
+      <p:sp>
+        <p:nvSpPr>
+          <p:cNvPr id="15" name="TextBox 14"/>
+          <p:cNvSpPr txBox="1"/>
+          <p:nvPr/>
+        </p:nvSpPr>
+        <p:spPr>
+          <a:xfrm>
+            <a:off x="566928" y="6473952"/>
+            <a:ext cx="9692640" cy="182880"/>
+          </a:xfrm>
+          <a:prstGeom prst="rect">
+            <a:avLst/>
+          </a:prstGeom>
+          <a:noFill/>
+        </p:spPr>
+        <p:txBody>
+          <a:bodyPr wrap="square" lIns="18288" rIns="18288" tIns="18288" bIns="18288" anchor="ctr">
+            <a:spAutoFit/>
+          </a:bodyPr>
+          <a:lstStyle/>
+          <a:p>
+            <a:pPr algn="l">
+              <a:defRPr sz="800" b="1">
+                <a:solidFill>
+                  <a:srgbClr val="637389"/>
+                </a:solidFill>
+                <a:latin typeface="Aptos"/>
+              </a:defRPr>
+            </a:pPr>
+            <a:r>
+              <a:t>MEVZUATAGENT  •  YEREL  •  ONAYLI  •  DENETLENEBİLİR</a:t>
+            </a:r>
+          </a:p>
+        </p:txBody>
+      </p:sp>
+      <p:sp>
+        <p:nvSpPr>
+          <p:cNvPr id="16" name="TextBox 15"/>
+          <p:cNvSpPr txBox="1"/>
+          <p:nvPr/>
+        </p:nvSpPr>
+        <p:spPr>
+          <a:xfrm>
+            <a:off x="11109960" y="6419088"/>
+            <a:ext cx="502920" cy="274320"/>
+          </a:xfrm>
+          <a:prstGeom prst="rect">
+            <a:avLst/>
+          </a:prstGeom>
+          <a:noFill/>
+        </p:spPr>
+        <p:txBody>
+          <a:bodyPr wrap="square" lIns="18288" rIns="18288" tIns="18288" bIns="18288" anchor="ctr">
+            <a:spAutoFit/>
+          </a:bodyPr>
+          <a:lstStyle/>
+          <a:p>
+            <a:pPr algn="r">
+              <a:defRPr sz="1000" b="1">
+                <a:solidFill>
+                  <a:srgbClr val="637389"/>
+                </a:solidFill>
+                <a:latin typeface="Aptos"/>
+              </a:defRPr>
+            </a:pPr>
+            <a:r>
+              <a:t>25</a:t>
+            </a:r>
+          </a:p>
+        </p:txBody>
+      </p:sp>
+    </p:spTree>
+  </p:cSld>
+  <p:clrMapOvr>
+    <a:masterClrMapping/>
+  </p:clrMapOvr>
+</p:sld>
+</file>
+
+<file path=ppt/slides/slide26.xml><?xml version="1.0" encoding="utf-8"?>
+<p:sld xmlns:a="http://schemas.openxmlformats.org/drawingml/2006/main" xmlns:p="http://schemas.openxmlformats.org/presentationml/2006/main" xmlns:r="http://schemas.openxmlformats.org/officeDocument/2006/relationships">
+  <p:cSld>
+    <p:bg>
+      <p:bgPr>
+        <a:solidFill>
+          <a:srgbClr val="F7F9FC"/>
+        </a:solidFill>
+        <a:effectLst/>
+      </p:bgPr>
+    </p:bg>
+    <p:spTree>
+      <p:nvGrpSpPr>
+        <p:cNvPr id="1" name=""/>
+        <p:cNvGrpSpPr/>
+        <p:nvPr/>
+      </p:nvGrpSpPr>
+      <p:grpSpPr/>
+      <p:sp>
+        <p:nvSpPr>
+          <p:cNvPr id="2" name="TextBox 1"/>
+          <p:cNvSpPr txBox="1"/>
+          <p:nvPr/>
+        </p:nvSpPr>
+        <p:spPr>
+          <a:xfrm>
+            <a:off x="640080" y="329184"/>
+            <a:ext cx="10881360" cy="228600"/>
+          </a:xfrm>
+          <a:prstGeom prst="rect">
+            <a:avLst/>
+          </a:prstGeom>
+          <a:noFill/>
+        </p:spPr>
+        <p:txBody>
+          <a:bodyPr wrap="square" lIns="18288" rIns="18288" tIns="18288" bIns="18288" anchor="ctr">
+            <a:spAutoFit/>
+          </a:bodyPr>
+          <a:lstStyle/>
+          <a:p>
+            <a:pPr algn="l">
+              <a:defRPr sz="900" b="1">
+                <a:solidFill>
+                  <a:srgbClr val="00AFA0"/>
+                </a:solidFill>
+                <a:latin typeface="Aptos"/>
+              </a:defRPr>
+            </a:pPr>
+            <a:r>
+              <a:t>26  •  BILINEN SINIRLAMALAR</a:t>
+            </a:r>
+          </a:p>
+        </p:txBody>
+      </p:sp>
+      <p:sp>
+        <p:nvSpPr>
+          <p:cNvPr id="3" name="TextBox 2"/>
+          <p:cNvSpPr txBox="1"/>
+          <p:nvPr/>
+        </p:nvSpPr>
+        <p:spPr>
+          <a:xfrm>
+            <a:off x="640080" y="658368"/>
+            <a:ext cx="10972800" cy="502920"/>
+          </a:xfrm>
+          <a:prstGeom prst="rect">
+            <a:avLst/>
+          </a:prstGeom>
+          <a:noFill/>
+        </p:spPr>
+        <p:txBody>
+          <a:bodyPr wrap="square" lIns="18288" rIns="18288" tIns="18288" bIns="18288" anchor="ctr">
+            <a:spAutoFit/>
+          </a:bodyPr>
+          <a:lstStyle/>
+          <a:p>
+            <a:pPr algn="l">
+              <a:defRPr sz="2700" b="1">
+                <a:solidFill>
+                  <a:srgbClr val="112240"/>
+                </a:solidFill>
+                <a:latin typeface="Aptos"/>
+              </a:defRPr>
+            </a:pPr>
+            <a:r>
+              <a:t>Tamamlanan iş ve sonraki geliştirme alanları</a:t>
+            </a:r>
+          </a:p>
+        </p:txBody>
+      </p:sp>
+      <p:sp>
+        <p:nvSpPr>
+          <p:cNvPr id="4" name="TextBox 3"/>
+          <p:cNvSpPr txBox="1"/>
+          <p:nvPr/>
+        </p:nvSpPr>
+        <p:spPr>
+          <a:xfrm>
+            <a:off x="658368" y="1197864"/>
+            <a:ext cx="10881360" cy="420624"/>
+          </a:xfrm>
+          <a:prstGeom prst="rect">
+            <a:avLst/>
+          </a:prstGeom>
+          <a:noFill/>
+        </p:spPr>
+        <p:txBody>
+          <a:bodyPr wrap="square" lIns="18288" rIns="18288" tIns="18288" bIns="18288" anchor="ctr">
+            <a:spAutoFit/>
+          </a:bodyPr>
+          <a:lstStyle/>
+          <a:p>
+            <a:pPr algn="l">
+              <a:defRPr sz="1300" b="0">
+                <a:solidFill>
+                  <a:srgbClr val="637389"/>
+                </a:solidFill>
+                <a:latin typeface="Aptos"/>
+              </a:defRPr>
+            </a:pPr>
+            <a:r>
+              <a:t>Kapsamı dürüstçe ayırmak, model çıktısına gereğinden fazla güvenilmesini önler.</a:t>
+            </a:r>
+          </a:p>
+        </p:txBody>
+      </p:sp>
+      <p:sp>
+        <p:nvSpPr>
+          <p:cNvPr id="5" name="Rounded Rectangle 4"/>
+          <p:cNvSpPr/>
+          <p:nvPr/>
+        </p:nvSpPr>
+        <p:spPr>
+          <a:xfrm>
+            <a:off x="713232" y="1847088"/>
+            <a:ext cx="5230368" cy="2423160"/>
+          </a:xfrm>
+          <a:prstGeom prst="roundRect">
+            <a:avLst/>
+          </a:prstGeom>
+          <a:solidFill>
+            <a:srgbClr val="FFFFFF"/>
+          </a:solidFill>
+          <a:ln>
+            <a:noFill/>
+          </a:ln>
+        </p:spPr>
+        <p:style>
+          <a:lnRef idx="1">
+            <a:schemeClr val="accent1"/>
+          </a:lnRef>
+          <a:fillRef idx="3">
+            <a:schemeClr val="accent1"/>
+          </a:fillRef>
+          <a:effectRef idx="2">
+            <a:schemeClr val="accent1"/>
+          </a:effectRef>
+          <a:fontRef idx="minor">
+            <a:schemeClr val="lt1"/>
+          </a:fontRef>
+        </p:style>
+        <p:txBody>
+          <a:bodyPr rtlCol="0" anchor="ctr"/>
+          <a:lstStyle/>
+          <a:p>
+            <a:pPr algn="ctr"/>
+          </a:p>
+        </p:txBody>
+      </p:sp>
+      <p:sp>
+        <p:nvSpPr>
+          <p:cNvPr id="6" name="Rectangle 5"/>
+          <p:cNvSpPr/>
+          <p:nvPr/>
+        </p:nvSpPr>
+        <p:spPr>
+          <a:xfrm>
+            <a:off x="713232" y="1847088"/>
+            <a:ext cx="64008" cy="2423160"/>
+          </a:xfrm>
+          <a:prstGeom prst="rect">
+            <a:avLst/>
+          </a:prstGeom>
+          <a:solidFill>
+            <a:srgbClr val="00AFA0"/>
+          </a:solidFill>
+          <a:ln>
+            <a:noFill/>
+          </a:ln>
+        </p:spPr>
+        <p:style>
+          <a:lnRef idx="1">
+            <a:schemeClr val="accent1"/>
+          </a:lnRef>
+          <a:fillRef idx="3">
+            <a:schemeClr val="accent1"/>
+          </a:fillRef>
+          <a:effectRef idx="2">
+            <a:schemeClr val="accent1"/>
+          </a:effectRef>
+          <a:fontRef idx="minor">
+            <a:schemeClr val="lt1"/>
+          </a:fontRef>
+        </p:style>
+        <p:txBody>
+          <a:bodyPr rtlCol="0" anchor="ctr"/>
+          <a:lstStyle/>
+          <a:p>
+            <a:pPr algn="ctr"/>
+          </a:p>
+        </p:txBody>
+      </p:sp>
+      <p:sp>
+        <p:nvSpPr>
+          <p:cNvPr id="7" name="TextBox 6"/>
+          <p:cNvSpPr txBox="1"/>
+          <p:nvPr/>
+        </p:nvSpPr>
+        <p:spPr>
+          <a:xfrm>
+            <a:off x="914400" y="1975104"/>
+            <a:ext cx="4846320" cy="347472"/>
+          </a:xfrm>
+          <a:prstGeom prst="rect">
+            <a:avLst/>
+          </a:prstGeom>
+          <a:noFill/>
+        </p:spPr>
+        <p:txBody>
+          <a:bodyPr wrap="square" lIns="18288" rIns="18288" tIns="18288" bIns="18288" anchor="ctr">
+            <a:spAutoFit/>
+          </a:bodyPr>
+          <a:lstStyle/>
+          <a:p>
+            <a:pPr algn="l">
+              <a:defRPr sz="1600" b="1">
+                <a:solidFill>
+                  <a:srgbClr val="112240"/>
+                </a:solidFill>
+                <a:latin typeface="Aptos"/>
+              </a:defRPr>
+            </a:pPr>
+            <a:r>
+              <a:t>Uygulanan</a:t>
+            </a:r>
+          </a:p>
+        </p:txBody>
+      </p:sp>
+      <p:sp>
+        <p:nvSpPr>
+          <p:cNvPr id="8" name="TextBox 7"/>
+          <p:cNvSpPr txBox="1"/>
+          <p:nvPr/>
+        </p:nvSpPr>
+        <p:spPr>
+          <a:xfrm>
+            <a:off x="932688" y="2395728"/>
+            <a:ext cx="4809744" cy="1764792"/>
+          </a:xfrm>
+          <a:prstGeom prst="rect">
+            <a:avLst/>
+          </a:prstGeom>
+          <a:noFill/>
+        </p:spPr>
+        <p:txBody>
+          <a:bodyPr wrap="square" lIns="18288" rIns="18288" tIns="18288" bIns="18288" anchor="ctr">
+            <a:spAutoFit/>
+          </a:bodyPr>
+          <a:lstStyle/>
+          <a:p>
+            <a:pPr algn="l">
+              <a:defRPr sz="1200" b="0">
+                <a:solidFill>
+                  <a:srgbClr val="223045"/>
+                </a:solidFill>
+                <a:latin typeface="Aptos"/>
+              </a:defRPr>
+            </a:pPr>
+            <a:r>
+              <a:t>•  PDF indirme ve sayfa metnini parçalama</a:t>
+            </a:r>
+            <a:br/>
+            <a:r>
+              <a:t>•  BM25 ile yerel mevzuat araması</a:t>
+            </a:r>
+            <a:br/>
+            <a:r>
+              <a:t>•  Onaylı tarama ve MD/HTML rapor</a:t>
+            </a:r>
+            <a:br/>
+            <a:r>
+              <a:t>•  İzole düzeltme, test ve PR akışları</a:t>
+            </a:r>
+          </a:p>
+        </p:txBody>
+      </p:sp>
+      <p:sp>
+        <p:nvSpPr>
+          <p:cNvPr id="9" name="Rounded Rectangle 8"/>
+          <p:cNvSpPr/>
+          <p:nvPr/>
+        </p:nvSpPr>
+        <p:spPr>
+          <a:xfrm>
+            <a:off x="6144768" y="1847088"/>
+            <a:ext cx="5230368" cy="2423160"/>
+          </a:xfrm>
+          <a:prstGeom prst="roundRect">
+            <a:avLst/>
+          </a:prstGeom>
+          <a:solidFill>
+            <a:srgbClr val="FFFFFF"/>
+          </a:solidFill>
+          <a:ln>
+            <a:noFill/>
+          </a:ln>
+        </p:spPr>
+        <p:style>
+          <a:lnRef idx="1">
+            <a:schemeClr val="accent1"/>
+          </a:lnRef>
+          <a:fillRef idx="3">
+            <a:schemeClr val="accent1"/>
+          </a:fillRef>
+          <a:effectRef idx="2">
+            <a:schemeClr val="accent1"/>
+          </a:effectRef>
+          <a:fontRef idx="minor">
+            <a:schemeClr val="lt1"/>
+          </a:fontRef>
+        </p:style>
+        <p:txBody>
+          <a:bodyPr rtlCol="0" anchor="ctr"/>
+          <a:lstStyle/>
+          <a:p>
+            <a:pPr algn="ctr"/>
+          </a:p>
+        </p:txBody>
+      </p:sp>
+      <p:sp>
+        <p:nvSpPr>
+          <p:cNvPr id="10" name="Rectangle 9"/>
+          <p:cNvSpPr/>
+          <p:nvPr/>
+        </p:nvSpPr>
+        <p:spPr>
+          <a:xfrm>
+            <a:off x="6144768" y="1847088"/>
+            <a:ext cx="64008" cy="2423160"/>
+          </a:xfrm>
+          <a:prstGeom prst="rect">
+            <a:avLst/>
+          </a:prstGeom>
+          <a:solidFill>
+            <a:srgbClr val="F8BC4A"/>
+          </a:solidFill>
+          <a:ln>
+            <a:noFill/>
+          </a:ln>
+        </p:spPr>
+        <p:style>
+          <a:lnRef idx="1">
+            <a:schemeClr val="accent1"/>
+          </a:lnRef>
+          <a:fillRef idx="3">
+            <a:schemeClr val="accent1"/>
+          </a:fillRef>
+          <a:effectRef idx="2">
+            <a:schemeClr val="accent1"/>
+          </a:effectRef>
+          <a:fontRef idx="minor">
+            <a:schemeClr val="lt1"/>
+          </a:fontRef>
+        </p:style>
+        <p:txBody>
+          <a:bodyPr rtlCol="0" anchor="ctr"/>
+          <a:lstStyle/>
+          <a:p>
+            <a:pPr algn="ctr"/>
+          </a:p>
+        </p:txBody>
+      </p:sp>
+      <p:sp>
+        <p:nvSpPr>
+          <p:cNvPr id="11" name="TextBox 10"/>
+          <p:cNvSpPr txBox="1"/>
+          <p:nvPr/>
+        </p:nvSpPr>
+        <p:spPr>
+          <a:xfrm>
+            <a:off x="6345936" y="1975104"/>
+            <a:ext cx="4846320" cy="347472"/>
+          </a:xfrm>
+          <a:prstGeom prst="rect">
+            <a:avLst/>
+          </a:prstGeom>
+          <a:noFill/>
+        </p:spPr>
+        <p:txBody>
+          <a:bodyPr wrap="square" lIns="18288" rIns="18288" tIns="18288" bIns="18288" anchor="ctr">
+            <a:spAutoFit/>
+          </a:bodyPr>
+          <a:lstStyle/>
+          <a:p>
+            <a:pPr algn="l">
+              <a:defRPr sz="1600" b="1">
+                <a:solidFill>
+                  <a:srgbClr val="112240"/>
+                </a:solidFill>
+                <a:latin typeface="Aptos"/>
+              </a:defRPr>
+            </a:pPr>
+            <a:r>
+              <a:t>Henüz yok / garanti edilmez</a:t>
+            </a:r>
+          </a:p>
+        </p:txBody>
+      </p:sp>
+      <p:sp>
+        <p:nvSpPr>
+          <p:cNvPr id="12" name="TextBox 11"/>
+          <p:cNvSpPr txBox="1"/>
+          <p:nvPr/>
+        </p:nvSpPr>
+        <p:spPr>
+          <a:xfrm>
+            <a:off x="6364224" y="2395728"/>
+            <a:ext cx="4809744" cy="1764792"/>
+          </a:xfrm>
+          <a:prstGeom prst="rect">
+            <a:avLst/>
+          </a:prstGeom>
+          <a:noFill/>
+        </p:spPr>
+        <p:txBody>
+          <a:bodyPr wrap="square" lIns="18288" rIns="18288" tIns="18288" bIns="18288" anchor="ctr">
+            <a:spAutoFit/>
+          </a:bodyPr>
+          <a:lstStyle/>
+          <a:p>
+            <a:pPr algn="l">
+              <a:defRPr sz="1200" b="0">
+                <a:solidFill>
+                  <a:srgbClr val="223045"/>
+                </a:solidFill>
+                <a:latin typeface="Aptos"/>
+              </a:defRPr>
+            </a:pPr>
+            <a:r>
+              <a:t>•  OCR, vektör arama ve belge sürüm takibi</a:t>
+            </a:r>
+            <a:br/>
+            <a:r>
+              <a:t>•  Hukuki doğruluğun otomatik kanıtlanması</a:t>
+            </a:r>
+            <a:br/>
+            <a:r>
+              <a:t>•  Web arayüzü ve devam ettirilebilir işler</a:t>
+            </a:r>
+            <a:br/>
+            <a:r>
+              <a:t>•  Gerçek GitHub PR ile uçtan uca canlı doğrulama</a:t>
+            </a:r>
+          </a:p>
+        </p:txBody>
+      </p:sp>
+      <p:sp>
+        <p:nvSpPr>
+          <p:cNvPr id="13" name="Rounded Rectangle 12"/>
+          <p:cNvSpPr/>
+          <p:nvPr/>
+        </p:nvSpPr>
+        <p:spPr>
+          <a:xfrm>
+            <a:off x="713232" y="4681728"/>
+            <a:ext cx="10661904" cy="749808"/>
+          </a:xfrm>
+          <a:prstGeom prst="roundRect">
+            <a:avLst/>
+          </a:prstGeom>
+          <a:solidFill>
+            <a:srgbClr val="FFF6DF"/>
+          </a:solidFill>
+          <a:ln>
+            <a:noFill/>
+          </a:ln>
+        </p:spPr>
+        <p:style>
+          <a:lnRef idx="1">
+            <a:schemeClr val="accent1"/>
+          </a:lnRef>
+          <a:fillRef idx="3">
+            <a:schemeClr val="accent1"/>
+          </a:fillRef>
+          <a:effectRef idx="2">
+            <a:schemeClr val="accent1"/>
+          </a:effectRef>
+          <a:fontRef idx="minor">
+            <a:schemeClr val="lt1"/>
+          </a:fontRef>
+        </p:style>
+        <p:txBody>
+          <a:bodyPr rtlCol="0" anchor="ctr"/>
+          <a:lstStyle/>
+          <a:p>
+            <a:pPr algn="ctr"/>
+          </a:p>
+        </p:txBody>
+      </p:sp>
+      <p:sp>
+        <p:nvSpPr>
+          <p:cNvPr id="14" name="TextBox 13"/>
+          <p:cNvSpPr txBox="1"/>
+          <p:nvPr/>
+        </p:nvSpPr>
+        <p:spPr>
+          <a:xfrm>
+            <a:off x="914400" y="4837176"/>
+            <a:ext cx="10241280" cy="411480"/>
+          </a:xfrm>
+          <a:prstGeom prst="rect">
+            <a:avLst/>
+          </a:prstGeom>
+          <a:noFill/>
+        </p:spPr>
+        <p:txBody>
+          <a:bodyPr wrap="square" lIns="18288" rIns="18288" tIns="18288" bIns="18288" anchor="ctr">
+            <a:spAutoFit/>
+          </a:bodyPr>
+          <a:lstStyle/>
+          <a:p>
+            <a:pPr algn="ctr">
+              <a:defRPr sz="1100" b="1">
+                <a:solidFill>
+                  <a:srgbClr val="112240"/>
+                </a:solidFill>
+                <a:latin typeface="Aptos"/>
+              </a:defRPr>
+            </a:pPr>
+            <a:r>
+              <a:t>Sonraki adımlar: gerçek mevzuat örneklerinde uzman değerlendirmesi yap • yetkili test deposunda gerçek PR akışını dene.</a:t>
+            </a:r>
+          </a:p>
+        </p:txBody>
+      </p:sp>
+      <p:sp>
+        <p:nvSpPr>
+          <p:cNvPr id="15" name="TextBox 14"/>
+          <p:cNvSpPr txBox="1"/>
+          <p:nvPr/>
+        </p:nvSpPr>
+        <p:spPr>
+          <a:xfrm>
+            <a:off x="566928" y="6473952"/>
+            <a:ext cx="9692640" cy="182880"/>
+          </a:xfrm>
+          <a:prstGeom prst="rect">
+            <a:avLst/>
+          </a:prstGeom>
+          <a:noFill/>
+        </p:spPr>
+        <p:txBody>
+          <a:bodyPr wrap="square" lIns="18288" rIns="18288" tIns="18288" bIns="18288" anchor="ctr">
+            <a:spAutoFit/>
+          </a:bodyPr>
+          <a:lstStyle/>
+          <a:p>
+            <a:pPr algn="l">
+              <a:defRPr sz="800" b="1">
+                <a:solidFill>
+                  <a:srgbClr val="637389"/>
+                </a:solidFill>
+                <a:latin typeface="Aptos"/>
+              </a:defRPr>
+            </a:pPr>
+            <a:r>
+              <a:t>MEVZUATAGENT  •  YEREL  •  ONAYLI  •  DENETLENEBİLİR</a:t>
+            </a:r>
+          </a:p>
+        </p:txBody>
+      </p:sp>
+      <p:sp>
+        <p:nvSpPr>
+          <p:cNvPr id="16" name="TextBox 15"/>
+          <p:cNvSpPr txBox="1"/>
+          <p:nvPr/>
+        </p:nvSpPr>
+        <p:spPr>
+          <a:xfrm>
+            <a:off x="11109960" y="6419088"/>
+            <a:ext cx="502920" cy="274320"/>
+          </a:xfrm>
+          <a:prstGeom prst="rect">
+            <a:avLst/>
+          </a:prstGeom>
+          <a:noFill/>
+        </p:spPr>
+        <p:txBody>
+          <a:bodyPr wrap="square" lIns="18288" rIns="18288" tIns="18288" bIns="18288" anchor="ctr">
+            <a:spAutoFit/>
+          </a:bodyPr>
+          <a:lstStyle/>
+          <a:p>
+            <a:pPr algn="r">
+              <a:defRPr sz="1000" b="1">
+                <a:solidFill>
+                  <a:srgbClr val="637389"/>
+                </a:solidFill>
+                <a:latin typeface="Aptos"/>
+              </a:defRPr>
+            </a:pPr>
+            <a:r>
+              <a:t>26</a:t>
+            </a:r>
+          </a:p>
+        </p:txBody>
+      </p:sp>
+    </p:spTree>
+  </p:cSld>
+  <p:clrMapOvr>
+    <a:masterClrMapping/>
+  </p:clrMapOvr>
+</p:sld>
+</file>
+
+<file path=ppt/slides/slide27.xml><?xml version="1.0" encoding="utf-8"?>
+<p:sld xmlns:a="http://schemas.openxmlformats.org/drawingml/2006/main" xmlns:p="http://schemas.openxmlformats.org/presentationml/2006/main" xmlns:r="http://schemas.openxmlformats.org/officeDocument/2006/relationships">
+  <p:cSld>
+    <p:bg>
+      <p:bgPr>
+        <a:solidFill>
+          <a:srgbClr val="F7F9FC"/>
+        </a:solidFill>
+        <a:effectLst/>
+      </p:bgPr>
+    </p:bg>
+    <p:spTree>
+      <p:nvGrpSpPr>
+        <p:cNvPr id="1" name=""/>
+        <p:cNvGrpSpPr/>
+        <p:nvPr/>
+      </p:nvGrpSpPr>
+      <p:grpSpPr/>
+      <p:sp>
+        <p:nvSpPr>
+          <p:cNvPr id="2" name="TextBox 1"/>
+          <p:cNvSpPr txBox="1"/>
+          <p:nvPr/>
+        </p:nvSpPr>
+        <p:spPr>
+          <a:xfrm>
+            <a:off x="640080" y="329184"/>
+            <a:ext cx="10881360" cy="228600"/>
+          </a:xfrm>
+          <a:prstGeom prst="rect">
+            <a:avLst/>
+          </a:prstGeom>
+          <a:noFill/>
+        </p:spPr>
+        <p:txBody>
+          <a:bodyPr wrap="square" lIns="18288" rIns="18288" tIns="18288" bIns="18288" anchor="ctr">
+            <a:spAutoFit/>
+          </a:bodyPr>
+          <a:lstStyle/>
+          <a:p>
+            <a:pPr algn="l">
+              <a:defRPr sz="900" b="1">
+                <a:solidFill>
+                  <a:srgbClr val="00AFA0"/>
+                </a:solidFill>
+                <a:latin typeface="Aptos"/>
+              </a:defRPr>
+            </a:pPr>
+            <a:r>
+              <a:t>27  •  BOOTCAMP KAPANIŞ PROJESI RUBRIĞI</a:t>
+            </a:r>
+          </a:p>
+        </p:txBody>
+      </p:sp>
+      <p:sp>
+        <p:nvSpPr>
+          <p:cNvPr id="3" name="TextBox 2"/>
+          <p:cNvSpPr txBox="1"/>
+          <p:nvPr/>
+        </p:nvSpPr>
+        <p:spPr>
+          <a:xfrm>
+            <a:off x="640080" y="658368"/>
+            <a:ext cx="10972800" cy="502920"/>
+          </a:xfrm>
+          <a:prstGeom prst="rect">
+            <a:avLst/>
+          </a:prstGeom>
+          <a:noFill/>
+        </p:spPr>
+        <p:txBody>
+          <a:bodyPr wrap="square" lIns="18288" rIns="18288" tIns="18288" bIns="18288" anchor="ctr">
+            <a:spAutoFit/>
+          </a:bodyPr>
+          <a:lstStyle/>
+          <a:p>
+            <a:pPr algn="l">
+              <a:defRPr sz="2700" b="1">
+                <a:solidFill>
+                  <a:srgbClr val="112240"/>
+                </a:solidFill>
+                <a:latin typeface="Aptos"/>
+              </a:defRPr>
+            </a:pPr>
+            <a:r>
+              <a:t>Beş değerlendirme ölçütüne göre proje özeti</a:t>
+            </a:r>
+          </a:p>
+        </p:txBody>
+      </p:sp>
+      <p:sp>
+        <p:nvSpPr>
+          <p:cNvPr id="4" name="TextBox 3"/>
+          <p:cNvSpPr txBox="1"/>
+          <p:nvPr/>
+        </p:nvSpPr>
+        <p:spPr>
+          <a:xfrm>
+            <a:off x="658368" y="1197864"/>
+            <a:ext cx="10881360" cy="420624"/>
+          </a:xfrm>
+          <a:prstGeom prst="rect">
+            <a:avLst/>
+          </a:prstGeom>
+          <a:noFill/>
+        </p:spPr>
+        <p:txBody>
+          <a:bodyPr wrap="square" lIns="18288" rIns="18288" tIns="18288" bIns="18288" anchor="ctr">
+            <a:spAutoFit/>
+          </a:bodyPr>
+          <a:lstStyle/>
+          <a:p>
+            <a:pPr algn="l">
+              <a:defRPr sz="1300" b="0">
+                <a:solidFill>
+                  <a:srgbClr val="637389"/>
+                </a:solidFill>
+                <a:latin typeface="Aptos"/>
+              </a:defRPr>
+            </a:pPr>
+            <a:r>
+              <a:t>Her ölçüt %20 ağırlıktadır; kanıtlar ve mevcut sınırlar birlikte değerlendirilmiştir.</a:t>
+            </a:r>
+          </a:p>
+        </p:txBody>
+      </p:sp>
+      <p:sp>
+        <p:nvSpPr>
+          <p:cNvPr id="5" name="Rounded Rectangle 4"/>
+          <p:cNvSpPr/>
+          <p:nvPr/>
+        </p:nvSpPr>
+        <p:spPr>
+          <a:xfrm>
+            <a:off x="713232" y="1783080"/>
+            <a:ext cx="5230368" cy="1417320"/>
+          </a:xfrm>
+          <a:prstGeom prst="roundRect">
+            <a:avLst/>
+          </a:prstGeom>
+          <a:solidFill>
+            <a:srgbClr val="FFFFFF"/>
+          </a:solidFill>
+          <a:ln>
+            <a:noFill/>
+          </a:ln>
+        </p:spPr>
+        <p:style>
+          <a:lnRef idx="1">
+            <a:schemeClr val="accent1"/>
+          </a:lnRef>
+          <a:fillRef idx="3">
+            <a:schemeClr val="accent1"/>
+          </a:fillRef>
+          <a:effectRef idx="2">
+            <a:schemeClr val="accent1"/>
+          </a:effectRef>
+          <a:fontRef idx="minor">
+            <a:schemeClr val="lt1"/>
+          </a:fontRef>
+        </p:style>
+        <p:txBody>
+          <a:bodyPr rtlCol="0" anchor="ctr"/>
+          <a:lstStyle/>
+          <a:p>
+            <a:pPr algn="ctr"/>
+          </a:p>
+        </p:txBody>
+      </p:sp>
+      <p:sp>
+        <p:nvSpPr>
+          <p:cNvPr id="6" name="Rectangle 5"/>
+          <p:cNvSpPr/>
+          <p:nvPr/>
+        </p:nvSpPr>
+        <p:spPr>
+          <a:xfrm>
+            <a:off x="713232" y="1783080"/>
+            <a:ext cx="64008" cy="1417320"/>
+          </a:xfrm>
+          <a:prstGeom prst="rect">
+            <a:avLst/>
+          </a:prstGeom>
+          <a:solidFill>
+            <a:srgbClr val="00AFA0"/>
+          </a:solidFill>
+          <a:ln>
+            <a:noFill/>
+          </a:ln>
+        </p:spPr>
+        <p:style>
+          <a:lnRef idx="1">
+            <a:schemeClr val="accent1"/>
+          </a:lnRef>
+          <a:fillRef idx="3">
+            <a:schemeClr val="accent1"/>
+          </a:fillRef>
+          <a:effectRef idx="2">
+            <a:schemeClr val="accent1"/>
+          </a:effectRef>
+          <a:fontRef idx="minor">
+            <a:schemeClr val="lt1"/>
+          </a:fontRef>
+        </p:style>
+        <p:txBody>
+          <a:bodyPr rtlCol="0" anchor="ctr"/>
+          <a:lstStyle/>
+          <a:p>
+            <a:pPr algn="ctr"/>
+          </a:p>
+        </p:txBody>
+      </p:sp>
+      <p:sp>
+        <p:nvSpPr>
+          <p:cNvPr id="7" name="TextBox 6"/>
+          <p:cNvSpPr txBox="1"/>
+          <p:nvPr/>
+        </p:nvSpPr>
+        <p:spPr>
+          <a:xfrm>
+            <a:off x="914400" y="1911095"/>
+            <a:ext cx="4846320" cy="347472"/>
+          </a:xfrm>
+          <a:prstGeom prst="rect">
+            <a:avLst/>
+          </a:prstGeom>
+          <a:noFill/>
+        </p:spPr>
+        <p:txBody>
+          <a:bodyPr wrap="square" lIns="18288" rIns="18288" tIns="18288" bIns="18288" anchor="ctr">
+            <a:spAutoFit/>
+          </a:bodyPr>
+          <a:lstStyle/>
+          <a:p>
+            <a:pPr algn="l">
+              <a:defRPr sz="1600" b="1">
+                <a:solidFill>
+                  <a:srgbClr val="112240"/>
+                </a:solidFill>
+                <a:latin typeface="Aptos"/>
+              </a:defRPr>
+            </a:pPr>
+            <a:r>
+              <a:t>Problem tanımı ve gerçek dünya • %20</a:t>
+            </a:r>
+          </a:p>
+        </p:txBody>
+      </p:sp>
+      <p:sp>
+        <p:nvSpPr>
+          <p:cNvPr id="8" name="TextBox 7"/>
+          <p:cNvSpPr txBox="1"/>
+          <p:nvPr/>
+        </p:nvSpPr>
+        <p:spPr>
+          <a:xfrm>
+            <a:off x="932688" y="2331720"/>
+            <a:ext cx="4809744" cy="758952"/>
+          </a:xfrm>
+          <a:prstGeom prst="rect">
+            <a:avLst/>
+          </a:prstGeom>
+          <a:noFill/>
+        </p:spPr>
+        <p:txBody>
+          <a:bodyPr wrap="square" lIns="18288" rIns="18288" tIns="18288" bIns="18288" anchor="ctr">
+            <a:spAutoFit/>
+          </a:bodyPr>
+          <a:lstStyle/>
+          <a:p>
+            <a:pPr algn="l">
+              <a:defRPr sz="1200" b="0">
+                <a:solidFill>
+                  <a:srgbClr val="223045"/>
+                </a:solidFill>
+                <a:latin typeface="Aptos"/>
+              </a:defRPr>
+            </a:pPr>
+            <a:r>
+              <a:t>•  Kartlı ödeme: maskeleme, tutar, idempotency.</a:t>
+            </a:r>
+            <a:br/>
+            <a:r>
+              <a:t>•  Gerçekçi ön inceleme ihtiyacı; uzman kararı gerekir.</a:t>
+            </a:r>
+          </a:p>
+        </p:txBody>
+      </p:sp>
+      <p:sp>
+        <p:nvSpPr>
+          <p:cNvPr id="9" name="Rounded Rectangle 8"/>
+          <p:cNvSpPr/>
+          <p:nvPr/>
+        </p:nvSpPr>
+        <p:spPr>
+          <a:xfrm>
+            <a:off x="6199632" y="1783080"/>
+            <a:ext cx="5230368" cy="1417320"/>
+          </a:xfrm>
+          <a:prstGeom prst="roundRect">
+            <a:avLst/>
+          </a:prstGeom>
+          <a:solidFill>
+            <a:srgbClr val="FFFFFF"/>
+          </a:solidFill>
+          <a:ln>
+            <a:noFill/>
+          </a:ln>
+        </p:spPr>
+        <p:style>
+          <a:lnRef idx="1">
+            <a:schemeClr val="accent1"/>
+          </a:lnRef>
+          <a:fillRef idx="3">
+            <a:schemeClr val="accent1"/>
+          </a:fillRef>
+          <a:effectRef idx="2">
+            <a:schemeClr val="accent1"/>
+          </a:effectRef>
+          <a:fontRef idx="minor">
+            <a:schemeClr val="lt1"/>
+          </a:fontRef>
+        </p:style>
+        <p:txBody>
+          <a:bodyPr rtlCol="0" anchor="ctr"/>
+          <a:lstStyle/>
+          <a:p>
+            <a:pPr algn="ctr"/>
+          </a:p>
+        </p:txBody>
+      </p:sp>
+      <p:sp>
+        <p:nvSpPr>
+          <p:cNvPr id="10" name="Rectangle 9"/>
+          <p:cNvSpPr/>
+          <p:nvPr/>
+        </p:nvSpPr>
+        <p:spPr>
+          <a:xfrm>
+            <a:off x="6199632" y="1783080"/>
+            <a:ext cx="64008" cy="1417320"/>
+          </a:xfrm>
+          <a:prstGeom prst="rect">
+            <a:avLst/>
+          </a:prstGeom>
+          <a:solidFill>
+            <a:srgbClr val="35BED7"/>
+          </a:solidFill>
+          <a:ln>
+            <a:noFill/>
+          </a:ln>
+        </p:spPr>
+        <p:style>
+          <a:lnRef idx="1">
+            <a:schemeClr val="accent1"/>
+          </a:lnRef>
+          <a:fillRef idx="3">
+            <a:schemeClr val="accent1"/>
+          </a:fillRef>
+          <a:effectRef idx="2">
+            <a:schemeClr val="accent1"/>
+          </a:effectRef>
+          <a:fontRef idx="minor">
+            <a:schemeClr val="lt1"/>
+          </a:fontRef>
+        </p:style>
+        <p:txBody>
+          <a:bodyPr rtlCol="0" anchor="ctr"/>
+          <a:lstStyle/>
+          <a:p>
+            <a:pPr algn="ctr"/>
+          </a:p>
+        </p:txBody>
+      </p:sp>
+      <p:sp>
+        <p:nvSpPr>
+          <p:cNvPr id="11" name="TextBox 10"/>
+          <p:cNvSpPr txBox="1"/>
+          <p:nvPr/>
+        </p:nvSpPr>
+        <p:spPr>
+          <a:xfrm>
+            <a:off x="6400800" y="1911095"/>
+            <a:ext cx="4846320" cy="347472"/>
+          </a:xfrm>
+          <a:prstGeom prst="rect">
+            <a:avLst/>
+          </a:prstGeom>
+          <a:noFill/>
+        </p:spPr>
+        <p:txBody>
+          <a:bodyPr wrap="square" lIns="18288" rIns="18288" tIns="18288" bIns="18288" anchor="ctr">
+            <a:spAutoFit/>
+          </a:bodyPr>
+          <a:lstStyle/>
+          <a:p>
+            <a:pPr algn="l">
+              <a:defRPr sz="1600" b="1">
+                <a:solidFill>
+                  <a:srgbClr val="112240"/>
+                </a:solidFill>
+                <a:latin typeface="Aptos"/>
+              </a:defRPr>
+            </a:pPr>
+            <a:r>
+              <a:t>Agentic mimari ve eğitim yaklaşımları • %20</a:t>
+            </a:r>
+          </a:p>
+        </p:txBody>
+      </p:sp>
+      <p:sp>
+        <p:nvSpPr>
+          <p:cNvPr id="12" name="TextBox 11"/>
+          <p:cNvSpPr txBox="1"/>
+          <p:nvPr/>
+        </p:nvSpPr>
+        <p:spPr>
+          <a:xfrm>
+            <a:off x="6419088" y="2331720"/>
+            <a:ext cx="4809744" cy="758952"/>
+          </a:xfrm>
+          <a:prstGeom prst="rect">
+            <a:avLst/>
+          </a:prstGeom>
+          <a:noFill/>
+        </p:spPr>
+        <p:txBody>
+          <a:bodyPr wrap="square" lIns="18288" rIns="18288" tIns="18288" bIns="18288" anchor="ctr">
+            <a:spAutoFit/>
+          </a:bodyPr>
+          <a:lstStyle/>
+          <a:p>
+            <a:pPr algn="l">
+              <a:defRPr sz="1200" b="0">
+                <a:solidFill>
+                  <a:srgbClr val="223045"/>
+                </a:solidFill>
+                <a:latin typeface="Aptos"/>
+              </a:defRPr>
+            </a:pPr>
+            <a:r>
+              <a:t>•  RAG + Python araçları + çok adımlı LangChain akışı.</a:t>
+            </a:r>
+            <a:br/>
+            <a:r>
+              <a:t>•  Onaylı araç adımları; hafıza/otonom plan/multi-agent yok.</a:t>
+            </a:r>
+          </a:p>
+        </p:txBody>
+      </p:sp>
+      <p:sp>
+        <p:nvSpPr>
+          <p:cNvPr id="13" name="Rounded Rectangle 12"/>
+          <p:cNvSpPr/>
+          <p:nvPr/>
+        </p:nvSpPr>
+        <p:spPr>
+          <a:xfrm>
+            <a:off x="713232" y="3401568"/>
+            <a:ext cx="3401568" cy="1508760"/>
+          </a:xfrm>
+          <a:prstGeom prst="roundRect">
+            <a:avLst/>
+          </a:prstGeom>
+          <a:solidFill>
+            <a:srgbClr val="FFFFFF"/>
+          </a:solidFill>
+          <a:ln>
+            <a:noFill/>
+          </a:ln>
+        </p:spPr>
+        <p:style>
+          <a:lnRef idx="1">
+            <a:schemeClr val="accent1"/>
+          </a:lnRef>
+          <a:fillRef idx="3">
+            <a:schemeClr val="accent1"/>
+          </a:fillRef>
+          <a:effectRef idx="2">
+            <a:schemeClr val="accent1"/>
+          </a:effectRef>
+          <a:fontRef idx="minor">
+            <a:schemeClr val="lt1"/>
+          </a:fontRef>
+        </p:style>
+        <p:txBody>
+          <a:bodyPr rtlCol="0" anchor="ctr"/>
+          <a:lstStyle/>
+          <a:p>
+            <a:pPr algn="ctr"/>
+          </a:p>
+        </p:txBody>
+      </p:sp>
+      <p:sp>
+        <p:nvSpPr>
+          <p:cNvPr id="14" name="Rectangle 13"/>
+          <p:cNvSpPr/>
+          <p:nvPr/>
+        </p:nvSpPr>
+        <p:spPr>
+          <a:xfrm>
+            <a:off x="713232" y="3401568"/>
+            <a:ext cx="64008" cy="1508760"/>
+          </a:xfrm>
+          <a:prstGeom prst="rect">
+            <a:avLst/>
+          </a:prstGeom>
+          <a:solidFill>
+            <a:srgbClr val="F8BC4A"/>
+          </a:solidFill>
+          <a:ln>
+            <a:noFill/>
+          </a:ln>
+        </p:spPr>
+        <p:style>
+          <a:lnRef idx="1">
+            <a:schemeClr val="accent1"/>
+          </a:lnRef>
+          <a:fillRef idx="3">
+            <a:schemeClr val="accent1"/>
+          </a:fillRef>
+          <a:effectRef idx="2">
+            <a:schemeClr val="accent1"/>
+          </a:effectRef>
+          <a:fontRef idx="minor">
+            <a:schemeClr val="lt1"/>
+          </a:fontRef>
+        </p:style>
+        <p:txBody>
+          <a:bodyPr rtlCol="0" anchor="ctr"/>
+          <a:lstStyle/>
+          <a:p>
+            <a:pPr algn="ctr"/>
+          </a:p>
+        </p:txBody>
+      </p:sp>
+      <p:sp>
+        <p:nvSpPr>
+          <p:cNvPr id="15" name="TextBox 14"/>
+          <p:cNvSpPr txBox="1"/>
+          <p:nvPr/>
+        </p:nvSpPr>
+        <p:spPr>
+          <a:xfrm>
+            <a:off x="914400" y="3529584"/>
+            <a:ext cx="3017520" cy="347472"/>
+          </a:xfrm>
+          <a:prstGeom prst="rect">
+            <a:avLst/>
+          </a:prstGeom>
+          <a:noFill/>
+        </p:spPr>
+        <p:txBody>
+          <a:bodyPr wrap="square" lIns="18288" rIns="18288" tIns="18288" bIns="18288" anchor="ctr">
+            <a:spAutoFit/>
+          </a:bodyPr>
+          <a:lstStyle/>
+          <a:p>
+            <a:pPr algn="l">
+              <a:defRPr sz="1600" b="1">
+                <a:solidFill>
+                  <a:srgbClr val="112240"/>
+                </a:solidFill>
+                <a:latin typeface="Aptos"/>
+              </a:defRPr>
+            </a:pPr>
+            <a:r>
+              <a:t>İşlevsellik ve çıktı • %20</a:t>
+            </a:r>
+          </a:p>
+        </p:txBody>
+      </p:sp>
+      <p:sp>
+        <p:nvSpPr>
+          <p:cNvPr id="16" name="TextBox 15"/>
+          <p:cNvSpPr txBox="1"/>
+          <p:nvPr/>
+        </p:nvSpPr>
+        <p:spPr>
+          <a:xfrm>
+            <a:off x="932688" y="3950208"/>
+            <a:ext cx="2980944" cy="850392"/>
+          </a:xfrm>
+          <a:prstGeom prst="rect">
+            <a:avLst/>
+          </a:prstGeom>
+          <a:noFill/>
+        </p:spPr>
+        <p:txBody>
+          <a:bodyPr wrap="square" lIns="18288" rIns="18288" tIns="18288" bIns="18288" anchor="ctr">
+            <a:spAutoFit/>
+          </a:bodyPr>
+          <a:lstStyle/>
+          <a:p>
+            <a:pPr algn="l">
+              <a:defRPr sz="1200" b="0">
+                <a:solidFill>
+                  <a:srgbClr val="223045"/>
+                </a:solidFill>
+                <a:latin typeface="Aptos"/>
+              </a:defRPr>
+            </a:pPr>
+            <a:r>
+              <a:t>•  56 otomatik test geçti.</a:t>
+            </a:r>
+            <a:br/>
+            <a:r>
+              <a:t>•  Canlı model: 1 dosya, 0 bulgu.</a:t>
+            </a:r>
+            <a:br/>
+            <a:r>
+              <a:t>•  Pozitif E2E sentetik fixture.</a:t>
+            </a:r>
+          </a:p>
+        </p:txBody>
+      </p:sp>
+      <p:sp>
+        <p:nvSpPr>
+          <p:cNvPr id="17" name="Rounded Rectangle 16"/>
+          <p:cNvSpPr/>
+          <p:nvPr/>
+        </p:nvSpPr>
+        <p:spPr>
+          <a:xfrm>
+            <a:off x="4389120" y="3401568"/>
+            <a:ext cx="3401568" cy="1508760"/>
+          </a:xfrm>
+          <a:prstGeom prst="roundRect">
+            <a:avLst/>
+          </a:prstGeom>
+          <a:solidFill>
+            <a:srgbClr val="FFFFFF"/>
+          </a:solidFill>
+          <a:ln>
+            <a:noFill/>
+          </a:ln>
+        </p:spPr>
+        <p:style>
+          <a:lnRef idx="1">
+            <a:schemeClr val="accent1"/>
+          </a:lnRef>
+          <a:fillRef idx="3">
+            <a:schemeClr val="accent1"/>
+          </a:fillRef>
+          <a:effectRef idx="2">
+            <a:schemeClr val="accent1"/>
+          </a:effectRef>
+          <a:fontRef idx="minor">
+            <a:schemeClr val="lt1"/>
+          </a:fontRef>
+        </p:style>
+        <p:txBody>
+          <a:bodyPr rtlCol="0" anchor="ctr"/>
+          <a:lstStyle/>
+          <a:p>
+            <a:pPr algn="ctr"/>
+          </a:p>
+        </p:txBody>
+      </p:sp>
+      <p:sp>
+        <p:nvSpPr>
+          <p:cNvPr id="18" name="Rectangle 17"/>
+          <p:cNvSpPr/>
+          <p:nvPr/>
+        </p:nvSpPr>
+        <p:spPr>
+          <a:xfrm>
+            <a:off x="4389120" y="3401568"/>
+            <a:ext cx="64008" cy="1508760"/>
+          </a:xfrm>
+          <a:prstGeom prst="rect">
+            <a:avLst/>
+          </a:prstGeom>
+          <a:solidFill>
+            <a:srgbClr val="00AFA0"/>
+          </a:solidFill>
+          <a:ln>
+            <a:noFill/>
+          </a:ln>
+        </p:spPr>
+        <p:style>
+          <a:lnRef idx="1">
+            <a:schemeClr val="accent1"/>
+          </a:lnRef>
+          <a:fillRef idx="3">
+            <a:schemeClr val="accent1"/>
+          </a:fillRef>
+          <a:effectRef idx="2">
+            <a:schemeClr val="accent1"/>
+          </a:effectRef>
+          <a:fontRef idx="minor">
+            <a:schemeClr val="lt1"/>
+          </a:fontRef>
+        </p:style>
+        <p:txBody>
+          <a:bodyPr rtlCol="0" anchor="ctr"/>
+          <a:lstStyle/>
+          <a:p>
+            <a:pPr algn="ctr"/>
+          </a:p>
+        </p:txBody>
+      </p:sp>
+      <p:sp>
+        <p:nvSpPr>
+          <p:cNvPr id="19" name="TextBox 18"/>
+          <p:cNvSpPr txBox="1"/>
+          <p:nvPr/>
+        </p:nvSpPr>
+        <p:spPr>
+          <a:xfrm>
+            <a:off x="4590288" y="3529584"/>
+            <a:ext cx="3017520" cy="347472"/>
+          </a:xfrm>
+          <a:prstGeom prst="rect">
+            <a:avLst/>
+          </a:prstGeom>
+          <a:noFill/>
+        </p:spPr>
+        <p:txBody>
+          <a:bodyPr wrap="square" lIns="18288" rIns="18288" tIns="18288" bIns="18288" anchor="ctr">
+            <a:spAutoFit/>
+          </a:bodyPr>
+          <a:lstStyle/>
+          <a:p>
+            <a:pPr algn="l">
+              <a:defRPr sz="1600" b="1">
+                <a:solidFill>
+                  <a:srgbClr val="112240"/>
+                </a:solidFill>
+                <a:latin typeface="Aptos"/>
+              </a:defRPr>
+            </a:pPr>
+            <a:r>
+              <a:t>Kod ve teknik uygulama • %20</a:t>
+            </a:r>
+          </a:p>
+        </p:txBody>
+      </p:sp>
+      <p:sp>
+        <p:nvSpPr>
+          <p:cNvPr id="20" name="TextBox 19"/>
+          <p:cNvSpPr txBox="1"/>
+          <p:nvPr/>
+        </p:nvSpPr>
+        <p:spPr>
+          <a:xfrm>
+            <a:off x="4608576" y="3950208"/>
+            <a:ext cx="2980944" cy="850392"/>
+          </a:xfrm>
+          <a:prstGeom prst="rect">
+            <a:avLst/>
+          </a:prstGeom>
+          <a:noFill/>
+        </p:spPr>
+        <p:txBody>
+          <a:bodyPr wrap="square" lIns="18288" rIns="18288" tIns="18288" bIns="18288" anchor="ctr">
+            <a:spAutoFit/>
+          </a:bodyPr>
+          <a:lstStyle/>
+          <a:p>
+            <a:pPr algn="l">
+              <a:defRPr sz="1200" b="0">
+                <a:solidFill>
+                  <a:srgbClr val="223045"/>
+                </a:solidFill>
+                <a:latin typeface="Aptos"/>
+              </a:defRPr>
+            </a:pPr>
+            <a:r>
+              <a:t>•  Modüler Python araçları ve testler.</a:t>
+            </a:r>
+            <a:br/>
+            <a:r>
+              <a:t>•  Yerel Ollama; bulut API anahtarı gerekmez.</a:t>
+            </a:r>
+          </a:p>
+        </p:txBody>
+      </p:sp>
+      <p:sp>
+        <p:nvSpPr>
+          <p:cNvPr id="21" name="Rounded Rectangle 20"/>
+          <p:cNvSpPr/>
+          <p:nvPr/>
+        </p:nvSpPr>
+        <p:spPr>
+          <a:xfrm>
+            <a:off x="8065008" y="3401568"/>
+            <a:ext cx="3401568" cy="1508760"/>
+          </a:xfrm>
+          <a:prstGeom prst="roundRect">
+            <a:avLst/>
+          </a:prstGeom>
+          <a:solidFill>
+            <a:srgbClr val="FFFFFF"/>
+          </a:solidFill>
+          <a:ln>
+            <a:noFill/>
+          </a:ln>
+        </p:spPr>
+        <p:style>
+          <a:lnRef idx="1">
+            <a:schemeClr val="accent1"/>
+          </a:lnRef>
+          <a:fillRef idx="3">
+            <a:schemeClr val="accent1"/>
+          </a:fillRef>
+          <a:effectRef idx="2">
+            <a:schemeClr val="accent1"/>
+          </a:effectRef>
+          <a:fontRef idx="minor">
+            <a:schemeClr val="lt1"/>
+          </a:fontRef>
+        </p:style>
+        <p:txBody>
+          <a:bodyPr rtlCol="0" anchor="ctr"/>
+          <a:lstStyle/>
+          <a:p>
+            <a:pPr algn="ctr"/>
+          </a:p>
+        </p:txBody>
+      </p:sp>
+      <p:sp>
+        <p:nvSpPr>
+          <p:cNvPr id="22" name="Rectangle 21"/>
+          <p:cNvSpPr/>
+          <p:nvPr/>
+        </p:nvSpPr>
+        <p:spPr>
+          <a:xfrm>
+            <a:off x="8065008" y="3401568"/>
+            <a:ext cx="64008" cy="1508760"/>
+          </a:xfrm>
+          <a:prstGeom prst="rect">
+            <a:avLst/>
+          </a:prstGeom>
+          <a:solidFill>
+            <a:srgbClr val="35BED7"/>
+          </a:solidFill>
+          <a:ln>
+            <a:noFill/>
+          </a:ln>
+        </p:spPr>
+        <p:style>
+          <a:lnRef idx="1">
+            <a:schemeClr val="accent1"/>
+          </a:lnRef>
+          <a:fillRef idx="3">
+            <a:schemeClr val="accent1"/>
+          </a:fillRef>
+          <a:effectRef idx="2">
+            <a:schemeClr val="accent1"/>
+          </a:effectRef>
+          <a:fontRef idx="minor">
+            <a:schemeClr val="lt1"/>
+          </a:fontRef>
+        </p:style>
+        <p:txBody>
+          <a:bodyPr rtlCol="0" anchor="ctr"/>
+          <a:lstStyle/>
+          <a:p>
+            <a:pPr algn="ctr"/>
+          </a:p>
+        </p:txBody>
+      </p:sp>
+      <p:sp>
+        <p:nvSpPr>
+          <p:cNvPr id="23" name="TextBox 22"/>
+          <p:cNvSpPr txBox="1"/>
+          <p:nvPr/>
+        </p:nvSpPr>
+        <p:spPr>
+          <a:xfrm>
+            <a:off x="8266176" y="3529584"/>
+            <a:ext cx="3017520" cy="347472"/>
+          </a:xfrm>
+          <a:prstGeom prst="rect">
+            <a:avLst/>
+          </a:prstGeom>
+          <a:noFill/>
+        </p:spPr>
+        <p:txBody>
+          <a:bodyPr wrap="square" lIns="18288" rIns="18288" tIns="18288" bIns="18288" anchor="ctr">
+            <a:spAutoFit/>
+          </a:bodyPr>
+          <a:lstStyle/>
+          <a:p>
+            <a:pPr algn="l">
+              <a:defRPr sz="1600" b="1">
+                <a:solidFill>
+                  <a:srgbClr val="112240"/>
+                </a:solidFill>
+                <a:latin typeface="Aptos"/>
+              </a:defRPr>
+            </a:pPr>
+            <a:r>
+              <a:t>Dokümantasyon ve teslim • %20</a:t>
+            </a:r>
+          </a:p>
+        </p:txBody>
+      </p:sp>
+      <p:sp>
+        <p:nvSpPr>
+          <p:cNvPr id="24" name="TextBox 23"/>
+          <p:cNvSpPr txBox="1"/>
+          <p:nvPr/>
+        </p:nvSpPr>
+        <p:spPr>
+          <a:xfrm>
+            <a:off x="8284464" y="3950208"/>
+            <a:ext cx="2980944" cy="850392"/>
+          </a:xfrm>
+          <a:prstGeom prst="rect">
+            <a:avLst/>
+          </a:prstGeom>
+          <a:noFill/>
+        </p:spPr>
+        <p:txBody>
+          <a:bodyPr wrap="square" lIns="18288" rIns="18288" tIns="18288" bIns="18288" anchor="ctr">
+            <a:spAutoFit/>
+          </a:bodyPr>
+          <a:lstStyle/>
+          <a:p>
+            <a:pPr algn="l">
+              <a:defRPr sz="1200" b="0">
+                <a:solidFill>
+                  <a:srgbClr val="223045"/>
+                </a:solidFill>
+                <a:latin typeface="Aptos"/>
+              </a:defRPr>
+            </a:pPr>
+            <a:r>
+              <a:t>•  README: amaç, teknoloji, kurulum, kullanım.</a:t>
+            </a:r>
+            <a:br/>
+            <a:r>
+              <a:t>•  Terminal ve HTML rapor görselleri.</a:t>
+            </a:r>
+          </a:p>
+        </p:txBody>
+      </p:sp>
+      <p:sp>
+        <p:nvSpPr>
+          <p:cNvPr id="25" name="Rounded Rectangle 24"/>
+          <p:cNvSpPr/>
+          <p:nvPr/>
+        </p:nvSpPr>
+        <p:spPr>
+          <a:xfrm>
+            <a:off x="749808" y="5230368"/>
+            <a:ext cx="10698480" cy="713232"/>
+          </a:xfrm>
+          <a:prstGeom prst="roundRect">
+            <a:avLst/>
+          </a:prstGeom>
+          <a:solidFill>
+            <a:srgbClr val="FFF6DF"/>
+          </a:solidFill>
+          <a:ln>
+            <a:noFill/>
+          </a:ln>
+        </p:spPr>
+        <p:style>
+          <a:lnRef idx="1">
+            <a:schemeClr val="accent1"/>
+          </a:lnRef>
+          <a:fillRef idx="3">
+            <a:schemeClr val="accent1"/>
+          </a:fillRef>
+          <a:effectRef idx="2">
+            <a:schemeClr val="accent1"/>
+          </a:effectRef>
+          <a:fontRef idx="minor">
+            <a:schemeClr val="lt1"/>
+          </a:fontRef>
+        </p:style>
+        <p:txBody>
+          <a:bodyPr rtlCol="0" anchor="ctr"/>
+          <a:lstStyle/>
+          <a:p>
+            <a:pPr algn="ctr"/>
+          </a:p>
+        </p:txBody>
+      </p:sp>
+      <p:sp>
+        <p:nvSpPr>
+          <p:cNvPr id="26" name="TextBox 25"/>
+          <p:cNvSpPr txBox="1"/>
+          <p:nvPr/>
+        </p:nvSpPr>
+        <p:spPr>
+          <a:xfrm>
+            <a:off x="914400" y="5394960"/>
+            <a:ext cx="10287000" cy="347472"/>
+          </a:xfrm>
+          <a:prstGeom prst="rect">
+            <a:avLst/>
+          </a:prstGeom>
+          <a:noFill/>
+        </p:spPr>
+        <p:txBody>
+          <a:bodyPr wrap="square" lIns="18288" rIns="18288" tIns="18288" bIns="18288" anchor="ctr">
+            <a:spAutoFit/>
+          </a:bodyPr>
+          <a:lstStyle/>
+          <a:p>
+            <a:pPr algn="ctr">
+              <a:defRPr sz="1200" b="1">
+                <a:solidFill>
+                  <a:srgbClr val="112240"/>
+                </a:solidFill>
+                <a:latin typeface="Aptos"/>
+              </a:defRPr>
+            </a:pPr>
+            <a:r>
+              <a:t>Sentetik E2E, iş akışını kanıtlar; gerçek mevzuat bulgusunu, hukuki uygunluğu veya gerçek GitHub PR'ını kanıtlamaz.</a:t>
+            </a:r>
+          </a:p>
+        </p:txBody>
+      </p:sp>
+      <p:sp>
+        <p:nvSpPr>
+          <p:cNvPr id="27" name="TextBox 26"/>
+          <p:cNvSpPr txBox="1"/>
+          <p:nvPr/>
+        </p:nvSpPr>
+        <p:spPr>
+          <a:xfrm>
+            <a:off x="566928" y="6473952"/>
+            <a:ext cx="9692640" cy="182880"/>
+          </a:xfrm>
+          <a:prstGeom prst="rect">
+            <a:avLst/>
+          </a:prstGeom>
+          <a:noFill/>
+        </p:spPr>
+        <p:txBody>
+          <a:bodyPr wrap="square" lIns="18288" rIns="18288" tIns="18288" bIns="18288" anchor="ctr">
+            <a:spAutoFit/>
+          </a:bodyPr>
+          <a:lstStyle/>
+          <a:p>
+            <a:pPr algn="l">
+              <a:defRPr sz="800" b="1">
+                <a:solidFill>
+                  <a:srgbClr val="637389"/>
+                </a:solidFill>
+                <a:latin typeface="Aptos"/>
+              </a:defRPr>
+            </a:pPr>
+            <a:r>
+              <a:t>MEVZUATAGENT  •  YEREL  •  ONAYLI  •  DENETLENEBİLİR</a:t>
+            </a:r>
+          </a:p>
+        </p:txBody>
+      </p:sp>
+      <p:sp>
+        <p:nvSpPr>
+          <p:cNvPr id="28" name="TextBox 27"/>
+          <p:cNvSpPr txBox="1"/>
+          <p:nvPr/>
+        </p:nvSpPr>
+        <p:spPr>
+          <a:xfrm>
+            <a:off x="11109960" y="6419088"/>
+            <a:ext cx="502920" cy="274320"/>
+          </a:xfrm>
+          <a:prstGeom prst="rect">
+            <a:avLst/>
+          </a:prstGeom>
+          <a:noFill/>
+        </p:spPr>
+        <p:txBody>
+          <a:bodyPr wrap="square" lIns="18288" rIns="18288" tIns="18288" bIns="18288" anchor="ctr">
+            <a:spAutoFit/>
+          </a:bodyPr>
+          <a:lstStyle/>
+          <a:p>
+            <a:pPr algn="r">
+              <a:defRPr sz="1000" b="1">
+                <a:solidFill>
+                  <a:srgbClr val="637389"/>
+                </a:solidFill>
+                <a:latin typeface="Aptos"/>
+              </a:defRPr>
+            </a:pPr>
+            <a:r>
+              <a:t>27</a:t>
+            </a:r>
+          </a:p>
+        </p:txBody>
+      </p:sp>
+    </p:spTree>
+  </p:cSld>
+  <p:clrMapOvr>
+    <a:masterClrMapping/>
+  </p:clrMapOvr>
+</p:sld>
+</file>
+
+<file path=ppt/slides/slide28.xml><?xml version="1.0" encoding="utf-8"?>
 <p:sld xmlns:a="http://schemas.openxmlformats.org/drawingml/2006/main" xmlns:p="http://schemas.openxmlformats.org/presentationml/2006/main" xmlns:r="http://schemas.openxmlformats.org/officeDocument/2006/relationships">
   <p:cSld>
     <p:bg>
@@ -18640,7 +16862,7 @@
           <a:lstStyle/>
           <a:p>
             <a:pPr algn="l">
-              <a:defRPr sz="1100" b="0">
+              <a:defRPr sz="1200" b="0">
                 <a:solidFill>
                   <a:srgbClr val="FFFFFF"/>
                 </a:solidFill>
@@ -18648,7 +16870,7 @@
               </a:defRPr>
             </a:pPr>
             <a:r>
-              <a:t>Kaynak notu: Bu sunum konuşmada verilen dokuz gereksinime göre hazırlanmıştır. Ekli dosya yalnızca PDF simgesi olarak erişilebildi; PDF içeriği ve rubriği doğrulanamadı.</a:t>
+              <a:t>Kanıt kapsamı: canlı model denemesi ve ayrı sentetik E2E; gerçek GitHub PR'ı veya hukuki uyumluluk iddiası yoktur.</a:t>
             </a:r>
           </a:p>
         </p:txBody>
@@ -18720,7 +16942,7 @@
               </a:defRPr>
             </a:pPr>
             <a:r>
-              <a:t>24</a:t>
+              <a:t>28</a:t>
             </a:r>
           </a:p>
         </p:txBody>
